--- a/Project_AT&T_AH.pptx
+++ b/Project_AT&T_AH.pptx
@@ -5,59 +5,57 @@
     <p:sldMasterId id="2147483659" r:id="rId1"/>
   </p:sldMasterIdLst>
   <p:notesMasterIdLst>
-    <p:notesMasterId r:id="rId21"/>
+    <p:notesMasterId r:id="rId19"/>
   </p:notesMasterIdLst>
   <p:sldIdLst>
     <p:sldId id="256" r:id="rId2"/>
     <p:sldId id="257" r:id="rId3"/>
     <p:sldId id="258" r:id="rId4"/>
     <p:sldId id="266" r:id="rId5"/>
-    <p:sldId id="259" r:id="rId6"/>
-    <p:sldId id="267" r:id="rId7"/>
-    <p:sldId id="271" r:id="rId8"/>
-    <p:sldId id="263" r:id="rId9"/>
-    <p:sldId id="269" r:id="rId10"/>
-    <p:sldId id="268" r:id="rId11"/>
-    <p:sldId id="270" r:id="rId12"/>
-    <p:sldId id="272" r:id="rId13"/>
-    <p:sldId id="273" r:id="rId14"/>
-    <p:sldId id="274" r:id="rId15"/>
-    <p:sldId id="265" r:id="rId16"/>
-    <p:sldId id="275" r:id="rId17"/>
-    <p:sldId id="276" r:id="rId18"/>
-    <p:sldId id="261" r:id="rId19"/>
-    <p:sldId id="262" r:id="rId20"/>
+    <p:sldId id="267" r:id="rId6"/>
+    <p:sldId id="271" r:id="rId7"/>
+    <p:sldId id="263" r:id="rId8"/>
+    <p:sldId id="269" r:id="rId9"/>
+    <p:sldId id="272" r:id="rId10"/>
+    <p:sldId id="270" r:id="rId11"/>
+    <p:sldId id="273" r:id="rId12"/>
+    <p:sldId id="274" r:id="rId13"/>
+    <p:sldId id="265" r:id="rId14"/>
+    <p:sldId id="275" r:id="rId15"/>
+    <p:sldId id="276" r:id="rId16"/>
+    <p:sldId id="261" r:id="rId17"/>
+    <p:sldId id="262" r:id="rId18"/>
   </p:sldIdLst>
   <p:sldSz cx="9144000" cy="5143500" type="screen16x9"/>
   <p:notesSz cx="6858000" cy="9144000"/>
   <p:embeddedFontLst>
     <p:embeddedFont>
       <p:font typeface="Inter" panose="020B0604020202020204" charset="0"/>
-      <p:regular r:id="rId22"/>
-      <p:bold r:id="rId23"/>
-      <p:italic r:id="rId24"/>
-      <p:boldItalic r:id="rId25"/>
+      <p:regular r:id="rId20"/>
+      <p:bold r:id="rId21"/>
+      <p:italic r:id="rId22"/>
+      <p:boldItalic r:id="rId23"/>
     </p:embeddedFont>
     <p:embeddedFont>
       <p:font typeface="Inter Medium" panose="020B0604020202020204" charset="0"/>
-      <p:regular r:id="rId26"/>
-      <p:bold r:id="rId27"/>
-      <p:italic r:id="rId28"/>
-      <p:boldItalic r:id="rId29"/>
+      <p:regular r:id="rId24"/>
+      <p:bold r:id="rId25"/>
+      <p:italic r:id="rId26"/>
+      <p:boldItalic r:id="rId27"/>
     </p:embeddedFont>
     <p:embeddedFont>
       <p:font typeface="Inter SemiBold" panose="020B0604020202020204" charset="0"/>
-      <p:regular r:id="rId30"/>
-      <p:bold r:id="rId31"/>
-      <p:italic r:id="rId32"/>
-      <p:boldItalic r:id="rId33"/>
+      <p:regular r:id="rId28"/>
+      <p:bold r:id="rId29"/>
+      <p:italic r:id="rId30"/>
+      <p:boldItalic r:id="rId31"/>
     </p:embeddedFont>
     <p:embeddedFont>
       <p:font typeface="Libre Baskerville" panose="02000000000000000000" pitchFamily="2" charset="0"/>
-      <p:regular r:id="rId34"/>
-      <p:bold r:id="rId35"/>
-      <p:italic r:id="rId36"/>
-      <p:boldItalic r:id="rId37"/>
+      <p:regular r:id="rId32"/>
+      <p:bold r:id="rId33"/>
+      <p:italic r:id="rId34"/>
+      <p:boldItalic r:id="rId35"/>
     </p:embeddedFont>
   </p:embeddedFontLst>
   <p:defaultTextStyle>
@@ -850,151 +848,6 @@
         <p:cNvPr id="1" name="Shape 77">
           <a:extLst>
             <a:ext uri="{FF2B5EF4-FFF2-40B4-BE49-F238E27FC236}">
-              <a16:creationId xmlns:a16="http://schemas.microsoft.com/office/drawing/2014/main" id="{367549F6-1459-3946-861F-D66F97354DA2}"/>
-            </a:ext>
-          </a:extLst>
-        </p:cNvPr>
-        <p:cNvGrpSpPr/>
-        <p:nvPr/>
-      </p:nvGrpSpPr>
-      <p:grpSpPr>
-        <a:xfrm>
-          <a:off x="0" y="0"/>
-          <a:ext cx="0" cy="0"/>
-          <a:chOff x="0" y="0"/>
-          <a:chExt cx="0" cy="0"/>
-        </a:xfrm>
-      </p:grpSpPr>
-      <p:sp>
-        <p:nvSpPr>
-          <p:cNvPr id="78" name="Google Shape;78;gf4f11f959e_0_5:notes">
-            <a:extLst>
-              <a:ext uri="{FF2B5EF4-FFF2-40B4-BE49-F238E27FC236}">
-                <a16:creationId xmlns:a16="http://schemas.microsoft.com/office/drawing/2014/main" id="{F2C90588-AE64-5AB1-12D5-A8061F278D34}"/>
-              </a:ext>
-            </a:extLst>
-          </p:cNvPr>
-          <p:cNvSpPr>
-            <a:spLocks noGrp="1" noRot="1" noChangeAspect="1"/>
-          </p:cNvSpPr>
-          <p:nvPr>
-            <p:ph type="sldImg" idx="2"/>
-          </p:nvPr>
-        </p:nvSpPr>
-        <p:spPr>
-          <a:xfrm>
-            <a:off x="381000" y="685800"/>
-            <a:ext cx="6096000" cy="3429000"/>
-          </a:xfrm>
-          <a:custGeom>
-            <a:avLst/>
-            <a:gdLst/>
-            <a:ahLst/>
-            <a:cxnLst/>
-            <a:rect l="l" t="t" r="r" b="b"/>
-            <a:pathLst>
-              <a:path w="120000" h="120000" extrusionOk="0">
-                <a:moveTo>
-                  <a:pt x="0" y="0"/>
-                </a:moveTo>
-                <a:lnTo>
-                  <a:pt x="120000" y="0"/>
-                </a:lnTo>
-                <a:lnTo>
-                  <a:pt x="120000" y="120000"/>
-                </a:lnTo>
-                <a:lnTo>
-                  <a:pt x="0" y="120000"/>
-                </a:lnTo>
-                <a:close/>
-              </a:path>
-            </a:pathLst>
-          </a:custGeom>
-          <a:noFill/>
-          <a:ln w="9525" cap="flat" cmpd="sng">
-            <a:solidFill>
-              <a:srgbClr val="000000"/>
-            </a:solidFill>
-            <a:prstDash val="solid"/>
-            <a:round/>
-            <a:headEnd type="none" w="sm" len="sm"/>
-            <a:tailEnd type="none" w="sm" len="sm"/>
-          </a:ln>
-        </p:spPr>
-      </p:sp>
-      <p:sp>
-        <p:nvSpPr>
-          <p:cNvPr id="79" name="Google Shape;79;gf4f11f959e_0_5:notes">
-            <a:extLst>
-              <a:ext uri="{FF2B5EF4-FFF2-40B4-BE49-F238E27FC236}">
-                <a16:creationId xmlns:a16="http://schemas.microsoft.com/office/drawing/2014/main" id="{DC089E5E-AF95-CD97-3BD8-B3B0CAF625D1}"/>
-              </a:ext>
-            </a:extLst>
-          </p:cNvPr>
-          <p:cNvSpPr txBox="1">
-            <a:spLocks noGrp="1"/>
-          </p:cNvSpPr>
-          <p:nvPr>
-            <p:ph type="body" idx="1"/>
-          </p:nvPr>
-        </p:nvSpPr>
-        <p:spPr>
-          <a:xfrm>
-            <a:off x="685800" y="4343400"/>
-            <a:ext cx="5486400" cy="4114800"/>
-          </a:xfrm>
-          <a:prstGeom prst="rect">
-            <a:avLst/>
-          </a:prstGeom>
-          <a:noFill/>
-          <a:ln>
-            <a:noFill/>
-          </a:ln>
-        </p:spPr>
-        <p:txBody>
-          <a:bodyPr spcFirstLastPara="1" wrap="square" lIns="91425" tIns="91425" rIns="91425" bIns="91425" anchor="t" anchorCtr="0">
-            <a:noAutofit/>
-          </a:bodyPr>
-          <a:lstStyle/>
-          <a:p>
-            <a:pPr marL="0" lvl="0" indent="0" algn="l" rtl="0">
-              <a:lnSpc>
-                <a:spcPct val="100000"/>
-              </a:lnSpc>
-              <a:spcBef>
-                <a:spcPts val="0"/>
-              </a:spcBef>
-              <a:spcAft>
-                <a:spcPts val="0"/>
-              </a:spcAft>
-              <a:buSzPts val="1100"/>
-              <a:buNone/>
-            </a:pPr>
-            <a:endParaRPr/>
-          </a:p>
-        </p:txBody>
-      </p:sp>
-    </p:spTree>
-    <p:extLst>
-      <p:ext uri="{BB962C8B-B14F-4D97-AF65-F5344CB8AC3E}">
-        <p14:creationId xmlns:p14="http://schemas.microsoft.com/office/powerpoint/2010/main" val="2967554576"/>
-      </p:ext>
-    </p:extLst>
-  </p:cSld>
-  <p:clrMapOvr>
-    <a:masterClrMapping/>
-  </p:clrMapOvr>
-</p:notes>
-</file>
-
-<file path=ppt/notesSlides/notesSlide11.xml><?xml version="1.0" encoding="utf-8"?>
-<p:notes xmlns:a="http://schemas.openxmlformats.org/drawingml/2006/main" xmlns:r="http://schemas.openxmlformats.org/officeDocument/2006/relationships" xmlns:p="http://schemas.openxmlformats.org/presentationml/2006/main" showMasterSp="0" showMasterPhAnim="0">
-  <p:cSld>
-    <p:spTree>
-      <p:nvGrpSpPr>
-        <p:cNvPr id="1" name="Shape 77">
-          <a:extLst>
-            <a:ext uri="{FF2B5EF4-FFF2-40B4-BE49-F238E27FC236}">
               <a16:creationId xmlns:a16="http://schemas.microsoft.com/office/drawing/2014/main" id="{DE1F163D-9306-B63B-8A42-5A1B6E71D6FC}"/>
             </a:ext>
           </a:extLst>
@@ -1115,7 +968,166 @@
               <a:buSzPts val="1100"/>
               <a:buNone/>
             </a:pPr>
-            <a:endParaRPr/>
+            <a:r>
+              <a:rPr lang="fr-FR" sz="1100" b="1" dirty="0" err="1"/>
+              <a:t>SimpleSpamDetector</a:t>
+            </a:r>
+            <a:r>
+              <a:rPr lang="fr-FR" sz="1100" b="1" dirty="0"/>
+              <a:t>: </a:t>
+            </a:r>
+            <a:r>
+              <a:rPr lang="fr-FR" sz="1100" dirty="0" err="1"/>
+              <a:t>Purpose</a:t>
+            </a:r>
+            <a:r>
+              <a:rPr lang="fr-FR" sz="1100" dirty="0"/>
+              <a:t>: A </a:t>
+            </a:r>
+            <a:r>
+              <a:rPr lang="fr-FR" sz="1100" dirty="0" err="1"/>
+              <a:t>foundational</a:t>
+            </a:r>
+            <a:r>
+              <a:rPr lang="fr-FR" sz="1100" dirty="0"/>
+              <a:t> model to </a:t>
+            </a:r>
+            <a:r>
+              <a:rPr lang="fr-FR" sz="1100" dirty="0" err="1"/>
+              <a:t>leverage</a:t>
+            </a:r>
+            <a:r>
+              <a:rPr lang="fr-FR" sz="1100" dirty="0"/>
+              <a:t> the </a:t>
+            </a:r>
+            <a:r>
+              <a:rPr lang="fr-FR" sz="1100" dirty="0" err="1"/>
+              <a:t>combined</a:t>
+            </a:r>
+            <a:r>
+              <a:rPr lang="fr-FR" sz="1100" dirty="0"/>
+              <a:t> </a:t>
+            </a:r>
+            <a:r>
+              <a:rPr lang="fr-FR" sz="1100" dirty="0" err="1"/>
+              <a:t>semantic</a:t>
+            </a:r>
+            <a:r>
+              <a:rPr lang="fr-FR" sz="1100" dirty="0"/>
+              <a:t> </a:t>
+            </a:r>
+            <a:r>
+              <a:rPr lang="fr-FR" sz="1100" dirty="0" err="1"/>
+              <a:t>embeddings</a:t>
+            </a:r>
+            <a:r>
+              <a:rPr lang="fr-FR" sz="1100" dirty="0"/>
+              <a:t> and </a:t>
+            </a:r>
+            <a:r>
+              <a:rPr lang="fr-FR" sz="1100" dirty="0" err="1"/>
+              <a:t>engineered</a:t>
+            </a:r>
+            <a:r>
+              <a:rPr lang="fr-FR" sz="1100" dirty="0"/>
+              <a:t> </a:t>
+            </a:r>
+            <a:r>
+              <a:rPr lang="fr-FR" sz="1100" dirty="0" err="1"/>
+              <a:t>features</a:t>
+            </a:r>
+            <a:r>
+              <a:rPr lang="fr-FR" sz="1100" dirty="0"/>
+              <a:t>.</a:t>
+            </a:r>
+          </a:p>
+          <a:p>
+            <a:pPr marL="0" lvl="0" indent="0" algn="l" rtl="0">
+              <a:lnSpc>
+                <a:spcPct val="100000"/>
+              </a:lnSpc>
+              <a:spcBef>
+                <a:spcPts val="0"/>
+              </a:spcBef>
+              <a:spcAft>
+                <a:spcPts val="0"/>
+              </a:spcAft>
+              <a:buSzPts val="1100"/>
+              <a:buNone/>
+            </a:pPr>
+            <a:endParaRPr lang="fr-FR" sz="1100" dirty="0"/>
+          </a:p>
+          <a:p>
+            <a:pPr marL="0" lvl="0" indent="0" algn="l" rtl="0">
+              <a:lnSpc>
+                <a:spcPct val="100000"/>
+              </a:lnSpc>
+              <a:spcBef>
+                <a:spcPts val="0"/>
+              </a:spcBef>
+              <a:spcAft>
+                <a:spcPts val="0"/>
+              </a:spcAft>
+              <a:buSzPts val="1100"/>
+              <a:buNone/>
+            </a:pPr>
+            <a:r>
+              <a:rPr lang="fr-FR" sz="1100" b="1" dirty="0" err="1"/>
+              <a:t>UltraSimpleSpamDetector</a:t>
+            </a:r>
+            <a:r>
+              <a:rPr lang="fr-FR" sz="1100" b="1" dirty="0"/>
+              <a:t>: </a:t>
+            </a:r>
+            <a:r>
+              <a:rPr lang="fr-FR" sz="1100" dirty="0" err="1"/>
+              <a:t>Purpose</a:t>
+            </a:r>
+            <a:r>
+              <a:rPr lang="fr-FR" sz="1100" dirty="0"/>
+              <a:t>: A </a:t>
+            </a:r>
+            <a:r>
+              <a:rPr lang="fr-FR" sz="1100" dirty="0" err="1"/>
+              <a:t>highly</a:t>
+            </a:r>
+            <a:r>
+              <a:rPr lang="fr-FR" sz="1100" dirty="0"/>
+              <a:t> efficient, minimal model </a:t>
+            </a:r>
+            <a:r>
+              <a:rPr lang="fr-FR" sz="1100" dirty="0" err="1"/>
+              <a:t>designed</a:t>
+            </a:r>
+            <a:r>
+              <a:rPr lang="fr-FR" sz="1100" dirty="0"/>
+              <a:t> for </a:t>
+            </a:r>
+            <a:r>
+              <a:rPr lang="fr-FR" sz="1100" dirty="0" err="1"/>
+              <a:t>faster</a:t>
+            </a:r>
+            <a:r>
+              <a:rPr lang="fr-FR" sz="1100" dirty="0"/>
+              <a:t> training and </a:t>
+            </a:r>
+            <a:r>
+              <a:rPr lang="fr-FR" sz="1100" dirty="0" err="1"/>
+              <a:t>deployment</a:t>
+            </a:r>
+            <a:r>
+              <a:rPr lang="fr-FR" sz="1100" dirty="0"/>
+              <a:t> </a:t>
+            </a:r>
+            <a:r>
+              <a:rPr lang="fr-FR" sz="1100" dirty="0" err="1"/>
+              <a:t>with</a:t>
+            </a:r>
+            <a:r>
+              <a:rPr lang="fr-FR" sz="1100" dirty="0"/>
+              <a:t> comparable performance.</a:t>
+            </a:r>
+            <a:endParaRPr dirty="0"/>
           </a:p>
         </p:txBody>
       </p:sp>
@@ -1132,152 +1144,7 @@
 </p:notes>
 </file>
 
-<file path=ppt/notesSlides/notesSlide12.xml><?xml version="1.0" encoding="utf-8"?>
-<p:notes xmlns:a="http://schemas.openxmlformats.org/drawingml/2006/main" xmlns:r="http://schemas.openxmlformats.org/officeDocument/2006/relationships" xmlns:p="http://schemas.openxmlformats.org/presentationml/2006/main" showMasterSp="0" showMasterPhAnim="0">
-  <p:cSld>
-    <p:spTree>
-      <p:nvGrpSpPr>
-        <p:cNvPr id="1" name="Shape 77">
-          <a:extLst>
-            <a:ext uri="{FF2B5EF4-FFF2-40B4-BE49-F238E27FC236}">
-              <a16:creationId xmlns:a16="http://schemas.microsoft.com/office/drawing/2014/main" id="{63AE2DAD-61E3-9D75-845C-E230ED784869}"/>
-            </a:ext>
-          </a:extLst>
-        </p:cNvPr>
-        <p:cNvGrpSpPr/>
-        <p:nvPr/>
-      </p:nvGrpSpPr>
-      <p:grpSpPr>
-        <a:xfrm>
-          <a:off x="0" y="0"/>
-          <a:ext cx="0" cy="0"/>
-          <a:chOff x="0" y="0"/>
-          <a:chExt cx="0" cy="0"/>
-        </a:xfrm>
-      </p:grpSpPr>
-      <p:sp>
-        <p:nvSpPr>
-          <p:cNvPr id="78" name="Google Shape;78;gf4f11f959e_0_5:notes">
-            <a:extLst>
-              <a:ext uri="{FF2B5EF4-FFF2-40B4-BE49-F238E27FC236}">
-                <a16:creationId xmlns:a16="http://schemas.microsoft.com/office/drawing/2014/main" id="{ECD46BB2-B204-A5B5-50F9-3B7DEE8C04F4}"/>
-              </a:ext>
-            </a:extLst>
-          </p:cNvPr>
-          <p:cNvSpPr>
-            <a:spLocks noGrp="1" noRot="1" noChangeAspect="1"/>
-          </p:cNvSpPr>
-          <p:nvPr>
-            <p:ph type="sldImg" idx="2"/>
-          </p:nvPr>
-        </p:nvSpPr>
-        <p:spPr>
-          <a:xfrm>
-            <a:off x="381000" y="685800"/>
-            <a:ext cx="6096000" cy="3429000"/>
-          </a:xfrm>
-          <a:custGeom>
-            <a:avLst/>
-            <a:gdLst/>
-            <a:ahLst/>
-            <a:cxnLst/>
-            <a:rect l="l" t="t" r="r" b="b"/>
-            <a:pathLst>
-              <a:path w="120000" h="120000" extrusionOk="0">
-                <a:moveTo>
-                  <a:pt x="0" y="0"/>
-                </a:moveTo>
-                <a:lnTo>
-                  <a:pt x="120000" y="0"/>
-                </a:lnTo>
-                <a:lnTo>
-                  <a:pt x="120000" y="120000"/>
-                </a:lnTo>
-                <a:lnTo>
-                  <a:pt x="0" y="120000"/>
-                </a:lnTo>
-                <a:close/>
-              </a:path>
-            </a:pathLst>
-          </a:custGeom>
-          <a:noFill/>
-          <a:ln w="9525" cap="flat" cmpd="sng">
-            <a:solidFill>
-              <a:srgbClr val="000000"/>
-            </a:solidFill>
-            <a:prstDash val="solid"/>
-            <a:round/>
-            <a:headEnd type="none" w="sm" len="sm"/>
-            <a:tailEnd type="none" w="sm" len="sm"/>
-          </a:ln>
-        </p:spPr>
-      </p:sp>
-      <p:sp>
-        <p:nvSpPr>
-          <p:cNvPr id="79" name="Google Shape;79;gf4f11f959e_0_5:notes">
-            <a:extLst>
-              <a:ext uri="{FF2B5EF4-FFF2-40B4-BE49-F238E27FC236}">
-                <a16:creationId xmlns:a16="http://schemas.microsoft.com/office/drawing/2014/main" id="{624A2996-7478-BDEB-1023-270295A2CF28}"/>
-              </a:ext>
-            </a:extLst>
-          </p:cNvPr>
-          <p:cNvSpPr txBox="1">
-            <a:spLocks noGrp="1"/>
-          </p:cNvSpPr>
-          <p:nvPr>
-            <p:ph type="body" idx="1"/>
-          </p:nvPr>
-        </p:nvSpPr>
-        <p:spPr>
-          <a:xfrm>
-            <a:off x="685800" y="4343400"/>
-            <a:ext cx="5486400" cy="4114800"/>
-          </a:xfrm>
-          <a:prstGeom prst="rect">
-            <a:avLst/>
-          </a:prstGeom>
-          <a:noFill/>
-          <a:ln>
-            <a:noFill/>
-          </a:ln>
-        </p:spPr>
-        <p:txBody>
-          <a:bodyPr spcFirstLastPara="1" wrap="square" lIns="91425" tIns="91425" rIns="91425" bIns="91425" anchor="t" anchorCtr="0">
-            <a:noAutofit/>
-          </a:bodyPr>
-          <a:lstStyle/>
-          <a:p>
-            <a:pPr marL="0" lvl="0" indent="0" algn="l" rtl="0">
-              <a:lnSpc>
-                <a:spcPct val="100000"/>
-              </a:lnSpc>
-              <a:spcBef>
-                <a:spcPts val="0"/>
-              </a:spcBef>
-              <a:spcAft>
-                <a:spcPts val="0"/>
-              </a:spcAft>
-              <a:buSzPts val="1100"/>
-              <a:buNone/>
-            </a:pPr>
-            <a:endParaRPr/>
-          </a:p>
-        </p:txBody>
-      </p:sp>
-    </p:spTree>
-    <p:extLst>
-      <p:ext uri="{BB962C8B-B14F-4D97-AF65-F5344CB8AC3E}">
-        <p14:creationId xmlns:p14="http://schemas.microsoft.com/office/powerpoint/2010/main" val="384385576"/>
-      </p:ext>
-    </p:extLst>
-  </p:cSld>
-  <p:clrMapOvr>
-    <a:masterClrMapping/>
-  </p:clrMapOvr>
-</p:notes>
-</file>
-
-<file path=ppt/notesSlides/notesSlide13.xml><?xml version="1.0" encoding="utf-8"?>
+<file path=ppt/notesSlides/notesSlide11.xml><?xml version="1.0" encoding="utf-8"?>
 <p:notes xmlns:a="http://schemas.openxmlformats.org/drawingml/2006/main" xmlns:r="http://schemas.openxmlformats.org/officeDocument/2006/relationships" xmlns:p="http://schemas.openxmlformats.org/presentationml/2006/main" showMasterSp="0" showMasterPhAnim="0">
   <p:cSld>
     <p:spTree>
@@ -1422,7 +1289,7 @@
 </p:notes>
 </file>
 
-<file path=ppt/notesSlides/notesSlide14.xml><?xml version="1.0" encoding="utf-8"?>
+<file path=ppt/notesSlides/notesSlide12.xml><?xml version="1.0" encoding="utf-8"?>
 <p:notes xmlns:a="http://schemas.openxmlformats.org/drawingml/2006/main" xmlns:r="http://schemas.openxmlformats.org/officeDocument/2006/relationships" xmlns:p="http://schemas.openxmlformats.org/presentationml/2006/main" showMasterSp="0" showMasterPhAnim="0">
   <p:cSld>
     <p:spTree>
@@ -1567,7 +1434,7 @@
 </p:notes>
 </file>
 
-<file path=ppt/notesSlides/notesSlide15.xml><?xml version="1.0" encoding="utf-8"?>
+<file path=ppt/notesSlides/notesSlide13.xml><?xml version="1.0" encoding="utf-8"?>
 <p:notes xmlns:a="http://schemas.openxmlformats.org/drawingml/2006/main" xmlns:r="http://schemas.openxmlformats.org/officeDocument/2006/relationships" xmlns:p="http://schemas.openxmlformats.org/presentationml/2006/main" showMasterSp="0" showMasterPhAnim="0">
   <p:cSld>
     <p:spTree>
@@ -1695,7 +1562,37 @@
               <a:buSzPts val="1100"/>
               <a:buNone/>
             </a:pPr>
-            <a:endParaRPr/>
+            <a:r>
+              <a:rPr lang="en-US" sz="1100" b="1" dirty="0"/>
+              <a:t>Test Cases:</a:t>
+            </a:r>
+            <a:r>
+              <a:rPr lang="en-US" sz="1100" dirty="0"/>
+              <a:t> a set of example messages</a:t>
+            </a:r>
+            <a:br>
+              <a:rPr lang="en-US" sz="1100" dirty="0"/>
+            </a:br>
+            <a:r>
+              <a:rPr lang="en-US" sz="1100" b="1" dirty="0"/>
+              <a:t>Prediction Pipeline: </a:t>
+            </a:r>
+            <a:r>
+              <a:rPr lang="en-US" sz="1100" dirty="0"/>
+              <a:t>Each message was processed through the complete pipeline:</a:t>
+            </a:r>
+            <a:br>
+              <a:rPr lang="en-US" sz="1100" dirty="0"/>
+            </a:br>
+            <a:r>
+              <a:rPr lang="en-US" sz="1100" b="1" dirty="0"/>
+              <a:t>Output: </a:t>
+            </a:r>
+            <a:r>
+              <a:rPr lang="en-US" sz="1100" dirty="0"/>
+              <a:t>For each message, the model provided a clear 'HAM' or 'SPAM' prediction along with a confidence score (spam probability).</a:t>
+            </a:r>
+            <a:endParaRPr dirty="0"/>
           </a:p>
         </p:txBody>
       </p:sp>
@@ -1712,7 +1609,7 @@
 </p:notes>
 </file>
 
-<file path=ppt/notesSlides/notesSlide16.xml><?xml version="1.0" encoding="utf-8"?>
+<file path=ppt/notesSlides/notesSlide14.xml><?xml version="1.0" encoding="utf-8"?>
 <p:notes xmlns:a="http://schemas.openxmlformats.org/drawingml/2006/main" xmlns:r="http://schemas.openxmlformats.org/officeDocument/2006/relationships" xmlns:p="http://schemas.openxmlformats.org/presentationml/2006/main" showMasterSp="0" showMasterPhAnim="0">
   <p:cSld>
     <p:spTree>
@@ -1857,7 +1754,7 @@
 </p:notes>
 </file>
 
-<file path=ppt/notesSlides/notesSlide17.xml><?xml version="1.0" encoding="utf-8"?>
+<file path=ppt/notesSlides/notesSlide15.xml><?xml version="1.0" encoding="utf-8"?>
 <p:notes xmlns:a="http://schemas.openxmlformats.org/drawingml/2006/main" xmlns:r="http://schemas.openxmlformats.org/officeDocument/2006/relationships" xmlns:p="http://schemas.openxmlformats.org/presentationml/2006/main" showMasterSp="0" showMasterPhAnim="0">
   <p:cSld>
     <p:spTree>
@@ -2002,7 +1899,7 @@
 </p:notes>
 </file>
 
-<file path=ppt/notesSlides/notesSlide18.xml><?xml version="1.0" encoding="utf-8"?>
+<file path=ppt/notesSlides/notesSlide16.xml><?xml version="1.0" encoding="utf-8"?>
 <p:notes xmlns:a="http://schemas.openxmlformats.org/drawingml/2006/main" xmlns:r="http://schemas.openxmlformats.org/officeDocument/2006/relationships" xmlns:p="http://schemas.openxmlformats.org/presentationml/2006/main" showMasterSp="0" showMasterPhAnim="0">
   <p:cSld>
     <p:spTree>
@@ -2124,7 +2021,7 @@
 </p:notes>
 </file>
 
-<file path=ppt/notesSlides/notesSlide19.xml><?xml version="1.0" encoding="utf-8"?>
+<file path=ppt/notesSlides/notesSlide17.xml><?xml version="1.0" encoding="utf-8"?>
 <p:notes xmlns:a="http://schemas.openxmlformats.org/drawingml/2006/main" xmlns:r="http://schemas.openxmlformats.org/officeDocument/2006/relationships" xmlns:p="http://schemas.openxmlformats.org/presentationml/2006/main" showMasterSp="0" showMasterPhAnim="0">
   <p:cSld>
     <p:spTree>
@@ -2586,128 +2483,6 @@
   <p:cSld>
     <p:spTree>
       <p:nvGrpSpPr>
-        <p:cNvPr id="1" name="Shape 77"/>
-        <p:cNvGrpSpPr/>
-        <p:nvPr/>
-      </p:nvGrpSpPr>
-      <p:grpSpPr>
-        <a:xfrm>
-          <a:off x="0" y="0"/>
-          <a:ext cx="0" cy="0"/>
-          <a:chOff x="0" y="0"/>
-          <a:chExt cx="0" cy="0"/>
-        </a:xfrm>
-      </p:grpSpPr>
-      <p:sp>
-        <p:nvSpPr>
-          <p:cNvPr id="78" name="Google Shape;78;gf4f11f959e_0_5:notes"/>
-          <p:cNvSpPr>
-            <a:spLocks noGrp="1" noRot="1" noChangeAspect="1"/>
-          </p:cNvSpPr>
-          <p:nvPr>
-            <p:ph type="sldImg" idx="2"/>
-          </p:nvPr>
-        </p:nvSpPr>
-        <p:spPr>
-          <a:xfrm>
-            <a:off x="381000" y="685800"/>
-            <a:ext cx="6096000" cy="3429000"/>
-          </a:xfrm>
-          <a:custGeom>
-            <a:avLst/>
-            <a:gdLst/>
-            <a:ahLst/>
-            <a:cxnLst/>
-            <a:rect l="l" t="t" r="r" b="b"/>
-            <a:pathLst>
-              <a:path w="120000" h="120000" extrusionOk="0">
-                <a:moveTo>
-                  <a:pt x="0" y="0"/>
-                </a:moveTo>
-                <a:lnTo>
-                  <a:pt x="120000" y="0"/>
-                </a:lnTo>
-                <a:lnTo>
-                  <a:pt x="120000" y="120000"/>
-                </a:lnTo>
-                <a:lnTo>
-                  <a:pt x="0" y="120000"/>
-                </a:lnTo>
-                <a:close/>
-              </a:path>
-            </a:pathLst>
-          </a:custGeom>
-          <a:noFill/>
-          <a:ln w="9525" cap="flat" cmpd="sng">
-            <a:solidFill>
-              <a:srgbClr val="000000"/>
-            </a:solidFill>
-            <a:prstDash val="solid"/>
-            <a:round/>
-            <a:headEnd type="none" w="sm" len="sm"/>
-            <a:tailEnd type="none" w="sm" len="sm"/>
-          </a:ln>
-        </p:spPr>
-      </p:sp>
-      <p:sp>
-        <p:nvSpPr>
-          <p:cNvPr id="79" name="Google Shape;79;gf4f11f959e_0_5:notes"/>
-          <p:cNvSpPr txBox="1">
-            <a:spLocks noGrp="1"/>
-          </p:cNvSpPr>
-          <p:nvPr>
-            <p:ph type="body" idx="1"/>
-          </p:nvPr>
-        </p:nvSpPr>
-        <p:spPr>
-          <a:xfrm>
-            <a:off x="685800" y="4343400"/>
-            <a:ext cx="5486400" cy="4114800"/>
-          </a:xfrm>
-          <a:prstGeom prst="rect">
-            <a:avLst/>
-          </a:prstGeom>
-          <a:noFill/>
-          <a:ln>
-            <a:noFill/>
-          </a:ln>
-        </p:spPr>
-        <p:txBody>
-          <a:bodyPr spcFirstLastPara="1" wrap="square" lIns="91425" tIns="91425" rIns="91425" bIns="91425" anchor="t" anchorCtr="0">
-            <a:noAutofit/>
-          </a:bodyPr>
-          <a:lstStyle/>
-          <a:p>
-            <a:pPr marL="0" lvl="0" indent="0" algn="l" rtl="0">
-              <a:lnSpc>
-                <a:spcPct val="100000"/>
-              </a:lnSpc>
-              <a:spcBef>
-                <a:spcPts val="0"/>
-              </a:spcBef>
-              <a:spcAft>
-                <a:spcPts val="0"/>
-              </a:spcAft>
-              <a:buSzPts val="1100"/>
-              <a:buNone/>
-            </a:pPr>
-            <a:endParaRPr/>
-          </a:p>
-        </p:txBody>
-      </p:sp>
-    </p:spTree>
-  </p:cSld>
-  <p:clrMapOvr>
-    <a:masterClrMapping/>
-  </p:clrMapOvr>
-</p:notes>
-</file>
-
-<file path=ppt/notesSlides/notesSlide6.xml><?xml version="1.0" encoding="utf-8"?>
-<p:notes xmlns:a="http://schemas.openxmlformats.org/drawingml/2006/main" xmlns:r="http://schemas.openxmlformats.org/officeDocument/2006/relationships" xmlns:p="http://schemas.openxmlformats.org/presentationml/2006/main" showMasterSp="0" showMasterPhAnim="0">
-  <p:cSld>
-    <p:spTree>
-      <p:nvGrpSpPr>
         <p:cNvPr id="1" name="Shape 77">
           <a:extLst>
             <a:ext uri="{FF2B5EF4-FFF2-40B4-BE49-F238E27FC236}">
@@ -2848,7 +2623,7 @@
 </p:notes>
 </file>
 
-<file path=ppt/notesSlides/notesSlide7.xml><?xml version="1.0" encoding="utf-8"?>
+<file path=ppt/notesSlides/notesSlide6.xml><?xml version="1.0" encoding="utf-8"?>
 <p:notes xmlns:a="http://schemas.openxmlformats.org/drawingml/2006/main" xmlns:r="http://schemas.openxmlformats.org/officeDocument/2006/relationships" xmlns:p="http://schemas.openxmlformats.org/presentationml/2006/main" showMasterSp="0" showMasterPhAnim="0">
   <p:cSld>
     <p:spTree>
@@ -2976,7 +2751,91 @@
               <a:buSzPts val="1100"/>
               <a:buNone/>
             </a:pPr>
-            <a:endParaRPr/>
+            <a:r>
+              <a:rPr lang="fr-FR" sz="1100" b="1" dirty="0"/>
+              <a:t>Déséquilibre des classes considérable</a:t>
+            </a:r>
+            <a:br>
+              <a:rPr lang="fr-FR" sz="1100" dirty="0"/>
+            </a:br>
+            <a:r>
+              <a:rPr lang="fr-FR" sz="1100" dirty="0"/>
+              <a:t>Sur 5572 messages au total: 4825 '</a:t>
+            </a:r>
+            <a:r>
+              <a:rPr lang="fr-FR" sz="1100" dirty="0" err="1"/>
+              <a:t>ham</a:t>
+            </a:r>
+            <a:r>
+              <a:rPr lang="fr-FR" sz="1100" dirty="0"/>
+              <a:t>' (86.6%) et 747 'spam' (13.4%). </a:t>
+            </a:r>
+            <a:br>
+              <a:rPr lang="fr-FR" sz="1100" b="1" dirty="0"/>
+            </a:br>
+            <a:r>
+              <a:rPr lang="fr-FR" sz="1100" b="1" dirty="0"/>
+              <a:t>Différences de longueur des messages</a:t>
+            </a:r>
+            <a:br>
+              <a:rPr lang="fr-FR" sz="1100" dirty="0"/>
+            </a:br>
+            <a:r>
+              <a:rPr lang="fr-FR" sz="1100" dirty="0"/>
+              <a:t>Les spams sont généralement plus longs</a:t>
+            </a:r>
+            <a:br>
+              <a:rPr lang="fr-FR" sz="1100" dirty="0"/>
+            </a:br>
+            <a:r>
+              <a:rPr lang="fr-FR" sz="1100" b="1" dirty="0"/>
+              <a:t>Registre du langage distinct</a:t>
+            </a:r>
+            <a:br>
+              <a:rPr lang="fr-FR" sz="1100" dirty="0"/>
+            </a:br>
+            <a:r>
+              <a:rPr lang="fr-FR" sz="1100" dirty="0"/>
+              <a:t>Messages légitimes utilisent souvent le langage familier, les spams sont plus formels et présent l’aspect d’urgence</a:t>
+            </a:r>
+            <a:br>
+              <a:rPr lang="fr-FR" sz="1100" dirty="0"/>
+            </a:br>
+            <a:r>
+              <a:rPr lang="fr-FR" sz="1100" b="1" dirty="0"/>
+              <a:t>Tendances du vocabulaire</a:t>
+            </a:r>
+            <a:br>
+              <a:rPr lang="fr-FR" sz="1100" dirty="0"/>
+            </a:br>
+            <a:r>
+              <a:rPr lang="fr-FR" sz="1100" dirty="0"/>
+              <a:t>Mots clés dans les spams: ‘free’, ‘</a:t>
+            </a:r>
+            <a:r>
+              <a:rPr lang="fr-FR" sz="1100" dirty="0" err="1"/>
+              <a:t>win</a:t>
+            </a:r>
+            <a:r>
+              <a:rPr lang="fr-FR" sz="1100" dirty="0"/>
+              <a:t>’, ‘</a:t>
+            </a:r>
+            <a:r>
+              <a:rPr lang="fr-FR" sz="1100" dirty="0" err="1"/>
+              <a:t>reward</a:t>
+            </a:r>
+            <a:r>
+              <a:rPr lang="fr-FR" sz="1100" dirty="0"/>
+              <a:t>’ </a:t>
+            </a:r>
+            <a:r>
+              <a:rPr lang="fr-FR" sz="1100" dirty="0" err="1"/>
+              <a:t>etc</a:t>
+            </a:r>
+            <a:br>
+              <a:rPr lang="en-US" sz="1100" dirty="0"/>
+            </a:br>
+            <a:endParaRPr dirty="0"/>
           </a:p>
         </p:txBody>
       </p:sp>
@@ -2993,7 +2852,7 @@
 </p:notes>
 </file>
 
-<file path=ppt/notesSlides/notesSlide8.xml><?xml version="1.0" encoding="utf-8"?>
+<file path=ppt/notesSlides/notesSlide7.xml><?xml version="1.0" encoding="utf-8"?>
 <p:notes xmlns:a="http://schemas.openxmlformats.org/drawingml/2006/main" xmlns:r="http://schemas.openxmlformats.org/officeDocument/2006/relationships" xmlns:p="http://schemas.openxmlformats.org/presentationml/2006/main" showMasterSp="0" showMasterPhAnim="0">
   <p:cSld>
     <p:spTree>
@@ -3138,7 +2997,7 @@
 </p:notes>
 </file>
 
-<file path=ppt/notesSlides/notesSlide9.xml><?xml version="1.0" encoding="utf-8"?>
+<file path=ppt/notesSlides/notesSlide8.xml><?xml version="1.0" encoding="utf-8"?>
 <p:notes xmlns:a="http://schemas.openxmlformats.org/drawingml/2006/main" xmlns:r="http://schemas.openxmlformats.org/officeDocument/2006/relationships" xmlns:p="http://schemas.openxmlformats.org/presentationml/2006/main" showMasterSp="0" showMasterPhAnim="0">
   <p:cSld>
     <p:spTree>
@@ -3274,6 +3133,151 @@
     <p:extLst>
       <p:ext uri="{BB962C8B-B14F-4D97-AF65-F5344CB8AC3E}">
         <p14:creationId xmlns:p14="http://schemas.microsoft.com/office/powerpoint/2010/main" val="1155206241"/>
+      </p:ext>
+    </p:extLst>
+  </p:cSld>
+  <p:clrMapOvr>
+    <a:masterClrMapping/>
+  </p:clrMapOvr>
+</p:notes>
+</file>
+
+<file path=ppt/notesSlides/notesSlide9.xml><?xml version="1.0" encoding="utf-8"?>
+<p:notes xmlns:a="http://schemas.openxmlformats.org/drawingml/2006/main" xmlns:r="http://schemas.openxmlformats.org/officeDocument/2006/relationships" xmlns:p="http://schemas.openxmlformats.org/presentationml/2006/main" showMasterSp="0" showMasterPhAnim="0">
+  <p:cSld>
+    <p:spTree>
+      <p:nvGrpSpPr>
+        <p:cNvPr id="1" name="Shape 77">
+          <a:extLst>
+            <a:ext uri="{FF2B5EF4-FFF2-40B4-BE49-F238E27FC236}">
+              <a16:creationId xmlns:a16="http://schemas.microsoft.com/office/drawing/2014/main" id="{63AE2DAD-61E3-9D75-845C-E230ED784869}"/>
+            </a:ext>
+          </a:extLst>
+        </p:cNvPr>
+        <p:cNvGrpSpPr/>
+        <p:nvPr/>
+      </p:nvGrpSpPr>
+      <p:grpSpPr>
+        <a:xfrm>
+          <a:off x="0" y="0"/>
+          <a:ext cx="0" cy="0"/>
+          <a:chOff x="0" y="0"/>
+          <a:chExt cx="0" cy="0"/>
+        </a:xfrm>
+      </p:grpSpPr>
+      <p:sp>
+        <p:nvSpPr>
+          <p:cNvPr id="78" name="Google Shape;78;gf4f11f959e_0_5:notes">
+            <a:extLst>
+              <a:ext uri="{FF2B5EF4-FFF2-40B4-BE49-F238E27FC236}">
+                <a16:creationId xmlns:a16="http://schemas.microsoft.com/office/drawing/2014/main" id="{ECD46BB2-B204-A5B5-50F9-3B7DEE8C04F4}"/>
+              </a:ext>
+            </a:extLst>
+          </p:cNvPr>
+          <p:cNvSpPr>
+            <a:spLocks noGrp="1" noRot="1" noChangeAspect="1"/>
+          </p:cNvSpPr>
+          <p:nvPr>
+            <p:ph type="sldImg" idx="2"/>
+          </p:nvPr>
+        </p:nvSpPr>
+        <p:spPr>
+          <a:xfrm>
+            <a:off x="381000" y="685800"/>
+            <a:ext cx="6096000" cy="3429000"/>
+          </a:xfrm>
+          <a:custGeom>
+            <a:avLst/>
+            <a:gdLst/>
+            <a:ahLst/>
+            <a:cxnLst/>
+            <a:rect l="l" t="t" r="r" b="b"/>
+            <a:pathLst>
+              <a:path w="120000" h="120000" extrusionOk="0">
+                <a:moveTo>
+                  <a:pt x="0" y="0"/>
+                </a:moveTo>
+                <a:lnTo>
+                  <a:pt x="120000" y="0"/>
+                </a:lnTo>
+                <a:lnTo>
+                  <a:pt x="120000" y="120000"/>
+                </a:lnTo>
+                <a:lnTo>
+                  <a:pt x="0" y="120000"/>
+                </a:lnTo>
+                <a:close/>
+              </a:path>
+            </a:pathLst>
+          </a:custGeom>
+          <a:noFill/>
+          <a:ln w="9525" cap="flat" cmpd="sng">
+            <a:solidFill>
+              <a:srgbClr val="000000"/>
+            </a:solidFill>
+            <a:prstDash val="solid"/>
+            <a:round/>
+            <a:headEnd type="none" w="sm" len="sm"/>
+            <a:tailEnd type="none" w="sm" len="sm"/>
+          </a:ln>
+        </p:spPr>
+      </p:sp>
+      <p:sp>
+        <p:nvSpPr>
+          <p:cNvPr id="79" name="Google Shape;79;gf4f11f959e_0_5:notes">
+            <a:extLst>
+              <a:ext uri="{FF2B5EF4-FFF2-40B4-BE49-F238E27FC236}">
+                <a16:creationId xmlns:a16="http://schemas.microsoft.com/office/drawing/2014/main" id="{624A2996-7478-BDEB-1023-270295A2CF28}"/>
+              </a:ext>
+            </a:extLst>
+          </p:cNvPr>
+          <p:cNvSpPr txBox="1">
+            <a:spLocks noGrp="1"/>
+          </p:cNvSpPr>
+          <p:nvPr>
+            <p:ph type="body" idx="1"/>
+          </p:nvPr>
+        </p:nvSpPr>
+        <p:spPr>
+          <a:xfrm>
+            <a:off x="685800" y="4343400"/>
+            <a:ext cx="5486400" cy="4114800"/>
+          </a:xfrm>
+          <a:prstGeom prst="rect">
+            <a:avLst/>
+          </a:prstGeom>
+          <a:noFill/>
+          <a:ln>
+            <a:noFill/>
+          </a:ln>
+        </p:spPr>
+        <p:txBody>
+          <a:bodyPr spcFirstLastPara="1" wrap="square" lIns="91425" tIns="91425" rIns="91425" bIns="91425" anchor="t" anchorCtr="0">
+            <a:noAutofit/>
+          </a:bodyPr>
+          <a:lstStyle/>
+          <a:p>
+            <a:pPr marL="0" lvl="0" indent="0" algn="l" rtl="0">
+              <a:lnSpc>
+                <a:spcPct val="100000"/>
+              </a:lnSpc>
+              <a:spcBef>
+                <a:spcPts val="0"/>
+              </a:spcBef>
+              <a:spcAft>
+                <a:spcPts val="0"/>
+              </a:spcAft>
+              <a:buSzPts val="1100"/>
+              <a:buNone/>
+            </a:pPr>
+            <a:endParaRPr/>
+          </a:p>
+        </p:txBody>
+      </p:sp>
+    </p:spTree>
+    <p:extLst>
+      <p:ext uri="{BB962C8B-B14F-4D97-AF65-F5344CB8AC3E}">
+        <p14:creationId xmlns:p14="http://schemas.microsoft.com/office/powerpoint/2010/main" val="384385576"/>
       </p:ext>
     </p:extLst>
   </p:cSld>
@@ -8069,7 +8073,7 @@
         </p:nvSpPr>
         <p:spPr>
           <a:xfrm>
-            <a:off x="732062" y="2262900"/>
+            <a:off x="640000" y="2595750"/>
             <a:ext cx="6866444" cy="617700"/>
           </a:xfrm>
           <a:prstGeom prst="rect">
@@ -8091,25 +8095,21 @@
             </a:br>
             <a:r>
               <a:rPr lang="fr-FR" sz="2800" b="1" dirty="0"/>
+              <a:t>Concepteur développeur en science des données</a:t>
+            </a:r>
+            <a:br>
+              <a:rPr lang="fr-FR" sz="3200" b="1" dirty="0"/>
+            </a:br>
+            <a:br>
+              <a:rPr lang="fr-FR" sz="3200" b="1" dirty="0"/>
+            </a:br>
+            <a:r>
+              <a:rPr lang="fr-FR" sz="2400" b="1" dirty="0"/>
               <a:t>Machine Learning </a:t>
             </a:r>
             <a:r>
-              <a:rPr lang="fr-FR" sz="2800" b="1" dirty="0" err="1"/>
+              <a:rPr lang="fr-FR" sz="2400" b="1" dirty="0" err="1"/>
               <a:t>Engineer</a:t>
-            </a:r>
-            <a:r>
-              <a:rPr lang="fr-FR" sz="2800" b="1" dirty="0"/>
-              <a:t> </a:t>
-            </a:r>
-            <a:br>
-              <a:rPr lang="fr-FR" sz="2800" dirty="0"/>
-            </a:br>
-            <a:br>
-              <a:rPr lang="fr-FR" sz="2800" dirty="0"/>
-            </a:br>
-            <a:r>
-              <a:rPr lang="fr-FR" sz="2800" dirty="0"/>
-              <a:t>Certification at JEDHA</a:t>
             </a:r>
             <a:endParaRPr sz="2800" dirty="0">
               <a:solidFill>
@@ -8191,7 +8191,7 @@
         </p:nvSpPr>
         <p:spPr>
           <a:xfrm>
-            <a:off x="840549" y="3087788"/>
+            <a:off x="694245" y="3254213"/>
             <a:ext cx="4882075" cy="533100"/>
           </a:xfrm>
           <a:prstGeom prst="rect">
@@ -8206,7 +8206,11 @@
           <a:p>
             <a:pPr algn="l"/>
             <a:r>
-              <a:rPr lang="fr-FR" sz="2400" dirty="0"/>
+              <a:rPr lang="fr-FR" sz="2400" b="1" dirty="0">
+                <a:solidFill>
+                  <a:srgbClr val="FFFF00"/>
+                </a:solidFill>
+              </a:rPr>
               <a:t>Bloc 4</a:t>
             </a:r>
           </a:p>
@@ -8228,7 +8232,7 @@
         </p:nvSpPr>
         <p:spPr>
           <a:xfrm>
-            <a:off x="840550" y="3828077"/>
+            <a:off x="694245" y="3864535"/>
             <a:ext cx="5315100" cy="533100"/>
           </a:xfrm>
           <a:prstGeom prst="rect">
@@ -8493,8 +8497,12 @@
           <a:p>
             <a:pPr algn="l"/>
             <a:r>
+              <a:rPr lang="en-US" sz="1600" dirty="0" err="1"/>
+              <a:t>Préparé</a:t>
+            </a:r>
+            <a:r>
               <a:rPr lang="en-US" sz="1600" dirty="0"/>
-              <a:t>Prepared by Agnès HEIJLIGERS</a:t>
+              <a:t> par Agnès HEIJLIGERS</a:t>
             </a:r>
             <a:endParaRPr lang="en-US" sz="1600" dirty="0">
               <a:solidFill>
@@ -8517,382 +8525,6 @@
 </file>
 
 <file path=ppt/slides/slide10.xml><?xml version="1.0" encoding="utf-8"?>
-<p:sld xmlns:a="http://schemas.openxmlformats.org/drawingml/2006/main" xmlns:r="http://schemas.openxmlformats.org/officeDocument/2006/relationships" xmlns:p="http://schemas.openxmlformats.org/presentationml/2006/main">
-  <p:cSld>
-    <p:spTree>
-      <p:nvGrpSpPr>
-        <p:cNvPr id="1" name="Shape 80">
-          <a:extLst>
-            <a:ext uri="{FF2B5EF4-FFF2-40B4-BE49-F238E27FC236}">
-              <a16:creationId xmlns:a16="http://schemas.microsoft.com/office/drawing/2014/main" id="{02B21633-A302-B122-070F-EE3BF75793C4}"/>
-            </a:ext>
-          </a:extLst>
-        </p:cNvPr>
-        <p:cNvGrpSpPr/>
-        <p:nvPr/>
-      </p:nvGrpSpPr>
-      <p:grpSpPr>
-        <a:xfrm>
-          <a:off x="0" y="0"/>
-          <a:ext cx="0" cy="0"/>
-          <a:chOff x="0" y="0"/>
-          <a:chExt cx="0" cy="0"/>
-        </a:xfrm>
-      </p:grpSpPr>
-      <p:sp>
-        <p:nvSpPr>
-          <p:cNvPr id="81" name="Google Shape;81;p16">
-            <a:extLst>
-              <a:ext uri="{FF2B5EF4-FFF2-40B4-BE49-F238E27FC236}">
-                <a16:creationId xmlns:a16="http://schemas.microsoft.com/office/drawing/2014/main" id="{139D937E-D131-0341-A71C-7F7B2AEBEAF7}"/>
-              </a:ext>
-            </a:extLst>
-          </p:cNvPr>
-          <p:cNvSpPr/>
-          <p:nvPr/>
-        </p:nvSpPr>
-        <p:spPr>
-          <a:xfrm>
-            <a:off x="5499" y="-17775"/>
-            <a:ext cx="3233647" cy="5161200"/>
-          </a:xfrm>
-          <a:prstGeom prst="rect">
-            <a:avLst/>
-          </a:prstGeom>
-          <a:solidFill>
-            <a:srgbClr val="C3FFFC"/>
-          </a:solidFill>
-          <a:ln>
-            <a:noFill/>
-          </a:ln>
-        </p:spPr>
-        <p:txBody>
-          <a:bodyPr spcFirstLastPara="1" wrap="square" lIns="91425" tIns="91425" rIns="91425" bIns="91425" anchor="ctr" anchorCtr="0">
-            <a:noAutofit/>
-          </a:bodyPr>
-          <a:lstStyle/>
-          <a:p>
-            <a:pPr marL="0" marR="0" lvl="0" indent="0" algn="l" rtl="0">
-              <a:lnSpc>
-                <a:spcPct val="100000"/>
-              </a:lnSpc>
-              <a:spcBef>
-                <a:spcPts val="0"/>
-              </a:spcBef>
-              <a:spcAft>
-                <a:spcPts val="0"/>
-              </a:spcAft>
-              <a:buClr>
-                <a:srgbClr val="000000"/>
-              </a:buClr>
-              <a:buSzPts val="1400"/>
-              <a:buFont typeface="Arial"/>
-              <a:buNone/>
-            </a:pPr>
-            <a:endParaRPr sz="1400" b="0" i="0" u="none" strike="noStrike" cap="none">
-              <a:solidFill>
-                <a:srgbClr val="000000"/>
-              </a:solidFill>
-              <a:latin typeface="Arial"/>
-              <a:ea typeface="Arial"/>
-              <a:cs typeface="Arial"/>
-              <a:sym typeface="Arial"/>
-            </a:endParaRPr>
-          </a:p>
-        </p:txBody>
-      </p:sp>
-      <p:sp>
-        <p:nvSpPr>
-          <p:cNvPr id="82" name="Google Shape;82;p16">
-            <a:extLst>
-              <a:ext uri="{FF2B5EF4-FFF2-40B4-BE49-F238E27FC236}">
-                <a16:creationId xmlns:a16="http://schemas.microsoft.com/office/drawing/2014/main" id="{4746BB85-C109-9BF1-7903-520960EEB0B6}"/>
-              </a:ext>
-            </a:extLst>
-          </p:cNvPr>
-          <p:cNvSpPr txBox="1">
-            <a:spLocks noGrp="1"/>
-          </p:cNvSpPr>
-          <p:nvPr>
-            <p:ph type="title"/>
-          </p:nvPr>
-        </p:nvSpPr>
-        <p:spPr>
-          <a:xfrm>
-            <a:off x="438808" y="967077"/>
-            <a:ext cx="2988031" cy="3774288"/>
-          </a:xfrm>
-          <a:prstGeom prst="rect">
-            <a:avLst/>
-          </a:prstGeom>
-          <a:noFill/>
-          <a:ln>
-            <a:noFill/>
-          </a:ln>
-        </p:spPr>
-        <p:txBody>
-          <a:bodyPr spcFirstLastPara="1" wrap="square" lIns="91425" tIns="91425" rIns="91425" bIns="91425" anchor="t" anchorCtr="0">
-            <a:noAutofit/>
-          </a:bodyPr>
-          <a:lstStyle/>
-          <a:p>
-            <a:r>
-              <a:rPr lang="en-US" b="1" dirty="0"/>
-              <a:t>Data Preparation for Deep Learning</a:t>
-            </a:r>
-            <a:br>
-              <a:rPr lang="en-US" dirty="0"/>
-            </a:br>
-            <a:br>
-              <a:rPr lang="en-US" dirty="0"/>
-            </a:br>
-            <a:br>
-              <a:rPr lang="fr-FR" b="1" dirty="0"/>
-            </a:br>
-            <a:br>
-              <a:rPr lang="fr" sz="2400" dirty="0">
-                <a:solidFill>
-                  <a:srgbClr val="015955"/>
-                </a:solidFill>
-                <a:latin typeface="Inter"/>
-                <a:ea typeface="Inter"/>
-                <a:cs typeface="Inter"/>
-                <a:sym typeface="Inter"/>
-              </a:rPr>
-            </a:br>
-            <a:br>
-              <a:rPr lang="fr" sz="2400" dirty="0">
-                <a:solidFill>
-                  <a:srgbClr val="015955"/>
-                </a:solidFill>
-                <a:latin typeface="Inter"/>
-                <a:ea typeface="Inter"/>
-                <a:cs typeface="Inter"/>
-                <a:sym typeface="Inter"/>
-              </a:rPr>
-            </a:br>
-            <a:endParaRPr sz="2400" dirty="0">
-              <a:solidFill>
-                <a:srgbClr val="015955"/>
-              </a:solidFill>
-              <a:latin typeface="Inter"/>
-              <a:ea typeface="Inter"/>
-              <a:cs typeface="Inter"/>
-              <a:sym typeface="Inter"/>
-            </a:endParaRPr>
-          </a:p>
-        </p:txBody>
-      </p:sp>
-      <p:pic>
-        <p:nvPicPr>
-          <p:cNvPr id="83" name="Google Shape;83;p16">
-            <a:extLst>
-              <a:ext uri="{FF2B5EF4-FFF2-40B4-BE49-F238E27FC236}">
-                <a16:creationId xmlns:a16="http://schemas.microsoft.com/office/drawing/2014/main" id="{46E5E1CD-1470-25A2-1751-D84460151E69}"/>
-              </a:ext>
-            </a:extLst>
-          </p:cNvPr>
-          <p:cNvPicPr preferRelativeResize="0"/>
-          <p:nvPr/>
-        </p:nvPicPr>
-        <p:blipFill rotWithShape="1">
-          <a:blip r:embed="rId3">
-            <a:alphaModFix/>
-          </a:blip>
-          <a:srcRect/>
-          <a:stretch/>
-        </p:blipFill>
-        <p:spPr>
-          <a:xfrm>
-            <a:off x="463375" y="482852"/>
-            <a:ext cx="576900" cy="385904"/>
-          </a:xfrm>
-          <a:prstGeom prst="rect">
-            <a:avLst/>
-          </a:prstGeom>
-          <a:noFill/>
-          <a:ln>
-            <a:noFill/>
-          </a:ln>
-        </p:spPr>
-      </p:pic>
-      <p:sp>
-        <p:nvSpPr>
-          <p:cNvPr id="84" name="Google Shape;84;p16">
-            <a:extLst>
-              <a:ext uri="{FF2B5EF4-FFF2-40B4-BE49-F238E27FC236}">
-                <a16:creationId xmlns:a16="http://schemas.microsoft.com/office/drawing/2014/main" id="{DA6BDDE3-2229-9F18-4C91-5D4059FDA079}"/>
-              </a:ext>
-            </a:extLst>
-          </p:cNvPr>
-          <p:cNvSpPr txBox="1">
-            <a:spLocks noGrp="1"/>
-          </p:cNvSpPr>
-          <p:nvPr>
-            <p:ph type="ctrTitle" idx="4294967295"/>
-          </p:nvPr>
-        </p:nvSpPr>
-        <p:spPr>
-          <a:xfrm>
-            <a:off x="3318887" y="129873"/>
-            <a:ext cx="5819614" cy="5013627"/>
-          </a:xfrm>
-          <a:prstGeom prst="rect">
-            <a:avLst/>
-          </a:prstGeom>
-          <a:noFill/>
-          <a:ln>
-            <a:noFill/>
-          </a:ln>
-        </p:spPr>
-        <p:txBody>
-          <a:bodyPr spcFirstLastPara="1" wrap="square" lIns="91425" tIns="91425" rIns="91425" bIns="91425" anchor="t" anchorCtr="0">
-            <a:noAutofit/>
-          </a:bodyPr>
-          <a:lstStyle/>
-          <a:p>
-            <a:r>
-              <a:rPr lang="en-US" sz="1600" b="1" dirty="0"/>
-              <a:t>Train-Test Split:</a:t>
-            </a:r>
-            <a:br>
-              <a:rPr lang="en-US" sz="1600" dirty="0"/>
-            </a:br>
-            <a:r>
-              <a:rPr lang="en-US" sz="1600" dirty="0"/>
-              <a:t>The dataset was divided into training (80%) and testing (20%) sets.</a:t>
-            </a:r>
-            <a:br>
-              <a:rPr lang="en-US" sz="1600" dirty="0"/>
-            </a:br>
-            <a:br>
-              <a:rPr lang="en-US" sz="1600" dirty="0"/>
-            </a:br>
-            <a:r>
-              <a:rPr lang="en-US" sz="1600" b="1" dirty="0"/>
-              <a:t>Feature Scaling:</a:t>
-            </a:r>
-            <a:br>
-              <a:rPr lang="en-US" sz="1600" dirty="0"/>
-            </a:br>
-            <a:r>
-              <a:rPr lang="en-US" sz="1600" dirty="0" err="1"/>
-              <a:t>StandardScaler</a:t>
-            </a:r>
-            <a:r>
-              <a:rPr lang="en-US" sz="1600" dirty="0"/>
-              <a:t> was applied to both sentence embeddings and engineered features.</a:t>
-            </a:r>
-            <a:br>
-              <a:rPr lang="en-US" sz="1600" dirty="0"/>
-            </a:br>
-            <a:br>
-              <a:rPr lang="en-US" sz="1600" dirty="0"/>
-            </a:br>
-            <a:r>
-              <a:rPr lang="en-US" sz="1600" b="1" dirty="0"/>
-              <a:t>Class Weighting:</a:t>
-            </a:r>
-            <a:br>
-              <a:rPr lang="en-US" sz="1600" dirty="0"/>
-            </a:br>
-            <a:r>
-              <a:rPr lang="en-US" sz="1600" dirty="0"/>
-              <a:t>Recognizing the significant class imbalance to give higher importance to the minority 'spam' class during training, preventing the model from becoming biased towards the majority 'ham' class.</a:t>
-            </a:r>
-            <a:br>
-              <a:rPr lang="en-US" sz="1600" dirty="0"/>
-            </a:br>
-            <a:br>
-              <a:rPr lang="en-US" sz="1600" dirty="0"/>
-            </a:br>
-            <a:r>
-              <a:rPr lang="en-US" sz="1600" b="1" dirty="0"/>
-              <a:t>Conversion to </a:t>
-            </a:r>
-            <a:r>
-              <a:rPr lang="en-US" sz="1600" b="1" dirty="0" err="1"/>
-              <a:t>PyTorch</a:t>
-            </a:r>
-            <a:r>
-              <a:rPr lang="en-US" sz="1600" b="1" dirty="0"/>
-              <a:t> Tensors and </a:t>
-            </a:r>
-            <a:r>
-              <a:rPr lang="en-US" sz="1600" b="1" dirty="0" err="1"/>
-              <a:t>DataLoaders</a:t>
-            </a:r>
-            <a:r>
-              <a:rPr lang="en-US" sz="1600" b="1" dirty="0"/>
-              <a:t>:</a:t>
-            </a:r>
-            <a:br>
-              <a:rPr lang="en-US" sz="1600" b="1" dirty="0"/>
-            </a:br>
-            <a:r>
-              <a:rPr lang="en-US" sz="1600" dirty="0"/>
-              <a:t>Scaled features and labels were converted into </a:t>
-            </a:r>
-            <a:r>
-              <a:rPr lang="en-US" sz="1600" dirty="0" err="1"/>
-              <a:t>torch.FloatTensor</a:t>
-            </a:r>
-            <a:r>
-              <a:rPr lang="en-US" sz="1600" dirty="0"/>
-              <a:t>.</a:t>
-            </a:r>
-            <a:br>
-              <a:rPr lang="en-US" sz="1600" dirty="0"/>
-            </a:br>
-            <a:r>
-              <a:rPr lang="en-US" sz="1600" dirty="0" err="1"/>
-              <a:t>TensorDataset</a:t>
-            </a:r>
-            <a:r>
-              <a:rPr lang="en-US" sz="1600" dirty="0"/>
-              <a:t> and </a:t>
-            </a:r>
-            <a:r>
-              <a:rPr lang="en-US" sz="1600" dirty="0" err="1"/>
-              <a:t>DataLoader</a:t>
-            </a:r>
-            <a:r>
-              <a:rPr lang="en-US" sz="1600" dirty="0"/>
-              <a:t> were created to efficiently feed data to the neural networks in batches during training and evaluation, leveraging GPU acceleration.</a:t>
-            </a:r>
-            <a:br>
-              <a:rPr lang="en-US" dirty="0"/>
-            </a:br>
-            <a:br>
-              <a:rPr lang="en-US" sz="1600" dirty="0"/>
-            </a:br>
-            <a:br>
-              <a:rPr lang="en-US" dirty="0"/>
-            </a:br>
-            <a:br>
-              <a:rPr lang="fr-FR" sz="1600" dirty="0"/>
-            </a:br>
-            <a:br>
-              <a:rPr lang="fr-FR" dirty="0"/>
-            </a:br>
-            <a:endParaRPr lang="en-US" sz="1600" dirty="0"/>
-          </a:p>
-        </p:txBody>
-      </p:sp>
-    </p:spTree>
-    <p:extLst>
-      <p:ext uri="{BB962C8B-B14F-4D97-AF65-F5344CB8AC3E}">
-        <p14:creationId xmlns:p14="http://schemas.microsoft.com/office/powerpoint/2010/main" val="2416471691"/>
-      </p:ext>
-    </p:extLst>
-  </p:cSld>
-  <p:clrMapOvr>
-    <a:masterClrMapping/>
-  </p:clrMapOvr>
-</p:sld>
-</file>
-
-<file path=ppt/slides/slide11.xml><?xml version="1.0" encoding="utf-8"?>
 <p:sld xmlns:a="http://schemas.openxmlformats.org/drawingml/2006/main" xmlns:r="http://schemas.openxmlformats.org/officeDocument/2006/relationships" xmlns:p="http://schemas.openxmlformats.org/presentationml/2006/main">
   <p:cSld>
     <p:spTree>
@@ -9013,32 +8645,24 @@
           <a:lstStyle/>
           <a:p>
             <a:r>
-              <a:rPr lang="fr-FR" b="1" dirty="0"/>
-              <a:t>Neural Network </a:t>
-            </a:r>
-            <a:r>
-              <a:rPr lang="fr-FR" b="1" dirty="0" err="1"/>
-              <a:t>Models</a:t>
-            </a:r>
-            <a:r>
-              <a:rPr lang="fr-FR" b="1" dirty="0"/>
-              <a:t> Architecture</a:t>
-            </a:r>
-            <a:br>
-              <a:rPr lang="fr-FR" dirty="0"/>
-            </a:br>
-            <a:br>
-              <a:rPr lang="en-US" dirty="0"/>
-            </a:br>
-            <a:r>
-              <a:rPr lang="en-US" sz="2000" dirty="0"/>
-              <a:t>- 2 lean feed-forward neural networks for efficient binary classification</a:t>
-            </a:r>
-            <a:br>
-              <a:rPr lang="fr-FR" b="1" dirty="0"/>
-            </a:br>
-            <a:br>
-              <a:rPr lang="fr" sz="2400" dirty="0">
+              <a:rPr lang="fr-FR" b="1" noProof="0" dirty="0"/>
+              <a:t>Architecture des modèles neuronaux </a:t>
+            </a:r>
+            <a:br>
+              <a:rPr lang="fr-FR" b="1" noProof="0" dirty="0"/>
+            </a:br>
+            <a:br>
+              <a:rPr lang="fr-FR" noProof="0" dirty="0"/>
+            </a:br>
+            <a:r>
+              <a:rPr lang="fr-FR" sz="2000" noProof="0" dirty="0"/>
+              <a:t>- 2 réseaux neuronaux à propagation directe pour une classification binaire efficace</a:t>
+            </a:r>
+            <a:br>
+              <a:rPr lang="fr-FR" b="1" noProof="0" dirty="0"/>
+            </a:br>
+            <a:br>
+              <a:rPr lang="fr-FR" sz="2400" noProof="0" dirty="0">
                 <a:solidFill>
                   <a:srgbClr val="015955"/>
                 </a:solidFill>
@@ -9049,7 +8673,7 @@
               </a:rPr>
             </a:br>
             <a:br>
-              <a:rPr lang="fr" sz="2400" dirty="0">
+              <a:rPr lang="fr-FR" sz="2400" noProof="0" dirty="0">
                 <a:solidFill>
                   <a:srgbClr val="015955"/>
                 </a:solidFill>
@@ -9059,7 +8683,7 @@
                 <a:sym typeface="Inter"/>
               </a:rPr>
             </a:br>
-            <a:endParaRPr sz="2400" dirty="0">
+            <a:endParaRPr lang="fr-FR" sz="2400" noProof="0" dirty="0">
               <a:solidFill>
                 <a:srgbClr val="015955"/>
               </a:solidFill>
@@ -9122,8 +8746,8 @@
         </p:nvSpPr>
         <p:spPr>
           <a:xfrm>
-            <a:off x="3588119" y="579249"/>
-            <a:ext cx="5315100" cy="3425576"/>
+            <a:off x="3588119" y="579248"/>
+            <a:ext cx="5315100" cy="4380457"/>
           </a:xfrm>
           <a:prstGeom prst="rect">
             <a:avLst/>
@@ -9140,334 +8764,172 @@
           <a:lstStyle/>
           <a:p>
             <a:r>
-              <a:rPr lang="fr-FR" sz="1400" b="1" dirty="0" err="1"/>
+              <a:rPr lang="fr-FR" sz="1400" b="1" noProof="0" dirty="0" err="1"/>
               <a:t>SimpleSpamDetector</a:t>
             </a:r>
             <a:r>
-              <a:rPr lang="fr-FR" sz="1400" b="1" dirty="0"/>
+              <a:rPr lang="fr-FR" sz="1400" b="1" noProof="0" dirty="0"/>
               <a:t>:</a:t>
             </a:r>
             <a:br>
-              <a:rPr lang="fr-FR" sz="1400" dirty="0"/>
-            </a:br>
-            <a:br>
-              <a:rPr lang="fr-FR" sz="1400" dirty="0"/>
-            </a:br>
-            <a:r>
-              <a:rPr lang="fr-FR" sz="1400" dirty="0"/>
-              <a:t>Architecture: Input Layer (392 </a:t>
-            </a:r>
-            <a:r>
-              <a:rPr lang="fr-FR" sz="1400" dirty="0" err="1"/>
-              <a:t>features</a:t>
-            </a:r>
-            <a:r>
-              <a:rPr lang="fr-FR" sz="1400" dirty="0"/>
-              <a:t>) → </a:t>
-            </a:r>
-            <a:r>
-              <a:rPr lang="fr-FR" sz="1400" dirty="0" err="1"/>
-              <a:t>Hidden</a:t>
-            </a:r>
-            <a:r>
-              <a:rPr lang="fr-FR" sz="1400" dirty="0"/>
-              <a:t> Layer (128 </a:t>
-            </a:r>
-            <a:r>
-              <a:rPr lang="fr-FR" sz="1400" dirty="0" err="1"/>
-              <a:t>neurons</a:t>
-            </a:r>
-            <a:r>
-              <a:rPr lang="fr-FR" sz="1400" dirty="0"/>
-              <a:t>, </a:t>
-            </a:r>
-            <a:r>
-              <a:rPr lang="fr-FR" sz="1400" dirty="0" err="1"/>
+              <a:rPr lang="fr-FR" sz="1400" noProof="0" dirty="0"/>
+            </a:br>
+            <a:br>
+              <a:rPr lang="fr-FR" sz="1400" noProof="0" dirty="0"/>
+            </a:br>
+            <a:r>
+              <a:rPr lang="fr-FR" sz="1400" noProof="0" dirty="0"/>
+              <a:t>Architecture: Couche d’entrée </a:t>
+            </a:r>
+            <a:r>
+              <a:rPr lang="fr-FR" sz="1400" b="1" noProof="0" dirty="0"/>
+              <a:t>(392 variables</a:t>
+            </a:r>
+            <a:r>
+              <a:rPr lang="fr-FR" sz="1400" noProof="0" dirty="0"/>
+              <a:t>) → Couche cachée (</a:t>
+            </a:r>
+            <a:r>
+              <a:rPr lang="fr-FR" sz="1400" b="1" noProof="0" dirty="0"/>
+              <a:t>128 neurones</a:t>
+            </a:r>
+            <a:r>
+              <a:rPr lang="fr-FR" sz="1400" noProof="0" dirty="0"/>
+              <a:t>, activation </a:t>
+            </a:r>
+            <a:r>
+              <a:rPr lang="fr-FR" sz="1400" noProof="0" dirty="0" err="1"/>
               <a:t>ReLU</a:t>
             </a:r>
             <a:r>
-              <a:rPr lang="fr-FR" sz="1400" dirty="0"/>
-              <a:t> activation, Dropout) → Output Layer (1 </a:t>
-            </a:r>
-            <a:r>
-              <a:rPr lang="fr-FR" sz="1400" dirty="0" err="1"/>
-              <a:t>neuron</a:t>
-            </a:r>
-            <a:r>
-              <a:rPr lang="fr-FR" sz="1400" dirty="0"/>
-              <a:t>, </a:t>
-            </a:r>
-            <a:r>
-              <a:rPr lang="fr-FR" sz="1400" dirty="0" err="1"/>
+              <a:rPr lang="fr-FR" sz="1400" noProof="0" dirty="0"/>
+              <a:t>, Dropout) → Couche de sortie (</a:t>
+            </a:r>
+            <a:r>
+              <a:rPr lang="fr-FR" sz="1400" b="1" noProof="0" dirty="0"/>
+              <a:t>1 neurone</a:t>
+            </a:r>
+            <a:r>
+              <a:rPr lang="fr-FR" sz="1400" noProof="0" dirty="0"/>
+              <a:t>, activation </a:t>
+            </a:r>
+            <a:r>
+              <a:rPr lang="fr-FR" sz="1400" noProof="0" dirty="0" err="1"/>
               <a:t>Sigmoid</a:t>
             </a:r>
             <a:r>
-              <a:rPr lang="fr-FR" sz="1400" dirty="0"/>
-              <a:t> activation for </a:t>
-            </a:r>
-            <a:r>
-              <a:rPr lang="fr-FR" sz="1400" dirty="0" err="1"/>
-              <a:t>probability</a:t>
-            </a:r>
-            <a:r>
-              <a:rPr lang="fr-FR" sz="1400" dirty="0"/>
-              <a:t>).</a:t>
-            </a:r>
-            <a:br>
-              <a:rPr lang="fr-FR" sz="1400" dirty="0"/>
-            </a:br>
-            <a:r>
-              <a:rPr lang="fr-FR" sz="1400" dirty="0" err="1"/>
-              <a:t>Parameters</a:t>
-            </a:r>
-            <a:r>
-              <a:rPr lang="fr-FR" sz="1400" dirty="0"/>
-              <a:t>: </a:t>
-            </a:r>
-            <a:r>
-              <a:rPr lang="fr-FR" sz="1400" dirty="0" err="1"/>
-              <a:t>Approximately</a:t>
-            </a:r>
-            <a:r>
-              <a:rPr lang="fr-FR" sz="1400" dirty="0"/>
-              <a:t> 50,433.</a:t>
-            </a:r>
-            <a:br>
-              <a:rPr lang="fr-FR" sz="1400" dirty="0"/>
-            </a:br>
-            <a:r>
-              <a:rPr lang="fr-FR" sz="1400" dirty="0" err="1"/>
-              <a:t>Purpose</a:t>
-            </a:r>
-            <a:r>
-              <a:rPr lang="fr-FR" sz="1400" dirty="0"/>
-              <a:t>: A </a:t>
-            </a:r>
-            <a:r>
-              <a:rPr lang="fr-FR" sz="1400" dirty="0" err="1"/>
-              <a:t>foundational</a:t>
-            </a:r>
-            <a:r>
-              <a:rPr lang="fr-FR" sz="1400" dirty="0"/>
-              <a:t> model to </a:t>
-            </a:r>
-            <a:r>
-              <a:rPr lang="fr-FR" sz="1400" dirty="0" err="1"/>
-              <a:t>leverage</a:t>
-            </a:r>
-            <a:r>
-              <a:rPr lang="fr-FR" sz="1400" dirty="0"/>
-              <a:t> the </a:t>
-            </a:r>
-            <a:r>
-              <a:rPr lang="fr-FR" sz="1400" dirty="0" err="1"/>
-              <a:t>combined</a:t>
-            </a:r>
-            <a:r>
-              <a:rPr lang="fr-FR" sz="1400" dirty="0"/>
-              <a:t> </a:t>
-            </a:r>
-            <a:r>
-              <a:rPr lang="fr-FR" sz="1400" dirty="0" err="1"/>
-              <a:t>semantic</a:t>
-            </a:r>
-            <a:r>
-              <a:rPr lang="fr-FR" sz="1400" dirty="0"/>
-              <a:t> </a:t>
-            </a:r>
-            <a:r>
-              <a:rPr lang="fr-FR" sz="1400" dirty="0" err="1"/>
-              <a:t>embeddings</a:t>
-            </a:r>
-            <a:r>
-              <a:rPr lang="fr-FR" sz="1400" dirty="0"/>
-              <a:t> and </a:t>
-            </a:r>
-            <a:r>
-              <a:rPr lang="fr-FR" sz="1400" dirty="0" err="1"/>
-              <a:t>engineered</a:t>
-            </a:r>
-            <a:r>
-              <a:rPr lang="fr-FR" sz="1400" dirty="0"/>
-              <a:t> </a:t>
-            </a:r>
-            <a:r>
-              <a:rPr lang="fr-FR" sz="1400" dirty="0" err="1"/>
-              <a:t>features</a:t>
-            </a:r>
-            <a:r>
-              <a:rPr lang="fr-FR" sz="1400" dirty="0"/>
-              <a:t>.</a:t>
-            </a:r>
-            <a:br>
-              <a:rPr lang="fr-FR" sz="1400" dirty="0"/>
-            </a:br>
-            <a:br>
-              <a:rPr lang="fr-FR" sz="1400" dirty="0"/>
-            </a:br>
-            <a:r>
-              <a:rPr lang="fr-FR" sz="1400" b="1" dirty="0" err="1"/>
+              <a:rPr lang="fr-FR" sz="1400" noProof="0" dirty="0"/>
+              <a:t> pour la probabilité).</a:t>
+            </a:r>
+            <a:br>
+              <a:rPr lang="fr-FR" sz="1400" noProof="0" dirty="0"/>
+            </a:br>
+            <a:br>
+              <a:rPr lang="fr-FR" sz="1400" noProof="0" dirty="0"/>
+            </a:br>
+            <a:r>
+              <a:rPr lang="fr-FR" sz="1400" b="1" noProof="0" dirty="0"/>
+              <a:t>Paramètres: environ 50,433.</a:t>
+            </a:r>
+            <a:br>
+              <a:rPr lang="fr-FR" sz="1400" noProof="0" dirty="0"/>
+            </a:br>
+            <a:br>
+              <a:rPr lang="fr-FR" sz="1400" noProof="0" dirty="0"/>
+            </a:br>
+            <a:br>
+              <a:rPr lang="fr-FR" sz="1400" noProof="0" dirty="0"/>
+            </a:br>
+            <a:r>
+              <a:rPr lang="fr-FR" sz="1400" b="1" noProof="0" dirty="0" err="1"/>
               <a:t>UltraSimpleSpamDetector</a:t>
             </a:r>
             <a:r>
-              <a:rPr lang="fr-FR" sz="1400" b="1" dirty="0"/>
+              <a:rPr lang="fr-FR" sz="1400" b="1" noProof="0" dirty="0"/>
               <a:t>:</a:t>
             </a:r>
             <a:br>
-              <a:rPr lang="fr-FR" sz="1400" dirty="0"/>
-            </a:br>
-            <a:br>
-              <a:rPr lang="fr-FR" sz="1400" dirty="0"/>
-            </a:br>
-            <a:r>
-              <a:rPr lang="fr-FR" sz="1400" dirty="0"/>
-              <a:t>Architecture: Input Layer (392 </a:t>
-            </a:r>
-            <a:r>
-              <a:rPr lang="fr-FR" sz="1400" dirty="0" err="1"/>
-              <a:t>features</a:t>
-            </a:r>
-            <a:r>
-              <a:rPr lang="fr-FR" sz="1400" dirty="0"/>
-              <a:t>) → </a:t>
-            </a:r>
-            <a:r>
-              <a:rPr lang="fr-FR" sz="1400" dirty="0" err="1"/>
-              <a:t>Hidden</a:t>
-            </a:r>
-            <a:r>
-              <a:rPr lang="fr-FR" sz="1400" dirty="0"/>
-              <a:t> Layer (64 </a:t>
-            </a:r>
-            <a:r>
-              <a:rPr lang="fr-FR" sz="1400" dirty="0" err="1"/>
-              <a:t>neurons</a:t>
-            </a:r>
-            <a:r>
-              <a:rPr lang="fr-FR" sz="1400" dirty="0"/>
-              <a:t>, </a:t>
-            </a:r>
-            <a:r>
-              <a:rPr lang="fr-FR" sz="1400" dirty="0" err="1"/>
+              <a:rPr lang="fr-FR" sz="1400" noProof="0" dirty="0"/>
+            </a:br>
+            <a:br>
+              <a:rPr lang="fr-FR" sz="1400" noProof="0" dirty="0"/>
+            </a:br>
+            <a:r>
+              <a:rPr lang="fr-FR" sz="1400" noProof="0" dirty="0"/>
+              <a:t>Architecture: Couche d’entrée (</a:t>
+            </a:r>
+            <a:r>
+              <a:rPr lang="fr-FR" sz="1400" b="1" noProof="0" dirty="0"/>
+              <a:t>392 variables</a:t>
+            </a:r>
+            <a:r>
+              <a:rPr lang="fr-FR" sz="1400" noProof="0" dirty="0"/>
+              <a:t>) → Couche cachée (</a:t>
+            </a:r>
+            <a:r>
+              <a:rPr lang="fr-FR" sz="1400" b="1" noProof="0" dirty="0"/>
+              <a:t>64 neurones</a:t>
+            </a:r>
+            <a:r>
+              <a:rPr lang="fr-FR" sz="1400" noProof="0" dirty="0"/>
+              <a:t>, activation </a:t>
+            </a:r>
+            <a:r>
+              <a:rPr lang="fr-FR" sz="1400" noProof="0" dirty="0" err="1"/>
               <a:t>ReLU</a:t>
             </a:r>
             <a:r>
-              <a:rPr lang="fr-FR" sz="1400" dirty="0"/>
-              <a:t> activation, Dropout) → Output Layer (1 </a:t>
-            </a:r>
-            <a:r>
-              <a:rPr lang="fr-FR" sz="1400" dirty="0" err="1"/>
-              <a:t>neuron</a:t>
-            </a:r>
-            <a:r>
-              <a:rPr lang="fr-FR" sz="1400" dirty="0"/>
-              <a:t>, </a:t>
-            </a:r>
-            <a:r>
-              <a:rPr lang="fr-FR" sz="1400" dirty="0" err="1"/>
+              <a:rPr lang="fr-FR" sz="1400" noProof="0" dirty="0"/>
+              <a:t>, Dropout) → Couche de sortie (</a:t>
+            </a:r>
+            <a:r>
+              <a:rPr lang="fr-FR" sz="1400" b="1" noProof="0" dirty="0"/>
+              <a:t>1 neurone</a:t>
+            </a:r>
+            <a:r>
+              <a:rPr lang="fr-FR" sz="1400" noProof="0" dirty="0"/>
+              <a:t>, activation </a:t>
+            </a:r>
+            <a:r>
+              <a:rPr lang="fr-FR" sz="1400" noProof="0" dirty="0" err="1"/>
               <a:t>Sigmoid</a:t>
             </a:r>
             <a:r>
-              <a:rPr lang="fr-FR" sz="1400" dirty="0"/>
-              <a:t> activation for </a:t>
-            </a:r>
-            <a:r>
-              <a:rPr lang="fr-FR" sz="1400" dirty="0" err="1"/>
-              <a:t>probability</a:t>
-            </a:r>
-            <a:r>
-              <a:rPr lang="fr-FR" sz="1400" dirty="0"/>
-              <a:t>).</a:t>
-            </a:r>
-            <a:br>
-              <a:rPr lang="fr-FR" sz="1400" dirty="0"/>
-            </a:br>
-            <a:r>
-              <a:rPr lang="fr-FR" sz="1400" dirty="0" err="1"/>
-              <a:t>Parameters</a:t>
-            </a:r>
-            <a:r>
-              <a:rPr lang="fr-FR" sz="1400" dirty="0"/>
-              <a:t>: </a:t>
-            </a:r>
-            <a:r>
-              <a:rPr lang="fr-FR" sz="1400" dirty="0" err="1"/>
-              <a:t>Approximately</a:t>
-            </a:r>
-            <a:r>
-              <a:rPr lang="fr-FR" sz="1400" dirty="0"/>
-              <a:t> 25,217.</a:t>
-            </a:r>
-            <a:br>
-              <a:rPr lang="fr-FR" sz="1400" dirty="0"/>
-            </a:br>
-            <a:r>
-              <a:rPr lang="fr-FR" sz="1400" dirty="0" err="1"/>
-              <a:t>Purpose</a:t>
-            </a:r>
-            <a:r>
-              <a:rPr lang="fr-FR" sz="1400" dirty="0"/>
-              <a:t>: A </a:t>
-            </a:r>
-            <a:r>
-              <a:rPr lang="fr-FR" sz="1400" dirty="0" err="1"/>
-              <a:t>highly</a:t>
-            </a:r>
-            <a:r>
-              <a:rPr lang="fr-FR" sz="1400" dirty="0"/>
-              <a:t> efficient, minimal model </a:t>
-            </a:r>
-            <a:r>
-              <a:rPr lang="fr-FR" sz="1400" dirty="0" err="1"/>
-              <a:t>designed</a:t>
-            </a:r>
-            <a:r>
-              <a:rPr lang="fr-FR" sz="1400" dirty="0"/>
-              <a:t> for </a:t>
-            </a:r>
-            <a:r>
-              <a:rPr lang="fr-FR" sz="1400" dirty="0" err="1"/>
-              <a:t>faster</a:t>
-            </a:r>
-            <a:r>
-              <a:rPr lang="fr-FR" sz="1400" dirty="0"/>
-              <a:t> training and </a:t>
-            </a:r>
-            <a:r>
-              <a:rPr lang="fr-FR" sz="1400" dirty="0" err="1"/>
-              <a:t>deployment</a:t>
-            </a:r>
-            <a:r>
-              <a:rPr lang="fr-FR" sz="1400" dirty="0"/>
-              <a:t> </a:t>
-            </a:r>
-            <a:r>
-              <a:rPr lang="fr-FR" sz="1400" dirty="0" err="1"/>
-              <a:t>with</a:t>
-            </a:r>
-            <a:r>
-              <a:rPr lang="fr-FR" sz="1400" dirty="0"/>
-              <a:t> comparable performance.</a:t>
-            </a:r>
-            <a:br>
-              <a:rPr lang="fr-FR" dirty="0"/>
-            </a:br>
-            <a:br>
-              <a:rPr lang="en-US" dirty="0"/>
-            </a:br>
-            <a:br>
-              <a:rPr lang="en-US" sz="1600" dirty="0"/>
-            </a:br>
-            <a:br>
-              <a:rPr lang="en-US" dirty="0"/>
-            </a:br>
-            <a:br>
-              <a:rPr lang="fr-FR" sz="1600" dirty="0"/>
-            </a:br>
-            <a:br>
-              <a:rPr lang="fr-FR" dirty="0"/>
-            </a:br>
-            <a:endParaRPr lang="en-US" sz="1600" dirty="0"/>
+              <a:rPr lang="fr-FR" sz="1400" noProof="0" dirty="0"/>
+              <a:t> pour la probabilité).</a:t>
+            </a:r>
+            <a:br>
+              <a:rPr lang="fr-FR" sz="1400" noProof="0" dirty="0"/>
+            </a:br>
+            <a:br>
+              <a:rPr lang="fr-FR" sz="1400" noProof="0" dirty="0"/>
+            </a:br>
+            <a:r>
+              <a:rPr lang="fr-FR" sz="1400" b="1" noProof="0" dirty="0"/>
+              <a:t>Paramètres: environ 25,217.</a:t>
+            </a:r>
+            <a:br>
+              <a:rPr lang="fr-FR" sz="1400" noProof="0" dirty="0"/>
+            </a:br>
+            <a:br>
+              <a:rPr lang="fr-FR" sz="1400" noProof="0" dirty="0"/>
+            </a:br>
+            <a:br>
+              <a:rPr lang="fr-FR" noProof="0" dirty="0"/>
+            </a:br>
+            <a:br>
+              <a:rPr lang="fr-FR" sz="1600" noProof="0" dirty="0"/>
+            </a:br>
+            <a:br>
+              <a:rPr lang="fr-FR" noProof="0" dirty="0"/>
+            </a:br>
+            <a:br>
+              <a:rPr lang="fr-FR" sz="1600" noProof="0" dirty="0"/>
+            </a:br>
+            <a:br>
+              <a:rPr lang="fr-FR" noProof="0" dirty="0"/>
+            </a:br>
+            <a:endParaRPr lang="fr-FR" sz="1600" noProof="0" dirty="0"/>
           </a:p>
         </p:txBody>
       </p:sp>
@@ -9484,375 +8946,8 @@
 </p:sld>
 </file>
 
-<file path=ppt/slides/slide12.xml><?xml version="1.0" encoding="utf-8"?>
-<p:sld xmlns:a="http://schemas.openxmlformats.org/drawingml/2006/main" xmlns:r="http://schemas.openxmlformats.org/officeDocument/2006/relationships" xmlns:p="http://schemas.openxmlformats.org/presentationml/2006/main">
-  <p:cSld>
-    <p:spTree>
-      <p:nvGrpSpPr>
-        <p:cNvPr id="1" name="Shape 80">
-          <a:extLst>
-            <a:ext uri="{FF2B5EF4-FFF2-40B4-BE49-F238E27FC236}">
-              <a16:creationId xmlns:a16="http://schemas.microsoft.com/office/drawing/2014/main" id="{8F107260-E9E3-F2FF-2773-9B1ED7275C4E}"/>
-            </a:ext>
-          </a:extLst>
-        </p:cNvPr>
-        <p:cNvGrpSpPr/>
-        <p:nvPr/>
-      </p:nvGrpSpPr>
-      <p:grpSpPr>
-        <a:xfrm>
-          <a:off x="0" y="0"/>
-          <a:ext cx="0" cy="0"/>
-          <a:chOff x="0" y="0"/>
-          <a:chExt cx="0" cy="0"/>
-        </a:xfrm>
-      </p:grpSpPr>
-      <p:sp>
-        <p:nvSpPr>
-          <p:cNvPr id="81" name="Google Shape;81;p16">
-            <a:extLst>
-              <a:ext uri="{FF2B5EF4-FFF2-40B4-BE49-F238E27FC236}">
-                <a16:creationId xmlns:a16="http://schemas.microsoft.com/office/drawing/2014/main" id="{04979A22-C8E0-FFFA-9852-DCCD10627B77}"/>
-              </a:ext>
-            </a:extLst>
-          </p:cNvPr>
-          <p:cNvSpPr/>
-          <p:nvPr/>
-        </p:nvSpPr>
-        <p:spPr>
-          <a:xfrm>
-            <a:off x="5499" y="-17775"/>
-            <a:ext cx="3520625" cy="5161200"/>
-          </a:xfrm>
-          <a:prstGeom prst="rect">
-            <a:avLst/>
-          </a:prstGeom>
-          <a:solidFill>
-            <a:srgbClr val="C3FFFC"/>
-          </a:solidFill>
-          <a:ln>
-            <a:noFill/>
-          </a:ln>
-        </p:spPr>
-        <p:txBody>
-          <a:bodyPr spcFirstLastPara="1" wrap="square" lIns="91425" tIns="91425" rIns="91425" bIns="91425" anchor="ctr" anchorCtr="0">
-            <a:noAutofit/>
-          </a:bodyPr>
-          <a:lstStyle/>
-          <a:p>
-            <a:pPr marL="0" marR="0" lvl="0" indent="0" algn="l" rtl="0">
-              <a:lnSpc>
-                <a:spcPct val="100000"/>
-              </a:lnSpc>
-              <a:spcBef>
-                <a:spcPts val="0"/>
-              </a:spcBef>
-              <a:spcAft>
-                <a:spcPts val="0"/>
-              </a:spcAft>
-              <a:buClr>
-                <a:srgbClr val="000000"/>
-              </a:buClr>
-              <a:buSzPts val="1400"/>
-              <a:buFont typeface="Arial"/>
-              <a:buNone/>
-            </a:pPr>
-            <a:endParaRPr sz="1400" b="0" i="0" u="none" strike="noStrike" cap="none">
-              <a:solidFill>
-                <a:srgbClr val="000000"/>
-              </a:solidFill>
-              <a:latin typeface="Arial"/>
-              <a:ea typeface="Arial"/>
-              <a:cs typeface="Arial"/>
-              <a:sym typeface="Arial"/>
-            </a:endParaRPr>
-          </a:p>
-        </p:txBody>
-      </p:sp>
-      <p:sp>
-        <p:nvSpPr>
-          <p:cNvPr id="82" name="Google Shape;82;p16">
-            <a:extLst>
-              <a:ext uri="{FF2B5EF4-FFF2-40B4-BE49-F238E27FC236}">
-                <a16:creationId xmlns:a16="http://schemas.microsoft.com/office/drawing/2014/main" id="{2AECFF55-D3E0-E752-1051-22457DE80FFD}"/>
-              </a:ext>
-            </a:extLst>
-          </p:cNvPr>
-          <p:cNvSpPr txBox="1">
-            <a:spLocks noGrp="1"/>
-          </p:cNvSpPr>
-          <p:nvPr>
-            <p:ph type="title"/>
-          </p:nvPr>
-        </p:nvSpPr>
-        <p:spPr>
-          <a:xfrm>
-            <a:off x="438808" y="967077"/>
-            <a:ext cx="2988031" cy="3774288"/>
-          </a:xfrm>
-          <a:prstGeom prst="rect">
-            <a:avLst/>
-          </a:prstGeom>
-          <a:noFill/>
-          <a:ln>
-            <a:noFill/>
-          </a:ln>
-        </p:spPr>
-        <p:txBody>
-          <a:bodyPr spcFirstLastPara="1" wrap="square" lIns="91425" tIns="91425" rIns="91425" bIns="91425" anchor="t" anchorCtr="0">
-            <a:noAutofit/>
-          </a:bodyPr>
-          <a:lstStyle/>
-          <a:p>
-            <a:r>
-              <a:rPr lang="fr-FR" b="1" dirty="0"/>
-              <a:t>Neural Network </a:t>
-            </a:r>
-            <a:r>
-              <a:rPr lang="fr-FR" b="1" dirty="0" err="1"/>
-              <a:t>Models</a:t>
-            </a:r>
-            <a:r>
-              <a:rPr lang="fr-FR" b="1" dirty="0"/>
-              <a:t> Architecture</a:t>
-            </a:r>
-            <a:br>
-              <a:rPr lang="fr-FR" dirty="0"/>
-            </a:br>
-            <a:br>
-              <a:rPr lang="en-US" dirty="0"/>
-            </a:br>
-            <a:r>
-              <a:rPr lang="en-US" sz="2000" dirty="0"/>
-              <a:t>- 2 lean feed-forward neural networks for efficient binary classification</a:t>
-            </a:r>
-            <a:br>
-              <a:rPr lang="fr-FR" b="1" dirty="0"/>
-            </a:br>
-            <a:br>
-              <a:rPr lang="fr" sz="2400" dirty="0">
-                <a:solidFill>
-                  <a:srgbClr val="015955"/>
-                </a:solidFill>
-                <a:latin typeface="Inter"/>
-                <a:ea typeface="Inter"/>
-                <a:cs typeface="Inter"/>
-                <a:sym typeface="Inter"/>
-              </a:rPr>
-            </a:br>
-            <a:br>
-              <a:rPr lang="fr" sz="2400" dirty="0">
-                <a:solidFill>
-                  <a:srgbClr val="015955"/>
-                </a:solidFill>
-                <a:latin typeface="Inter"/>
-                <a:ea typeface="Inter"/>
-                <a:cs typeface="Inter"/>
-                <a:sym typeface="Inter"/>
-              </a:rPr>
-            </a:br>
-            <a:endParaRPr sz="2400" dirty="0">
-              <a:solidFill>
-                <a:srgbClr val="015955"/>
-              </a:solidFill>
-              <a:latin typeface="Inter"/>
-              <a:ea typeface="Inter"/>
-              <a:cs typeface="Inter"/>
-              <a:sym typeface="Inter"/>
-            </a:endParaRPr>
-          </a:p>
-        </p:txBody>
-      </p:sp>
-      <p:pic>
-        <p:nvPicPr>
-          <p:cNvPr id="83" name="Google Shape;83;p16">
-            <a:extLst>
-              <a:ext uri="{FF2B5EF4-FFF2-40B4-BE49-F238E27FC236}">
-                <a16:creationId xmlns:a16="http://schemas.microsoft.com/office/drawing/2014/main" id="{8C51FDFF-64D4-7826-EACF-38E4037EB7A9}"/>
-              </a:ext>
-            </a:extLst>
-          </p:cNvPr>
-          <p:cNvPicPr preferRelativeResize="0"/>
-          <p:nvPr/>
-        </p:nvPicPr>
-        <p:blipFill rotWithShape="1">
-          <a:blip r:embed="rId3">
-            <a:alphaModFix/>
-          </a:blip>
-          <a:srcRect/>
-          <a:stretch/>
-        </p:blipFill>
-        <p:spPr>
-          <a:xfrm>
-            <a:off x="463375" y="482852"/>
-            <a:ext cx="576900" cy="385904"/>
-          </a:xfrm>
-          <a:prstGeom prst="rect">
-            <a:avLst/>
-          </a:prstGeom>
-          <a:noFill/>
-          <a:ln>
-            <a:noFill/>
-          </a:ln>
-        </p:spPr>
-      </p:pic>
-      <p:sp>
-        <p:nvSpPr>
-          <p:cNvPr id="84" name="Google Shape;84;p16">
-            <a:extLst>
-              <a:ext uri="{FF2B5EF4-FFF2-40B4-BE49-F238E27FC236}">
-                <a16:creationId xmlns:a16="http://schemas.microsoft.com/office/drawing/2014/main" id="{F5F910D5-3B49-70D5-2E53-E96797673320}"/>
-              </a:ext>
-            </a:extLst>
-          </p:cNvPr>
-          <p:cNvSpPr txBox="1">
-            <a:spLocks noGrp="1"/>
-          </p:cNvSpPr>
-          <p:nvPr>
-            <p:ph type="ctrTitle" idx="4294967295"/>
-          </p:nvPr>
-        </p:nvSpPr>
-        <p:spPr>
-          <a:xfrm>
-            <a:off x="3588119" y="579248"/>
-            <a:ext cx="5455142" cy="4062493"/>
-          </a:xfrm>
-          <a:prstGeom prst="rect">
-            <a:avLst/>
-          </a:prstGeom>
-          <a:noFill/>
-          <a:ln>
-            <a:noFill/>
-          </a:ln>
-        </p:spPr>
-        <p:txBody>
-          <a:bodyPr spcFirstLastPara="1" wrap="square" lIns="91425" tIns="91425" rIns="91425" bIns="91425" anchor="t" anchorCtr="0">
-            <a:noAutofit/>
-          </a:bodyPr>
-          <a:lstStyle/>
-          <a:p>
-            <a:r>
-              <a:rPr lang="en-US" sz="1600" b="1" dirty="0"/>
-              <a:t>Key Design Choices:</a:t>
-            </a:r>
-            <a:br>
-              <a:rPr lang="en-US" sz="1600" dirty="0"/>
-            </a:br>
-            <a:br>
-              <a:rPr lang="en-US" sz="1600" dirty="0"/>
-            </a:br>
-            <a:r>
-              <a:rPr lang="en-US" sz="1600" b="1" dirty="0"/>
-              <a:t>Input Layer</a:t>
-            </a:r>
-            <a:r>
-              <a:rPr lang="en-US" sz="1600" dirty="0"/>
-              <a:t>: 392 features (384 from Sentence Transformers + 8 engineered features).</a:t>
-            </a:r>
-            <a:br>
-              <a:rPr lang="en-US" sz="1600" dirty="0"/>
-            </a:br>
-            <a:br>
-              <a:rPr lang="en-US" sz="1600" dirty="0"/>
-            </a:br>
-            <a:r>
-              <a:rPr lang="en-US" sz="1600" b="1" dirty="0"/>
-              <a:t>Output Layer</a:t>
-            </a:r>
-            <a:r>
-              <a:rPr lang="en-US" sz="1600" dirty="0"/>
-              <a:t>: Single neuron with sigmoid activation for binary classification (spam/ham).</a:t>
-            </a:r>
-            <a:br>
-              <a:rPr lang="en-US" sz="1600" dirty="0"/>
-            </a:br>
-            <a:br>
-              <a:rPr lang="en-US" sz="1600" dirty="0"/>
-            </a:br>
-            <a:r>
-              <a:rPr lang="en-US" sz="1600" b="1" dirty="0"/>
-              <a:t>Activation</a:t>
-            </a:r>
-            <a:r>
-              <a:rPr lang="en-US" sz="1600" dirty="0"/>
-              <a:t>: </a:t>
-            </a:r>
-            <a:r>
-              <a:rPr lang="en-US" sz="1600" dirty="0" err="1"/>
-              <a:t>ReLU</a:t>
-            </a:r>
-            <a:r>
-              <a:rPr lang="en-US" sz="1600" dirty="0"/>
-              <a:t> for non-linearity in hidden layers.</a:t>
-            </a:r>
-            <a:br>
-              <a:rPr lang="en-US" sz="1600" dirty="0"/>
-            </a:br>
-            <a:br>
-              <a:rPr lang="en-US" sz="1600" dirty="0"/>
-            </a:br>
-            <a:r>
-              <a:rPr lang="en-US" sz="1600" b="1" dirty="0"/>
-              <a:t>Dropout</a:t>
-            </a:r>
-            <a:r>
-              <a:rPr lang="en-US" sz="1600" dirty="0"/>
-              <a:t>: Included to prevent overfitting, especially with a relatively small dataset.</a:t>
-            </a:r>
-            <a:br>
-              <a:rPr lang="en-US" sz="1600" dirty="0"/>
-            </a:br>
-            <a:br>
-              <a:rPr lang="en-US" sz="1600" dirty="0"/>
-            </a:br>
-            <a:r>
-              <a:rPr lang="en-US" sz="1600" b="1" dirty="0"/>
-              <a:t>Efficiency</a:t>
-            </a:r>
-            <a:r>
-              <a:rPr lang="en-US" sz="1600" dirty="0"/>
-              <a:t>: Both models prioritize lean architectures to balance performance with computational resources, making them suitable for rapid deployment.</a:t>
-            </a:r>
-            <a:br>
-              <a:rPr lang="en-US" dirty="0"/>
-            </a:br>
-            <a:br>
-              <a:rPr lang="fr-FR" dirty="0"/>
-            </a:br>
-            <a:br>
-              <a:rPr lang="en-US" dirty="0"/>
-            </a:br>
-            <a:br>
-              <a:rPr lang="en-US" sz="1600" dirty="0"/>
-            </a:br>
-            <a:br>
-              <a:rPr lang="en-US" dirty="0"/>
-            </a:br>
-            <a:br>
-              <a:rPr lang="fr-FR" sz="1600" dirty="0"/>
-            </a:br>
-            <a:br>
-              <a:rPr lang="fr-FR" dirty="0"/>
-            </a:br>
-            <a:endParaRPr lang="en-US" sz="1600" dirty="0"/>
-          </a:p>
-        </p:txBody>
-      </p:sp>
-    </p:spTree>
-    <p:extLst>
-      <p:ext uri="{BB962C8B-B14F-4D97-AF65-F5344CB8AC3E}">
-        <p14:creationId xmlns:p14="http://schemas.microsoft.com/office/powerpoint/2010/main" val="2564139638"/>
-      </p:ext>
-    </p:extLst>
-  </p:cSld>
-  <p:clrMapOvr>
-    <a:masterClrMapping/>
-  </p:clrMapOvr>
-</p:sld>
-</file>
-
-<file path=ppt/slides/slide13.xml><?xml version="1.0" encoding="utf-8"?>
-<p:sld xmlns:a="http://schemas.openxmlformats.org/drawingml/2006/main" xmlns:r="http://schemas.openxmlformats.org/officeDocument/2006/relationships" xmlns:p="http://schemas.openxmlformats.org/presentationml/2006/main">
+<file path=ppt/slides/slide11.xml><?xml version="1.0" encoding="utf-8"?>
+<p:sld xmlns:a="http://schemas.openxmlformats.org/drawingml/2006/main" xmlns:r="http://schemas.openxmlformats.org/officeDocument/2006/relationships" xmlns:p="http://schemas.openxmlformats.org/presentationml/2006/main" show="0">
   <p:cSld>
     <p:spTree>
       <p:nvGrpSpPr>
@@ -9973,7 +9068,15 @@
           <a:p>
             <a:r>
               <a:rPr lang="en-US" b="1" dirty="0"/>
-              <a:t>Training Process and Class Weighting</a:t>
+              <a:t>Processus </a:t>
+            </a:r>
+            <a:r>
+              <a:rPr lang="en-US" b="1" dirty="0" err="1"/>
+              <a:t>d’entraînement</a:t>
+            </a:r>
+            <a:r>
+              <a:rPr lang="en-US" b="1" dirty="0"/>
+              <a:t> et ponderation des classes</a:t>
             </a:r>
             <a:br>
               <a:rPr lang="en-US" dirty="0"/>
@@ -9990,7 +9093,7 @@
             </a:r>
             <a:r>
               <a:rPr lang="fr-FR" dirty="0"/>
-              <a:t>Key Aspects of Training</a:t>
+              <a:t>Aspects clés de l’entraînement</a:t>
             </a:r>
             <a:br>
               <a:rPr lang="fr-FR" dirty="0"/>
@@ -10244,7 +9347,7 @@
 </p:sld>
 </file>
 
-<file path=ppt/slides/slide14.xml><?xml version="1.0" encoding="utf-8"?>
+<file path=ppt/slides/slide12.xml><?xml version="1.0" encoding="utf-8"?>
 <p:sld xmlns:a="http://schemas.openxmlformats.org/drawingml/2006/main" xmlns:r="http://schemas.openxmlformats.org/officeDocument/2006/relationships" xmlns:p="http://schemas.openxmlformats.org/presentationml/2006/main">
   <p:cSld>
     <p:spTree>
@@ -10347,8 +9450,8 @@
         </p:nvSpPr>
         <p:spPr>
           <a:xfrm>
-            <a:off x="438808" y="967077"/>
-            <a:ext cx="2988031" cy="3774288"/>
+            <a:off x="365330" y="1369383"/>
+            <a:ext cx="2988031" cy="1857766"/>
           </a:xfrm>
           <a:prstGeom prst="rect">
             <a:avLst/>
@@ -10366,11 +9469,7 @@
           <a:p>
             <a:r>
               <a:rPr lang="fr-FR" b="1" dirty="0"/>
-              <a:t>Model Evaluation and </a:t>
-            </a:r>
-            <a:r>
-              <a:rPr lang="fr-FR" b="1" dirty="0" err="1"/>
-              <a:t>Comparison</a:t>
+              <a:t>Evaluation et comparaison des modèles</a:t>
             </a:r>
             <a:br>
               <a:rPr lang="fr-FR" dirty="0"/>
@@ -10384,18 +9483,6 @@
             <a:br>
               <a:rPr lang="en-US" dirty="0"/>
             </a:br>
-            <a:r>
-              <a:rPr lang="en-US" sz="2000" dirty="0"/>
-              <a:t>- </a:t>
-            </a:r>
-            <a:r>
-              <a:rPr lang="fr-FR" dirty="0"/>
-              <a:t>Model </a:t>
-            </a:r>
-            <a:r>
-              <a:rPr lang="fr-FR" dirty="0" err="1"/>
-              <a:t>Selection</a:t>
-            </a:r>
             <a:br>
               <a:rPr lang="fr-FR" dirty="0"/>
             </a:br>
@@ -10505,86 +9592,112 @@
           <a:lstStyle/>
           <a:p>
             <a:r>
-              <a:rPr lang="en-US" sz="1400" b="1" dirty="0"/>
-              <a:t>The Ultra-Simple NN</a:t>
-            </a:r>
-            <a:br>
-              <a:rPr lang="en-US" sz="1400" b="1" dirty="0"/>
-            </a:br>
-            <a:br>
-              <a:rPr lang="en-US" sz="1400" b="1" dirty="0"/>
-            </a:br>
-            <a:r>
-              <a:rPr lang="en-US" sz="1400" dirty="0"/>
-              <a:t>Given the comparable and highly effective performance of both models, the Ultra-Simple Neural Network was selected as the preferred model for deployment due to its significantly lower parameter count (approximately half of the Simple NN)</a:t>
-            </a:r>
-            <a:br>
-              <a:rPr lang="en-US" sz="1400" dirty="0"/>
-            </a:br>
-            <a:br>
-              <a:rPr lang="en-US" sz="1400" dirty="0"/>
-            </a:br>
-            <a:br>
-              <a:rPr lang="en-US" sz="1600" dirty="0"/>
-            </a:br>
-            <a:br>
-              <a:rPr lang="en-US" dirty="0"/>
-            </a:br>
-            <a:br>
-              <a:rPr lang="fr-FR" sz="1600" dirty="0"/>
-            </a:br>
-            <a:br>
-              <a:rPr lang="fr-FR" dirty="0"/>
-            </a:br>
-            <a:endParaRPr lang="en-US" sz="1600" dirty="0"/>
+              <a:rPr lang="fr-FR" sz="1400" b="1" noProof="0" dirty="0" err="1"/>
+              <a:t>Ultra-Simple</a:t>
+            </a:r>
+            <a:r>
+              <a:rPr lang="fr-FR" sz="1400" b="1" noProof="0" dirty="0"/>
+              <a:t> NN</a:t>
+            </a:r>
+            <a:br>
+              <a:rPr lang="fr-FR" sz="1400" b="1" noProof="0" dirty="0"/>
+            </a:br>
+            <a:br>
+              <a:rPr lang="fr-FR" sz="1400" b="1" noProof="0" dirty="0"/>
+            </a:br>
+            <a:r>
+              <a:rPr lang="fr-FR" sz="1400" noProof="0" dirty="0"/>
+              <a:t>Sachant que les deux modèles sont efficaces, il vaut mieux choisir le modèle plus simple: </a:t>
+            </a:r>
+            <a:r>
+              <a:rPr lang="fr-FR" sz="1400" b="1" noProof="0" dirty="0" err="1"/>
+              <a:t>Ultra-Simple</a:t>
+            </a:r>
+            <a:r>
+              <a:rPr lang="fr-FR" sz="1400" b="1" noProof="0" dirty="0"/>
+              <a:t> Neural Network </a:t>
+            </a:r>
+            <a:r>
+              <a:rPr lang="fr-FR" sz="1400" noProof="0" dirty="0"/>
+              <a:t>car il compte deux fois moins de paramètres tout en obtenant les résultats comparables ce qui allège les ressources de calcul pour la détection des spams.</a:t>
+            </a:r>
+            <a:br>
+              <a:rPr lang="fr-FR" sz="1400" noProof="0" dirty="0"/>
+            </a:br>
+            <a:br>
+              <a:rPr lang="fr-FR" sz="1600" noProof="0" dirty="0"/>
+            </a:br>
+            <a:br>
+              <a:rPr lang="fr-FR" noProof="0" dirty="0"/>
+            </a:br>
+            <a:br>
+              <a:rPr lang="fr-FR" sz="1600" noProof="0" dirty="0"/>
+            </a:br>
+            <a:br>
+              <a:rPr lang="fr-FR" noProof="0" dirty="0"/>
+            </a:br>
+            <a:endParaRPr lang="fr-FR" sz="1600" noProof="0" dirty="0"/>
           </a:p>
         </p:txBody>
       </p:sp>
       <p:pic>
         <p:nvPicPr>
-          <p:cNvPr id="8194" name="Picture 2">
+          <p:cNvPr id="3" name="Image 2" descr="Une image contenant texte, capture d’écran, diagramme, Rectangle&#10;&#10;Le contenu généré par l’IA peut être incorrect.">
             <a:extLst>
               <a:ext uri="{FF2B5EF4-FFF2-40B4-BE49-F238E27FC236}">
-                <a16:creationId xmlns:a16="http://schemas.microsoft.com/office/drawing/2014/main" id="{57C33E33-85E2-39F6-5A65-B1BB84DD02E4}"/>
+                <a16:creationId xmlns:a16="http://schemas.microsoft.com/office/drawing/2014/main" id="{C702E82C-DF40-71D0-AE1B-AB16CE574622}"/>
               </a:ext>
             </a:extLst>
           </p:cNvPr>
           <p:cNvPicPr>
-            <a:picLocks noChangeAspect="1" noChangeArrowheads="1"/>
+            <a:picLocks noChangeAspect="1"/>
           </p:cNvPicPr>
           <p:nvPr/>
         </p:nvPicPr>
         <p:blipFill>
-          <a:blip r:embed="rId4">
-            <a:extLst>
-              <a:ext uri="{28A0092B-C50C-407E-A947-70E740481C1C}">
-                <a14:useLocalDpi xmlns:a14="http://schemas.microsoft.com/office/drawing/2010/main" val="0"/>
-              </a:ext>
-            </a:extLst>
-          </a:blip>
-          <a:srcRect/>
+          <a:blip r:embed="rId4"/>
           <a:stretch>
             <a:fillRect/>
           </a:stretch>
         </p:blipFill>
-        <p:spPr bwMode="auto">
+        <p:spPr>
           <a:xfrm>
-            <a:off x="4285282" y="2221038"/>
-            <a:ext cx="3628924" cy="2411839"/>
+            <a:off x="3798512" y="2298266"/>
+            <a:ext cx="2049308" cy="1942716"/>
           </a:xfrm>
           <a:prstGeom prst="rect">
             <a:avLst/>
           </a:prstGeom>
-          <a:noFill/>
-          <a:extLst>
-            <a:ext uri="{909E8E84-426E-40DD-AFC4-6F175D3DCCD1}">
-              <a14:hiddenFill xmlns:a14="http://schemas.microsoft.com/office/drawing/2010/main">
-                <a:solidFill>
-                  <a:srgbClr val="FFFFFF"/>
-                </a:solidFill>
-              </a14:hiddenFill>
-            </a:ext>
-          </a:extLst>
+        </p:spPr>
+      </p:pic>
+      <p:pic>
+        <p:nvPicPr>
+          <p:cNvPr id="5" name="Image 4" descr="Une image contenant texte, capture d’écran, diagramme, Rectangle&#10;&#10;Le contenu généré par l’IA peut être incorrect.">
+            <a:extLst>
+              <a:ext uri="{FF2B5EF4-FFF2-40B4-BE49-F238E27FC236}">
+                <a16:creationId xmlns:a16="http://schemas.microsoft.com/office/drawing/2014/main" id="{4F46F44E-8250-E270-299C-6F5BD20E1F4E}"/>
+              </a:ext>
+            </a:extLst>
+          </p:cNvPr>
+          <p:cNvPicPr>
+            <a:picLocks noChangeAspect="1"/>
+          </p:cNvPicPr>
+          <p:nvPr/>
+        </p:nvPicPr>
+        <p:blipFill>
+          <a:blip r:embed="rId5"/>
+          <a:stretch>
+            <a:fillRect/>
+          </a:stretch>
+        </p:blipFill>
+        <p:spPr>
+          <a:xfrm>
+            <a:off x="6192760" y="2199020"/>
+            <a:ext cx="2049308" cy="1999487"/>
+          </a:xfrm>
+          <a:prstGeom prst="rect">
+            <a:avLst/>
+          </a:prstGeom>
         </p:spPr>
       </p:pic>
     </p:spTree>
@@ -10600,7 +9713,7 @@
 </p:sld>
 </file>
 
-<file path=ppt/slides/slide15.xml><?xml version="1.0" encoding="utf-8"?>
+<file path=ppt/slides/slide13.xml><?xml version="1.0" encoding="utf-8"?>
 <p:sld xmlns:a="http://schemas.openxmlformats.org/drawingml/2006/main" xmlns:r="http://schemas.openxmlformats.org/officeDocument/2006/relationships" xmlns:p="http://schemas.openxmlformats.org/presentationml/2006/main">
   <p:cSld>
     <p:spTree>
@@ -10703,8 +9816,8 @@
         </p:nvSpPr>
         <p:spPr>
           <a:xfrm>
-            <a:off x="406097" y="1030187"/>
-            <a:ext cx="2988031" cy="3458100"/>
+            <a:off x="334736" y="1339409"/>
+            <a:ext cx="2988031" cy="2464681"/>
           </a:xfrm>
           <a:prstGeom prst="rect">
             <a:avLst/>
@@ -10721,21 +9834,15 @@
           <a:lstStyle/>
           <a:p>
             <a:r>
-              <a:rPr lang="fr-FR" b="1" dirty="0" err="1"/>
-              <a:t>Prediction</a:t>
-            </a:r>
-            <a:r>
               <a:rPr lang="fr-FR" b="1" dirty="0"/>
-              <a:t> </a:t>
-            </a:r>
-            <a:r>
-              <a:rPr lang="fr-FR" b="1" dirty="0" err="1"/>
-              <a:t>Demo</a:t>
-            </a:r>
-            <a:r>
+              <a:t>Démonstration de  prédiction sur de nouveaux messages</a:t>
+            </a:r>
+            <a:br>
               <a:rPr lang="fr-FR" b="1" dirty="0"/>
-              <a:t> on New Messages</a:t>
-            </a:r>
+            </a:br>
+            <a:br>
+              <a:rPr lang="fr-FR" b="1" dirty="0"/>
+            </a:br>
             <a:br>
               <a:rPr lang="fr-FR" dirty="0"/>
             </a:br>
@@ -10820,8 +9927,8 @@
         </p:nvSpPr>
         <p:spPr>
           <a:xfrm>
-            <a:off x="3394128" y="168994"/>
-            <a:ext cx="5721196" cy="3944319"/>
+            <a:off x="3518114" y="1278611"/>
+            <a:ext cx="5415136" cy="2843940"/>
           </a:xfrm>
           <a:prstGeom prst="rect">
             <a:avLst/>
@@ -10838,79 +9945,8 @@
           <a:lstStyle/>
           <a:p>
             <a:r>
-              <a:rPr lang="en-US" sz="1600" dirty="0"/>
-              <a:t>Demonstration Highlights:</a:t>
-            </a:r>
-            <a:br>
-              <a:rPr lang="en-US" sz="1600" dirty="0"/>
-            </a:br>
-            <a:r>
-              <a:rPr lang="en-US" sz="1600" b="1" dirty="0"/>
-              <a:t>Test Cases:</a:t>
-            </a:r>
-            <a:r>
-              <a:rPr lang="en-US" sz="1600" dirty="0"/>
-              <a:t> a set of example messages</a:t>
-            </a:r>
-            <a:br>
-              <a:rPr lang="en-US" sz="1600" dirty="0"/>
-            </a:br>
-            <a:r>
-              <a:rPr lang="en-US" sz="1600" b="1" dirty="0"/>
-              <a:t>Prediction Pipeline: </a:t>
-            </a:r>
-            <a:r>
-              <a:rPr lang="en-US" sz="1600" dirty="0"/>
-              <a:t>Each message was processed through the complete pipeline:</a:t>
-            </a:r>
-            <a:br>
-              <a:rPr lang="en-US" sz="1600" dirty="0"/>
-            </a:br>
-            <a:r>
-              <a:rPr lang="en-US" sz="1600" dirty="0"/>
-              <a:t> - Feature Engineering:</a:t>
-            </a:r>
-            <a:br>
-              <a:rPr lang="en-US" sz="1600" dirty="0"/>
-            </a:br>
-            <a:r>
-              <a:rPr lang="en-US" sz="1600" dirty="0"/>
-              <a:t> - Sentence Embedding:</a:t>
-            </a:r>
-            <a:br>
-              <a:rPr lang="en-US" sz="1600" dirty="0"/>
-            </a:br>
-            <a:r>
-              <a:rPr lang="en-US" sz="1600" dirty="0"/>
-              <a:t> - Feature Combination &amp; Scaling</a:t>
-            </a:r>
-            <a:br>
-              <a:rPr lang="en-US" sz="1600" dirty="0"/>
-            </a:br>
-            <a:r>
-              <a:rPr lang="en-US" sz="1600" dirty="0"/>
-              <a:t> - Neural Network Inference:</a:t>
-            </a:r>
-            <a:br>
-              <a:rPr lang="en-US" sz="1600" dirty="0"/>
-            </a:br>
-            <a:r>
-              <a:rPr lang="en-US" sz="1600" b="1" dirty="0"/>
-              <a:t>Output: </a:t>
-            </a:r>
-            <a:r>
-              <a:rPr lang="en-US" sz="1600" dirty="0"/>
-              <a:t>For each message, the model provided a clear 'HAM' or 'SPAM' prediction along with a confidence score (spam probability).</a:t>
-            </a:r>
-            <a:br>
-              <a:rPr lang="en-US" sz="1600" dirty="0"/>
-            </a:br>
-            <a:br>
-              <a:rPr lang="en-US" sz="1600" dirty="0"/>
-            </a:br>
-            <a:r>
-              <a:rPr lang="en-US" sz="1600" dirty="0"/>
-              <a:t>Example Predictions:</a:t>
+              <a:rPr lang="fr-FR" sz="1600" noProof="0" dirty="0"/>
+              <a:t>Exemples de prédiction:</a:t>
             </a:r>
             <a:br>
               <a:rPr lang="en-US" sz="1600" dirty="0"/>
@@ -10951,6 +9987,12 @@
             <a:br>
               <a:rPr lang="en-US" sz="1400" dirty="0"/>
             </a:br>
+            <a:br>
+              <a:rPr lang="en-US" sz="1400" dirty="0"/>
+            </a:br>
+            <a:br>
+              <a:rPr lang="en-US" sz="1400" dirty="0"/>
+            </a:br>
             <a:r>
               <a:rPr lang="en-US" sz="1400" b="1" dirty="0"/>
               <a:t>Message 2 (Spam)</a:t>
@@ -10981,12 +10023,6 @@
               <a:rPr lang="en-US" sz="1400" dirty="0"/>
               <a:t>: Very High Spam Probability (e.g., 100.0%)</a:t>
             </a:r>
-            <a:br>
-              <a:rPr lang="en-US" dirty="0"/>
-            </a:br>
-            <a:br>
-              <a:rPr lang="en-US" sz="1800" dirty="0"/>
-            </a:br>
             <a:br>
               <a:rPr lang="en-US" dirty="0"/>
             </a:br>
@@ -11019,7 +10055,7 @@
 </p:sld>
 </file>
 
-<file path=ppt/slides/slide16.xml><?xml version="1.0" encoding="utf-8"?>
+<file path=ppt/slides/slide14.xml><?xml version="1.0" encoding="utf-8"?>
 <p:sld xmlns:a="http://schemas.openxmlformats.org/drawingml/2006/main" xmlns:r="http://schemas.openxmlformats.org/officeDocument/2006/relationships" xmlns:p="http://schemas.openxmlformats.org/presentationml/2006/main">
   <p:cSld>
     <p:spTree>
@@ -11122,8 +10158,8 @@
         </p:nvSpPr>
         <p:spPr>
           <a:xfrm>
-            <a:off x="406097" y="1030187"/>
-            <a:ext cx="3088771" cy="3458100"/>
+            <a:off x="406098" y="1351608"/>
+            <a:ext cx="3088771" cy="1303776"/>
           </a:xfrm>
           <a:prstGeom prst="rect">
             <a:avLst/>
@@ -11140,29 +10176,16 @@
           <a:lstStyle/>
           <a:p>
             <a:r>
-              <a:rPr lang="en-US" b="1" dirty="0"/>
-              <a:t>Future Work </a:t>
-            </a:r>
-            <a:br>
-              <a:rPr lang="en-US" b="1" dirty="0"/>
-            </a:br>
-            <a:r>
-              <a:rPr lang="en-US" b="1" dirty="0"/>
-              <a:t>and Areas </a:t>
-            </a:r>
-            <a:br>
-              <a:rPr lang="en-US" b="1" dirty="0"/>
-            </a:br>
-            <a:r>
-              <a:rPr lang="en-US" b="1" dirty="0"/>
-              <a:t>for </a:t>
-            </a:r>
-            <a:br>
-              <a:rPr lang="en-US" b="1" dirty="0"/>
-            </a:br>
-            <a:r>
-              <a:rPr lang="en-US" b="1" dirty="0"/>
-              <a:t>Improvement</a:t>
+              <a:rPr lang="fr-FR" b="1" dirty="0">
+                <a:solidFill>
+                  <a:schemeClr val="tx1"/>
+                </a:solidFill>
+                <a:latin typeface="Inter"/>
+                <a:ea typeface="Inter"/>
+                <a:cs typeface="Inter"/>
+                <a:sym typeface="Inter"/>
+              </a:rPr>
+              <a:t>Perspectives d’évolution</a:t>
             </a:r>
             <a:br>
               <a:rPr lang="fr-FR" dirty="0"/>
@@ -11248,8 +10271,8 @@
         </p:nvSpPr>
         <p:spPr>
           <a:xfrm>
-            <a:off x="3976888" y="868756"/>
-            <a:ext cx="4703737" cy="4044442"/>
+            <a:off x="3872289" y="868756"/>
+            <a:ext cx="4865613" cy="3703244"/>
           </a:xfrm>
           <a:prstGeom prst="rect">
             <a:avLst/>
@@ -11266,57 +10289,104 @@
           <a:lstStyle/>
           <a:p>
             <a:br>
-              <a:rPr lang="en-US" sz="1100" dirty="0"/>
-            </a:br>
-            <a:r>
-              <a:rPr lang="en-US" sz="1600" dirty="0"/>
-              <a:t>1.  Explore More Advanced Neural Network Architectures</a:t>
-            </a:r>
-            <a:br>
-              <a:rPr lang="en-US" sz="1600" dirty="0"/>
-            </a:br>
-            <a:r>
-              <a:rPr lang="en-US" sz="1600" dirty="0"/>
-              <a:t>2.  Experiment with Different Sentence Transformer Models: </a:t>
-            </a:r>
-            <a:br>
-              <a:rPr lang="en-US" sz="1600" dirty="0"/>
-            </a:br>
-            <a:r>
-              <a:rPr lang="en-US" sz="1600" dirty="0"/>
-              <a:t>3.  Fine-tuning Sentence Transformers: </a:t>
-            </a:r>
-            <a:br>
-              <a:rPr lang="en-US" sz="1600" dirty="0"/>
-            </a:br>
-            <a:r>
-              <a:rPr lang="en-US" sz="1600" dirty="0"/>
-              <a:t>4.  Sophisticated Feature Engineering: </a:t>
-            </a:r>
-            <a:br>
-              <a:rPr lang="en-US" sz="1600" dirty="0"/>
-            </a:br>
-            <a:r>
-              <a:rPr lang="en-US" sz="1600" dirty="0"/>
-              <a:t>5.  Real-time Processing Considerations: </a:t>
-            </a:r>
-            <a:br>
-              <a:rPr lang="en-US" sz="1600" dirty="0"/>
-            </a:br>
-            <a:r>
-              <a:rPr lang="en-US" sz="1600" dirty="0"/>
-              <a:t>6.  Dataset Expansion and Diversity: </a:t>
-            </a:r>
-            <a:br>
-              <a:rPr lang="en-US" sz="1100" dirty="0"/>
-            </a:br>
-            <a:br>
-              <a:rPr lang="en-US" dirty="0"/>
-            </a:br>
-            <a:endParaRPr lang="en-US" sz="1600" dirty="0"/>
+              <a:rPr lang="fr-FR" sz="1100" noProof="0" dirty="0"/>
+            </a:br>
+            <a:r>
+              <a:rPr lang="fr-FR" sz="1800" noProof="0" dirty="0"/>
+              <a:t>1. Explorer des architectures NN plus avancées</a:t>
+            </a:r>
+            <a:br>
+              <a:rPr lang="fr-FR" sz="1800" noProof="0" dirty="0"/>
+            </a:br>
+            <a:r>
+              <a:rPr lang="fr-FR" sz="1800" noProof="0" dirty="0"/>
+              <a:t>2. Expérimenter un autre modèle d’</a:t>
+            </a:r>
+            <a:r>
+              <a:rPr lang="fr-FR" sz="1800" noProof="0" dirty="0" err="1"/>
+              <a:t>embedding</a:t>
+            </a:r>
+            <a:r>
+              <a:rPr lang="fr-FR" sz="1800" noProof="0" dirty="0"/>
+              <a:t> (Sentence Transformer, BERT ou autres)</a:t>
+            </a:r>
+            <a:br>
+              <a:rPr lang="fr-FR" sz="1800" noProof="0" dirty="0"/>
+            </a:br>
+            <a:r>
+              <a:rPr lang="fr-FR" sz="1800" noProof="0" dirty="0"/>
+              <a:t>3. Fine-tuning du modèle de Sentence Transformers </a:t>
+            </a:r>
+            <a:br>
+              <a:rPr lang="fr-FR" sz="1800" noProof="0" dirty="0"/>
+            </a:br>
+            <a:r>
+              <a:rPr lang="fr-FR" sz="1800" noProof="0" dirty="0"/>
+              <a:t>4. Ingénieries des variables plus poussées</a:t>
+            </a:r>
+            <a:br>
+              <a:rPr lang="fr-FR" sz="1800" noProof="0" dirty="0"/>
+            </a:br>
+            <a:r>
+              <a:rPr lang="fr-FR" sz="1800" noProof="0" dirty="0"/>
+              <a:t>5. Expansion du jeu de données </a:t>
+            </a:r>
+            <a:br>
+              <a:rPr lang="fr-FR" sz="1800" noProof="0" dirty="0"/>
+            </a:br>
+            <a:r>
+              <a:rPr lang="fr-FR" sz="1800" noProof="0" dirty="0"/>
+              <a:t>6. Déploiement du modèle pour utilisation en temps réel</a:t>
+            </a:r>
+            <a:br>
+              <a:rPr lang="fr-FR" sz="1600" noProof="0" dirty="0"/>
+            </a:br>
+            <a:br>
+              <a:rPr lang="fr-FR" sz="1100" noProof="0" dirty="0"/>
+            </a:br>
+            <a:br>
+              <a:rPr lang="fr-FR" noProof="0" dirty="0"/>
+            </a:br>
+            <a:endParaRPr lang="fr-FR" sz="1600" noProof="0" dirty="0"/>
           </a:p>
         </p:txBody>
       </p:sp>
+      <p:pic>
+        <p:nvPicPr>
+          <p:cNvPr id="3" name="Graphique 2" descr="Internet des objets contour">
+            <a:extLst>
+              <a:ext uri="{FF2B5EF4-FFF2-40B4-BE49-F238E27FC236}">
+                <a16:creationId xmlns:a16="http://schemas.microsoft.com/office/drawing/2014/main" id="{6A99CE5C-63B1-A8C1-3563-3EE32F78128D}"/>
+              </a:ext>
+            </a:extLst>
+          </p:cNvPr>
+          <p:cNvPicPr>
+            <a:picLocks noChangeAspect="1"/>
+          </p:cNvPicPr>
+          <p:nvPr/>
+        </p:nvPicPr>
+        <p:blipFill>
+          <a:blip r:embed="rId4">
+            <a:extLst>
+              <a:ext uri="{96DAC541-7B7A-43D3-8B79-37D633B846F1}">
+                <asvg:svgBlip xmlns:asvg="http://schemas.microsoft.com/office/drawing/2016/SVG/main" r:embed="rId5"/>
+              </a:ext>
+            </a:extLst>
+          </a:blip>
+          <a:stretch>
+            <a:fillRect/>
+          </a:stretch>
+        </p:blipFill>
+        <p:spPr>
+          <a:xfrm>
+            <a:off x="1040275" y="2809537"/>
+            <a:ext cx="1367407" cy="1367407"/>
+          </a:xfrm>
+          <a:prstGeom prst="rect">
+            <a:avLst/>
+          </a:prstGeom>
+        </p:spPr>
+      </p:pic>
     </p:spTree>
     <p:extLst>
       <p:ext uri="{BB962C8B-B14F-4D97-AF65-F5344CB8AC3E}">
@@ -11330,7 +10400,7 @@
 </p:sld>
 </file>
 
-<file path=ppt/slides/slide17.xml><?xml version="1.0" encoding="utf-8"?>
+<file path=ppt/slides/slide15.xml><?xml version="1.0" encoding="utf-8"?>
 <p:sld xmlns:a="http://schemas.openxmlformats.org/drawingml/2006/main" xmlns:r="http://schemas.openxmlformats.org/officeDocument/2006/relationships" xmlns:p="http://schemas.openxmlformats.org/presentationml/2006/main">
   <p:cSld>
     <p:spTree>
@@ -11368,7 +10438,7 @@
         <p:spPr>
           <a:xfrm>
             <a:off x="28676" y="0"/>
-            <a:ext cx="3721914" cy="5161200"/>
+            <a:ext cx="3404199" cy="5161200"/>
           </a:xfrm>
           <a:prstGeom prst="rect">
             <a:avLst/>
@@ -11434,7 +10504,7 @@
         <p:spPr>
           <a:xfrm>
             <a:off x="406097" y="1030187"/>
-            <a:ext cx="3088771" cy="3458100"/>
+            <a:ext cx="3088771" cy="1647699"/>
           </a:xfrm>
           <a:prstGeom prst="rect">
             <a:avLst/>
@@ -11451,15 +10521,8 @@
           <a:lstStyle/>
           <a:p>
             <a:r>
-              <a:rPr lang="en-US" b="1" dirty="0"/>
-              <a:t>Project Summary and </a:t>
-            </a:r>
-            <a:br>
-              <a:rPr lang="en-US" b="1" dirty="0"/>
-            </a:br>
-            <a:r>
-              <a:rPr lang="en-US" b="1" dirty="0"/>
-              <a:t>Model Choice</a:t>
+              <a:rPr lang="fr-FR" b="1" noProof="0" dirty="0"/>
+              <a:t>Résumé du projet</a:t>
             </a:r>
             <a:br>
               <a:rPr lang="en-US" dirty="0"/>
@@ -11548,8 +10611,8 @@
         </p:nvSpPr>
         <p:spPr>
           <a:xfrm>
-            <a:off x="3872289" y="388309"/>
-            <a:ext cx="4703737" cy="4044442"/>
+            <a:off x="3494868" y="1030187"/>
+            <a:ext cx="5316836" cy="3339033"/>
           </a:xfrm>
           <a:prstGeom prst="rect">
             <a:avLst/>
@@ -11565,39 +10628,140 @@
           </a:bodyPr>
           <a:lstStyle/>
           <a:p>
-            <a:br>
-              <a:rPr lang="en-US" sz="1600" dirty="0"/>
-            </a:br>
-            <a:r>
-              <a:rPr lang="en-US" sz="1600" dirty="0"/>
-              <a:t>The project successfully developed an efficient and accurate spam detection system by combining Sentence Transformers for semantic embeddings and Neural Networks for classification.</a:t>
-            </a:r>
-            <a:br>
-              <a:rPr lang="en-US" sz="1600" dirty="0"/>
-            </a:br>
-            <a:br>
-              <a:rPr lang="en-US" sz="1600" dirty="0"/>
-            </a:br>
-            <a:br>
-              <a:rPr lang="en-US" sz="1600" dirty="0"/>
-            </a:br>
-            <a:r>
-              <a:rPr lang="en-US" sz="1600" dirty="0"/>
-              <a:t>The Ultra-Simple Neural Network was chosen as the preferred model for deployment due to its efficiency and comparable predictive power, aligning with the goal of a lightweight and resource-efficient solution.</a:t>
-            </a:r>
-            <a:br>
-              <a:rPr lang="en-US" sz="1600" dirty="0"/>
-            </a:br>
-            <a:br>
-              <a:rPr lang="en-US" sz="1100" dirty="0"/>
-            </a:br>
-            <a:br>
-              <a:rPr lang="en-US" dirty="0"/>
-            </a:br>
-            <a:endParaRPr lang="en-US" sz="1600" dirty="0"/>
+            <a:pPr algn="just"/>
+            <a:br>
+              <a:rPr lang="fr-FR" sz="1600" noProof="0" dirty="0"/>
+            </a:br>
+            <a:r>
+              <a:rPr lang="fr-FR" sz="1600" noProof="0" dirty="0"/>
+              <a:t>Dans ce projet nous avons développé un </a:t>
+            </a:r>
+            <a:r>
+              <a:rPr lang="fr-FR" sz="1600" b="1" noProof="0" dirty="0"/>
+              <a:t>détecteur de spam </a:t>
+            </a:r>
+            <a:r>
+              <a:rPr lang="fr-FR" sz="1600" noProof="0" dirty="0"/>
+              <a:t>efficace en combinant un modèle d’</a:t>
+            </a:r>
+            <a:r>
+              <a:rPr lang="fr-FR" sz="1600" noProof="0" dirty="0" err="1"/>
+              <a:t>embedding</a:t>
+            </a:r>
+            <a:r>
+              <a:rPr lang="fr-FR" sz="1600" noProof="0" dirty="0"/>
+              <a:t> existant avec des réseaux de neurones utilisés pour la classification binaire. </a:t>
+            </a:r>
+            <a:br>
+              <a:rPr lang="fr-FR" sz="1600" noProof="0" dirty="0"/>
+            </a:br>
+            <a:br>
+              <a:rPr lang="fr-FR" sz="1600" noProof="0" dirty="0"/>
+            </a:br>
+            <a:br>
+              <a:rPr lang="fr-FR" sz="1600" noProof="0" dirty="0"/>
+            </a:br>
+            <a:r>
+              <a:rPr lang="fr-FR" sz="1600" noProof="0" dirty="0"/>
+              <a:t>Le modèle choisi est </a:t>
+            </a:r>
+            <a:r>
+              <a:rPr lang="fr-FR" sz="1600" b="1" noProof="0" dirty="0" err="1"/>
+              <a:t>Ultra-Simple</a:t>
+            </a:r>
+            <a:r>
+              <a:rPr lang="fr-FR" sz="1600" b="1" noProof="0" dirty="0"/>
+              <a:t> Neural Network </a:t>
+            </a:r>
+            <a:r>
+              <a:rPr lang="fr-FR" sz="1600" noProof="0" dirty="0"/>
+              <a:t>en raison de sa simplicité et l’efficacité comparable avec le modèle plus complexe. Ceci pour alléger les ressources de calcul et assurer la performance des prédictions. </a:t>
+            </a:r>
+            <a:br>
+              <a:rPr lang="fr-FR" sz="1600" noProof="0" dirty="0"/>
+            </a:br>
+            <a:br>
+              <a:rPr lang="fr-FR" sz="1100" noProof="0" dirty="0"/>
+            </a:br>
+            <a:br>
+              <a:rPr lang="fr-FR" noProof="0" dirty="0"/>
+            </a:br>
+            <a:endParaRPr lang="fr-FR" sz="1600" noProof="0" dirty="0"/>
           </a:p>
         </p:txBody>
       </p:sp>
+      <p:pic>
+        <p:nvPicPr>
+          <p:cNvPr id="3" name="Graphique 2" descr="Selfie avec un remplissage uni">
+            <a:extLst>
+              <a:ext uri="{FF2B5EF4-FFF2-40B4-BE49-F238E27FC236}">
+                <a16:creationId xmlns:a16="http://schemas.microsoft.com/office/drawing/2014/main" id="{F61AB983-029C-9B4A-4836-C5EF76783B6B}"/>
+              </a:ext>
+            </a:extLst>
+          </p:cNvPr>
+          <p:cNvPicPr>
+            <a:picLocks noChangeAspect="1"/>
+          </p:cNvPicPr>
+          <p:nvPr/>
+        </p:nvPicPr>
+        <p:blipFill>
+          <a:blip r:embed="rId4">
+            <a:extLst>
+              <a:ext uri="{96DAC541-7B7A-43D3-8B79-37D633B846F1}">
+                <asvg:svgBlip xmlns:asvg="http://schemas.microsoft.com/office/drawing/2016/SVG/main" r:embed="rId5"/>
+              </a:ext>
+            </a:extLst>
+          </a:blip>
+          <a:stretch>
+            <a:fillRect/>
+          </a:stretch>
+        </p:blipFill>
+        <p:spPr>
+          <a:xfrm>
+            <a:off x="583075" y="2839317"/>
+            <a:ext cx="914400" cy="914400"/>
+          </a:xfrm>
+          <a:prstGeom prst="rect">
+            <a:avLst/>
+          </a:prstGeom>
+        </p:spPr>
+      </p:pic>
+      <p:pic>
+        <p:nvPicPr>
+          <p:cNvPr id="6" name="Graphique 5" descr="Selfie contour">
+            <a:extLst>
+              <a:ext uri="{FF2B5EF4-FFF2-40B4-BE49-F238E27FC236}">
+                <a16:creationId xmlns:a16="http://schemas.microsoft.com/office/drawing/2014/main" id="{AA7B4D0B-957F-B06B-9091-0E82F06A4D4E}"/>
+              </a:ext>
+            </a:extLst>
+          </p:cNvPr>
+          <p:cNvPicPr>
+            <a:picLocks noChangeAspect="1"/>
+          </p:cNvPicPr>
+          <p:nvPr/>
+        </p:nvPicPr>
+        <p:blipFill>
+          <a:blip r:embed="rId6">
+            <a:extLst>
+              <a:ext uri="{96DAC541-7B7A-43D3-8B79-37D633B846F1}">
+                <asvg:svgBlip xmlns:asvg="http://schemas.microsoft.com/office/drawing/2016/SVG/main" r:embed="rId7"/>
+              </a:ext>
+            </a:extLst>
+          </a:blip>
+          <a:stretch>
+            <a:fillRect/>
+          </a:stretch>
+        </p:blipFill>
+        <p:spPr>
+          <a:xfrm>
+            <a:off x="1853373" y="2870698"/>
+            <a:ext cx="914400" cy="914400"/>
+          </a:xfrm>
+          <a:prstGeom prst="rect">
+            <a:avLst/>
+          </a:prstGeom>
+        </p:spPr>
+      </p:pic>
     </p:spTree>
     <p:extLst>
       <p:ext uri="{BB962C8B-B14F-4D97-AF65-F5344CB8AC3E}">
@@ -11611,7 +10775,7 @@
 </p:sld>
 </file>
 
-<file path=ppt/slides/slide18.xml><?xml version="1.0" encoding="utf-8"?>
+<file path=ppt/slides/slide16.xml><?xml version="1.0" encoding="utf-8"?>
 <p:sld xmlns:a="http://schemas.openxmlformats.org/drawingml/2006/main" xmlns:r="http://schemas.openxmlformats.org/officeDocument/2006/relationships" xmlns:p="http://schemas.openxmlformats.org/presentationml/2006/main">
   <p:cSld>
     <p:bg>
@@ -11648,7 +10812,7 @@
         </p:nvSpPr>
         <p:spPr>
           <a:xfrm>
-            <a:off x="1390625" y="1039500"/>
+            <a:off x="1354525" y="875630"/>
             <a:ext cx="6362700" cy="3188700"/>
           </a:xfrm>
           <a:prstGeom prst="rect">
@@ -11692,7 +10856,31 @@
                 <a:cs typeface="Libre Baskerville"/>
                 <a:sym typeface="Libre Baskerville"/>
               </a:rPr>
-              <a:t>“The greatest challenge to any thinker is stating the problem in a way that will allow a solution”</a:t>
+              <a:t>“</a:t>
+            </a:r>
+            <a:r>
+              <a:rPr lang="fr-FR" sz="3200" b="0" i="0" u="none" strike="noStrike" cap="none" dirty="0">
+                <a:solidFill>
+                  <a:srgbClr val="FFFFFF"/>
+                </a:solidFill>
+                <a:latin typeface="Libre Baskerville"/>
+                <a:ea typeface="Libre Baskerville"/>
+                <a:cs typeface="Libre Baskerville"/>
+                <a:sym typeface="Libre Baskerville"/>
+              </a:rPr>
+              <a:t>La communication est une science difficile. Ce n'est pas une science exacte. Ca s'apprend et ça se cultive.</a:t>
+            </a:r>
+            <a:r>
+              <a:rPr lang="fr" sz="3200" b="0" i="0" u="none" strike="noStrike" cap="none" dirty="0">
+                <a:solidFill>
+                  <a:srgbClr val="FFFFFF"/>
+                </a:solidFill>
+                <a:latin typeface="Libre Baskerville"/>
+                <a:ea typeface="Libre Baskerville"/>
+                <a:cs typeface="Libre Baskerville"/>
+                <a:sym typeface="Libre Baskerville"/>
+              </a:rPr>
+              <a:t>”</a:t>
             </a:r>
             <a:endParaRPr sz="3200" b="0" i="0" u="none" strike="noStrike" cap="none" dirty="0">
               <a:solidFill>
@@ -11753,7 +10941,7 @@
               <a:buNone/>
             </a:pPr>
             <a:r>
-              <a:rPr lang="fr" sz="1000" b="0" i="0" u="none" strike="noStrike" cap="none" dirty="0">
+              <a:rPr lang="fr-FR" sz="1000" b="0" i="0" u="none" strike="noStrike" cap="none" dirty="0">
                 <a:solidFill>
                   <a:srgbClr val="FFFFFF"/>
                 </a:solidFill>
@@ -11762,7 +10950,7 @@
                 <a:cs typeface="Inter"/>
                 <a:sym typeface="Inter"/>
               </a:rPr>
-              <a:t>Bertrand RUSSELL, British philosopher</a:t>
+              <a:t>Jean-Luc Lagardère, homme d’affaires français</a:t>
             </a:r>
             <a:endParaRPr sz="1000" b="0" i="0" u="none" strike="noStrike" cap="none" dirty="0">
               <a:solidFill>
@@ -11811,7 +10999,7 @@
 </p:sld>
 </file>
 
-<file path=ppt/slides/slide19.xml><?xml version="1.0" encoding="utf-8"?>
+<file path=ppt/slides/slide17.xml><?xml version="1.0" encoding="utf-8"?>
 <p:sld xmlns:a="http://schemas.openxmlformats.org/drawingml/2006/main" xmlns:r="http://schemas.openxmlformats.org/officeDocument/2006/relationships" xmlns:p="http://schemas.openxmlformats.org/presentationml/2006/main">
   <p:cSld>
     <p:bg>
@@ -11880,7 +11068,7 @@
                 <a:cs typeface="Inter"/>
                 <a:sym typeface="Inter"/>
               </a:rPr>
-              <a:t>Thank you! </a:t>
+              <a:t>Merci! </a:t>
             </a:r>
             <a:endParaRPr sz="5600" b="1" dirty="0">
               <a:solidFill>
@@ -11966,7 +11154,7 @@
                 <a:cs typeface="Inter Medium"/>
                 <a:sym typeface="Inter Medium"/>
               </a:rPr>
-              <a:t>Do you have any questions ?</a:t>
+              <a:t>Avez-vous des questions?</a:t>
             </a:r>
             <a:endParaRPr sz="2400" dirty="0">
               <a:solidFill>
@@ -12053,8 +11241,8 @@
         </p:nvSpPr>
         <p:spPr>
           <a:xfrm>
-            <a:off x="1040272" y="1702749"/>
-            <a:ext cx="7189328" cy="2241569"/>
+            <a:off x="528599" y="1199357"/>
+            <a:ext cx="7189328" cy="3116611"/>
           </a:xfrm>
           <a:prstGeom prst="rect">
             <a:avLst/>
@@ -12077,7 +11265,7 @@
                 <a:cs typeface="Inter SemiBold"/>
                 <a:sym typeface="Inter SemiBold"/>
               </a:rPr>
-              <a:t>AT&amp;T Spam Detector Project</a:t>
+              <a:t>Projet AT&amp;T Détecteur de spam</a:t>
             </a:r>
             <a:br>
               <a:rPr lang="fr" sz="3600" dirty="0">
@@ -12102,9 +11290,30 @@
               </a:rPr>
             </a:br>
             <a:r>
-              <a:rPr lang="en-US" sz="3200" dirty="0"/>
-              <a:t>Deep Learning</a:t>
-            </a:r>
+              <a:rPr lang="fr-FR" dirty="0"/>
+              <a:t>Analyse prédictive de données non-structurées par l'intelligence artificielle</a:t>
+            </a:r>
+            <a:br>
+              <a:rPr lang="fr-FR" dirty="0"/>
+            </a:br>
+            <a:br>
+              <a:rPr lang="fr-FR" dirty="0"/>
+            </a:br>
+            <a:r>
+              <a:rPr lang="fr-FR" dirty="0"/>
+              <a:t>(apprentissage profond)</a:t>
+            </a:r>
+            <a:br>
+              <a:rPr lang="fr" sz="4800" dirty="0">
+                <a:solidFill>
+                  <a:srgbClr val="0E3449"/>
+                </a:solidFill>
+                <a:latin typeface="Inter SemiBold"/>
+                <a:ea typeface="Inter SemiBold"/>
+                <a:cs typeface="Inter SemiBold"/>
+                <a:sym typeface="Inter SemiBold"/>
+              </a:rPr>
+            </a:br>
             <a:br>
               <a:rPr lang="en-US" sz="4800" dirty="0">
                 <a:solidFill>
@@ -12154,6 +11363,53 @@
           <a:ln>
             <a:noFill/>
           </a:ln>
+        </p:spPr>
+      </p:pic>
+      <p:pic>
+        <p:nvPicPr>
+          <p:cNvPr id="1026" name="Picture 2" descr="At&amp;t Png Logo - Free Transparent PNG Logos">
+            <a:extLst>
+              <a:ext uri="{FF2B5EF4-FFF2-40B4-BE49-F238E27FC236}">
+                <a16:creationId xmlns:a16="http://schemas.microsoft.com/office/drawing/2014/main" id="{D8DBE8D2-AFDB-D29D-1D4F-1F34478772C2}"/>
+              </a:ext>
+            </a:extLst>
+          </p:cNvPr>
+          <p:cNvPicPr>
+            <a:picLocks noChangeAspect="1" noChangeArrowheads="1"/>
+          </p:cNvPicPr>
+          <p:nvPr/>
+        </p:nvPicPr>
+        <p:blipFill>
+          <a:blip r:embed="rId4">
+            <a:extLst>
+              <a:ext uri="{28A0092B-C50C-407E-A947-70E740481C1C}">
+                <a14:useLocalDpi xmlns:a14="http://schemas.microsoft.com/office/drawing/2010/main" val="0"/>
+              </a:ext>
+            </a:extLst>
+          </a:blip>
+          <a:srcRect/>
+          <a:stretch>
+            <a:fillRect/>
+          </a:stretch>
+        </p:blipFill>
+        <p:spPr bwMode="auto">
+          <a:xfrm>
+            <a:off x="6591256" y="2634696"/>
+            <a:ext cx="2253343" cy="2253343"/>
+          </a:xfrm>
+          <a:prstGeom prst="rect">
+            <a:avLst/>
+          </a:prstGeom>
+          <a:noFill/>
+          <a:extLst>
+            <a:ext uri="{909E8E84-426E-40DD-AFC4-6F175D3DCCD1}">
+              <a14:hiddenFill xmlns:a14="http://schemas.microsoft.com/office/drawing/2010/main">
+                <a:solidFill>
+                  <a:srgbClr val="FFFFFF"/>
+                </a:solidFill>
+              </a14:hiddenFill>
+            </a:ext>
+          </a:extLst>
         </p:spPr>
       </p:pic>
     </p:spTree>
@@ -12208,10 +11464,10 @@
           <a:p>
             <a:pPr lvl="0"/>
             <a:r>
-              <a:rPr lang="en-US" sz="2400" dirty="0"/>
-              <a:t>Project Overview</a:t>
-            </a:r>
-            <a:endParaRPr sz="2500" dirty="0">
+              <a:rPr lang="fr-FR" sz="2400" noProof="0" dirty="0"/>
+              <a:t>Objectif du projet</a:t>
+            </a:r>
+            <a:endParaRPr lang="fr-FR" sz="2500" noProof="0" dirty="0">
               <a:solidFill>
                 <a:srgbClr val="0E3449"/>
               </a:solidFill>
@@ -12241,8 +11497,8 @@
         </p:nvSpPr>
         <p:spPr>
           <a:xfrm>
-            <a:off x="311700" y="1055551"/>
-            <a:ext cx="8520600" cy="3836473"/>
+            <a:off x="311700" y="1726387"/>
+            <a:ext cx="8520600" cy="2136040"/>
           </a:xfrm>
         </p:spPr>
         <p:txBody>
@@ -12253,74 +11509,30 @@
               <a:buNone/>
             </a:pPr>
             <a:r>
-              <a:rPr lang="en-US" b="1" dirty="0">
+              <a:rPr lang="fr-FR" sz="2400" noProof="0" dirty="0">
                 <a:solidFill>
                   <a:schemeClr val="tx1"/>
                 </a:solidFill>
               </a:rPr>
-              <a:t>AT&amp;T Spam Detection: A Deep Learning Approach</a:t>
-            </a:r>
-          </a:p>
-          <a:p>
-            <a:endParaRPr lang="en-US" dirty="0">
-              <a:solidFill>
-                <a:schemeClr val="tx1"/>
-              </a:solidFill>
-            </a:endParaRPr>
-          </a:p>
-          <a:p>
-            <a:r>
-              <a:rPr lang="en-US" b="1" dirty="0">
+              <a:t>Développer un détecteur de spam automatique en utilisant des techniques d’apprentissage profond avancées, exploiter l’apprentissage</a:t>
+            </a:r>
+            <a:r>
+              <a:rPr lang="fr-FR" sz="2400" dirty="0">
                 <a:solidFill>
                   <a:schemeClr val="tx1"/>
                 </a:solidFill>
               </a:rPr>
-              <a:t>Goal:</a:t>
-            </a:r>
-          </a:p>
-          <a:p>
-            <a:pPr marL="114300" indent="0">
-              <a:buNone/>
-            </a:pPr>
-            <a:r>
-              <a:rPr lang="en-US" dirty="0">
+              <a:t> par transfert</a:t>
+            </a:r>
+            <a:r>
+              <a:rPr lang="fr-FR" sz="2400" noProof="0" dirty="0">
                 <a:solidFill>
                   <a:schemeClr val="tx1"/>
                 </a:solidFill>
               </a:rPr>
-              <a:t>To develop an automated spam detector using advanced deep learning techniques, leveraging transfer learning and custom neural networks.</a:t>
-            </a:r>
-          </a:p>
-          <a:p>
-            <a:endParaRPr lang="en-US" b="1" dirty="0">
-              <a:solidFill>
-                <a:schemeClr val="tx1"/>
-              </a:solidFill>
-            </a:endParaRPr>
-          </a:p>
-          <a:p>
-            <a:r>
-              <a:rPr lang="en-US" b="1" dirty="0">
-                <a:solidFill>
-                  <a:schemeClr val="tx1"/>
-                </a:solidFill>
-              </a:rPr>
-              <a:t>Problem Addressed:</a:t>
-            </a:r>
-          </a:p>
-          <a:p>
-            <a:pPr marL="114300" indent="0">
-              <a:buNone/>
-            </a:pPr>
-            <a:r>
-              <a:rPr lang="en-US" dirty="0">
-                <a:solidFill>
-                  <a:schemeClr val="tx1"/>
-                </a:solidFill>
-              </a:rPr>
-              <a:t>To tackle the pervasive issue of unsolicited and malicious spam messages by automatically identifying and filtering them based solely on their content. The primary objective is to enhance the user experience and security for AT&amp;T customers by providing a robust and efficient solution to detect spam.</a:t>
-            </a:r>
-            <a:endParaRPr lang="fr-FR" b="1" dirty="0">
+              <a:t> et des réseaux de neurones customisés. </a:t>
+            </a:r>
+            <a:endParaRPr lang="fr-FR" sz="2400" b="1" noProof="0" dirty="0">
               <a:solidFill>
                 <a:schemeClr val="tx1"/>
               </a:solidFill>
@@ -12396,6 +11608,42 @@
           </a:p>
         </p:txBody>
       </p:sp>
+      <p:pic>
+        <p:nvPicPr>
+          <p:cNvPr id="13" name="Graphique 12" descr="Vibration du téléphone avec un remplissage uni">
+            <a:extLst>
+              <a:ext uri="{FF2B5EF4-FFF2-40B4-BE49-F238E27FC236}">
+                <a16:creationId xmlns:a16="http://schemas.microsoft.com/office/drawing/2014/main" id="{89B3AD99-CFCF-26FA-2588-736E3D62390E}"/>
+              </a:ext>
+            </a:extLst>
+          </p:cNvPr>
+          <p:cNvPicPr>
+            <a:picLocks noChangeAspect="1"/>
+          </p:cNvPicPr>
+          <p:nvPr/>
+        </p:nvPicPr>
+        <p:blipFill>
+          <a:blip r:embed="rId4">
+            <a:extLst>
+              <a:ext uri="{96DAC541-7B7A-43D3-8B79-37D633B846F1}">
+                <asvg:svgBlip xmlns:asvg="http://schemas.microsoft.com/office/drawing/2016/SVG/main" r:embed="rId5"/>
+              </a:ext>
+            </a:extLst>
+          </a:blip>
+          <a:stretch>
+            <a:fillRect/>
+          </a:stretch>
+        </p:blipFill>
+        <p:spPr>
+          <a:xfrm>
+            <a:off x="7097006" y="3518391"/>
+            <a:ext cx="1201667" cy="1201667"/>
+          </a:xfrm>
+          <a:prstGeom prst="rect">
+            <a:avLst/>
+          </a:prstGeom>
+        </p:spPr>
+      </p:pic>
     </p:spTree>
   </p:cSld>
   <p:clrMapOvr>
@@ -12525,24 +11773,31 @@
           <a:lstStyle/>
           <a:p>
             <a:r>
-              <a:rPr lang="en-US" b="1" dirty="0"/>
-              <a:t>Methodology Overview</a:t>
-            </a:r>
-            <a:br>
-              <a:rPr lang="en-US" dirty="0"/>
-            </a:br>
-            <a:br>
-              <a:rPr lang="en-US" dirty="0"/>
-            </a:br>
-            <a:r>
-              <a:rPr lang="en-US" sz="2000" dirty="0"/>
-              <a:t>A Hybrid Approach: Transfer Learning + Feature Engineering + Deep Learning</a:t>
-            </a:r>
-            <a:br>
-              <a:rPr lang="en-US" dirty="0"/>
-            </a:br>
-            <a:br>
-              <a:rPr lang="fr" sz="2400" dirty="0">
+              <a:rPr lang="fr-FR" b="1" noProof="0" dirty="0"/>
+              <a:t>Méthode</a:t>
+            </a:r>
+            <a:br>
+              <a:rPr lang="fr-FR" noProof="0" dirty="0"/>
+            </a:br>
+            <a:br>
+              <a:rPr lang="fr-FR" noProof="0" dirty="0"/>
+            </a:br>
+            <a:r>
+              <a:rPr lang="fr-FR" sz="2000" noProof="0" dirty="0"/>
+              <a:t>Approche hybride: </a:t>
+            </a:r>
+            <a:br>
+              <a:rPr lang="fr-FR" sz="2000" noProof="0" dirty="0"/>
+            </a:br>
+            <a:r>
+              <a:rPr lang="fr-FR" sz="2000" noProof="0" dirty="0"/>
+              <a:t>Apprentissage par transfert + Ingénierie des variables+ Apprentissage profond</a:t>
+            </a:r>
+            <a:br>
+              <a:rPr lang="fr-FR" noProof="0" dirty="0"/>
+            </a:br>
+            <a:br>
+              <a:rPr lang="fr-FR" sz="2400" noProof="0" dirty="0">
                 <a:solidFill>
                   <a:srgbClr val="015955"/>
                 </a:solidFill>
@@ -12553,7 +11808,7 @@
               </a:rPr>
             </a:br>
             <a:br>
-              <a:rPr lang="fr" sz="2400" dirty="0">
+              <a:rPr lang="fr-FR" sz="2400" noProof="0" dirty="0">
                 <a:solidFill>
                   <a:srgbClr val="015955"/>
                 </a:solidFill>
@@ -12563,7 +11818,7 @@
                 <a:sym typeface="Inter"/>
               </a:rPr>
             </a:br>
-            <a:endParaRPr sz="2400" dirty="0">
+            <a:endParaRPr lang="fr-FR" sz="2400" noProof="0" dirty="0">
               <a:solidFill>
                 <a:srgbClr val="015955"/>
               </a:solidFill>
@@ -12626,8 +11881,8 @@
         </p:nvSpPr>
         <p:spPr>
           <a:xfrm>
-            <a:off x="3769156" y="594315"/>
-            <a:ext cx="5315100" cy="3642552"/>
+            <a:off x="3696604" y="868756"/>
+            <a:ext cx="5441895" cy="3642552"/>
           </a:xfrm>
           <a:prstGeom prst="rect">
             <a:avLst/>
@@ -12644,98 +11899,109 @@
           <a:lstStyle/>
           <a:p>
             <a:r>
-              <a:rPr lang="en-US" sz="1600" b="1" dirty="0"/>
-              <a:t>- Semantic Text Embeddings (Transfer Learning)</a:t>
-            </a:r>
-            <a:r>
-              <a:rPr lang="en-US" sz="1600" dirty="0"/>
-              <a:t>:</a:t>
-            </a:r>
-            <a:br>
-              <a:rPr lang="en-US" sz="1600" dirty="0"/>
-            </a:br>
-            <a:r>
-              <a:rPr lang="en-US" sz="1600" dirty="0"/>
-              <a:t>Use </a:t>
-            </a:r>
-            <a:r>
-              <a:rPr lang="en-US" sz="1600" b="1" dirty="0"/>
-              <a:t>Sentence Transformers (all-MiniLM-L6-v2)</a:t>
-            </a:r>
-            <a:r>
-              <a:rPr lang="en-US" sz="1600" dirty="0"/>
-              <a:t> to convert raw text messages into dense, numerical vector representations.</a:t>
-            </a:r>
-            <a:br>
-              <a:rPr lang="en-US" sz="1600" dirty="0"/>
-            </a:br>
-            <a:r>
-              <a:rPr lang="en-US" sz="1600" dirty="0"/>
+              <a:rPr lang="fr-FR" sz="2000" noProof="0" dirty="0"/>
               <a:t>- </a:t>
             </a:r>
             <a:r>
-              <a:rPr lang="en-US" sz="1600" b="1" dirty="0"/>
-              <a:t>Domain-Specific Feature Engineering</a:t>
-            </a:r>
-            <a:r>
-              <a:rPr lang="en-US" sz="1600" dirty="0"/>
-              <a:t>:</a:t>
-            </a:r>
-            <a:br>
-              <a:rPr lang="en-US" sz="1600" dirty="0"/>
-            </a:br>
-            <a:r>
-              <a:rPr lang="en-US" sz="1600" dirty="0"/>
-              <a:t>Identified and quantified key characteristics distinguishing spam from legitimate messages.</a:t>
-            </a:r>
-            <a:br>
-              <a:rPr lang="en-US" sz="1600" dirty="0"/>
-            </a:br>
-            <a:r>
-              <a:rPr lang="en-US" sz="1600" dirty="0"/>
-              <a:t>- </a:t>
-            </a:r>
-            <a:r>
-              <a:rPr lang="en-US" sz="1600" b="1" dirty="0"/>
-              <a:t>Class Weighting for Imbalanced Data</a:t>
-            </a:r>
-            <a:r>
-              <a:rPr lang="en-US" sz="1600" dirty="0"/>
-              <a:t>:</a:t>
-            </a:r>
-            <a:br>
-              <a:rPr lang="en-US" sz="1600" dirty="0"/>
-            </a:br>
-            <a:r>
-              <a:rPr lang="en-US" sz="1600" dirty="0"/>
-              <a:t>Implemented a weighted loss function during neural network training to ensure the model adequately learns from the minority 'spam' class, preventing bias towards the majority 'ham' class.</a:t>
-            </a:r>
-            <a:br>
-              <a:rPr lang="en-US" sz="1600" dirty="0"/>
-            </a:br>
-            <a:r>
-              <a:rPr lang="en-US" sz="1600" dirty="0"/>
-              <a:t>- </a:t>
-            </a:r>
-            <a:r>
-              <a:rPr lang="en-US" sz="1600" b="1" dirty="0"/>
-              <a:t>Simple &amp; Ultra-Simple Neural Networks (Deep Learning)</a:t>
-            </a:r>
-            <a:r>
-              <a:rPr lang="en-US" sz="1600" dirty="0"/>
-              <a:t>:</a:t>
-            </a:r>
-            <a:br>
-              <a:rPr lang="en-US" sz="1600" dirty="0"/>
-            </a:br>
-            <a:r>
-              <a:rPr lang="en-US" sz="1600" dirty="0"/>
-              <a:t>Developed custom feed-forward neural networks for efficient binary classification.</a:t>
-            </a:r>
-            <a:endParaRPr lang="en-US" dirty="0"/>
+              <a:rPr lang="fr-FR" sz="2000" noProof="0" dirty="0" err="1"/>
+              <a:t>Embeddings</a:t>
+            </a:r>
+            <a:r>
+              <a:rPr lang="fr-FR" sz="2000" noProof="0" dirty="0"/>
+              <a:t> sémantiques de texte (Transfer Learning)</a:t>
+            </a:r>
+            <a:br>
+              <a:rPr lang="fr-FR" sz="2000" noProof="0" dirty="0"/>
+            </a:br>
+            <a:br>
+              <a:rPr lang="fr-FR" sz="2000" noProof="0" dirty="0"/>
+            </a:br>
+            <a:r>
+              <a:rPr lang="fr-FR" sz="2000" noProof="0" dirty="0"/>
+              <a:t>- Ingénierie des variables spécifiques au domaine (</a:t>
+            </a:r>
+            <a:r>
+              <a:rPr lang="fr-FR" sz="2000" noProof="0" dirty="0" err="1"/>
+              <a:t>Feature</a:t>
+            </a:r>
+            <a:r>
+              <a:rPr lang="fr-FR" sz="2000" noProof="0" dirty="0"/>
+              <a:t> Engineering)</a:t>
+            </a:r>
+            <a:br>
+              <a:rPr lang="fr-FR" sz="2000" noProof="0" dirty="0"/>
+            </a:br>
+            <a:br>
+              <a:rPr lang="fr-FR" sz="2000" noProof="0" dirty="0"/>
+            </a:br>
+            <a:r>
+              <a:rPr lang="fr-FR" sz="2000" noProof="0" dirty="0"/>
+              <a:t>- Pondération des classes pour les données déséquilibrées</a:t>
+            </a:r>
+            <a:br>
+              <a:rPr lang="fr-FR" sz="2000" noProof="0" dirty="0"/>
+            </a:br>
+            <a:br>
+              <a:rPr lang="fr-FR" sz="2000" noProof="0" dirty="0"/>
+            </a:br>
+            <a:r>
+              <a:rPr lang="fr-FR" sz="2000" noProof="0" dirty="0"/>
+              <a:t>- Réseaux des neurones Simple &amp; Ultrasimple (Deep Learning)</a:t>
+            </a:r>
+            <a:br>
+              <a:rPr lang="fr-FR" sz="1600" noProof="0" dirty="0"/>
+            </a:br>
+            <a:endParaRPr lang="fr-FR" noProof="0" dirty="0"/>
           </a:p>
         </p:txBody>
       </p:sp>
+      <p:pic>
+        <p:nvPicPr>
+          <p:cNvPr id="2" name="Picture 2" descr="Download HD Free Download Neural Networks Illustration Png Clipart ...">
+            <a:extLst>
+              <a:ext uri="{FF2B5EF4-FFF2-40B4-BE49-F238E27FC236}">
+                <a16:creationId xmlns:a16="http://schemas.microsoft.com/office/drawing/2014/main" id="{0B5A643D-1E3C-572E-4DA0-852825F06B03}"/>
+              </a:ext>
+            </a:extLst>
+          </p:cNvPr>
+          <p:cNvPicPr>
+            <a:picLocks noChangeAspect="1" noChangeArrowheads="1"/>
+          </p:cNvPicPr>
+          <p:nvPr/>
+        </p:nvPicPr>
+        <p:blipFill>
+          <a:blip r:embed="rId4">
+            <a:extLst>
+              <a:ext uri="{28A0092B-C50C-407E-A947-70E740481C1C}">
+                <a14:useLocalDpi xmlns:a14="http://schemas.microsoft.com/office/drawing/2010/main" val="0"/>
+              </a:ext>
+            </a:extLst>
+          </a:blip>
+          <a:srcRect/>
+          <a:stretch>
+            <a:fillRect/>
+          </a:stretch>
+        </p:blipFill>
+        <p:spPr bwMode="auto">
+          <a:xfrm>
+            <a:off x="1116381" y="3621555"/>
+            <a:ext cx="1092588" cy="975220"/>
+          </a:xfrm>
+          <a:prstGeom prst="rect">
+            <a:avLst/>
+          </a:prstGeom>
+          <a:noFill/>
+          <a:extLst>
+            <a:ext uri="{909E8E84-426E-40DD-AFC4-6F175D3DCCD1}">
+              <a14:hiddenFill xmlns:a14="http://schemas.microsoft.com/office/drawing/2010/main">
+                <a:solidFill>
+                  <a:srgbClr val="FFFFFF"/>
+                </a:solidFill>
+              </a14:hiddenFill>
+            </a:ext>
+          </a:extLst>
+        </p:spPr>
+      </p:pic>
     </p:spTree>
     <p:extLst>
       <p:ext uri="{BB962C8B-B14F-4D97-AF65-F5344CB8AC3E}">
@@ -12750,310 +12016,7 @@
 </file>
 
 <file path=ppt/slides/slide5.xml><?xml version="1.0" encoding="utf-8"?>
-<p:sld xmlns:a="http://schemas.openxmlformats.org/drawingml/2006/main" xmlns:r="http://schemas.openxmlformats.org/officeDocument/2006/relationships" xmlns:p="http://schemas.openxmlformats.org/presentationml/2006/main">
-  <p:cSld>
-    <p:spTree>
-      <p:nvGrpSpPr>
-        <p:cNvPr id="1" name="Shape 80"/>
-        <p:cNvGrpSpPr/>
-        <p:nvPr/>
-      </p:nvGrpSpPr>
-      <p:grpSpPr>
-        <a:xfrm>
-          <a:off x="0" y="0"/>
-          <a:ext cx="0" cy="0"/>
-          <a:chOff x="0" y="0"/>
-          <a:chExt cx="0" cy="0"/>
-        </a:xfrm>
-      </p:grpSpPr>
-      <p:sp>
-        <p:nvSpPr>
-          <p:cNvPr id="81" name="Google Shape;81;p16"/>
-          <p:cNvSpPr/>
-          <p:nvPr/>
-        </p:nvSpPr>
-        <p:spPr>
-          <a:xfrm>
-            <a:off x="5500" y="-17775"/>
-            <a:ext cx="3691106" cy="5161200"/>
-          </a:xfrm>
-          <a:prstGeom prst="rect">
-            <a:avLst/>
-          </a:prstGeom>
-          <a:solidFill>
-            <a:srgbClr val="C3FFFC"/>
-          </a:solidFill>
-          <a:ln>
-            <a:noFill/>
-          </a:ln>
-        </p:spPr>
-        <p:txBody>
-          <a:bodyPr spcFirstLastPara="1" wrap="square" lIns="91425" tIns="91425" rIns="91425" bIns="91425" anchor="ctr" anchorCtr="0">
-            <a:noAutofit/>
-          </a:bodyPr>
-          <a:lstStyle/>
-          <a:p>
-            <a:pPr marL="0" marR="0" lvl="0" indent="0" algn="l" rtl="0">
-              <a:lnSpc>
-                <a:spcPct val="100000"/>
-              </a:lnSpc>
-              <a:spcBef>
-                <a:spcPts val="0"/>
-              </a:spcBef>
-              <a:spcAft>
-                <a:spcPts val="0"/>
-              </a:spcAft>
-              <a:buClr>
-                <a:srgbClr val="000000"/>
-              </a:buClr>
-              <a:buSzPts val="1400"/>
-              <a:buFont typeface="Arial"/>
-              <a:buNone/>
-            </a:pPr>
-            <a:endParaRPr sz="1400" b="0" i="0" u="none" strike="noStrike" cap="none">
-              <a:solidFill>
-                <a:srgbClr val="000000"/>
-              </a:solidFill>
-              <a:latin typeface="Arial"/>
-              <a:ea typeface="Arial"/>
-              <a:cs typeface="Arial"/>
-              <a:sym typeface="Arial"/>
-            </a:endParaRPr>
-          </a:p>
-        </p:txBody>
-      </p:sp>
-      <p:sp>
-        <p:nvSpPr>
-          <p:cNvPr id="82" name="Google Shape;82;p16"/>
-          <p:cNvSpPr txBox="1">
-            <a:spLocks noGrp="1"/>
-          </p:cNvSpPr>
-          <p:nvPr>
-            <p:ph type="title"/>
-          </p:nvPr>
-        </p:nvSpPr>
-        <p:spPr>
-          <a:xfrm>
-            <a:off x="296742" y="1115427"/>
-            <a:ext cx="3306007" cy="3458100"/>
-          </a:xfrm>
-          <a:prstGeom prst="rect">
-            <a:avLst/>
-          </a:prstGeom>
-          <a:noFill/>
-          <a:ln>
-            <a:noFill/>
-          </a:ln>
-        </p:spPr>
-        <p:txBody>
-          <a:bodyPr spcFirstLastPara="1" wrap="square" lIns="91425" tIns="91425" rIns="91425" bIns="91425" anchor="t" anchorCtr="0">
-            <a:noAutofit/>
-          </a:bodyPr>
-          <a:lstStyle/>
-          <a:p>
-            <a:pPr lvl="0"/>
-            <a:r>
-              <a:rPr lang="en-US" sz="2400" b="1" dirty="0"/>
-              <a:t>Data Loading and Cleaning</a:t>
-            </a:r>
-            <a:br>
-              <a:rPr lang="en-US" sz="2400" dirty="0"/>
-            </a:br>
-            <a:br>
-              <a:rPr lang="en-US" sz="2400" dirty="0"/>
-            </a:br>
-            <a:r>
-              <a:rPr lang="en-US" sz="2400" dirty="0"/>
-              <a:t>Preparation for the exploratory analysis</a:t>
-            </a:r>
-            <a:br>
-              <a:rPr lang="fr" sz="2400" dirty="0">
-                <a:solidFill>
-                  <a:srgbClr val="015955"/>
-                </a:solidFill>
-                <a:latin typeface="Inter"/>
-                <a:ea typeface="Inter"/>
-                <a:cs typeface="Inter"/>
-                <a:sym typeface="Inter"/>
-              </a:rPr>
-            </a:br>
-            <a:br>
-              <a:rPr lang="fr" sz="2400" dirty="0">
-                <a:solidFill>
-                  <a:srgbClr val="015955"/>
-                </a:solidFill>
-                <a:latin typeface="Inter"/>
-                <a:ea typeface="Inter"/>
-                <a:cs typeface="Inter"/>
-                <a:sym typeface="Inter"/>
-              </a:rPr>
-            </a:br>
-            <a:endParaRPr sz="2400" dirty="0">
-              <a:solidFill>
-                <a:srgbClr val="015955"/>
-              </a:solidFill>
-              <a:latin typeface="Inter"/>
-              <a:ea typeface="Inter"/>
-              <a:cs typeface="Inter"/>
-              <a:sym typeface="Inter"/>
-            </a:endParaRPr>
-          </a:p>
-        </p:txBody>
-      </p:sp>
-      <p:pic>
-        <p:nvPicPr>
-          <p:cNvPr id="83" name="Google Shape;83;p16"/>
-          <p:cNvPicPr preferRelativeResize="0"/>
-          <p:nvPr/>
-        </p:nvPicPr>
-        <p:blipFill rotWithShape="1">
-          <a:blip r:embed="rId3">
-            <a:alphaModFix/>
-          </a:blip>
-          <a:srcRect/>
-          <a:stretch/>
-        </p:blipFill>
-        <p:spPr>
-          <a:xfrm>
-            <a:off x="463375" y="482852"/>
-            <a:ext cx="576900" cy="385904"/>
-          </a:xfrm>
-          <a:prstGeom prst="rect">
-            <a:avLst/>
-          </a:prstGeom>
-          <a:noFill/>
-          <a:ln>
-            <a:noFill/>
-          </a:ln>
-        </p:spPr>
-      </p:pic>
-      <p:sp>
-        <p:nvSpPr>
-          <p:cNvPr id="84" name="Google Shape;84;p16"/>
-          <p:cNvSpPr txBox="1">
-            <a:spLocks noGrp="1"/>
-          </p:cNvSpPr>
-          <p:nvPr>
-            <p:ph type="ctrTitle" idx="4294967295"/>
-          </p:nvPr>
-        </p:nvSpPr>
-        <p:spPr>
-          <a:xfrm>
-            <a:off x="3925833" y="605285"/>
-            <a:ext cx="5056796" cy="3827230"/>
-          </a:xfrm>
-          <a:prstGeom prst="rect">
-            <a:avLst/>
-          </a:prstGeom>
-          <a:noFill/>
-          <a:ln>
-            <a:noFill/>
-          </a:ln>
-        </p:spPr>
-        <p:txBody>
-          <a:bodyPr spcFirstLastPara="1" wrap="square" lIns="91425" tIns="91425" rIns="91425" bIns="91425" anchor="t" anchorCtr="0">
-            <a:noAutofit/>
-          </a:bodyPr>
-          <a:lstStyle/>
-          <a:p>
-            <a:r>
-              <a:rPr lang="en-US" sz="1400" b="1" dirty="0"/>
-              <a:t>Initial Data State</a:t>
-            </a:r>
-            <a:br>
-              <a:rPr lang="en-US" sz="1400" dirty="0"/>
-            </a:br>
-            <a:r>
-              <a:rPr lang="en-US" sz="1400" dirty="0"/>
-              <a:t>- Loaded spam.csv dataset, containing 5572 messages.</a:t>
-            </a:r>
-            <a:br>
-              <a:rPr lang="en-US" sz="1400" dirty="0"/>
-            </a:br>
-            <a:r>
-              <a:rPr lang="en-US" sz="1400" dirty="0"/>
-              <a:t>- Initial observation revealed 5 columns: v1 (label), v2 (message), and three Unnamed columns</a:t>
-            </a:r>
-            <a:br>
-              <a:rPr lang="en-US" sz="1400" dirty="0"/>
-            </a:br>
-            <a:br>
-              <a:rPr lang="en-US" sz="1400" dirty="0"/>
-            </a:br>
-            <a:r>
-              <a:rPr lang="en-US" sz="1400" b="1" dirty="0"/>
-              <a:t>Cleaning Steps</a:t>
-            </a:r>
-            <a:br>
-              <a:rPr lang="en-US" sz="1400" dirty="0"/>
-            </a:br>
-            <a:r>
-              <a:rPr lang="en-US" sz="1400" dirty="0"/>
-              <a:t>- Column Dropping: Removed the Unnamed: 2, Unnamed: 3, and Unnamed: 4 columns.</a:t>
-            </a:r>
-            <a:br>
-              <a:rPr lang="en-US" sz="1400" dirty="0"/>
-            </a:br>
-            <a:r>
-              <a:rPr lang="en-US" sz="1400" dirty="0"/>
-              <a:t>- Column Renaming: Renamed v1 to label and v2 to message for clarity.</a:t>
-            </a:r>
-            <a:br>
-              <a:rPr lang="en-US" sz="1400" dirty="0"/>
-            </a:br>
-            <a:br>
-              <a:rPr lang="en-US" sz="1400" dirty="0"/>
-            </a:br>
-            <a:r>
-              <a:rPr lang="en-US" sz="1400" b="1" dirty="0"/>
-              <a:t>Resulting Dataset</a:t>
-            </a:r>
-            <a:br>
-              <a:rPr lang="en-US" sz="1400" dirty="0"/>
-            </a:br>
-            <a:r>
-              <a:rPr lang="en-US" sz="1400" dirty="0"/>
-              <a:t>Cleaned dataset now consists of 5572 messages with two key columns: label (ham/spam) and message (text content).</a:t>
-            </a:r>
-            <a:br>
-              <a:rPr lang="en-US" sz="1400" dirty="0"/>
-            </a:br>
-            <a:br>
-              <a:rPr lang="en-US" sz="1400" dirty="0"/>
-            </a:br>
-            <a:r>
-              <a:rPr lang="en-US" sz="1400" dirty="0"/>
-              <a:t>This prepared the data for subsequent exploratory analysis and feature engineering.</a:t>
-            </a:r>
-            <a:br>
-              <a:rPr lang="en-US" sz="1400" dirty="0"/>
-            </a:br>
-            <a:br>
-              <a:rPr lang="en-US" sz="1400" dirty="0"/>
-            </a:br>
-            <a:br>
-              <a:rPr lang="en-US" sz="1400" dirty="0"/>
-            </a:br>
-            <a:br>
-              <a:rPr lang="en-US" sz="1400" dirty="0"/>
-            </a:br>
-            <a:br>
-              <a:rPr lang="fr-FR" sz="1400" dirty="0"/>
-            </a:br>
-            <a:endParaRPr lang="en-US" sz="1400" dirty="0"/>
-          </a:p>
-        </p:txBody>
-      </p:sp>
-    </p:spTree>
-  </p:cSld>
-  <p:clrMapOvr>
-    <a:masterClrMapping/>
-  </p:clrMapOvr>
-</p:sld>
-</file>
-
-<file path=ppt/slides/slide6.xml><?xml version="1.0" encoding="utf-8"?>
-<p:sld xmlns:a="http://schemas.openxmlformats.org/drawingml/2006/main" xmlns:r="http://schemas.openxmlformats.org/officeDocument/2006/relationships" xmlns:p="http://schemas.openxmlformats.org/presentationml/2006/main">
+<p:sld xmlns:a="http://schemas.openxmlformats.org/drawingml/2006/main" xmlns:r="http://schemas.openxmlformats.org/officeDocument/2006/relationships" xmlns:p="http://schemas.openxmlformats.org/presentationml/2006/main" show="0">
   <p:cSld>
     <p:spTree>
       <p:nvGrpSpPr>
@@ -13277,8 +12240,8 @@
         </p:nvSpPr>
         <p:spPr>
           <a:xfrm>
-            <a:off x="3696605" y="362273"/>
-            <a:ext cx="5315100" cy="3642552"/>
+            <a:off x="3696605" y="362272"/>
+            <a:ext cx="5315100" cy="4155483"/>
           </a:xfrm>
           <a:prstGeom prst="rect">
             <a:avLst/>
@@ -13303,7 +12266,7 @@
             </a:br>
             <a:r>
               <a:rPr lang="en-US" sz="1600" dirty="0"/>
-              <a:t>Dataset has 5572 messages: 4825 'ham' (86.6%) and 747 'spam' (13.4%). This is crucial and addressed using class weighting during model training.</a:t>
+              <a:t>Dataset has 5572 messages: 4825 'ham' (86.6%) and 747 'spam' (13.4%). </a:t>
             </a:r>
             <a:br>
               <a:rPr lang="en-US" sz="1600" dirty="0"/>
@@ -13391,7 +12354,7 @@
 </p:sld>
 </file>
 
-<file path=ppt/slides/slide7.xml><?xml version="1.0" encoding="utf-8"?>
+<file path=ppt/slides/slide6.xml><?xml version="1.0" encoding="utf-8"?>
 <p:sld xmlns:a="http://schemas.openxmlformats.org/drawingml/2006/main" xmlns:r="http://schemas.openxmlformats.org/officeDocument/2006/relationships" xmlns:p="http://schemas.openxmlformats.org/presentationml/2006/main">
   <p:cSld>
     <p:spTree>
@@ -13512,31 +12475,35 @@
           <a:lstStyle/>
           <a:p>
             <a:r>
-              <a:rPr lang="en-US" b="1" dirty="0"/>
-              <a:t>Exploratory Data Analysis (EDA) &amp; Insights</a:t>
-            </a:r>
-            <a:br>
-              <a:rPr lang="en-US" b="1" dirty="0"/>
-            </a:br>
-            <a:br>
-              <a:rPr lang="en-US" b="1" dirty="0"/>
-            </a:br>
-            <a:r>
-              <a:rPr lang="en-US" dirty="0"/>
-              <a:t>Visualizations and </a:t>
-            </a:r>
-            <a:r>
-              <a:rPr lang="en-US" dirty="0" err="1"/>
-              <a:t>Observationsd</a:t>
-            </a:r>
-            <a:br>
-              <a:rPr lang="en-US" dirty="0"/>
-            </a:br>
-            <a:br>
-              <a:rPr lang="en-US" sz="2400" dirty="0"/>
-            </a:br>
-            <a:br>
-              <a:rPr lang="fr" sz="2400" dirty="0">
+              <a:rPr lang="fr-FR" b="1" noProof="0" dirty="0"/>
+              <a:t>Analyse exploratoire des données (EDA)</a:t>
+            </a:r>
+            <a:br>
+              <a:rPr lang="fr-FR" b="1" noProof="0" dirty="0"/>
+            </a:br>
+            <a:br>
+              <a:rPr lang="fr-FR" b="1" noProof="0" dirty="0"/>
+            </a:br>
+            <a:r>
+              <a:rPr lang="fr-FR" noProof="0" dirty="0"/>
+              <a:t>Visualisations </a:t>
+            </a:r>
+            <a:r>
+              <a:rPr lang="fr-FR" dirty="0"/>
+              <a:t>et</a:t>
+            </a:r>
+            <a:r>
+              <a:rPr lang="fr-FR" noProof="0" dirty="0"/>
+              <a:t> Observations</a:t>
+            </a:r>
+            <a:br>
+              <a:rPr lang="fr-FR" noProof="0" dirty="0"/>
+            </a:br>
+            <a:br>
+              <a:rPr lang="fr-FR" sz="2400" noProof="0" dirty="0"/>
+            </a:br>
+            <a:br>
+              <a:rPr lang="fr-FR" sz="2400" noProof="0" dirty="0">
                 <a:solidFill>
                   <a:srgbClr val="015955"/>
                 </a:solidFill>
@@ -13547,7 +12514,7 @@
               </a:rPr>
             </a:br>
             <a:br>
-              <a:rPr lang="fr" sz="2400" dirty="0">
+              <a:rPr lang="fr-FR" sz="2400" noProof="0" dirty="0">
                 <a:solidFill>
                   <a:srgbClr val="015955"/>
                 </a:solidFill>
@@ -13557,7 +12524,7 @@
                 <a:sym typeface="Inter"/>
               </a:rPr>
             </a:br>
-            <a:endParaRPr sz="2400" dirty="0">
+            <a:endParaRPr lang="fr-FR" sz="2400" noProof="0" dirty="0">
               <a:solidFill>
                 <a:srgbClr val="015955"/>
               </a:solidFill>
@@ -13621,7 +12588,7 @@
         <p:spPr>
           <a:xfrm>
             <a:off x="3696605" y="362273"/>
-            <a:ext cx="5315100" cy="3642552"/>
+            <a:ext cx="5315100" cy="4332390"/>
           </a:xfrm>
           <a:prstGeom prst="rect">
             <a:avLst/>
@@ -13637,46 +12604,59 @@
           </a:bodyPr>
           <a:lstStyle/>
           <a:p>
-            <a:br>
-              <a:rPr lang="en-US" sz="1400" dirty="0"/>
-            </a:br>
-            <a:br>
-              <a:rPr lang="en-US" sz="1400" dirty="0"/>
-            </a:br>
-            <a:r>
-              <a:rPr lang="en-US" sz="1400" b="1" dirty="0"/>
-              <a:t>Visualizations &amp; Observations:</a:t>
-            </a:r>
-            <a:br>
-              <a:rPr lang="en-US" sz="1400" dirty="0"/>
-            </a:br>
-            <a:br>
-              <a:rPr lang="en-US" sz="1400" dirty="0"/>
-            </a:br>
-            <a:r>
-              <a:rPr lang="en-US" sz="1400" dirty="0"/>
-              <a:t>Bar chart clearly shows the 'ham' vs. 'spam' distribution.</a:t>
-            </a:r>
-            <a:br>
-              <a:rPr lang="en-US" sz="1400" dirty="0"/>
-            </a:br>
-            <a:r>
-              <a:rPr lang="en-US" sz="1400" dirty="0"/>
-              <a:t>Initial message examples highlighted the linguistic differences and common spam tropes.</a:t>
-            </a:r>
-            <a:br>
-              <a:rPr lang="en-US" dirty="0"/>
-            </a:br>
-            <a:br>
-              <a:rPr lang="en-US" sz="1600" dirty="0"/>
-            </a:br>
-            <a:br>
-              <a:rPr lang="en-US" dirty="0"/>
-            </a:br>
-            <a:br>
-              <a:rPr lang="fr-FR" dirty="0"/>
-            </a:br>
-            <a:endParaRPr lang="en-US" sz="1600" dirty="0"/>
+            <a:r>
+              <a:rPr lang="fr-FR" sz="1600" b="1" dirty="0"/>
+              <a:t>Déséquilibre des classes considérable</a:t>
+            </a:r>
+            <a:br>
+              <a:rPr lang="fr-FR" sz="1600" dirty="0"/>
+            </a:br>
+            <a:br>
+              <a:rPr lang="fr-FR" sz="1600" b="1" dirty="0"/>
+            </a:br>
+            <a:r>
+              <a:rPr lang="fr-FR" sz="1600" b="1" dirty="0"/>
+              <a:t>Différences de longueur des messages</a:t>
+            </a:r>
+            <a:br>
+              <a:rPr lang="fr-FR" sz="1600" dirty="0"/>
+            </a:br>
+            <a:br>
+              <a:rPr lang="fr-FR" sz="1600" dirty="0"/>
+            </a:br>
+            <a:r>
+              <a:rPr lang="fr-FR" sz="1600" b="1" dirty="0"/>
+              <a:t>Registre du langage distinct</a:t>
+            </a:r>
+            <a:br>
+              <a:rPr lang="fr-FR" sz="1600" dirty="0"/>
+            </a:br>
+            <a:br>
+              <a:rPr lang="fr-FR" sz="1600" dirty="0"/>
+            </a:br>
+            <a:r>
+              <a:rPr lang="fr-FR" sz="1600" b="1" dirty="0"/>
+              <a:t>Tendances du vocabulaire</a:t>
+            </a:r>
+            <a:br>
+              <a:rPr lang="fr-FR" sz="1600" dirty="0"/>
+            </a:br>
+            <a:br>
+              <a:rPr lang="fr-FR" sz="1400" dirty="0"/>
+            </a:br>
+            <a:br>
+              <a:rPr lang="fr-FR" sz="1400" dirty="0"/>
+            </a:br>
+            <a:br>
+              <a:rPr lang="fr-FR" sz="1600" noProof="0" dirty="0"/>
+            </a:br>
+            <a:br>
+              <a:rPr lang="fr-FR" noProof="0" dirty="0"/>
+            </a:br>
+            <a:br>
+              <a:rPr lang="fr-FR" noProof="0" dirty="0"/>
+            </a:br>
+            <a:endParaRPr lang="fr-FR" sz="1600" noProof="0" dirty="0"/>
           </a:p>
         </p:txBody>
       </p:sp>
@@ -13709,8 +12689,8 @@
         </p:blipFill>
         <p:spPr bwMode="auto">
           <a:xfrm>
-            <a:off x="3701768" y="2152326"/>
-            <a:ext cx="2542323" cy="1697290"/>
+            <a:off x="3696603" y="2397760"/>
+            <a:ext cx="2738107" cy="1827998"/>
           </a:xfrm>
           <a:prstGeom prst="rect">
             <a:avLst/>
@@ -13756,8 +12736,8 @@
         </p:blipFill>
         <p:spPr bwMode="auto">
           <a:xfrm>
-            <a:off x="6211079" y="2183549"/>
-            <a:ext cx="2542323" cy="1635974"/>
+            <a:off x="6416384" y="3382470"/>
+            <a:ext cx="2480093" cy="1595929"/>
           </a:xfrm>
           <a:prstGeom prst="rect">
             <a:avLst/>
@@ -13787,7 +12767,7 @@
 </p:sld>
 </file>
 
-<file path=ppt/slides/slide8.xml><?xml version="1.0" encoding="utf-8"?>
+<file path=ppt/slides/slide7.xml><?xml version="1.0" encoding="utf-8"?>
 <p:sld xmlns:a="http://schemas.openxmlformats.org/drawingml/2006/main" xmlns:r="http://schemas.openxmlformats.org/officeDocument/2006/relationships" xmlns:p="http://schemas.openxmlformats.org/presentationml/2006/main">
   <p:cSld>
     <p:spTree>
@@ -13908,8 +12888,8 @@
           <a:lstStyle/>
           <a:p>
             <a:r>
-              <a:rPr lang="en-US" b="1" dirty="0"/>
-              <a:t>Feature Engineering: </a:t>
+              <a:rPr lang="fr-FR" b="1" dirty="0"/>
+              <a:t>Ingénierie des variables spécifiques au domaine </a:t>
             </a:r>
             <a:br>
               <a:rPr lang="en-US" dirty="0"/>
@@ -13919,7 +12899,15 @@
             </a:br>
             <a:r>
               <a:rPr lang="en-US" dirty="0"/>
-              <a:t>Spam Keyword Features</a:t>
+              <a:t>Mots </a:t>
+            </a:r>
+            <a:r>
+              <a:rPr lang="en-US" dirty="0" err="1"/>
+              <a:t>clés</a:t>
+            </a:r>
+            <a:r>
+              <a:rPr lang="en-US" dirty="0"/>
+              <a:t> dans les spams</a:t>
             </a:r>
             <a:br>
               <a:rPr lang="en-US" dirty="0"/>
@@ -14018,7 +13006,7 @@
         </p:nvSpPr>
         <p:spPr>
           <a:xfrm>
-            <a:off x="3588119" y="579249"/>
+            <a:off x="3740519" y="1141433"/>
             <a:ext cx="5315100" cy="3425576"/>
           </a:xfrm>
           <a:prstGeom prst="rect">
@@ -14036,64 +13024,72 @@
           <a:lstStyle/>
           <a:p>
             <a:r>
-              <a:rPr lang="en-US" sz="1800" dirty="0"/>
-              <a:t>Quantifying Spam Indicators based on the initial exploratory data analysis (vocabulary patterns) in spam messages:</a:t>
-            </a:r>
-            <a:br>
-              <a:rPr lang="en-US" sz="1800" dirty="0"/>
-            </a:br>
-            <a:br>
-              <a:rPr lang="en-US" sz="1800" dirty="0"/>
-            </a:br>
-            <a:r>
-              <a:rPr lang="en-US" sz="1800" dirty="0"/>
+              <a:rPr lang="fr-FR" sz="1800" noProof="0" dirty="0"/>
+              <a:t>Quantifier les indicateurs de spam en se basant sur l’analyses exploratoire:</a:t>
+            </a:r>
+            <a:br>
+              <a:rPr lang="fr-FR" sz="1800" noProof="0" dirty="0"/>
+            </a:br>
+            <a:br>
+              <a:rPr lang="fr-FR" sz="1800" noProof="0" dirty="0"/>
+            </a:br>
+            <a:r>
+              <a:rPr lang="fr-FR" sz="1800" noProof="0" dirty="0"/>
               <a:t> - </a:t>
             </a:r>
             <a:r>
-              <a:rPr lang="en-US" sz="1800" dirty="0" err="1"/>
+              <a:rPr lang="fr-FR" sz="1800" noProof="0" dirty="0" err="1"/>
               <a:t>spam_keyword_count</a:t>
             </a:r>
             <a:r>
-              <a:rPr lang="en-US" sz="1800" dirty="0"/>
-              <a:t>: counts the occurrences of any defined spam keywords within each message</a:t>
-            </a:r>
-            <a:br>
-              <a:rPr lang="en-US" sz="1800" dirty="0"/>
-            </a:br>
-            <a:br>
-              <a:rPr lang="en-US" sz="1800" dirty="0"/>
-            </a:br>
-            <a:r>
-              <a:rPr lang="en-US" sz="1800" dirty="0"/>
+              <a:rPr lang="fr-FR" sz="1800" noProof="0" dirty="0"/>
+              <a:t>: compte les occurrences des mots clés attribués aux spams</a:t>
+            </a:r>
+            <a:br>
+              <a:rPr lang="fr-FR" sz="1800" noProof="0" dirty="0"/>
+            </a:br>
+            <a:br>
+              <a:rPr lang="fr-FR" sz="1800" noProof="0" dirty="0"/>
+            </a:br>
+            <a:r>
+              <a:rPr lang="fr-FR" sz="1800" noProof="0" dirty="0"/>
               <a:t> - </a:t>
             </a:r>
             <a:r>
-              <a:rPr lang="en-US" sz="1800" dirty="0" err="1"/>
+              <a:rPr lang="fr-FR" sz="1800" noProof="0" dirty="0" err="1"/>
               <a:t>has_spam_keywords</a:t>
             </a:r>
             <a:r>
-              <a:rPr lang="en-US" sz="1800" dirty="0"/>
-              <a:t>: A binary feature (0 or 1) indicating whether a message contains at least one spam keyword.</a:t>
-            </a:r>
-            <a:br>
-              <a:rPr lang="en-US" sz="1800" dirty="0"/>
-            </a:br>
-            <a:br>
-              <a:rPr lang="en-US" sz="1800" dirty="0"/>
-            </a:br>
-            <a:br>
-              <a:rPr lang="en-US" sz="1600" dirty="0"/>
-            </a:br>
-            <a:br>
-              <a:rPr lang="en-US" dirty="0"/>
-            </a:br>
-            <a:br>
-              <a:rPr lang="fr-FR" sz="1600" dirty="0"/>
-            </a:br>
-            <a:br>
-              <a:rPr lang="fr-FR" dirty="0"/>
-            </a:br>
-            <a:endParaRPr lang="en-US" sz="1600" dirty="0"/>
+              <a:rPr lang="fr-FR" sz="1800" noProof="0" dirty="0"/>
+              <a:t>: une variable binaire (0 ou 1) </a:t>
+            </a:r>
+            <a:r>
+              <a:rPr lang="fr-FR" sz="1800" noProof="0" dirty="0" err="1"/>
+              <a:t>indicant</a:t>
+            </a:r>
+            <a:r>
+              <a:rPr lang="fr-FR" sz="1800" noProof="0" dirty="0"/>
+              <a:t> si le message contient le mot clé ou non</a:t>
+            </a:r>
+            <a:br>
+              <a:rPr lang="fr-FR" sz="1800" noProof="0" dirty="0"/>
+            </a:br>
+            <a:br>
+              <a:rPr lang="fr-FR" sz="1800" noProof="0" dirty="0"/>
+            </a:br>
+            <a:br>
+              <a:rPr lang="fr-FR" sz="1600" noProof="0" dirty="0"/>
+            </a:br>
+            <a:br>
+              <a:rPr lang="fr-FR" noProof="0" dirty="0"/>
+            </a:br>
+            <a:br>
+              <a:rPr lang="fr-FR" sz="1600" noProof="0" dirty="0"/>
+            </a:br>
+            <a:br>
+              <a:rPr lang="fr-FR" noProof="0" dirty="0"/>
+            </a:br>
+            <a:endParaRPr lang="fr-FR" sz="1600" noProof="0" dirty="0"/>
           </a:p>
         </p:txBody>
       </p:sp>
@@ -14110,7 +13106,7 @@
 </p:sld>
 </file>
 
-<file path=ppt/slides/slide9.xml><?xml version="1.0" encoding="utf-8"?>
+<file path=ppt/slides/slide8.xml><?xml version="1.0" encoding="utf-8"?>
 <p:sld xmlns:a="http://schemas.openxmlformats.org/drawingml/2006/main" xmlns:r="http://schemas.openxmlformats.org/officeDocument/2006/relationships" xmlns:p="http://schemas.openxmlformats.org/presentationml/2006/main">
   <p:cSld>
     <p:spTree>
@@ -14231,24 +13227,32 @@
           <a:lstStyle/>
           <a:p>
             <a:r>
-              <a:rPr lang="en-US" b="1" dirty="0"/>
-              <a:t>Text Embedding with Sentence Transformers</a:t>
-            </a:r>
-            <a:br>
-              <a:rPr lang="en-US" dirty="0"/>
-            </a:br>
-            <a:br>
-              <a:rPr lang="en-US" dirty="0"/>
-            </a:br>
-            <a:r>
-              <a:rPr lang="en-US" dirty="0"/>
-              <a:t>- Converting Text to Meaningful Vectors</a:t>
-            </a:r>
-            <a:br>
-              <a:rPr lang="fr-FR" b="1" dirty="0"/>
-            </a:br>
-            <a:br>
-              <a:rPr lang="fr" sz="2400" dirty="0">
+              <a:rPr lang="fr-FR" b="1" noProof="0" dirty="0" err="1"/>
+              <a:t>Embedding</a:t>
+            </a:r>
+            <a:r>
+              <a:rPr lang="fr-FR" b="1" noProof="0" dirty="0"/>
+              <a:t> du texte avec Sentence Transformers</a:t>
+            </a:r>
+            <a:br>
+              <a:rPr lang="fr-FR" noProof="0" dirty="0"/>
+            </a:br>
+            <a:br>
+              <a:rPr lang="fr-FR" noProof="0" dirty="0"/>
+            </a:br>
+            <a:r>
+              <a:rPr lang="fr-FR" noProof="0" dirty="0"/>
+              <a:t>- Convertir le texte en </a:t>
+            </a:r>
+            <a:r>
+              <a:rPr lang="fr-FR" noProof="0"/>
+              <a:t>vecteurs sémantiques</a:t>
+            </a:r>
+            <a:br>
+              <a:rPr lang="fr-FR" b="1" noProof="0" dirty="0"/>
+            </a:br>
+            <a:br>
+              <a:rPr lang="fr-FR" sz="2400" noProof="0" dirty="0">
                 <a:solidFill>
                   <a:srgbClr val="015955"/>
                 </a:solidFill>
@@ -14259,7 +13263,7 @@
               </a:rPr>
             </a:br>
             <a:br>
-              <a:rPr lang="fr" sz="2400" dirty="0">
+              <a:rPr lang="fr-FR" sz="2400" noProof="0" dirty="0">
                 <a:solidFill>
                   <a:srgbClr val="015955"/>
                 </a:solidFill>
@@ -14269,7 +13273,7 @@
                 <a:sym typeface="Inter"/>
               </a:rPr>
             </a:br>
-            <a:endParaRPr sz="2400" dirty="0">
+            <a:endParaRPr lang="fr-FR" sz="2400" noProof="0" dirty="0">
               <a:solidFill>
                 <a:srgbClr val="015955"/>
               </a:solidFill>
@@ -14333,7 +13337,7 @@
         <p:spPr>
           <a:xfrm>
             <a:off x="3526124" y="579249"/>
-            <a:ext cx="5315100" cy="3425576"/>
+            <a:ext cx="5315100" cy="4302994"/>
           </a:xfrm>
           <a:prstGeom prst="rect">
             <a:avLst/>
@@ -14350,74 +13354,90 @@
           <a:lstStyle/>
           <a:p>
             <a:r>
-              <a:rPr lang="en-US" sz="1800" b="1" dirty="0"/>
-              <a:t>Sentence Transformer Model: </a:t>
-            </a:r>
-            <a:br>
-              <a:rPr lang="en-US" sz="1800" b="1" dirty="0"/>
-            </a:br>
-            <a:r>
-              <a:rPr lang="en-US" sz="1800" dirty="0"/>
-              <a:t>Use of </a:t>
-            </a:r>
-            <a:r>
-              <a:rPr lang="en-US" sz="1800" b="1" dirty="0"/>
+              <a:rPr lang="fr-FR" sz="1800" b="1" noProof="0" dirty="0"/>
+              <a:t>Modèle existant Sentence Transformer:</a:t>
+            </a:r>
+            <a:br>
+              <a:rPr lang="fr-FR" sz="1800" b="1" noProof="0" dirty="0"/>
+            </a:br>
+            <a:r>
+              <a:rPr lang="fr-FR" sz="1800" noProof="0" dirty="0"/>
+              <a:t>Utiliser </a:t>
+            </a:r>
+            <a:r>
+              <a:rPr lang="fr-FR" sz="1800" b="1" noProof="0" dirty="0"/>
               <a:t>all-MiniLM-L6-v2</a:t>
             </a:r>
             <a:r>
-              <a:rPr lang="en-US" sz="1800" dirty="0"/>
-              <a:t> known for its excellent balance of speed and performance.</a:t>
-            </a:r>
-            <a:br>
-              <a:rPr lang="en-US" sz="1800" dirty="0"/>
-            </a:br>
-            <a:br>
-              <a:rPr lang="en-US" sz="1800" dirty="0"/>
-            </a:br>
-            <a:r>
-              <a:rPr lang="en-US" sz="1800" b="1" dirty="0"/>
-              <a:t>Embedding Generation:</a:t>
-            </a:r>
-            <a:br>
-              <a:rPr lang="en-US" sz="1800" dirty="0"/>
-            </a:br>
-            <a:r>
-              <a:rPr lang="en-US" sz="1800" dirty="0"/>
-              <a:t>Each message was transformed into a dense numerical vector of 384 dimensions.</a:t>
-            </a:r>
-            <a:br>
-              <a:rPr lang="en-US" sz="1800" dirty="0"/>
-            </a:br>
-            <a:br>
-              <a:rPr lang="en-US" sz="1800" dirty="0"/>
-            </a:br>
-            <a:r>
-              <a:rPr lang="en-US" sz="1800" b="1" dirty="0"/>
-              <a:t>Combination with Engineered Features:</a:t>
-            </a:r>
-            <a:br>
-              <a:rPr lang="en-US" sz="1800" b="1" dirty="0"/>
-            </a:br>
-            <a:r>
-              <a:rPr lang="en-US" sz="1800" dirty="0"/>
-              <a:t>Semantic embeddings were concatenated with the 8 domain-specific engineered features =&gt; combined feature set of 392 dimensions per message</a:t>
-            </a:r>
-            <a:br>
-              <a:rPr lang="en-US" sz="1800" dirty="0"/>
-            </a:br>
-            <a:br>
-              <a:rPr lang="en-US" sz="1800" dirty="0"/>
-            </a:br>
-            <a:br>
-              <a:rPr lang="en-US" dirty="0"/>
-            </a:br>
-            <a:br>
-              <a:rPr lang="fr-FR" sz="1600" dirty="0"/>
-            </a:br>
-            <a:br>
-              <a:rPr lang="fr-FR" dirty="0"/>
-            </a:br>
-            <a:endParaRPr lang="en-US" sz="1600" dirty="0"/>
+              <a:rPr lang="fr-FR" sz="1800" noProof="0" dirty="0"/>
+              <a:t> connu pour son </a:t>
+            </a:r>
+            <a:r>
+              <a:rPr lang="fr-FR" sz="1800" noProof="0" dirty="0" err="1"/>
+              <a:t>équlibre</a:t>
+            </a:r>
+            <a:r>
+              <a:rPr lang="fr-FR" sz="1800" noProof="0" dirty="0"/>
+              <a:t> entre la Vitesse et la performance.</a:t>
+            </a:r>
+            <a:br>
+              <a:rPr lang="fr-FR" sz="1800" noProof="0" dirty="0"/>
+            </a:br>
+            <a:br>
+              <a:rPr lang="fr-FR" sz="1800" noProof="0" dirty="0"/>
+            </a:br>
+            <a:r>
+              <a:rPr lang="fr-FR" sz="1800" b="1" noProof="0" dirty="0"/>
+              <a:t>Génération des </a:t>
+            </a:r>
+            <a:r>
+              <a:rPr lang="fr-FR" sz="1800" b="1" noProof="0" dirty="0" err="1"/>
+              <a:t>Embedding</a:t>
+            </a:r>
+            <a:r>
+              <a:rPr lang="fr-FR" sz="1800" b="1" noProof="0" dirty="0"/>
+              <a:t>:</a:t>
+            </a:r>
+            <a:br>
+              <a:rPr lang="fr-FR" sz="1800" noProof="0" dirty="0"/>
+            </a:br>
+            <a:r>
+              <a:rPr lang="fr-FR" sz="1800" noProof="0" dirty="0"/>
+              <a:t>Transformer chaque message en vecteur numérique de 384 dimensions porteur de la valeur sémantique.</a:t>
+            </a:r>
+            <a:br>
+              <a:rPr lang="fr-FR" sz="1800" noProof="0" dirty="0"/>
+            </a:br>
+            <a:br>
+              <a:rPr lang="fr-FR" sz="1800" noProof="0" dirty="0"/>
+            </a:br>
+            <a:r>
+              <a:rPr lang="fr-FR" sz="1800" b="1" noProof="0" dirty="0"/>
+              <a:t>Combiner avec les variables élaborées précédemment:</a:t>
+            </a:r>
+            <a:br>
+              <a:rPr lang="fr-FR" sz="1800" b="1" noProof="0" dirty="0"/>
+            </a:br>
+            <a:r>
+              <a:rPr lang="fr-FR" sz="1800" noProof="0" dirty="0"/>
+              <a:t>Concaténer les vecteurs sémantiques avec les 8 variables spécifiques =&gt; l’ensemble des variables contient 392 dimensions par message</a:t>
+            </a:r>
+            <a:br>
+              <a:rPr lang="fr-FR" sz="1800" noProof="0" dirty="0"/>
+            </a:br>
+            <a:br>
+              <a:rPr lang="fr-FR" sz="1800" noProof="0" dirty="0"/>
+            </a:br>
+            <a:br>
+              <a:rPr lang="fr-FR" noProof="0" dirty="0"/>
+            </a:br>
+            <a:br>
+              <a:rPr lang="fr-FR" sz="1600" noProof="0" dirty="0"/>
+            </a:br>
+            <a:br>
+              <a:rPr lang="fr-FR" noProof="0" dirty="0"/>
+            </a:br>
+            <a:endParaRPr lang="fr-FR" sz="1600" noProof="0" dirty="0"/>
           </a:p>
         </p:txBody>
       </p:sp>
@@ -14425,6 +13445,397 @@
     <p:extLst>
       <p:ext uri="{BB962C8B-B14F-4D97-AF65-F5344CB8AC3E}">
         <p14:creationId xmlns:p14="http://schemas.microsoft.com/office/powerpoint/2010/main" val="3349117093"/>
+      </p:ext>
+    </p:extLst>
+  </p:cSld>
+  <p:clrMapOvr>
+    <a:masterClrMapping/>
+  </p:clrMapOvr>
+</p:sld>
+</file>
+
+<file path=ppt/slides/slide9.xml><?xml version="1.0" encoding="utf-8"?>
+<p:sld xmlns:a="http://schemas.openxmlformats.org/drawingml/2006/main" xmlns:r="http://schemas.openxmlformats.org/officeDocument/2006/relationships" xmlns:p="http://schemas.openxmlformats.org/presentationml/2006/main">
+  <p:cSld>
+    <p:spTree>
+      <p:nvGrpSpPr>
+        <p:cNvPr id="1" name="Shape 80">
+          <a:extLst>
+            <a:ext uri="{FF2B5EF4-FFF2-40B4-BE49-F238E27FC236}">
+              <a16:creationId xmlns:a16="http://schemas.microsoft.com/office/drawing/2014/main" id="{8F107260-E9E3-F2FF-2773-9B1ED7275C4E}"/>
+            </a:ext>
+          </a:extLst>
+        </p:cNvPr>
+        <p:cNvGrpSpPr/>
+        <p:nvPr/>
+      </p:nvGrpSpPr>
+      <p:grpSpPr>
+        <a:xfrm>
+          <a:off x="0" y="0"/>
+          <a:ext cx="0" cy="0"/>
+          <a:chOff x="0" y="0"/>
+          <a:chExt cx="0" cy="0"/>
+        </a:xfrm>
+      </p:grpSpPr>
+      <p:sp>
+        <p:nvSpPr>
+          <p:cNvPr id="81" name="Google Shape;81;p16">
+            <a:extLst>
+              <a:ext uri="{FF2B5EF4-FFF2-40B4-BE49-F238E27FC236}">
+                <a16:creationId xmlns:a16="http://schemas.microsoft.com/office/drawing/2014/main" id="{04979A22-C8E0-FFFA-9852-DCCD10627B77}"/>
+              </a:ext>
+            </a:extLst>
+          </p:cNvPr>
+          <p:cNvSpPr/>
+          <p:nvPr/>
+        </p:nvSpPr>
+        <p:spPr>
+          <a:xfrm>
+            <a:off x="5499" y="-17775"/>
+            <a:ext cx="3520625" cy="5161200"/>
+          </a:xfrm>
+          <a:prstGeom prst="rect">
+            <a:avLst/>
+          </a:prstGeom>
+          <a:solidFill>
+            <a:srgbClr val="C3FFFC"/>
+          </a:solidFill>
+          <a:ln>
+            <a:noFill/>
+          </a:ln>
+        </p:spPr>
+        <p:txBody>
+          <a:bodyPr spcFirstLastPara="1" wrap="square" lIns="91425" tIns="91425" rIns="91425" bIns="91425" anchor="ctr" anchorCtr="0">
+            <a:noAutofit/>
+          </a:bodyPr>
+          <a:lstStyle/>
+          <a:p>
+            <a:pPr marL="0" marR="0" lvl="0" indent="0" algn="l" rtl="0">
+              <a:lnSpc>
+                <a:spcPct val="100000"/>
+              </a:lnSpc>
+              <a:spcBef>
+                <a:spcPts val="0"/>
+              </a:spcBef>
+              <a:spcAft>
+                <a:spcPts val="0"/>
+              </a:spcAft>
+              <a:buClr>
+                <a:srgbClr val="000000"/>
+              </a:buClr>
+              <a:buSzPts val="1400"/>
+              <a:buFont typeface="Arial"/>
+              <a:buNone/>
+            </a:pPr>
+            <a:endParaRPr sz="1400" b="0" i="0" u="none" strike="noStrike" cap="none">
+              <a:solidFill>
+                <a:srgbClr val="000000"/>
+              </a:solidFill>
+              <a:latin typeface="Arial"/>
+              <a:ea typeface="Arial"/>
+              <a:cs typeface="Arial"/>
+              <a:sym typeface="Arial"/>
+            </a:endParaRPr>
+          </a:p>
+        </p:txBody>
+      </p:sp>
+      <p:sp>
+        <p:nvSpPr>
+          <p:cNvPr id="82" name="Google Shape;82;p16">
+            <a:extLst>
+              <a:ext uri="{FF2B5EF4-FFF2-40B4-BE49-F238E27FC236}">
+                <a16:creationId xmlns:a16="http://schemas.microsoft.com/office/drawing/2014/main" id="{2AECFF55-D3E0-E752-1051-22457DE80FFD}"/>
+              </a:ext>
+            </a:extLst>
+          </p:cNvPr>
+          <p:cNvSpPr txBox="1">
+            <a:spLocks noGrp="1"/>
+          </p:cNvSpPr>
+          <p:nvPr>
+            <p:ph type="title"/>
+          </p:nvPr>
+        </p:nvSpPr>
+        <p:spPr>
+          <a:xfrm>
+            <a:off x="438808" y="967077"/>
+            <a:ext cx="2988031" cy="3774288"/>
+          </a:xfrm>
+          <a:prstGeom prst="rect">
+            <a:avLst/>
+          </a:prstGeom>
+          <a:noFill/>
+          <a:ln>
+            <a:noFill/>
+          </a:ln>
+        </p:spPr>
+        <p:txBody>
+          <a:bodyPr spcFirstLastPara="1" wrap="square" lIns="91425" tIns="91425" rIns="91425" bIns="91425" anchor="t" anchorCtr="0">
+            <a:noAutofit/>
+          </a:bodyPr>
+          <a:lstStyle/>
+          <a:p>
+            <a:r>
+              <a:rPr lang="fr-FR" b="1" dirty="0"/>
+              <a:t>Architecture des modèles neuronaux </a:t>
+            </a:r>
+            <a:br>
+              <a:rPr lang="fr-FR" b="1" dirty="0"/>
+            </a:br>
+            <a:br>
+              <a:rPr lang="fr-FR" dirty="0"/>
+            </a:br>
+            <a:r>
+              <a:rPr lang="fr-FR" sz="2000" dirty="0"/>
+              <a:t>- 2 réseaux neuronaux à propagation directe pour une classification binaire efficace</a:t>
+            </a:r>
+            <a:br>
+              <a:rPr lang="fr-FR" b="1" dirty="0"/>
+            </a:br>
+            <a:br>
+              <a:rPr lang="fr" sz="2400" dirty="0">
+                <a:solidFill>
+                  <a:srgbClr val="015955"/>
+                </a:solidFill>
+                <a:latin typeface="Inter"/>
+                <a:ea typeface="Inter"/>
+                <a:cs typeface="Inter"/>
+                <a:sym typeface="Inter"/>
+              </a:rPr>
+            </a:br>
+            <a:br>
+              <a:rPr lang="fr" sz="2400" dirty="0">
+                <a:solidFill>
+                  <a:srgbClr val="015955"/>
+                </a:solidFill>
+                <a:latin typeface="Inter"/>
+                <a:ea typeface="Inter"/>
+                <a:cs typeface="Inter"/>
+                <a:sym typeface="Inter"/>
+              </a:rPr>
+            </a:br>
+            <a:endParaRPr sz="2400" dirty="0">
+              <a:solidFill>
+                <a:srgbClr val="015955"/>
+              </a:solidFill>
+              <a:latin typeface="Inter"/>
+              <a:ea typeface="Inter"/>
+              <a:cs typeface="Inter"/>
+              <a:sym typeface="Inter"/>
+            </a:endParaRPr>
+          </a:p>
+        </p:txBody>
+      </p:sp>
+      <p:pic>
+        <p:nvPicPr>
+          <p:cNvPr id="83" name="Google Shape;83;p16">
+            <a:extLst>
+              <a:ext uri="{FF2B5EF4-FFF2-40B4-BE49-F238E27FC236}">
+                <a16:creationId xmlns:a16="http://schemas.microsoft.com/office/drawing/2014/main" id="{8C51FDFF-64D4-7826-EACF-38E4037EB7A9}"/>
+              </a:ext>
+            </a:extLst>
+          </p:cNvPr>
+          <p:cNvPicPr preferRelativeResize="0"/>
+          <p:nvPr/>
+        </p:nvPicPr>
+        <p:blipFill rotWithShape="1">
+          <a:blip r:embed="rId3">
+            <a:alphaModFix/>
+          </a:blip>
+          <a:srcRect/>
+          <a:stretch/>
+        </p:blipFill>
+        <p:spPr>
+          <a:xfrm>
+            <a:off x="463375" y="482852"/>
+            <a:ext cx="576900" cy="385904"/>
+          </a:xfrm>
+          <a:prstGeom prst="rect">
+            <a:avLst/>
+          </a:prstGeom>
+          <a:noFill/>
+          <a:ln>
+            <a:noFill/>
+          </a:ln>
+        </p:spPr>
+      </p:pic>
+      <p:sp>
+        <p:nvSpPr>
+          <p:cNvPr id="84" name="Google Shape;84;p16">
+            <a:extLst>
+              <a:ext uri="{FF2B5EF4-FFF2-40B4-BE49-F238E27FC236}">
+                <a16:creationId xmlns:a16="http://schemas.microsoft.com/office/drawing/2014/main" id="{F5F910D5-3B49-70D5-2E53-E96797673320}"/>
+              </a:ext>
+            </a:extLst>
+          </p:cNvPr>
+          <p:cNvSpPr txBox="1">
+            <a:spLocks noGrp="1"/>
+          </p:cNvSpPr>
+          <p:nvPr>
+            <p:ph type="ctrTitle" idx="4294967295"/>
+          </p:nvPr>
+        </p:nvSpPr>
+        <p:spPr>
+          <a:xfrm>
+            <a:off x="3526124" y="341931"/>
+            <a:ext cx="5455142" cy="4441788"/>
+          </a:xfrm>
+          <a:prstGeom prst="rect">
+            <a:avLst/>
+          </a:prstGeom>
+          <a:noFill/>
+          <a:ln>
+            <a:noFill/>
+          </a:ln>
+        </p:spPr>
+        <p:txBody>
+          <a:bodyPr spcFirstLastPara="1" wrap="square" lIns="91425" tIns="91425" rIns="91425" bIns="91425" anchor="t" anchorCtr="0">
+            <a:noAutofit/>
+          </a:bodyPr>
+          <a:lstStyle/>
+          <a:p>
+            <a:r>
+              <a:rPr lang="fr-FR" sz="1600" b="1" noProof="0" dirty="0"/>
+              <a:t>Conception:</a:t>
+            </a:r>
+            <a:br>
+              <a:rPr lang="fr-FR" sz="1600" noProof="0" dirty="0"/>
+            </a:br>
+            <a:br>
+              <a:rPr lang="fr-FR" sz="1600" noProof="0" dirty="0"/>
+            </a:br>
+            <a:r>
+              <a:rPr lang="fr-FR" sz="1600" b="1" noProof="0" dirty="0"/>
+              <a:t>Couche d’entrée</a:t>
+            </a:r>
+            <a:r>
+              <a:rPr lang="fr-FR" sz="1600" noProof="0" dirty="0"/>
+              <a:t>: 392 variables (384 de Sentence Transformers + 8 variables spécifiques).</a:t>
+            </a:r>
+            <a:br>
+              <a:rPr lang="fr-FR" sz="1600" noProof="0" dirty="0"/>
+            </a:br>
+            <a:br>
+              <a:rPr lang="fr-FR" sz="1600" noProof="0" dirty="0"/>
+            </a:br>
+            <a:r>
+              <a:rPr lang="fr-FR" sz="1600" b="1" noProof="0" dirty="0"/>
+              <a:t>Couche de sortie</a:t>
+            </a:r>
+            <a:r>
+              <a:rPr lang="fr-FR" sz="1600" noProof="0" dirty="0"/>
+              <a:t>: Simple neurone avec l’activation sigmoïde pour la classification binaire (spam/</a:t>
+            </a:r>
+            <a:r>
+              <a:rPr lang="fr-FR" sz="1600" noProof="0" dirty="0" err="1"/>
+              <a:t>ham</a:t>
+            </a:r>
+            <a:r>
+              <a:rPr lang="fr-FR" sz="1600" noProof="0" dirty="0"/>
+              <a:t>).</a:t>
+            </a:r>
+            <a:br>
+              <a:rPr lang="fr-FR" sz="1600" noProof="0" dirty="0"/>
+            </a:br>
+            <a:br>
+              <a:rPr lang="fr-FR" sz="1600" noProof="0" dirty="0"/>
+            </a:br>
+            <a:r>
+              <a:rPr lang="fr-FR" sz="1600" b="1" noProof="0" dirty="0"/>
+              <a:t>Activation</a:t>
+            </a:r>
+            <a:r>
+              <a:rPr lang="fr-FR" sz="1600" noProof="0" dirty="0"/>
+              <a:t>: </a:t>
+            </a:r>
+            <a:r>
+              <a:rPr lang="fr-FR" sz="1600" noProof="0" dirty="0" err="1"/>
+              <a:t>ReLU</a:t>
+            </a:r>
+            <a:r>
+              <a:rPr lang="fr-FR" sz="1600" noProof="0" dirty="0"/>
+              <a:t> pour la non-linéarité dans les couches cachées.</a:t>
+            </a:r>
+            <a:br>
+              <a:rPr lang="fr-FR" sz="1600" noProof="0" dirty="0"/>
+            </a:br>
+            <a:br>
+              <a:rPr lang="fr-FR" sz="1600" noProof="0" dirty="0"/>
+            </a:br>
+            <a:r>
+              <a:rPr lang="fr-FR" sz="1600" b="1" noProof="0" dirty="0"/>
+              <a:t>Dropout</a:t>
+            </a:r>
+            <a:r>
+              <a:rPr lang="fr-FR" sz="1600" noProof="0" dirty="0"/>
+              <a:t>: Inclut pour prévenir l’</a:t>
+            </a:r>
+            <a:r>
+              <a:rPr lang="fr-FR" sz="1600" noProof="0" dirty="0" err="1"/>
+              <a:t>overfitting</a:t>
+            </a:r>
+            <a:r>
+              <a:rPr lang="fr-FR" sz="1600" noProof="0" dirty="0"/>
+              <a:t>, </a:t>
+            </a:r>
+            <a:r>
+              <a:rPr lang="fr-FR" sz="1600" noProof="0" dirty="0" err="1"/>
+              <a:t>surout</a:t>
+            </a:r>
+            <a:r>
+              <a:rPr lang="fr-FR" sz="1600" noProof="0" dirty="0"/>
+              <a:t> dans un </a:t>
+            </a:r>
+            <a:r>
+              <a:rPr lang="fr-FR" sz="1600" noProof="0" dirty="0" err="1"/>
+              <a:t>context</a:t>
+            </a:r>
+            <a:r>
+              <a:rPr lang="fr-FR" sz="1600" noProof="0" dirty="0"/>
+              <a:t> du jeu de données restreint</a:t>
+            </a:r>
+            <a:br>
+              <a:rPr lang="fr-FR" sz="1600" noProof="0" dirty="0"/>
+            </a:br>
+            <a:br>
+              <a:rPr lang="fr-FR" sz="1600" noProof="0" dirty="0"/>
+            </a:br>
+            <a:r>
+              <a:rPr lang="fr-FR" sz="1600" b="1" noProof="0" dirty="0"/>
+              <a:t>Efficacité</a:t>
+            </a:r>
+            <a:r>
+              <a:rPr lang="fr-FR" sz="1600" noProof="0" dirty="0"/>
+              <a:t>: les deux modèles priorisent l’architecture à propagation directe pour équilibrer la performance avec les ressources de calcul pour assurer un déploiement rapide.</a:t>
+            </a:r>
+            <a:br>
+              <a:rPr lang="fr-FR" noProof="0" dirty="0"/>
+            </a:br>
+            <a:br>
+              <a:rPr lang="fr-FR" noProof="0" dirty="0"/>
+            </a:br>
+            <a:br>
+              <a:rPr lang="fr-FR" noProof="0" dirty="0"/>
+            </a:br>
+            <a:br>
+              <a:rPr lang="fr-FR" sz="1600" noProof="0" dirty="0"/>
+            </a:br>
+            <a:br>
+              <a:rPr lang="fr-FR" noProof="0" dirty="0"/>
+            </a:br>
+            <a:br>
+              <a:rPr lang="fr-FR" sz="1600" noProof="0" dirty="0"/>
+            </a:br>
+            <a:br>
+              <a:rPr lang="fr-FR" noProof="0" dirty="0"/>
+            </a:br>
+            <a:endParaRPr lang="fr-FR" sz="1600" noProof="0" dirty="0"/>
+          </a:p>
+        </p:txBody>
+      </p:sp>
+    </p:spTree>
+    <p:extLst>
+      <p:ext uri="{BB962C8B-B14F-4D97-AF65-F5344CB8AC3E}">
+        <p14:creationId xmlns:p14="http://schemas.microsoft.com/office/powerpoint/2010/main" val="2564139638"/>
       </p:ext>
     </p:extLst>
   </p:cSld>

--- a/Project_AT&T_AH.pptx
+++ b/Project_AT&T_AH.pptx
@@ -5,57 +5,54 @@
     <p:sldMasterId id="2147483659" r:id="rId1"/>
   </p:sldMasterIdLst>
   <p:notesMasterIdLst>
-    <p:notesMasterId r:id="rId19"/>
+    <p:notesMasterId r:id="rId16"/>
   </p:notesMasterIdLst>
   <p:sldIdLst>
     <p:sldId id="256" r:id="rId2"/>
     <p:sldId id="257" r:id="rId3"/>
     <p:sldId id="258" r:id="rId4"/>
     <p:sldId id="266" r:id="rId5"/>
-    <p:sldId id="267" r:id="rId6"/>
-    <p:sldId id="271" r:id="rId7"/>
-    <p:sldId id="263" r:id="rId8"/>
-    <p:sldId id="269" r:id="rId9"/>
-    <p:sldId id="272" r:id="rId10"/>
-    <p:sldId id="270" r:id="rId11"/>
-    <p:sldId id="273" r:id="rId12"/>
-    <p:sldId id="274" r:id="rId13"/>
-    <p:sldId id="265" r:id="rId14"/>
-    <p:sldId id="275" r:id="rId15"/>
-    <p:sldId id="276" r:id="rId16"/>
-    <p:sldId id="261" r:id="rId17"/>
-    <p:sldId id="262" r:id="rId18"/>
+    <p:sldId id="271" r:id="rId6"/>
+    <p:sldId id="263" r:id="rId7"/>
+    <p:sldId id="269" r:id="rId8"/>
+    <p:sldId id="270" r:id="rId9"/>
+    <p:sldId id="274" r:id="rId10"/>
+    <p:sldId id="265" r:id="rId11"/>
+    <p:sldId id="275" r:id="rId12"/>
+    <p:sldId id="276" r:id="rId13"/>
+    <p:sldId id="261" r:id="rId14"/>
+    <p:sldId id="262" r:id="rId15"/>
   </p:sldIdLst>
   <p:sldSz cx="9144000" cy="5143500" type="screen16x9"/>
   <p:notesSz cx="6858000" cy="9144000"/>
   <p:embeddedFontLst>
     <p:embeddedFont>
       <p:font typeface="Inter" panose="020B0604020202020204" charset="0"/>
-      <p:regular r:id="rId20"/>
-      <p:bold r:id="rId21"/>
-      <p:italic r:id="rId22"/>
-      <p:boldItalic r:id="rId23"/>
+      <p:regular r:id="rId17"/>
+      <p:bold r:id="rId18"/>
+      <p:italic r:id="rId19"/>
+      <p:boldItalic r:id="rId20"/>
     </p:embeddedFont>
     <p:embeddedFont>
       <p:font typeface="Inter Medium" panose="020B0604020202020204" charset="0"/>
-      <p:regular r:id="rId24"/>
-      <p:bold r:id="rId25"/>
-      <p:italic r:id="rId26"/>
-      <p:boldItalic r:id="rId27"/>
+      <p:regular r:id="rId21"/>
+      <p:bold r:id="rId22"/>
+      <p:italic r:id="rId23"/>
+      <p:boldItalic r:id="rId24"/>
     </p:embeddedFont>
     <p:embeddedFont>
       <p:font typeface="Inter SemiBold" panose="020B0604020202020204" charset="0"/>
-      <p:regular r:id="rId28"/>
-      <p:bold r:id="rId29"/>
-      <p:italic r:id="rId30"/>
-      <p:boldItalic r:id="rId31"/>
+      <p:regular r:id="rId25"/>
+      <p:bold r:id="rId26"/>
+      <p:italic r:id="rId27"/>
+      <p:boldItalic r:id="rId28"/>
     </p:embeddedFont>
     <p:embeddedFont>
       <p:font typeface="Libre Baskerville" panose="02000000000000000000" pitchFamily="2" charset="0"/>
-      <p:regular r:id="rId32"/>
-      <p:bold r:id="rId33"/>
-      <p:italic r:id="rId34"/>
-      <p:boldItalic r:id="rId35"/>
+      <p:regular r:id="rId29"/>
+      <p:bold r:id="rId30"/>
+      <p:italic r:id="rId31"/>
+      <p:boldItalic r:id="rId32"/>
     </p:embeddedFont>
   </p:embeddedFontLst>
   <p:defaultTextStyle>
@@ -848,600 +845,6 @@
         <p:cNvPr id="1" name="Shape 77">
           <a:extLst>
             <a:ext uri="{FF2B5EF4-FFF2-40B4-BE49-F238E27FC236}">
-              <a16:creationId xmlns:a16="http://schemas.microsoft.com/office/drawing/2014/main" id="{DE1F163D-9306-B63B-8A42-5A1B6E71D6FC}"/>
-            </a:ext>
-          </a:extLst>
-        </p:cNvPr>
-        <p:cNvGrpSpPr/>
-        <p:nvPr/>
-      </p:nvGrpSpPr>
-      <p:grpSpPr>
-        <a:xfrm>
-          <a:off x="0" y="0"/>
-          <a:ext cx="0" cy="0"/>
-          <a:chOff x="0" y="0"/>
-          <a:chExt cx="0" cy="0"/>
-        </a:xfrm>
-      </p:grpSpPr>
-      <p:sp>
-        <p:nvSpPr>
-          <p:cNvPr id="78" name="Google Shape;78;gf4f11f959e_0_5:notes">
-            <a:extLst>
-              <a:ext uri="{FF2B5EF4-FFF2-40B4-BE49-F238E27FC236}">
-                <a16:creationId xmlns:a16="http://schemas.microsoft.com/office/drawing/2014/main" id="{A44DE11A-7589-D211-54C0-A40875A23DA1}"/>
-              </a:ext>
-            </a:extLst>
-          </p:cNvPr>
-          <p:cNvSpPr>
-            <a:spLocks noGrp="1" noRot="1" noChangeAspect="1"/>
-          </p:cNvSpPr>
-          <p:nvPr>
-            <p:ph type="sldImg" idx="2"/>
-          </p:nvPr>
-        </p:nvSpPr>
-        <p:spPr>
-          <a:xfrm>
-            <a:off x="381000" y="685800"/>
-            <a:ext cx="6096000" cy="3429000"/>
-          </a:xfrm>
-          <a:custGeom>
-            <a:avLst/>
-            <a:gdLst/>
-            <a:ahLst/>
-            <a:cxnLst/>
-            <a:rect l="l" t="t" r="r" b="b"/>
-            <a:pathLst>
-              <a:path w="120000" h="120000" extrusionOk="0">
-                <a:moveTo>
-                  <a:pt x="0" y="0"/>
-                </a:moveTo>
-                <a:lnTo>
-                  <a:pt x="120000" y="0"/>
-                </a:lnTo>
-                <a:lnTo>
-                  <a:pt x="120000" y="120000"/>
-                </a:lnTo>
-                <a:lnTo>
-                  <a:pt x="0" y="120000"/>
-                </a:lnTo>
-                <a:close/>
-              </a:path>
-            </a:pathLst>
-          </a:custGeom>
-          <a:noFill/>
-          <a:ln w="9525" cap="flat" cmpd="sng">
-            <a:solidFill>
-              <a:srgbClr val="000000"/>
-            </a:solidFill>
-            <a:prstDash val="solid"/>
-            <a:round/>
-            <a:headEnd type="none" w="sm" len="sm"/>
-            <a:tailEnd type="none" w="sm" len="sm"/>
-          </a:ln>
-        </p:spPr>
-      </p:sp>
-      <p:sp>
-        <p:nvSpPr>
-          <p:cNvPr id="79" name="Google Shape;79;gf4f11f959e_0_5:notes">
-            <a:extLst>
-              <a:ext uri="{FF2B5EF4-FFF2-40B4-BE49-F238E27FC236}">
-                <a16:creationId xmlns:a16="http://schemas.microsoft.com/office/drawing/2014/main" id="{D530E629-5E77-0266-BA72-704E4E7606B0}"/>
-              </a:ext>
-            </a:extLst>
-          </p:cNvPr>
-          <p:cNvSpPr txBox="1">
-            <a:spLocks noGrp="1"/>
-          </p:cNvSpPr>
-          <p:nvPr>
-            <p:ph type="body" idx="1"/>
-          </p:nvPr>
-        </p:nvSpPr>
-        <p:spPr>
-          <a:xfrm>
-            <a:off x="685800" y="4343400"/>
-            <a:ext cx="5486400" cy="4114800"/>
-          </a:xfrm>
-          <a:prstGeom prst="rect">
-            <a:avLst/>
-          </a:prstGeom>
-          <a:noFill/>
-          <a:ln>
-            <a:noFill/>
-          </a:ln>
-        </p:spPr>
-        <p:txBody>
-          <a:bodyPr spcFirstLastPara="1" wrap="square" lIns="91425" tIns="91425" rIns="91425" bIns="91425" anchor="t" anchorCtr="0">
-            <a:noAutofit/>
-          </a:bodyPr>
-          <a:lstStyle/>
-          <a:p>
-            <a:pPr marL="0" lvl="0" indent="0" algn="l" rtl="0">
-              <a:lnSpc>
-                <a:spcPct val="100000"/>
-              </a:lnSpc>
-              <a:spcBef>
-                <a:spcPts val="0"/>
-              </a:spcBef>
-              <a:spcAft>
-                <a:spcPts val="0"/>
-              </a:spcAft>
-              <a:buSzPts val="1100"/>
-              <a:buNone/>
-            </a:pPr>
-            <a:r>
-              <a:rPr lang="fr-FR" sz="1100" b="1" dirty="0" err="1"/>
-              <a:t>SimpleSpamDetector</a:t>
-            </a:r>
-            <a:r>
-              <a:rPr lang="fr-FR" sz="1100" b="1" dirty="0"/>
-              <a:t>: </a:t>
-            </a:r>
-            <a:r>
-              <a:rPr lang="fr-FR" sz="1100" dirty="0" err="1"/>
-              <a:t>Purpose</a:t>
-            </a:r>
-            <a:r>
-              <a:rPr lang="fr-FR" sz="1100" dirty="0"/>
-              <a:t>: A </a:t>
-            </a:r>
-            <a:r>
-              <a:rPr lang="fr-FR" sz="1100" dirty="0" err="1"/>
-              <a:t>foundational</a:t>
-            </a:r>
-            <a:r>
-              <a:rPr lang="fr-FR" sz="1100" dirty="0"/>
-              <a:t> model to </a:t>
-            </a:r>
-            <a:r>
-              <a:rPr lang="fr-FR" sz="1100" dirty="0" err="1"/>
-              <a:t>leverage</a:t>
-            </a:r>
-            <a:r>
-              <a:rPr lang="fr-FR" sz="1100" dirty="0"/>
-              <a:t> the </a:t>
-            </a:r>
-            <a:r>
-              <a:rPr lang="fr-FR" sz="1100" dirty="0" err="1"/>
-              <a:t>combined</a:t>
-            </a:r>
-            <a:r>
-              <a:rPr lang="fr-FR" sz="1100" dirty="0"/>
-              <a:t> </a:t>
-            </a:r>
-            <a:r>
-              <a:rPr lang="fr-FR" sz="1100" dirty="0" err="1"/>
-              <a:t>semantic</a:t>
-            </a:r>
-            <a:r>
-              <a:rPr lang="fr-FR" sz="1100" dirty="0"/>
-              <a:t> </a:t>
-            </a:r>
-            <a:r>
-              <a:rPr lang="fr-FR" sz="1100" dirty="0" err="1"/>
-              <a:t>embeddings</a:t>
-            </a:r>
-            <a:r>
-              <a:rPr lang="fr-FR" sz="1100" dirty="0"/>
-              <a:t> and </a:t>
-            </a:r>
-            <a:r>
-              <a:rPr lang="fr-FR" sz="1100" dirty="0" err="1"/>
-              <a:t>engineered</a:t>
-            </a:r>
-            <a:r>
-              <a:rPr lang="fr-FR" sz="1100" dirty="0"/>
-              <a:t> </a:t>
-            </a:r>
-            <a:r>
-              <a:rPr lang="fr-FR" sz="1100" dirty="0" err="1"/>
-              <a:t>features</a:t>
-            </a:r>
-            <a:r>
-              <a:rPr lang="fr-FR" sz="1100" dirty="0"/>
-              <a:t>.</a:t>
-            </a:r>
-          </a:p>
-          <a:p>
-            <a:pPr marL="0" lvl="0" indent="0" algn="l" rtl="0">
-              <a:lnSpc>
-                <a:spcPct val="100000"/>
-              </a:lnSpc>
-              <a:spcBef>
-                <a:spcPts val="0"/>
-              </a:spcBef>
-              <a:spcAft>
-                <a:spcPts val="0"/>
-              </a:spcAft>
-              <a:buSzPts val="1100"/>
-              <a:buNone/>
-            </a:pPr>
-            <a:endParaRPr lang="fr-FR" sz="1100" dirty="0"/>
-          </a:p>
-          <a:p>
-            <a:pPr marL="0" lvl="0" indent="0" algn="l" rtl="0">
-              <a:lnSpc>
-                <a:spcPct val="100000"/>
-              </a:lnSpc>
-              <a:spcBef>
-                <a:spcPts val="0"/>
-              </a:spcBef>
-              <a:spcAft>
-                <a:spcPts val="0"/>
-              </a:spcAft>
-              <a:buSzPts val="1100"/>
-              <a:buNone/>
-            </a:pPr>
-            <a:r>
-              <a:rPr lang="fr-FR" sz="1100" b="1" dirty="0" err="1"/>
-              <a:t>UltraSimpleSpamDetector</a:t>
-            </a:r>
-            <a:r>
-              <a:rPr lang="fr-FR" sz="1100" b="1" dirty="0"/>
-              <a:t>: </a:t>
-            </a:r>
-            <a:r>
-              <a:rPr lang="fr-FR" sz="1100" dirty="0" err="1"/>
-              <a:t>Purpose</a:t>
-            </a:r>
-            <a:r>
-              <a:rPr lang="fr-FR" sz="1100" dirty="0"/>
-              <a:t>: A </a:t>
-            </a:r>
-            <a:r>
-              <a:rPr lang="fr-FR" sz="1100" dirty="0" err="1"/>
-              <a:t>highly</a:t>
-            </a:r>
-            <a:r>
-              <a:rPr lang="fr-FR" sz="1100" dirty="0"/>
-              <a:t> efficient, minimal model </a:t>
-            </a:r>
-            <a:r>
-              <a:rPr lang="fr-FR" sz="1100" dirty="0" err="1"/>
-              <a:t>designed</a:t>
-            </a:r>
-            <a:r>
-              <a:rPr lang="fr-FR" sz="1100" dirty="0"/>
-              <a:t> for </a:t>
-            </a:r>
-            <a:r>
-              <a:rPr lang="fr-FR" sz="1100" dirty="0" err="1"/>
-              <a:t>faster</a:t>
-            </a:r>
-            <a:r>
-              <a:rPr lang="fr-FR" sz="1100" dirty="0"/>
-              <a:t> training and </a:t>
-            </a:r>
-            <a:r>
-              <a:rPr lang="fr-FR" sz="1100" dirty="0" err="1"/>
-              <a:t>deployment</a:t>
-            </a:r>
-            <a:r>
-              <a:rPr lang="fr-FR" sz="1100" dirty="0"/>
-              <a:t> </a:t>
-            </a:r>
-            <a:r>
-              <a:rPr lang="fr-FR" sz="1100" dirty="0" err="1"/>
-              <a:t>with</a:t>
-            </a:r>
-            <a:r>
-              <a:rPr lang="fr-FR" sz="1100" dirty="0"/>
-              <a:t> comparable performance.</a:t>
-            </a:r>
-            <a:endParaRPr dirty="0"/>
-          </a:p>
-        </p:txBody>
-      </p:sp>
-    </p:spTree>
-    <p:extLst>
-      <p:ext uri="{BB962C8B-B14F-4D97-AF65-F5344CB8AC3E}">
-        <p14:creationId xmlns:p14="http://schemas.microsoft.com/office/powerpoint/2010/main" val="353194640"/>
-      </p:ext>
-    </p:extLst>
-  </p:cSld>
-  <p:clrMapOvr>
-    <a:masterClrMapping/>
-  </p:clrMapOvr>
-</p:notes>
-</file>
-
-<file path=ppt/notesSlides/notesSlide11.xml><?xml version="1.0" encoding="utf-8"?>
-<p:notes xmlns:a="http://schemas.openxmlformats.org/drawingml/2006/main" xmlns:r="http://schemas.openxmlformats.org/officeDocument/2006/relationships" xmlns:p="http://schemas.openxmlformats.org/presentationml/2006/main" showMasterSp="0" showMasterPhAnim="0">
-  <p:cSld>
-    <p:spTree>
-      <p:nvGrpSpPr>
-        <p:cNvPr id="1" name="Shape 77">
-          <a:extLst>
-            <a:ext uri="{FF2B5EF4-FFF2-40B4-BE49-F238E27FC236}">
-              <a16:creationId xmlns:a16="http://schemas.microsoft.com/office/drawing/2014/main" id="{5FBAD69E-1856-3286-A896-3BCF5F5D3D11}"/>
-            </a:ext>
-          </a:extLst>
-        </p:cNvPr>
-        <p:cNvGrpSpPr/>
-        <p:nvPr/>
-      </p:nvGrpSpPr>
-      <p:grpSpPr>
-        <a:xfrm>
-          <a:off x="0" y="0"/>
-          <a:ext cx="0" cy="0"/>
-          <a:chOff x="0" y="0"/>
-          <a:chExt cx="0" cy="0"/>
-        </a:xfrm>
-      </p:grpSpPr>
-      <p:sp>
-        <p:nvSpPr>
-          <p:cNvPr id="78" name="Google Shape;78;gf4f11f959e_0_5:notes">
-            <a:extLst>
-              <a:ext uri="{FF2B5EF4-FFF2-40B4-BE49-F238E27FC236}">
-                <a16:creationId xmlns:a16="http://schemas.microsoft.com/office/drawing/2014/main" id="{2F1C803E-F844-C007-5F15-5676B99F3BAF}"/>
-              </a:ext>
-            </a:extLst>
-          </p:cNvPr>
-          <p:cNvSpPr>
-            <a:spLocks noGrp="1" noRot="1" noChangeAspect="1"/>
-          </p:cNvSpPr>
-          <p:nvPr>
-            <p:ph type="sldImg" idx="2"/>
-          </p:nvPr>
-        </p:nvSpPr>
-        <p:spPr>
-          <a:xfrm>
-            <a:off x="381000" y="685800"/>
-            <a:ext cx="6096000" cy="3429000"/>
-          </a:xfrm>
-          <a:custGeom>
-            <a:avLst/>
-            <a:gdLst/>
-            <a:ahLst/>
-            <a:cxnLst/>
-            <a:rect l="l" t="t" r="r" b="b"/>
-            <a:pathLst>
-              <a:path w="120000" h="120000" extrusionOk="0">
-                <a:moveTo>
-                  <a:pt x="0" y="0"/>
-                </a:moveTo>
-                <a:lnTo>
-                  <a:pt x="120000" y="0"/>
-                </a:lnTo>
-                <a:lnTo>
-                  <a:pt x="120000" y="120000"/>
-                </a:lnTo>
-                <a:lnTo>
-                  <a:pt x="0" y="120000"/>
-                </a:lnTo>
-                <a:close/>
-              </a:path>
-            </a:pathLst>
-          </a:custGeom>
-          <a:noFill/>
-          <a:ln w="9525" cap="flat" cmpd="sng">
-            <a:solidFill>
-              <a:srgbClr val="000000"/>
-            </a:solidFill>
-            <a:prstDash val="solid"/>
-            <a:round/>
-            <a:headEnd type="none" w="sm" len="sm"/>
-            <a:tailEnd type="none" w="sm" len="sm"/>
-          </a:ln>
-        </p:spPr>
-      </p:sp>
-      <p:sp>
-        <p:nvSpPr>
-          <p:cNvPr id="79" name="Google Shape;79;gf4f11f959e_0_5:notes">
-            <a:extLst>
-              <a:ext uri="{FF2B5EF4-FFF2-40B4-BE49-F238E27FC236}">
-                <a16:creationId xmlns:a16="http://schemas.microsoft.com/office/drawing/2014/main" id="{EB2AC066-9B5E-7E46-B2EC-62943BB41ECD}"/>
-              </a:ext>
-            </a:extLst>
-          </p:cNvPr>
-          <p:cNvSpPr txBox="1">
-            <a:spLocks noGrp="1"/>
-          </p:cNvSpPr>
-          <p:nvPr>
-            <p:ph type="body" idx="1"/>
-          </p:nvPr>
-        </p:nvSpPr>
-        <p:spPr>
-          <a:xfrm>
-            <a:off x="685800" y="4343400"/>
-            <a:ext cx="5486400" cy="4114800"/>
-          </a:xfrm>
-          <a:prstGeom prst="rect">
-            <a:avLst/>
-          </a:prstGeom>
-          <a:noFill/>
-          <a:ln>
-            <a:noFill/>
-          </a:ln>
-        </p:spPr>
-        <p:txBody>
-          <a:bodyPr spcFirstLastPara="1" wrap="square" lIns="91425" tIns="91425" rIns="91425" bIns="91425" anchor="t" anchorCtr="0">
-            <a:noAutofit/>
-          </a:bodyPr>
-          <a:lstStyle/>
-          <a:p>
-            <a:pPr marL="0" lvl="0" indent="0" algn="l" rtl="0">
-              <a:lnSpc>
-                <a:spcPct val="100000"/>
-              </a:lnSpc>
-              <a:spcBef>
-                <a:spcPts val="0"/>
-              </a:spcBef>
-              <a:spcAft>
-                <a:spcPts val="0"/>
-              </a:spcAft>
-              <a:buSzPts val="1100"/>
-              <a:buNone/>
-            </a:pPr>
-            <a:endParaRPr/>
-          </a:p>
-        </p:txBody>
-      </p:sp>
-    </p:spTree>
-    <p:extLst>
-      <p:ext uri="{BB962C8B-B14F-4D97-AF65-F5344CB8AC3E}">
-        <p14:creationId xmlns:p14="http://schemas.microsoft.com/office/powerpoint/2010/main" val="3066301346"/>
-      </p:ext>
-    </p:extLst>
-  </p:cSld>
-  <p:clrMapOvr>
-    <a:masterClrMapping/>
-  </p:clrMapOvr>
-</p:notes>
-</file>
-
-<file path=ppt/notesSlides/notesSlide12.xml><?xml version="1.0" encoding="utf-8"?>
-<p:notes xmlns:a="http://schemas.openxmlformats.org/drawingml/2006/main" xmlns:r="http://schemas.openxmlformats.org/officeDocument/2006/relationships" xmlns:p="http://schemas.openxmlformats.org/presentationml/2006/main" showMasterSp="0" showMasterPhAnim="0">
-  <p:cSld>
-    <p:spTree>
-      <p:nvGrpSpPr>
-        <p:cNvPr id="1" name="Shape 77">
-          <a:extLst>
-            <a:ext uri="{FF2B5EF4-FFF2-40B4-BE49-F238E27FC236}">
-              <a16:creationId xmlns:a16="http://schemas.microsoft.com/office/drawing/2014/main" id="{E66714CB-0328-AADF-7A6C-F2EED746642A}"/>
-            </a:ext>
-          </a:extLst>
-        </p:cNvPr>
-        <p:cNvGrpSpPr/>
-        <p:nvPr/>
-      </p:nvGrpSpPr>
-      <p:grpSpPr>
-        <a:xfrm>
-          <a:off x="0" y="0"/>
-          <a:ext cx="0" cy="0"/>
-          <a:chOff x="0" y="0"/>
-          <a:chExt cx="0" cy="0"/>
-        </a:xfrm>
-      </p:grpSpPr>
-      <p:sp>
-        <p:nvSpPr>
-          <p:cNvPr id="78" name="Google Shape;78;gf4f11f959e_0_5:notes">
-            <a:extLst>
-              <a:ext uri="{FF2B5EF4-FFF2-40B4-BE49-F238E27FC236}">
-                <a16:creationId xmlns:a16="http://schemas.microsoft.com/office/drawing/2014/main" id="{4409C3C1-FA78-E144-2871-CB6AF5B64587}"/>
-              </a:ext>
-            </a:extLst>
-          </p:cNvPr>
-          <p:cNvSpPr>
-            <a:spLocks noGrp="1" noRot="1" noChangeAspect="1"/>
-          </p:cNvSpPr>
-          <p:nvPr>
-            <p:ph type="sldImg" idx="2"/>
-          </p:nvPr>
-        </p:nvSpPr>
-        <p:spPr>
-          <a:xfrm>
-            <a:off x="381000" y="685800"/>
-            <a:ext cx="6096000" cy="3429000"/>
-          </a:xfrm>
-          <a:custGeom>
-            <a:avLst/>
-            <a:gdLst/>
-            <a:ahLst/>
-            <a:cxnLst/>
-            <a:rect l="l" t="t" r="r" b="b"/>
-            <a:pathLst>
-              <a:path w="120000" h="120000" extrusionOk="0">
-                <a:moveTo>
-                  <a:pt x="0" y="0"/>
-                </a:moveTo>
-                <a:lnTo>
-                  <a:pt x="120000" y="0"/>
-                </a:lnTo>
-                <a:lnTo>
-                  <a:pt x="120000" y="120000"/>
-                </a:lnTo>
-                <a:lnTo>
-                  <a:pt x="0" y="120000"/>
-                </a:lnTo>
-                <a:close/>
-              </a:path>
-            </a:pathLst>
-          </a:custGeom>
-          <a:noFill/>
-          <a:ln w="9525" cap="flat" cmpd="sng">
-            <a:solidFill>
-              <a:srgbClr val="000000"/>
-            </a:solidFill>
-            <a:prstDash val="solid"/>
-            <a:round/>
-            <a:headEnd type="none" w="sm" len="sm"/>
-            <a:tailEnd type="none" w="sm" len="sm"/>
-          </a:ln>
-        </p:spPr>
-      </p:sp>
-      <p:sp>
-        <p:nvSpPr>
-          <p:cNvPr id="79" name="Google Shape;79;gf4f11f959e_0_5:notes">
-            <a:extLst>
-              <a:ext uri="{FF2B5EF4-FFF2-40B4-BE49-F238E27FC236}">
-                <a16:creationId xmlns:a16="http://schemas.microsoft.com/office/drawing/2014/main" id="{2292C057-74F5-AC0B-F0A1-A7CE21EEA999}"/>
-              </a:ext>
-            </a:extLst>
-          </p:cNvPr>
-          <p:cNvSpPr txBox="1">
-            <a:spLocks noGrp="1"/>
-          </p:cNvSpPr>
-          <p:nvPr>
-            <p:ph type="body" idx="1"/>
-          </p:nvPr>
-        </p:nvSpPr>
-        <p:spPr>
-          <a:xfrm>
-            <a:off x="685800" y="4343400"/>
-            <a:ext cx="5486400" cy="4114800"/>
-          </a:xfrm>
-          <a:prstGeom prst="rect">
-            <a:avLst/>
-          </a:prstGeom>
-          <a:noFill/>
-          <a:ln>
-            <a:noFill/>
-          </a:ln>
-        </p:spPr>
-        <p:txBody>
-          <a:bodyPr spcFirstLastPara="1" wrap="square" lIns="91425" tIns="91425" rIns="91425" bIns="91425" anchor="t" anchorCtr="0">
-            <a:noAutofit/>
-          </a:bodyPr>
-          <a:lstStyle/>
-          <a:p>
-            <a:pPr marL="0" lvl="0" indent="0" algn="l" rtl="0">
-              <a:lnSpc>
-                <a:spcPct val="100000"/>
-              </a:lnSpc>
-              <a:spcBef>
-                <a:spcPts val="0"/>
-              </a:spcBef>
-              <a:spcAft>
-                <a:spcPts val="0"/>
-              </a:spcAft>
-              <a:buSzPts val="1100"/>
-              <a:buNone/>
-            </a:pPr>
-            <a:endParaRPr/>
-          </a:p>
-        </p:txBody>
-      </p:sp>
-    </p:spTree>
-    <p:extLst>
-      <p:ext uri="{BB962C8B-B14F-4D97-AF65-F5344CB8AC3E}">
-        <p14:creationId xmlns:p14="http://schemas.microsoft.com/office/powerpoint/2010/main" val="3052372965"/>
-      </p:ext>
-    </p:extLst>
-  </p:cSld>
-  <p:clrMapOvr>
-    <a:masterClrMapping/>
-  </p:clrMapOvr>
-</p:notes>
-</file>
-
-<file path=ppt/notesSlides/notesSlide13.xml><?xml version="1.0" encoding="utf-8"?>
-<p:notes xmlns:a="http://schemas.openxmlformats.org/drawingml/2006/main" xmlns:r="http://schemas.openxmlformats.org/officeDocument/2006/relationships" xmlns:p="http://schemas.openxmlformats.org/presentationml/2006/main" showMasterSp="0" showMasterPhAnim="0">
-  <p:cSld>
-    <p:spTree>
-      <p:nvGrpSpPr>
-        <p:cNvPr id="1" name="Shape 77">
-          <a:extLst>
-            <a:ext uri="{FF2B5EF4-FFF2-40B4-BE49-F238E27FC236}">
               <a16:creationId xmlns:a16="http://schemas.microsoft.com/office/drawing/2014/main" id="{061283EF-166A-B1E5-9609-6D2ABD40DA5E}"/>
             </a:ext>
           </a:extLst>
@@ -1609,7 +1012,7 @@
 </p:notes>
 </file>
 
-<file path=ppt/notesSlides/notesSlide14.xml><?xml version="1.0" encoding="utf-8"?>
+<file path=ppt/notesSlides/notesSlide11.xml><?xml version="1.0" encoding="utf-8"?>
 <p:notes xmlns:a="http://schemas.openxmlformats.org/drawingml/2006/main" xmlns:r="http://schemas.openxmlformats.org/officeDocument/2006/relationships" xmlns:p="http://schemas.openxmlformats.org/presentationml/2006/main" showMasterSp="0" showMasterPhAnim="0">
   <p:cSld>
     <p:spTree>
@@ -1754,7 +1157,7 @@
 </p:notes>
 </file>
 
-<file path=ppt/notesSlides/notesSlide15.xml><?xml version="1.0" encoding="utf-8"?>
+<file path=ppt/notesSlides/notesSlide12.xml><?xml version="1.0" encoding="utf-8"?>
 <p:notes xmlns:a="http://schemas.openxmlformats.org/drawingml/2006/main" xmlns:r="http://schemas.openxmlformats.org/officeDocument/2006/relationships" xmlns:p="http://schemas.openxmlformats.org/presentationml/2006/main" showMasterSp="0" showMasterPhAnim="0">
   <p:cSld>
     <p:spTree>
@@ -1899,7 +1302,7 @@
 </p:notes>
 </file>
 
-<file path=ppt/notesSlides/notesSlide16.xml><?xml version="1.0" encoding="utf-8"?>
+<file path=ppt/notesSlides/notesSlide13.xml><?xml version="1.0" encoding="utf-8"?>
 <p:notes xmlns:a="http://schemas.openxmlformats.org/drawingml/2006/main" xmlns:r="http://schemas.openxmlformats.org/officeDocument/2006/relationships" xmlns:p="http://schemas.openxmlformats.org/presentationml/2006/main" showMasterSp="0" showMasterPhAnim="0">
   <p:cSld>
     <p:spTree>
@@ -2021,7 +1424,7 @@
 </p:notes>
 </file>
 
-<file path=ppt/notesSlides/notesSlide17.xml><?xml version="1.0" encoding="utf-8"?>
+<file path=ppt/notesSlides/notesSlide14.xml><?xml version="1.0" encoding="utf-8"?>
 <p:notes xmlns:a="http://schemas.openxmlformats.org/drawingml/2006/main" xmlns:r="http://schemas.openxmlformats.org/officeDocument/2006/relationships" xmlns:p="http://schemas.openxmlformats.org/presentationml/2006/main" showMasterSp="0" showMasterPhAnim="0">
   <p:cSld>
     <p:spTree>
@@ -2486,151 +1889,6 @@
         <p:cNvPr id="1" name="Shape 77">
           <a:extLst>
             <a:ext uri="{FF2B5EF4-FFF2-40B4-BE49-F238E27FC236}">
-              <a16:creationId xmlns:a16="http://schemas.microsoft.com/office/drawing/2014/main" id="{D844353A-E0F5-A023-B1C9-419085574A06}"/>
-            </a:ext>
-          </a:extLst>
-        </p:cNvPr>
-        <p:cNvGrpSpPr/>
-        <p:nvPr/>
-      </p:nvGrpSpPr>
-      <p:grpSpPr>
-        <a:xfrm>
-          <a:off x="0" y="0"/>
-          <a:ext cx="0" cy="0"/>
-          <a:chOff x="0" y="0"/>
-          <a:chExt cx="0" cy="0"/>
-        </a:xfrm>
-      </p:grpSpPr>
-      <p:sp>
-        <p:nvSpPr>
-          <p:cNvPr id="78" name="Google Shape;78;gf4f11f959e_0_5:notes">
-            <a:extLst>
-              <a:ext uri="{FF2B5EF4-FFF2-40B4-BE49-F238E27FC236}">
-                <a16:creationId xmlns:a16="http://schemas.microsoft.com/office/drawing/2014/main" id="{1CAB6C14-9E7B-45A3-8E0C-622F7CF7C86D}"/>
-              </a:ext>
-            </a:extLst>
-          </p:cNvPr>
-          <p:cNvSpPr>
-            <a:spLocks noGrp="1" noRot="1" noChangeAspect="1"/>
-          </p:cNvSpPr>
-          <p:nvPr>
-            <p:ph type="sldImg" idx="2"/>
-          </p:nvPr>
-        </p:nvSpPr>
-        <p:spPr>
-          <a:xfrm>
-            <a:off x="381000" y="685800"/>
-            <a:ext cx="6096000" cy="3429000"/>
-          </a:xfrm>
-          <a:custGeom>
-            <a:avLst/>
-            <a:gdLst/>
-            <a:ahLst/>
-            <a:cxnLst/>
-            <a:rect l="l" t="t" r="r" b="b"/>
-            <a:pathLst>
-              <a:path w="120000" h="120000" extrusionOk="0">
-                <a:moveTo>
-                  <a:pt x="0" y="0"/>
-                </a:moveTo>
-                <a:lnTo>
-                  <a:pt x="120000" y="0"/>
-                </a:lnTo>
-                <a:lnTo>
-                  <a:pt x="120000" y="120000"/>
-                </a:lnTo>
-                <a:lnTo>
-                  <a:pt x="0" y="120000"/>
-                </a:lnTo>
-                <a:close/>
-              </a:path>
-            </a:pathLst>
-          </a:custGeom>
-          <a:noFill/>
-          <a:ln w="9525" cap="flat" cmpd="sng">
-            <a:solidFill>
-              <a:srgbClr val="000000"/>
-            </a:solidFill>
-            <a:prstDash val="solid"/>
-            <a:round/>
-            <a:headEnd type="none" w="sm" len="sm"/>
-            <a:tailEnd type="none" w="sm" len="sm"/>
-          </a:ln>
-        </p:spPr>
-      </p:sp>
-      <p:sp>
-        <p:nvSpPr>
-          <p:cNvPr id="79" name="Google Shape;79;gf4f11f959e_0_5:notes">
-            <a:extLst>
-              <a:ext uri="{FF2B5EF4-FFF2-40B4-BE49-F238E27FC236}">
-                <a16:creationId xmlns:a16="http://schemas.microsoft.com/office/drawing/2014/main" id="{67ABA0BB-9C20-21AD-8A3C-7466BB98FFB8}"/>
-              </a:ext>
-            </a:extLst>
-          </p:cNvPr>
-          <p:cNvSpPr txBox="1">
-            <a:spLocks noGrp="1"/>
-          </p:cNvSpPr>
-          <p:nvPr>
-            <p:ph type="body" idx="1"/>
-          </p:nvPr>
-        </p:nvSpPr>
-        <p:spPr>
-          <a:xfrm>
-            <a:off x="685800" y="4343400"/>
-            <a:ext cx="5486400" cy="4114800"/>
-          </a:xfrm>
-          <a:prstGeom prst="rect">
-            <a:avLst/>
-          </a:prstGeom>
-          <a:noFill/>
-          <a:ln>
-            <a:noFill/>
-          </a:ln>
-        </p:spPr>
-        <p:txBody>
-          <a:bodyPr spcFirstLastPara="1" wrap="square" lIns="91425" tIns="91425" rIns="91425" bIns="91425" anchor="t" anchorCtr="0">
-            <a:noAutofit/>
-          </a:bodyPr>
-          <a:lstStyle/>
-          <a:p>
-            <a:pPr marL="0" lvl="0" indent="0" algn="l" rtl="0">
-              <a:lnSpc>
-                <a:spcPct val="100000"/>
-              </a:lnSpc>
-              <a:spcBef>
-                <a:spcPts val="0"/>
-              </a:spcBef>
-              <a:spcAft>
-                <a:spcPts val="0"/>
-              </a:spcAft>
-              <a:buSzPts val="1100"/>
-              <a:buNone/>
-            </a:pPr>
-            <a:endParaRPr/>
-          </a:p>
-        </p:txBody>
-      </p:sp>
-    </p:spTree>
-    <p:extLst>
-      <p:ext uri="{BB962C8B-B14F-4D97-AF65-F5344CB8AC3E}">
-        <p14:creationId xmlns:p14="http://schemas.microsoft.com/office/powerpoint/2010/main" val="1261799647"/>
-      </p:ext>
-    </p:extLst>
-  </p:cSld>
-  <p:clrMapOvr>
-    <a:masterClrMapping/>
-  </p:clrMapOvr>
-</p:notes>
-</file>
-
-<file path=ppt/notesSlides/notesSlide6.xml><?xml version="1.0" encoding="utf-8"?>
-<p:notes xmlns:a="http://schemas.openxmlformats.org/drawingml/2006/main" xmlns:r="http://schemas.openxmlformats.org/officeDocument/2006/relationships" xmlns:p="http://schemas.openxmlformats.org/presentationml/2006/main" showMasterSp="0" showMasterPhAnim="0">
-  <p:cSld>
-    <p:spTree>
-      <p:nvGrpSpPr>
-        <p:cNvPr id="1" name="Shape 77">
-          <a:extLst>
-            <a:ext uri="{FF2B5EF4-FFF2-40B4-BE49-F238E27FC236}">
               <a16:creationId xmlns:a16="http://schemas.microsoft.com/office/drawing/2014/main" id="{57AFCA1D-53D3-9FAE-B9E2-FA8311EA2305}"/>
             </a:ext>
           </a:extLst>
@@ -2852,7 +2110,7 @@
 </p:notes>
 </file>
 
-<file path=ppt/notesSlides/notesSlide7.xml><?xml version="1.0" encoding="utf-8"?>
+<file path=ppt/notesSlides/notesSlide6.xml><?xml version="1.0" encoding="utf-8"?>
 <p:notes xmlns:a="http://schemas.openxmlformats.org/drawingml/2006/main" xmlns:r="http://schemas.openxmlformats.org/officeDocument/2006/relationships" xmlns:p="http://schemas.openxmlformats.org/presentationml/2006/main" showMasterSp="0" showMasterPhAnim="0">
   <p:cSld>
     <p:spTree>
@@ -2997,7 +2255,7 @@
 </p:notes>
 </file>
 
-<file path=ppt/notesSlides/notesSlide8.xml><?xml version="1.0" encoding="utf-8"?>
+<file path=ppt/notesSlides/notesSlide7.xml><?xml version="1.0" encoding="utf-8"?>
 <p:notes xmlns:a="http://schemas.openxmlformats.org/drawingml/2006/main" xmlns:r="http://schemas.openxmlformats.org/officeDocument/2006/relationships" xmlns:p="http://schemas.openxmlformats.org/presentationml/2006/main" showMasterSp="0" showMasterPhAnim="0">
   <p:cSld>
     <p:spTree>
@@ -3142,7 +2400,7 @@
 </p:notes>
 </file>
 
-<file path=ppt/notesSlides/notesSlide9.xml><?xml version="1.0" encoding="utf-8"?>
+<file path=ppt/notesSlides/notesSlide8.xml><?xml version="1.0" encoding="utf-8"?>
 <p:notes xmlns:a="http://schemas.openxmlformats.org/drawingml/2006/main" xmlns:r="http://schemas.openxmlformats.org/officeDocument/2006/relationships" xmlns:p="http://schemas.openxmlformats.org/presentationml/2006/main" showMasterSp="0" showMasterPhAnim="0">
   <p:cSld>
     <p:spTree>
@@ -3150,7 +2408,7 @@
         <p:cNvPr id="1" name="Shape 77">
           <a:extLst>
             <a:ext uri="{FF2B5EF4-FFF2-40B4-BE49-F238E27FC236}">
-              <a16:creationId xmlns:a16="http://schemas.microsoft.com/office/drawing/2014/main" id="{63AE2DAD-61E3-9D75-845C-E230ED784869}"/>
+              <a16:creationId xmlns:a16="http://schemas.microsoft.com/office/drawing/2014/main" id="{DE1F163D-9306-B63B-8A42-5A1B6E71D6FC}"/>
             </a:ext>
           </a:extLst>
         </p:cNvPr>
@@ -3170,7 +2428,7 @@
           <p:cNvPr id="78" name="Google Shape;78;gf4f11f959e_0_5:notes">
             <a:extLst>
               <a:ext uri="{FF2B5EF4-FFF2-40B4-BE49-F238E27FC236}">
-                <a16:creationId xmlns:a16="http://schemas.microsoft.com/office/drawing/2014/main" id="{ECD46BB2-B204-A5B5-50F9-3B7DEE8C04F4}"/>
+                <a16:creationId xmlns:a16="http://schemas.microsoft.com/office/drawing/2014/main" id="{A44DE11A-7589-D211-54C0-A40875A23DA1}"/>
               </a:ext>
             </a:extLst>
           </p:cNvPr>
@@ -3227,7 +2485,7 @@
           <p:cNvPr id="79" name="Google Shape;79;gf4f11f959e_0_5:notes">
             <a:extLst>
               <a:ext uri="{FF2B5EF4-FFF2-40B4-BE49-F238E27FC236}">
-                <a16:creationId xmlns:a16="http://schemas.microsoft.com/office/drawing/2014/main" id="{624A2996-7478-BDEB-1023-270295A2CF28}"/>
+                <a16:creationId xmlns:a16="http://schemas.microsoft.com/office/drawing/2014/main" id="{D530E629-5E77-0266-BA72-704E4E7606B0}"/>
               </a:ext>
             </a:extLst>
           </p:cNvPr>
@@ -3270,6 +2528,310 @@
               <a:buSzPts val="1100"/>
               <a:buNone/>
             </a:pPr>
+            <a:r>
+              <a:rPr lang="fr-FR" sz="1100" b="1" dirty="0" err="1"/>
+              <a:t>SimpleSpamDetector</a:t>
+            </a:r>
+            <a:r>
+              <a:rPr lang="fr-FR" sz="1100" b="1" dirty="0"/>
+              <a:t>: </a:t>
+            </a:r>
+            <a:r>
+              <a:rPr lang="fr-FR" sz="1100" dirty="0" err="1"/>
+              <a:t>Purpose</a:t>
+            </a:r>
+            <a:r>
+              <a:rPr lang="fr-FR" sz="1100" dirty="0"/>
+              <a:t>: A </a:t>
+            </a:r>
+            <a:r>
+              <a:rPr lang="fr-FR" sz="1100" dirty="0" err="1"/>
+              <a:t>foundational</a:t>
+            </a:r>
+            <a:r>
+              <a:rPr lang="fr-FR" sz="1100" dirty="0"/>
+              <a:t> model to </a:t>
+            </a:r>
+            <a:r>
+              <a:rPr lang="fr-FR" sz="1100" dirty="0" err="1"/>
+              <a:t>leverage</a:t>
+            </a:r>
+            <a:r>
+              <a:rPr lang="fr-FR" sz="1100" dirty="0"/>
+              <a:t> the </a:t>
+            </a:r>
+            <a:r>
+              <a:rPr lang="fr-FR" sz="1100" dirty="0" err="1"/>
+              <a:t>combined</a:t>
+            </a:r>
+            <a:r>
+              <a:rPr lang="fr-FR" sz="1100" dirty="0"/>
+              <a:t> </a:t>
+            </a:r>
+            <a:r>
+              <a:rPr lang="fr-FR" sz="1100" dirty="0" err="1"/>
+              <a:t>semantic</a:t>
+            </a:r>
+            <a:r>
+              <a:rPr lang="fr-FR" sz="1100" dirty="0"/>
+              <a:t> </a:t>
+            </a:r>
+            <a:r>
+              <a:rPr lang="fr-FR" sz="1100" dirty="0" err="1"/>
+              <a:t>embeddings</a:t>
+            </a:r>
+            <a:r>
+              <a:rPr lang="fr-FR" sz="1100" dirty="0"/>
+              <a:t> and </a:t>
+            </a:r>
+            <a:r>
+              <a:rPr lang="fr-FR" sz="1100" dirty="0" err="1"/>
+              <a:t>engineered</a:t>
+            </a:r>
+            <a:r>
+              <a:rPr lang="fr-FR" sz="1100" dirty="0"/>
+              <a:t> </a:t>
+            </a:r>
+            <a:r>
+              <a:rPr lang="fr-FR" sz="1100" dirty="0" err="1"/>
+              <a:t>features</a:t>
+            </a:r>
+            <a:r>
+              <a:rPr lang="fr-FR" sz="1100" dirty="0"/>
+              <a:t>.</a:t>
+            </a:r>
+          </a:p>
+          <a:p>
+            <a:pPr marL="0" lvl="0" indent="0" algn="l" rtl="0">
+              <a:lnSpc>
+                <a:spcPct val="100000"/>
+              </a:lnSpc>
+              <a:spcBef>
+                <a:spcPts val="0"/>
+              </a:spcBef>
+              <a:spcAft>
+                <a:spcPts val="0"/>
+              </a:spcAft>
+              <a:buSzPts val="1100"/>
+              <a:buNone/>
+            </a:pPr>
+            <a:endParaRPr lang="fr-FR" sz="1100" dirty="0"/>
+          </a:p>
+          <a:p>
+            <a:pPr marL="0" lvl="0" indent="0" algn="l" rtl="0">
+              <a:lnSpc>
+                <a:spcPct val="100000"/>
+              </a:lnSpc>
+              <a:spcBef>
+                <a:spcPts val="0"/>
+              </a:spcBef>
+              <a:spcAft>
+                <a:spcPts val="0"/>
+              </a:spcAft>
+              <a:buSzPts val="1100"/>
+              <a:buNone/>
+            </a:pPr>
+            <a:r>
+              <a:rPr lang="fr-FR" sz="1100" b="1" dirty="0" err="1"/>
+              <a:t>UltraSimpleSpamDetector</a:t>
+            </a:r>
+            <a:r>
+              <a:rPr lang="fr-FR" sz="1100" b="1" dirty="0"/>
+              <a:t>: </a:t>
+            </a:r>
+            <a:r>
+              <a:rPr lang="fr-FR" sz="1100" dirty="0" err="1"/>
+              <a:t>Purpose</a:t>
+            </a:r>
+            <a:r>
+              <a:rPr lang="fr-FR" sz="1100" dirty="0"/>
+              <a:t>: A </a:t>
+            </a:r>
+            <a:r>
+              <a:rPr lang="fr-FR" sz="1100" dirty="0" err="1"/>
+              <a:t>highly</a:t>
+            </a:r>
+            <a:r>
+              <a:rPr lang="fr-FR" sz="1100" dirty="0"/>
+              <a:t> efficient, minimal model </a:t>
+            </a:r>
+            <a:r>
+              <a:rPr lang="fr-FR" sz="1100" dirty="0" err="1"/>
+              <a:t>designed</a:t>
+            </a:r>
+            <a:r>
+              <a:rPr lang="fr-FR" sz="1100" dirty="0"/>
+              <a:t> for </a:t>
+            </a:r>
+            <a:r>
+              <a:rPr lang="fr-FR" sz="1100" dirty="0" err="1"/>
+              <a:t>faster</a:t>
+            </a:r>
+            <a:r>
+              <a:rPr lang="fr-FR" sz="1100" dirty="0"/>
+              <a:t> training and </a:t>
+            </a:r>
+            <a:r>
+              <a:rPr lang="fr-FR" sz="1100" dirty="0" err="1"/>
+              <a:t>deployment</a:t>
+            </a:r>
+            <a:r>
+              <a:rPr lang="fr-FR" sz="1100" dirty="0"/>
+              <a:t> </a:t>
+            </a:r>
+            <a:r>
+              <a:rPr lang="fr-FR" sz="1100" dirty="0" err="1"/>
+              <a:t>with</a:t>
+            </a:r>
+            <a:r>
+              <a:rPr lang="fr-FR" sz="1100" dirty="0"/>
+              <a:t> comparable performance.</a:t>
+            </a:r>
+            <a:endParaRPr dirty="0"/>
+          </a:p>
+        </p:txBody>
+      </p:sp>
+    </p:spTree>
+    <p:extLst>
+      <p:ext uri="{BB962C8B-B14F-4D97-AF65-F5344CB8AC3E}">
+        <p14:creationId xmlns:p14="http://schemas.microsoft.com/office/powerpoint/2010/main" val="353194640"/>
+      </p:ext>
+    </p:extLst>
+  </p:cSld>
+  <p:clrMapOvr>
+    <a:masterClrMapping/>
+  </p:clrMapOvr>
+</p:notes>
+</file>
+
+<file path=ppt/notesSlides/notesSlide9.xml><?xml version="1.0" encoding="utf-8"?>
+<p:notes xmlns:a="http://schemas.openxmlformats.org/drawingml/2006/main" xmlns:r="http://schemas.openxmlformats.org/officeDocument/2006/relationships" xmlns:p="http://schemas.openxmlformats.org/presentationml/2006/main" showMasterSp="0" showMasterPhAnim="0">
+  <p:cSld>
+    <p:spTree>
+      <p:nvGrpSpPr>
+        <p:cNvPr id="1" name="Shape 77">
+          <a:extLst>
+            <a:ext uri="{FF2B5EF4-FFF2-40B4-BE49-F238E27FC236}">
+              <a16:creationId xmlns:a16="http://schemas.microsoft.com/office/drawing/2014/main" id="{E66714CB-0328-AADF-7A6C-F2EED746642A}"/>
+            </a:ext>
+          </a:extLst>
+        </p:cNvPr>
+        <p:cNvGrpSpPr/>
+        <p:nvPr/>
+      </p:nvGrpSpPr>
+      <p:grpSpPr>
+        <a:xfrm>
+          <a:off x="0" y="0"/>
+          <a:ext cx="0" cy="0"/>
+          <a:chOff x="0" y="0"/>
+          <a:chExt cx="0" cy="0"/>
+        </a:xfrm>
+      </p:grpSpPr>
+      <p:sp>
+        <p:nvSpPr>
+          <p:cNvPr id="78" name="Google Shape;78;gf4f11f959e_0_5:notes">
+            <a:extLst>
+              <a:ext uri="{FF2B5EF4-FFF2-40B4-BE49-F238E27FC236}">
+                <a16:creationId xmlns:a16="http://schemas.microsoft.com/office/drawing/2014/main" id="{4409C3C1-FA78-E144-2871-CB6AF5B64587}"/>
+              </a:ext>
+            </a:extLst>
+          </p:cNvPr>
+          <p:cNvSpPr>
+            <a:spLocks noGrp="1" noRot="1" noChangeAspect="1"/>
+          </p:cNvSpPr>
+          <p:nvPr>
+            <p:ph type="sldImg" idx="2"/>
+          </p:nvPr>
+        </p:nvSpPr>
+        <p:spPr>
+          <a:xfrm>
+            <a:off x="381000" y="685800"/>
+            <a:ext cx="6096000" cy="3429000"/>
+          </a:xfrm>
+          <a:custGeom>
+            <a:avLst/>
+            <a:gdLst/>
+            <a:ahLst/>
+            <a:cxnLst/>
+            <a:rect l="l" t="t" r="r" b="b"/>
+            <a:pathLst>
+              <a:path w="120000" h="120000" extrusionOk="0">
+                <a:moveTo>
+                  <a:pt x="0" y="0"/>
+                </a:moveTo>
+                <a:lnTo>
+                  <a:pt x="120000" y="0"/>
+                </a:lnTo>
+                <a:lnTo>
+                  <a:pt x="120000" y="120000"/>
+                </a:lnTo>
+                <a:lnTo>
+                  <a:pt x="0" y="120000"/>
+                </a:lnTo>
+                <a:close/>
+              </a:path>
+            </a:pathLst>
+          </a:custGeom>
+          <a:noFill/>
+          <a:ln w="9525" cap="flat" cmpd="sng">
+            <a:solidFill>
+              <a:srgbClr val="000000"/>
+            </a:solidFill>
+            <a:prstDash val="solid"/>
+            <a:round/>
+            <a:headEnd type="none" w="sm" len="sm"/>
+            <a:tailEnd type="none" w="sm" len="sm"/>
+          </a:ln>
+        </p:spPr>
+      </p:sp>
+      <p:sp>
+        <p:nvSpPr>
+          <p:cNvPr id="79" name="Google Shape;79;gf4f11f959e_0_5:notes">
+            <a:extLst>
+              <a:ext uri="{FF2B5EF4-FFF2-40B4-BE49-F238E27FC236}">
+                <a16:creationId xmlns:a16="http://schemas.microsoft.com/office/drawing/2014/main" id="{2292C057-74F5-AC0B-F0A1-A7CE21EEA999}"/>
+              </a:ext>
+            </a:extLst>
+          </p:cNvPr>
+          <p:cNvSpPr txBox="1">
+            <a:spLocks noGrp="1"/>
+          </p:cNvSpPr>
+          <p:nvPr>
+            <p:ph type="body" idx="1"/>
+          </p:nvPr>
+        </p:nvSpPr>
+        <p:spPr>
+          <a:xfrm>
+            <a:off x="685800" y="4343400"/>
+            <a:ext cx="5486400" cy="4114800"/>
+          </a:xfrm>
+          <a:prstGeom prst="rect">
+            <a:avLst/>
+          </a:prstGeom>
+          <a:noFill/>
+          <a:ln>
+            <a:noFill/>
+          </a:ln>
+        </p:spPr>
+        <p:txBody>
+          <a:bodyPr spcFirstLastPara="1" wrap="square" lIns="91425" tIns="91425" rIns="91425" bIns="91425" anchor="t" anchorCtr="0">
+            <a:noAutofit/>
+          </a:bodyPr>
+          <a:lstStyle/>
+          <a:p>
+            <a:pPr marL="0" lvl="0" indent="0" algn="l" rtl="0">
+              <a:lnSpc>
+                <a:spcPct val="100000"/>
+              </a:lnSpc>
+              <a:spcBef>
+                <a:spcPts val="0"/>
+              </a:spcBef>
+              <a:spcAft>
+                <a:spcPts val="0"/>
+              </a:spcAft>
+              <a:buSzPts val="1100"/>
+              <a:buNone/>
+            </a:pPr>
             <a:endParaRPr/>
           </a:p>
         </p:txBody>
@@ -3277,7 +2839,7 @@
     </p:spTree>
     <p:extLst>
       <p:ext uri="{BB962C8B-B14F-4D97-AF65-F5344CB8AC3E}">
-        <p14:creationId xmlns:p14="http://schemas.microsoft.com/office/powerpoint/2010/main" val="384385576"/>
+        <p14:creationId xmlns:p14="http://schemas.microsoft.com/office/powerpoint/2010/main" val="3052372965"/>
       </p:ext>
     </p:extLst>
   </p:cSld>
@@ -8532,1195 +8094,6 @@
         <p:cNvPr id="1" name="Shape 80">
           <a:extLst>
             <a:ext uri="{FF2B5EF4-FFF2-40B4-BE49-F238E27FC236}">
-              <a16:creationId xmlns:a16="http://schemas.microsoft.com/office/drawing/2014/main" id="{D9DE7D89-C1F7-A4A3-4CED-1BDCD203B867}"/>
-            </a:ext>
-          </a:extLst>
-        </p:cNvPr>
-        <p:cNvGrpSpPr/>
-        <p:nvPr/>
-      </p:nvGrpSpPr>
-      <p:grpSpPr>
-        <a:xfrm>
-          <a:off x="0" y="0"/>
-          <a:ext cx="0" cy="0"/>
-          <a:chOff x="0" y="0"/>
-          <a:chExt cx="0" cy="0"/>
-        </a:xfrm>
-      </p:grpSpPr>
-      <p:sp>
-        <p:nvSpPr>
-          <p:cNvPr id="81" name="Google Shape;81;p16">
-            <a:extLst>
-              <a:ext uri="{FF2B5EF4-FFF2-40B4-BE49-F238E27FC236}">
-                <a16:creationId xmlns:a16="http://schemas.microsoft.com/office/drawing/2014/main" id="{C8806206-5BF8-B5CB-7F02-C901346802F4}"/>
-              </a:ext>
-            </a:extLst>
-          </p:cNvPr>
-          <p:cNvSpPr/>
-          <p:nvPr/>
-        </p:nvSpPr>
-        <p:spPr>
-          <a:xfrm>
-            <a:off x="5499" y="-17775"/>
-            <a:ext cx="3520625" cy="5161200"/>
-          </a:xfrm>
-          <a:prstGeom prst="rect">
-            <a:avLst/>
-          </a:prstGeom>
-          <a:solidFill>
-            <a:srgbClr val="C3FFFC"/>
-          </a:solidFill>
-          <a:ln>
-            <a:noFill/>
-          </a:ln>
-        </p:spPr>
-        <p:txBody>
-          <a:bodyPr spcFirstLastPara="1" wrap="square" lIns="91425" tIns="91425" rIns="91425" bIns="91425" anchor="ctr" anchorCtr="0">
-            <a:noAutofit/>
-          </a:bodyPr>
-          <a:lstStyle/>
-          <a:p>
-            <a:pPr marL="0" marR="0" lvl="0" indent="0" algn="l" rtl="0">
-              <a:lnSpc>
-                <a:spcPct val="100000"/>
-              </a:lnSpc>
-              <a:spcBef>
-                <a:spcPts val="0"/>
-              </a:spcBef>
-              <a:spcAft>
-                <a:spcPts val="0"/>
-              </a:spcAft>
-              <a:buClr>
-                <a:srgbClr val="000000"/>
-              </a:buClr>
-              <a:buSzPts val="1400"/>
-              <a:buFont typeface="Arial"/>
-              <a:buNone/>
-            </a:pPr>
-            <a:endParaRPr sz="1400" b="0" i="0" u="none" strike="noStrike" cap="none">
-              <a:solidFill>
-                <a:srgbClr val="000000"/>
-              </a:solidFill>
-              <a:latin typeface="Arial"/>
-              <a:ea typeface="Arial"/>
-              <a:cs typeface="Arial"/>
-              <a:sym typeface="Arial"/>
-            </a:endParaRPr>
-          </a:p>
-        </p:txBody>
-      </p:sp>
-      <p:sp>
-        <p:nvSpPr>
-          <p:cNvPr id="82" name="Google Shape;82;p16">
-            <a:extLst>
-              <a:ext uri="{FF2B5EF4-FFF2-40B4-BE49-F238E27FC236}">
-                <a16:creationId xmlns:a16="http://schemas.microsoft.com/office/drawing/2014/main" id="{A76B9C11-15D3-4C6F-276A-F0FAA446B3B5}"/>
-              </a:ext>
-            </a:extLst>
-          </p:cNvPr>
-          <p:cNvSpPr txBox="1">
-            <a:spLocks noGrp="1"/>
-          </p:cNvSpPr>
-          <p:nvPr>
-            <p:ph type="title"/>
-          </p:nvPr>
-        </p:nvSpPr>
-        <p:spPr>
-          <a:xfrm>
-            <a:off x="438808" y="967077"/>
-            <a:ext cx="2988031" cy="3774288"/>
-          </a:xfrm>
-          <a:prstGeom prst="rect">
-            <a:avLst/>
-          </a:prstGeom>
-          <a:noFill/>
-          <a:ln>
-            <a:noFill/>
-          </a:ln>
-        </p:spPr>
-        <p:txBody>
-          <a:bodyPr spcFirstLastPara="1" wrap="square" lIns="91425" tIns="91425" rIns="91425" bIns="91425" anchor="t" anchorCtr="0">
-            <a:noAutofit/>
-          </a:bodyPr>
-          <a:lstStyle/>
-          <a:p>
-            <a:r>
-              <a:rPr lang="fr-FR" b="1" noProof="0" dirty="0"/>
-              <a:t>Architecture des modèles neuronaux </a:t>
-            </a:r>
-            <a:br>
-              <a:rPr lang="fr-FR" b="1" noProof="0" dirty="0"/>
-            </a:br>
-            <a:br>
-              <a:rPr lang="fr-FR" noProof="0" dirty="0"/>
-            </a:br>
-            <a:r>
-              <a:rPr lang="fr-FR" sz="2000" noProof="0" dirty="0"/>
-              <a:t>- 2 réseaux neuronaux à propagation directe pour une classification binaire efficace</a:t>
-            </a:r>
-            <a:br>
-              <a:rPr lang="fr-FR" b="1" noProof="0" dirty="0"/>
-            </a:br>
-            <a:br>
-              <a:rPr lang="fr-FR" sz="2400" noProof="0" dirty="0">
-                <a:solidFill>
-                  <a:srgbClr val="015955"/>
-                </a:solidFill>
-                <a:latin typeface="Inter"/>
-                <a:ea typeface="Inter"/>
-                <a:cs typeface="Inter"/>
-                <a:sym typeface="Inter"/>
-              </a:rPr>
-            </a:br>
-            <a:br>
-              <a:rPr lang="fr-FR" sz="2400" noProof="0" dirty="0">
-                <a:solidFill>
-                  <a:srgbClr val="015955"/>
-                </a:solidFill>
-                <a:latin typeface="Inter"/>
-                <a:ea typeface="Inter"/>
-                <a:cs typeface="Inter"/>
-                <a:sym typeface="Inter"/>
-              </a:rPr>
-            </a:br>
-            <a:endParaRPr lang="fr-FR" sz="2400" noProof="0" dirty="0">
-              <a:solidFill>
-                <a:srgbClr val="015955"/>
-              </a:solidFill>
-              <a:latin typeface="Inter"/>
-              <a:ea typeface="Inter"/>
-              <a:cs typeface="Inter"/>
-              <a:sym typeface="Inter"/>
-            </a:endParaRPr>
-          </a:p>
-        </p:txBody>
-      </p:sp>
-      <p:pic>
-        <p:nvPicPr>
-          <p:cNvPr id="83" name="Google Shape;83;p16">
-            <a:extLst>
-              <a:ext uri="{FF2B5EF4-FFF2-40B4-BE49-F238E27FC236}">
-                <a16:creationId xmlns:a16="http://schemas.microsoft.com/office/drawing/2014/main" id="{1672457B-229E-7F7A-C9FF-AD2C3D6ABAA0}"/>
-              </a:ext>
-            </a:extLst>
-          </p:cNvPr>
-          <p:cNvPicPr preferRelativeResize="0"/>
-          <p:nvPr/>
-        </p:nvPicPr>
-        <p:blipFill rotWithShape="1">
-          <a:blip r:embed="rId3">
-            <a:alphaModFix/>
-          </a:blip>
-          <a:srcRect/>
-          <a:stretch/>
-        </p:blipFill>
-        <p:spPr>
-          <a:xfrm>
-            <a:off x="463375" y="482852"/>
-            <a:ext cx="576900" cy="385904"/>
-          </a:xfrm>
-          <a:prstGeom prst="rect">
-            <a:avLst/>
-          </a:prstGeom>
-          <a:noFill/>
-          <a:ln>
-            <a:noFill/>
-          </a:ln>
-        </p:spPr>
-      </p:pic>
-      <p:sp>
-        <p:nvSpPr>
-          <p:cNvPr id="84" name="Google Shape;84;p16">
-            <a:extLst>
-              <a:ext uri="{FF2B5EF4-FFF2-40B4-BE49-F238E27FC236}">
-                <a16:creationId xmlns:a16="http://schemas.microsoft.com/office/drawing/2014/main" id="{2BE524D9-0AA5-9467-7381-4ECE57E3DE0D}"/>
-              </a:ext>
-            </a:extLst>
-          </p:cNvPr>
-          <p:cNvSpPr txBox="1">
-            <a:spLocks noGrp="1"/>
-          </p:cNvSpPr>
-          <p:nvPr>
-            <p:ph type="ctrTitle" idx="4294967295"/>
-          </p:nvPr>
-        </p:nvSpPr>
-        <p:spPr>
-          <a:xfrm>
-            <a:off x="3588119" y="579248"/>
-            <a:ext cx="5315100" cy="4380457"/>
-          </a:xfrm>
-          <a:prstGeom prst="rect">
-            <a:avLst/>
-          </a:prstGeom>
-          <a:noFill/>
-          <a:ln>
-            <a:noFill/>
-          </a:ln>
-        </p:spPr>
-        <p:txBody>
-          <a:bodyPr spcFirstLastPara="1" wrap="square" lIns="91425" tIns="91425" rIns="91425" bIns="91425" anchor="t" anchorCtr="0">
-            <a:noAutofit/>
-          </a:bodyPr>
-          <a:lstStyle/>
-          <a:p>
-            <a:r>
-              <a:rPr lang="fr-FR" sz="1400" b="1" noProof="0" dirty="0" err="1"/>
-              <a:t>SimpleSpamDetector</a:t>
-            </a:r>
-            <a:r>
-              <a:rPr lang="fr-FR" sz="1400" b="1" noProof="0" dirty="0"/>
-              <a:t>:</a:t>
-            </a:r>
-            <a:br>
-              <a:rPr lang="fr-FR" sz="1400" noProof="0" dirty="0"/>
-            </a:br>
-            <a:br>
-              <a:rPr lang="fr-FR" sz="1400" noProof="0" dirty="0"/>
-            </a:br>
-            <a:r>
-              <a:rPr lang="fr-FR" sz="1400" noProof="0" dirty="0"/>
-              <a:t>Architecture: Couche d’entrée </a:t>
-            </a:r>
-            <a:r>
-              <a:rPr lang="fr-FR" sz="1400" b="1" noProof="0" dirty="0"/>
-              <a:t>(392 variables</a:t>
-            </a:r>
-            <a:r>
-              <a:rPr lang="fr-FR" sz="1400" noProof="0" dirty="0"/>
-              <a:t>) → Couche cachée (</a:t>
-            </a:r>
-            <a:r>
-              <a:rPr lang="fr-FR" sz="1400" b="1" noProof="0" dirty="0"/>
-              <a:t>128 neurones</a:t>
-            </a:r>
-            <a:r>
-              <a:rPr lang="fr-FR" sz="1400" noProof="0" dirty="0"/>
-              <a:t>, activation </a:t>
-            </a:r>
-            <a:r>
-              <a:rPr lang="fr-FR" sz="1400" noProof="0" dirty="0" err="1"/>
-              <a:t>ReLU</a:t>
-            </a:r>
-            <a:r>
-              <a:rPr lang="fr-FR" sz="1400" noProof="0" dirty="0"/>
-              <a:t>, Dropout) → Couche de sortie (</a:t>
-            </a:r>
-            <a:r>
-              <a:rPr lang="fr-FR" sz="1400" b="1" noProof="0" dirty="0"/>
-              <a:t>1 neurone</a:t>
-            </a:r>
-            <a:r>
-              <a:rPr lang="fr-FR" sz="1400" noProof="0" dirty="0"/>
-              <a:t>, activation </a:t>
-            </a:r>
-            <a:r>
-              <a:rPr lang="fr-FR" sz="1400" noProof="0" dirty="0" err="1"/>
-              <a:t>Sigmoid</a:t>
-            </a:r>
-            <a:r>
-              <a:rPr lang="fr-FR" sz="1400" noProof="0" dirty="0"/>
-              <a:t> pour la probabilité).</a:t>
-            </a:r>
-            <a:br>
-              <a:rPr lang="fr-FR" sz="1400" noProof="0" dirty="0"/>
-            </a:br>
-            <a:br>
-              <a:rPr lang="fr-FR" sz="1400" noProof="0" dirty="0"/>
-            </a:br>
-            <a:r>
-              <a:rPr lang="fr-FR" sz="1400" b="1" noProof="0" dirty="0"/>
-              <a:t>Paramètres: environ 50,433.</a:t>
-            </a:r>
-            <a:br>
-              <a:rPr lang="fr-FR" sz="1400" noProof="0" dirty="0"/>
-            </a:br>
-            <a:br>
-              <a:rPr lang="fr-FR" sz="1400" noProof="0" dirty="0"/>
-            </a:br>
-            <a:br>
-              <a:rPr lang="fr-FR" sz="1400" noProof="0" dirty="0"/>
-            </a:br>
-            <a:r>
-              <a:rPr lang="fr-FR" sz="1400" b="1" noProof="0" dirty="0" err="1"/>
-              <a:t>UltraSimpleSpamDetector</a:t>
-            </a:r>
-            <a:r>
-              <a:rPr lang="fr-FR" sz="1400" b="1" noProof="0" dirty="0"/>
-              <a:t>:</a:t>
-            </a:r>
-            <a:br>
-              <a:rPr lang="fr-FR" sz="1400" noProof="0" dirty="0"/>
-            </a:br>
-            <a:br>
-              <a:rPr lang="fr-FR" sz="1400" noProof="0" dirty="0"/>
-            </a:br>
-            <a:r>
-              <a:rPr lang="fr-FR" sz="1400" noProof="0" dirty="0"/>
-              <a:t>Architecture: Couche d’entrée (</a:t>
-            </a:r>
-            <a:r>
-              <a:rPr lang="fr-FR" sz="1400" b="1" noProof="0" dirty="0"/>
-              <a:t>392 variables</a:t>
-            </a:r>
-            <a:r>
-              <a:rPr lang="fr-FR" sz="1400" noProof="0" dirty="0"/>
-              <a:t>) → Couche cachée (</a:t>
-            </a:r>
-            <a:r>
-              <a:rPr lang="fr-FR" sz="1400" b="1" noProof="0" dirty="0"/>
-              <a:t>64 neurones</a:t>
-            </a:r>
-            <a:r>
-              <a:rPr lang="fr-FR" sz="1400" noProof="0" dirty="0"/>
-              <a:t>, activation </a:t>
-            </a:r>
-            <a:r>
-              <a:rPr lang="fr-FR" sz="1400" noProof="0" dirty="0" err="1"/>
-              <a:t>ReLU</a:t>
-            </a:r>
-            <a:r>
-              <a:rPr lang="fr-FR" sz="1400" noProof="0" dirty="0"/>
-              <a:t>, Dropout) → Couche de sortie (</a:t>
-            </a:r>
-            <a:r>
-              <a:rPr lang="fr-FR" sz="1400" b="1" noProof="0" dirty="0"/>
-              <a:t>1 neurone</a:t>
-            </a:r>
-            <a:r>
-              <a:rPr lang="fr-FR" sz="1400" noProof="0" dirty="0"/>
-              <a:t>, activation </a:t>
-            </a:r>
-            <a:r>
-              <a:rPr lang="fr-FR" sz="1400" noProof="0" dirty="0" err="1"/>
-              <a:t>Sigmoid</a:t>
-            </a:r>
-            <a:r>
-              <a:rPr lang="fr-FR" sz="1400" noProof="0" dirty="0"/>
-              <a:t> pour la probabilité).</a:t>
-            </a:r>
-            <a:br>
-              <a:rPr lang="fr-FR" sz="1400" noProof="0" dirty="0"/>
-            </a:br>
-            <a:br>
-              <a:rPr lang="fr-FR" sz="1400" noProof="0" dirty="0"/>
-            </a:br>
-            <a:r>
-              <a:rPr lang="fr-FR" sz="1400" b="1" noProof="0" dirty="0"/>
-              <a:t>Paramètres: environ 25,217.</a:t>
-            </a:r>
-            <a:br>
-              <a:rPr lang="fr-FR" sz="1400" noProof="0" dirty="0"/>
-            </a:br>
-            <a:br>
-              <a:rPr lang="fr-FR" sz="1400" noProof="0" dirty="0"/>
-            </a:br>
-            <a:br>
-              <a:rPr lang="fr-FR" noProof="0" dirty="0"/>
-            </a:br>
-            <a:br>
-              <a:rPr lang="fr-FR" sz="1600" noProof="0" dirty="0"/>
-            </a:br>
-            <a:br>
-              <a:rPr lang="fr-FR" noProof="0" dirty="0"/>
-            </a:br>
-            <a:br>
-              <a:rPr lang="fr-FR" sz="1600" noProof="0" dirty="0"/>
-            </a:br>
-            <a:br>
-              <a:rPr lang="fr-FR" noProof="0" dirty="0"/>
-            </a:br>
-            <a:endParaRPr lang="fr-FR" sz="1600" noProof="0" dirty="0"/>
-          </a:p>
-        </p:txBody>
-      </p:sp>
-    </p:spTree>
-    <p:extLst>
-      <p:ext uri="{BB962C8B-B14F-4D97-AF65-F5344CB8AC3E}">
-        <p14:creationId xmlns:p14="http://schemas.microsoft.com/office/powerpoint/2010/main" val="851915911"/>
-      </p:ext>
-    </p:extLst>
-  </p:cSld>
-  <p:clrMapOvr>
-    <a:masterClrMapping/>
-  </p:clrMapOvr>
-</p:sld>
-</file>
-
-<file path=ppt/slides/slide11.xml><?xml version="1.0" encoding="utf-8"?>
-<p:sld xmlns:a="http://schemas.openxmlformats.org/drawingml/2006/main" xmlns:r="http://schemas.openxmlformats.org/officeDocument/2006/relationships" xmlns:p="http://schemas.openxmlformats.org/presentationml/2006/main" show="0">
-  <p:cSld>
-    <p:spTree>
-      <p:nvGrpSpPr>
-        <p:cNvPr id="1" name="Shape 80">
-          <a:extLst>
-            <a:ext uri="{FF2B5EF4-FFF2-40B4-BE49-F238E27FC236}">
-              <a16:creationId xmlns:a16="http://schemas.microsoft.com/office/drawing/2014/main" id="{520ADF24-A96D-5542-D7AA-9FAB09665FE6}"/>
-            </a:ext>
-          </a:extLst>
-        </p:cNvPr>
-        <p:cNvGrpSpPr/>
-        <p:nvPr/>
-      </p:nvGrpSpPr>
-      <p:grpSpPr>
-        <a:xfrm>
-          <a:off x="0" y="0"/>
-          <a:ext cx="0" cy="0"/>
-          <a:chOff x="0" y="0"/>
-          <a:chExt cx="0" cy="0"/>
-        </a:xfrm>
-      </p:grpSpPr>
-      <p:sp>
-        <p:nvSpPr>
-          <p:cNvPr id="81" name="Google Shape;81;p16">
-            <a:extLst>
-              <a:ext uri="{FF2B5EF4-FFF2-40B4-BE49-F238E27FC236}">
-                <a16:creationId xmlns:a16="http://schemas.microsoft.com/office/drawing/2014/main" id="{6C15E693-D567-8947-2500-19E39B53C9EF}"/>
-              </a:ext>
-            </a:extLst>
-          </p:cNvPr>
-          <p:cNvSpPr/>
-          <p:nvPr/>
-        </p:nvSpPr>
-        <p:spPr>
-          <a:xfrm>
-            <a:off x="5499" y="-17775"/>
-            <a:ext cx="3520625" cy="5161200"/>
-          </a:xfrm>
-          <a:prstGeom prst="rect">
-            <a:avLst/>
-          </a:prstGeom>
-          <a:solidFill>
-            <a:srgbClr val="C3FFFC"/>
-          </a:solidFill>
-          <a:ln>
-            <a:noFill/>
-          </a:ln>
-        </p:spPr>
-        <p:txBody>
-          <a:bodyPr spcFirstLastPara="1" wrap="square" lIns="91425" tIns="91425" rIns="91425" bIns="91425" anchor="ctr" anchorCtr="0">
-            <a:noAutofit/>
-          </a:bodyPr>
-          <a:lstStyle/>
-          <a:p>
-            <a:pPr marL="0" marR="0" lvl="0" indent="0" algn="l" rtl="0">
-              <a:lnSpc>
-                <a:spcPct val="100000"/>
-              </a:lnSpc>
-              <a:spcBef>
-                <a:spcPts val="0"/>
-              </a:spcBef>
-              <a:spcAft>
-                <a:spcPts val="0"/>
-              </a:spcAft>
-              <a:buClr>
-                <a:srgbClr val="000000"/>
-              </a:buClr>
-              <a:buSzPts val="1400"/>
-              <a:buFont typeface="Arial"/>
-              <a:buNone/>
-            </a:pPr>
-            <a:endParaRPr sz="1400" b="0" i="0" u="none" strike="noStrike" cap="none">
-              <a:solidFill>
-                <a:srgbClr val="000000"/>
-              </a:solidFill>
-              <a:latin typeface="Arial"/>
-              <a:ea typeface="Arial"/>
-              <a:cs typeface="Arial"/>
-              <a:sym typeface="Arial"/>
-            </a:endParaRPr>
-          </a:p>
-        </p:txBody>
-      </p:sp>
-      <p:sp>
-        <p:nvSpPr>
-          <p:cNvPr id="82" name="Google Shape;82;p16">
-            <a:extLst>
-              <a:ext uri="{FF2B5EF4-FFF2-40B4-BE49-F238E27FC236}">
-                <a16:creationId xmlns:a16="http://schemas.microsoft.com/office/drawing/2014/main" id="{5A8CD565-7FB9-F6BA-5DFF-426B16E9B1F1}"/>
-              </a:ext>
-            </a:extLst>
-          </p:cNvPr>
-          <p:cNvSpPr txBox="1">
-            <a:spLocks noGrp="1"/>
-          </p:cNvSpPr>
-          <p:nvPr>
-            <p:ph type="title"/>
-          </p:nvPr>
-        </p:nvSpPr>
-        <p:spPr>
-          <a:xfrm>
-            <a:off x="438808" y="967077"/>
-            <a:ext cx="2988031" cy="3774288"/>
-          </a:xfrm>
-          <a:prstGeom prst="rect">
-            <a:avLst/>
-          </a:prstGeom>
-          <a:noFill/>
-          <a:ln>
-            <a:noFill/>
-          </a:ln>
-        </p:spPr>
-        <p:txBody>
-          <a:bodyPr spcFirstLastPara="1" wrap="square" lIns="91425" tIns="91425" rIns="91425" bIns="91425" anchor="t" anchorCtr="0">
-            <a:noAutofit/>
-          </a:bodyPr>
-          <a:lstStyle/>
-          <a:p>
-            <a:r>
-              <a:rPr lang="en-US" b="1" dirty="0"/>
-              <a:t>Processus </a:t>
-            </a:r>
-            <a:r>
-              <a:rPr lang="en-US" b="1" dirty="0" err="1"/>
-              <a:t>d’entraînement</a:t>
-            </a:r>
-            <a:r>
-              <a:rPr lang="en-US" b="1" dirty="0"/>
-              <a:t> et ponderation des classes</a:t>
-            </a:r>
-            <a:br>
-              <a:rPr lang="en-US" dirty="0"/>
-            </a:br>
-            <a:br>
-              <a:rPr lang="fr-FR" dirty="0"/>
-            </a:br>
-            <a:br>
-              <a:rPr lang="en-US" dirty="0"/>
-            </a:br>
-            <a:r>
-              <a:rPr lang="en-US" sz="2000" dirty="0"/>
-              <a:t>- </a:t>
-            </a:r>
-            <a:r>
-              <a:rPr lang="fr-FR" dirty="0"/>
-              <a:t>Aspects clés de l’entraînement</a:t>
-            </a:r>
-            <a:br>
-              <a:rPr lang="fr-FR" dirty="0"/>
-            </a:br>
-            <a:br>
-              <a:rPr lang="fr-FR" b="1" dirty="0"/>
-            </a:br>
-            <a:br>
-              <a:rPr lang="fr" sz="2400" dirty="0">
-                <a:solidFill>
-                  <a:srgbClr val="015955"/>
-                </a:solidFill>
-                <a:latin typeface="Inter"/>
-                <a:ea typeface="Inter"/>
-                <a:cs typeface="Inter"/>
-                <a:sym typeface="Inter"/>
-              </a:rPr>
-            </a:br>
-            <a:br>
-              <a:rPr lang="fr" sz="2400" dirty="0">
-                <a:solidFill>
-                  <a:srgbClr val="015955"/>
-                </a:solidFill>
-                <a:latin typeface="Inter"/>
-                <a:ea typeface="Inter"/>
-                <a:cs typeface="Inter"/>
-                <a:sym typeface="Inter"/>
-              </a:rPr>
-            </a:br>
-            <a:endParaRPr sz="2400" dirty="0">
-              <a:solidFill>
-                <a:srgbClr val="015955"/>
-              </a:solidFill>
-              <a:latin typeface="Inter"/>
-              <a:ea typeface="Inter"/>
-              <a:cs typeface="Inter"/>
-              <a:sym typeface="Inter"/>
-            </a:endParaRPr>
-          </a:p>
-        </p:txBody>
-      </p:sp>
-      <p:pic>
-        <p:nvPicPr>
-          <p:cNvPr id="83" name="Google Shape;83;p16">
-            <a:extLst>
-              <a:ext uri="{FF2B5EF4-FFF2-40B4-BE49-F238E27FC236}">
-                <a16:creationId xmlns:a16="http://schemas.microsoft.com/office/drawing/2014/main" id="{18DA176D-56A9-4569-D271-7173AA3F0E30}"/>
-              </a:ext>
-            </a:extLst>
-          </p:cNvPr>
-          <p:cNvPicPr preferRelativeResize="0"/>
-          <p:nvPr/>
-        </p:nvPicPr>
-        <p:blipFill rotWithShape="1">
-          <a:blip r:embed="rId3">
-            <a:alphaModFix/>
-          </a:blip>
-          <a:srcRect/>
-          <a:stretch/>
-        </p:blipFill>
-        <p:spPr>
-          <a:xfrm>
-            <a:off x="463375" y="482852"/>
-            <a:ext cx="576900" cy="385904"/>
-          </a:xfrm>
-          <a:prstGeom prst="rect">
-            <a:avLst/>
-          </a:prstGeom>
-          <a:noFill/>
-          <a:ln>
-            <a:noFill/>
-          </a:ln>
-        </p:spPr>
-      </p:pic>
-      <p:sp>
-        <p:nvSpPr>
-          <p:cNvPr id="84" name="Google Shape;84;p16">
-            <a:extLst>
-              <a:ext uri="{FF2B5EF4-FFF2-40B4-BE49-F238E27FC236}">
-                <a16:creationId xmlns:a16="http://schemas.microsoft.com/office/drawing/2014/main" id="{F9D673B3-3E77-045F-8415-0441C81C90B2}"/>
-              </a:ext>
-            </a:extLst>
-          </p:cNvPr>
-          <p:cNvSpPr txBox="1">
-            <a:spLocks noGrp="1"/>
-          </p:cNvSpPr>
-          <p:nvPr>
-            <p:ph type="ctrTitle" idx="4294967295"/>
-          </p:nvPr>
-        </p:nvSpPr>
-        <p:spPr>
-          <a:xfrm>
-            <a:off x="3588119" y="579248"/>
-            <a:ext cx="5455142" cy="4488698"/>
-          </a:xfrm>
-          <a:prstGeom prst="rect">
-            <a:avLst/>
-          </a:prstGeom>
-          <a:noFill/>
-          <a:ln>
-            <a:noFill/>
-          </a:ln>
-        </p:spPr>
-        <p:txBody>
-          <a:bodyPr spcFirstLastPara="1" wrap="square" lIns="91425" tIns="91425" rIns="91425" bIns="91425" anchor="t" anchorCtr="0">
-            <a:noAutofit/>
-          </a:bodyPr>
-          <a:lstStyle/>
-          <a:p>
-            <a:r>
-              <a:rPr lang="en-US" sz="1400" b="1" dirty="0"/>
-              <a:t>Device Utilization: </a:t>
-            </a:r>
-            <a:r>
-              <a:rPr lang="en-US" sz="1400" dirty="0"/>
-              <a:t>use of </a:t>
-            </a:r>
-            <a:r>
-              <a:rPr lang="en-US" sz="1400" dirty="0" err="1"/>
-              <a:t>cuda</a:t>
-            </a:r>
-            <a:r>
-              <a:rPr lang="en-US" sz="1400" dirty="0"/>
-              <a:t> (GPU) device for accelerated training.</a:t>
-            </a:r>
-            <a:br>
-              <a:rPr lang="en-US" sz="1400" dirty="0"/>
-            </a:br>
-            <a:br>
-              <a:rPr lang="en-US" sz="1400" dirty="0"/>
-            </a:br>
-            <a:r>
-              <a:rPr lang="en-US" sz="1400" b="1" dirty="0"/>
-              <a:t>Weighted Loss Function: </a:t>
-            </a:r>
-            <a:r>
-              <a:rPr lang="en-US" sz="1400" dirty="0"/>
-              <a:t>crucial for handling the significant class imbalance.</a:t>
-            </a:r>
-            <a:br>
-              <a:rPr lang="en-US" sz="1400" dirty="0"/>
-            </a:br>
-            <a:br>
-              <a:rPr lang="en-US" sz="1400" b="1" dirty="0"/>
-            </a:br>
-            <a:r>
-              <a:rPr lang="en-US" sz="1400" b="1" dirty="0"/>
-              <a:t>Optimizer: The </a:t>
-            </a:r>
-            <a:r>
-              <a:rPr lang="en-US" sz="1400" dirty="0"/>
-              <a:t>Adam optimizer was employed with a learning rate of 0.001 and </a:t>
-            </a:r>
-            <a:r>
-              <a:rPr lang="en-US" sz="1400" dirty="0" err="1"/>
-              <a:t>weight_decay</a:t>
-            </a:r>
-            <a:r>
-              <a:rPr lang="en-US" sz="1400" dirty="0"/>
-              <a:t>=1e-5 to prevent overfitting.</a:t>
-            </a:r>
-            <a:br>
-              <a:rPr lang="en-US" sz="1400" dirty="0"/>
-            </a:br>
-            <a:br>
-              <a:rPr lang="en-US" sz="1400" dirty="0"/>
-            </a:br>
-            <a:r>
-              <a:rPr lang="en-US" sz="1400" b="1" dirty="0"/>
-              <a:t>Training Loop: </a:t>
-            </a:r>
-            <a:r>
-              <a:rPr lang="en-US" sz="1400" dirty="0"/>
-              <a:t>each epoch involved iterating through the </a:t>
-            </a:r>
-            <a:r>
-              <a:rPr lang="en-US" sz="1400" dirty="0" err="1"/>
-              <a:t>train_loader</a:t>
-            </a:r>
-            <a:r>
-              <a:rPr lang="en-US" sz="1400" dirty="0"/>
-              <a:t>, performing forward pass, calculating the weighted loss, backpropagating gradients, and updating model parameters.</a:t>
-            </a:r>
-            <a:br>
-              <a:rPr lang="en-US" sz="1400" dirty="0"/>
-            </a:br>
-            <a:br>
-              <a:rPr lang="en-US" sz="1400" dirty="0"/>
-            </a:br>
-            <a:r>
-              <a:rPr lang="en-US" sz="1400" b="1" dirty="0"/>
-              <a:t>Validation Loop: </a:t>
-            </a:r>
-            <a:r>
-              <a:rPr lang="en-US" sz="1400" dirty="0"/>
-              <a:t>after each epoch, the model was evaluated on the </a:t>
-            </a:r>
-            <a:r>
-              <a:rPr lang="en-US" sz="1400" dirty="0" err="1"/>
-              <a:t>test_loader</a:t>
-            </a:r>
-            <a:r>
-              <a:rPr lang="en-US" sz="1400" dirty="0"/>
-              <a:t> to monitor performance on unseen data.</a:t>
-            </a:r>
-            <a:br>
-              <a:rPr lang="en-US" sz="1400" dirty="0"/>
-            </a:br>
-            <a:br>
-              <a:rPr lang="en-US" sz="1400" dirty="0"/>
-            </a:br>
-            <a:r>
-              <a:rPr lang="en-US" sz="1400" dirty="0"/>
-              <a:t>Metrics like accuracy and AUC score were calculated to assess generalization ability.</a:t>
-            </a:r>
-            <a:br>
-              <a:rPr lang="en-US" dirty="0"/>
-            </a:br>
-            <a:br>
-              <a:rPr lang="fr-FR" dirty="0"/>
-            </a:br>
-            <a:br>
-              <a:rPr lang="en-US" dirty="0"/>
-            </a:br>
-            <a:br>
-              <a:rPr lang="en-US" sz="1600" dirty="0"/>
-            </a:br>
-            <a:br>
-              <a:rPr lang="en-US" dirty="0"/>
-            </a:br>
-            <a:br>
-              <a:rPr lang="fr-FR" sz="1600" dirty="0"/>
-            </a:br>
-            <a:br>
-              <a:rPr lang="fr-FR" dirty="0"/>
-            </a:br>
-            <a:endParaRPr lang="en-US" sz="1600" dirty="0"/>
-          </a:p>
-        </p:txBody>
-      </p:sp>
-    </p:spTree>
-    <p:extLst>
-      <p:ext uri="{BB962C8B-B14F-4D97-AF65-F5344CB8AC3E}">
-        <p14:creationId xmlns:p14="http://schemas.microsoft.com/office/powerpoint/2010/main" val="1601228616"/>
-      </p:ext>
-    </p:extLst>
-  </p:cSld>
-  <p:clrMapOvr>
-    <a:masterClrMapping/>
-  </p:clrMapOvr>
-</p:sld>
-</file>
-
-<file path=ppt/slides/slide12.xml><?xml version="1.0" encoding="utf-8"?>
-<p:sld xmlns:a="http://schemas.openxmlformats.org/drawingml/2006/main" xmlns:r="http://schemas.openxmlformats.org/officeDocument/2006/relationships" xmlns:p="http://schemas.openxmlformats.org/presentationml/2006/main">
-  <p:cSld>
-    <p:spTree>
-      <p:nvGrpSpPr>
-        <p:cNvPr id="1" name="Shape 80">
-          <a:extLst>
-            <a:ext uri="{FF2B5EF4-FFF2-40B4-BE49-F238E27FC236}">
-              <a16:creationId xmlns:a16="http://schemas.microsoft.com/office/drawing/2014/main" id="{ED642B1F-86B2-60A5-451B-100199CED629}"/>
-            </a:ext>
-          </a:extLst>
-        </p:cNvPr>
-        <p:cNvGrpSpPr/>
-        <p:nvPr/>
-      </p:nvGrpSpPr>
-      <p:grpSpPr>
-        <a:xfrm>
-          <a:off x="0" y="0"/>
-          <a:ext cx="0" cy="0"/>
-          <a:chOff x="0" y="0"/>
-          <a:chExt cx="0" cy="0"/>
-        </a:xfrm>
-      </p:grpSpPr>
-      <p:sp>
-        <p:nvSpPr>
-          <p:cNvPr id="81" name="Google Shape;81;p16">
-            <a:extLst>
-              <a:ext uri="{FF2B5EF4-FFF2-40B4-BE49-F238E27FC236}">
-                <a16:creationId xmlns:a16="http://schemas.microsoft.com/office/drawing/2014/main" id="{66300018-435D-F945-6779-2C2631A5C23F}"/>
-              </a:ext>
-            </a:extLst>
-          </p:cNvPr>
-          <p:cNvSpPr/>
-          <p:nvPr/>
-        </p:nvSpPr>
-        <p:spPr>
-          <a:xfrm>
-            <a:off x="5499" y="-17775"/>
-            <a:ext cx="3520625" cy="5161200"/>
-          </a:xfrm>
-          <a:prstGeom prst="rect">
-            <a:avLst/>
-          </a:prstGeom>
-          <a:solidFill>
-            <a:srgbClr val="C3FFFC"/>
-          </a:solidFill>
-          <a:ln>
-            <a:noFill/>
-          </a:ln>
-        </p:spPr>
-        <p:txBody>
-          <a:bodyPr spcFirstLastPara="1" wrap="square" lIns="91425" tIns="91425" rIns="91425" bIns="91425" anchor="ctr" anchorCtr="0">
-            <a:noAutofit/>
-          </a:bodyPr>
-          <a:lstStyle/>
-          <a:p>
-            <a:pPr marL="0" marR="0" lvl="0" indent="0" algn="l" rtl="0">
-              <a:lnSpc>
-                <a:spcPct val="100000"/>
-              </a:lnSpc>
-              <a:spcBef>
-                <a:spcPts val="0"/>
-              </a:spcBef>
-              <a:spcAft>
-                <a:spcPts val="0"/>
-              </a:spcAft>
-              <a:buClr>
-                <a:srgbClr val="000000"/>
-              </a:buClr>
-              <a:buSzPts val="1400"/>
-              <a:buFont typeface="Arial"/>
-              <a:buNone/>
-            </a:pPr>
-            <a:endParaRPr sz="1400" b="0" i="0" u="none" strike="noStrike" cap="none">
-              <a:solidFill>
-                <a:srgbClr val="000000"/>
-              </a:solidFill>
-              <a:latin typeface="Arial"/>
-              <a:ea typeface="Arial"/>
-              <a:cs typeface="Arial"/>
-              <a:sym typeface="Arial"/>
-            </a:endParaRPr>
-          </a:p>
-        </p:txBody>
-      </p:sp>
-      <p:sp>
-        <p:nvSpPr>
-          <p:cNvPr id="82" name="Google Shape;82;p16">
-            <a:extLst>
-              <a:ext uri="{FF2B5EF4-FFF2-40B4-BE49-F238E27FC236}">
-                <a16:creationId xmlns:a16="http://schemas.microsoft.com/office/drawing/2014/main" id="{D4136558-C25D-9E12-F881-F17613D060B8}"/>
-              </a:ext>
-            </a:extLst>
-          </p:cNvPr>
-          <p:cNvSpPr txBox="1">
-            <a:spLocks noGrp="1"/>
-          </p:cNvSpPr>
-          <p:nvPr>
-            <p:ph type="title"/>
-          </p:nvPr>
-        </p:nvSpPr>
-        <p:spPr>
-          <a:xfrm>
-            <a:off x="365330" y="1369383"/>
-            <a:ext cx="2988031" cy="1857766"/>
-          </a:xfrm>
-          <a:prstGeom prst="rect">
-            <a:avLst/>
-          </a:prstGeom>
-          <a:noFill/>
-          <a:ln>
-            <a:noFill/>
-          </a:ln>
-        </p:spPr>
-        <p:txBody>
-          <a:bodyPr spcFirstLastPara="1" wrap="square" lIns="91425" tIns="91425" rIns="91425" bIns="91425" anchor="t" anchorCtr="0">
-            <a:noAutofit/>
-          </a:bodyPr>
-          <a:lstStyle/>
-          <a:p>
-            <a:r>
-              <a:rPr lang="fr-FR" b="1" dirty="0"/>
-              <a:t>Evaluation et comparaison des modèles</a:t>
-            </a:r>
-            <a:br>
-              <a:rPr lang="fr-FR" dirty="0"/>
-            </a:br>
-            <a:br>
-              <a:rPr lang="en-US" dirty="0"/>
-            </a:br>
-            <a:br>
-              <a:rPr lang="fr-FR" dirty="0"/>
-            </a:br>
-            <a:br>
-              <a:rPr lang="en-US" dirty="0"/>
-            </a:br>
-            <a:br>
-              <a:rPr lang="fr-FR" dirty="0"/>
-            </a:br>
-            <a:br>
-              <a:rPr lang="fr-FR" b="1" dirty="0"/>
-            </a:br>
-            <a:br>
-              <a:rPr lang="fr" sz="2400" dirty="0">
-                <a:solidFill>
-                  <a:srgbClr val="015955"/>
-                </a:solidFill>
-                <a:latin typeface="Inter"/>
-                <a:ea typeface="Inter"/>
-                <a:cs typeface="Inter"/>
-                <a:sym typeface="Inter"/>
-              </a:rPr>
-            </a:br>
-            <a:br>
-              <a:rPr lang="fr" sz="2400" dirty="0">
-                <a:solidFill>
-                  <a:srgbClr val="015955"/>
-                </a:solidFill>
-                <a:latin typeface="Inter"/>
-                <a:ea typeface="Inter"/>
-                <a:cs typeface="Inter"/>
-                <a:sym typeface="Inter"/>
-              </a:rPr>
-            </a:br>
-            <a:endParaRPr sz="2400" dirty="0">
-              <a:solidFill>
-                <a:srgbClr val="015955"/>
-              </a:solidFill>
-              <a:latin typeface="Inter"/>
-              <a:ea typeface="Inter"/>
-              <a:cs typeface="Inter"/>
-              <a:sym typeface="Inter"/>
-            </a:endParaRPr>
-          </a:p>
-        </p:txBody>
-      </p:sp>
-      <p:pic>
-        <p:nvPicPr>
-          <p:cNvPr id="83" name="Google Shape;83;p16">
-            <a:extLst>
-              <a:ext uri="{FF2B5EF4-FFF2-40B4-BE49-F238E27FC236}">
-                <a16:creationId xmlns:a16="http://schemas.microsoft.com/office/drawing/2014/main" id="{043A57F9-4A1F-D430-FEA6-30310DBE76BE}"/>
-              </a:ext>
-            </a:extLst>
-          </p:cNvPr>
-          <p:cNvPicPr preferRelativeResize="0"/>
-          <p:nvPr/>
-        </p:nvPicPr>
-        <p:blipFill rotWithShape="1">
-          <a:blip r:embed="rId3">
-            <a:alphaModFix/>
-          </a:blip>
-          <a:srcRect/>
-          <a:stretch/>
-        </p:blipFill>
-        <p:spPr>
-          <a:xfrm>
-            <a:off x="463375" y="482852"/>
-            <a:ext cx="576900" cy="385904"/>
-          </a:xfrm>
-          <a:prstGeom prst="rect">
-            <a:avLst/>
-          </a:prstGeom>
-          <a:noFill/>
-          <a:ln>
-            <a:noFill/>
-          </a:ln>
-        </p:spPr>
-      </p:pic>
-      <p:sp>
-        <p:nvSpPr>
-          <p:cNvPr id="84" name="Google Shape;84;p16">
-            <a:extLst>
-              <a:ext uri="{FF2B5EF4-FFF2-40B4-BE49-F238E27FC236}">
-                <a16:creationId xmlns:a16="http://schemas.microsoft.com/office/drawing/2014/main" id="{184E04A7-6DCB-FAF8-0D66-F4C55D80D0DE}"/>
-              </a:ext>
-            </a:extLst>
-          </p:cNvPr>
-          <p:cNvSpPr txBox="1">
-            <a:spLocks noGrp="1"/>
-          </p:cNvSpPr>
-          <p:nvPr>
-            <p:ph type="ctrTitle" idx="4294967295"/>
-          </p:nvPr>
-        </p:nvSpPr>
-        <p:spPr>
-          <a:xfrm>
-            <a:off x="3588119" y="579248"/>
-            <a:ext cx="5455142" cy="4488698"/>
-          </a:xfrm>
-          <a:prstGeom prst="rect">
-            <a:avLst/>
-          </a:prstGeom>
-          <a:noFill/>
-          <a:ln>
-            <a:noFill/>
-          </a:ln>
-        </p:spPr>
-        <p:txBody>
-          <a:bodyPr spcFirstLastPara="1" wrap="square" lIns="91425" tIns="91425" rIns="91425" bIns="91425" anchor="t" anchorCtr="0">
-            <a:noAutofit/>
-          </a:bodyPr>
-          <a:lstStyle/>
-          <a:p>
-            <a:r>
-              <a:rPr lang="fr-FR" sz="1400" b="1" noProof="0" dirty="0" err="1"/>
-              <a:t>Ultra-Simple</a:t>
-            </a:r>
-            <a:r>
-              <a:rPr lang="fr-FR" sz="1400" b="1" noProof="0" dirty="0"/>
-              <a:t> NN</a:t>
-            </a:r>
-            <a:br>
-              <a:rPr lang="fr-FR" sz="1400" b="1" noProof="0" dirty="0"/>
-            </a:br>
-            <a:br>
-              <a:rPr lang="fr-FR" sz="1400" b="1" noProof="0" dirty="0"/>
-            </a:br>
-            <a:r>
-              <a:rPr lang="fr-FR" sz="1400" noProof="0" dirty="0"/>
-              <a:t>Sachant que les deux modèles sont efficaces, il vaut mieux choisir le modèle plus simple: </a:t>
-            </a:r>
-            <a:r>
-              <a:rPr lang="fr-FR" sz="1400" b="1" noProof="0" dirty="0" err="1"/>
-              <a:t>Ultra-Simple</a:t>
-            </a:r>
-            <a:r>
-              <a:rPr lang="fr-FR" sz="1400" b="1" noProof="0" dirty="0"/>
-              <a:t> Neural Network </a:t>
-            </a:r>
-            <a:r>
-              <a:rPr lang="fr-FR" sz="1400" noProof="0" dirty="0"/>
-              <a:t>car il compte deux fois moins de paramètres tout en obtenant les résultats comparables ce qui allège les ressources de calcul pour la détection des spams.</a:t>
-            </a:r>
-            <a:br>
-              <a:rPr lang="fr-FR" sz="1400" noProof="0" dirty="0"/>
-            </a:br>
-            <a:br>
-              <a:rPr lang="fr-FR" sz="1600" noProof="0" dirty="0"/>
-            </a:br>
-            <a:br>
-              <a:rPr lang="fr-FR" noProof="0" dirty="0"/>
-            </a:br>
-            <a:br>
-              <a:rPr lang="fr-FR" sz="1600" noProof="0" dirty="0"/>
-            </a:br>
-            <a:br>
-              <a:rPr lang="fr-FR" noProof="0" dirty="0"/>
-            </a:br>
-            <a:endParaRPr lang="fr-FR" sz="1600" noProof="0" dirty="0"/>
-          </a:p>
-        </p:txBody>
-      </p:sp>
-      <p:pic>
-        <p:nvPicPr>
-          <p:cNvPr id="3" name="Image 2" descr="Une image contenant texte, capture d’écran, diagramme, Rectangle&#10;&#10;Le contenu généré par l’IA peut être incorrect.">
-            <a:extLst>
-              <a:ext uri="{FF2B5EF4-FFF2-40B4-BE49-F238E27FC236}">
-                <a16:creationId xmlns:a16="http://schemas.microsoft.com/office/drawing/2014/main" id="{C702E82C-DF40-71D0-AE1B-AB16CE574622}"/>
-              </a:ext>
-            </a:extLst>
-          </p:cNvPr>
-          <p:cNvPicPr>
-            <a:picLocks noChangeAspect="1"/>
-          </p:cNvPicPr>
-          <p:nvPr/>
-        </p:nvPicPr>
-        <p:blipFill>
-          <a:blip r:embed="rId4"/>
-          <a:stretch>
-            <a:fillRect/>
-          </a:stretch>
-        </p:blipFill>
-        <p:spPr>
-          <a:xfrm>
-            <a:off x="3798512" y="2298266"/>
-            <a:ext cx="2049308" cy="1942716"/>
-          </a:xfrm>
-          <a:prstGeom prst="rect">
-            <a:avLst/>
-          </a:prstGeom>
-        </p:spPr>
-      </p:pic>
-      <p:pic>
-        <p:nvPicPr>
-          <p:cNvPr id="5" name="Image 4" descr="Une image contenant texte, capture d’écran, diagramme, Rectangle&#10;&#10;Le contenu généré par l’IA peut être incorrect.">
-            <a:extLst>
-              <a:ext uri="{FF2B5EF4-FFF2-40B4-BE49-F238E27FC236}">
-                <a16:creationId xmlns:a16="http://schemas.microsoft.com/office/drawing/2014/main" id="{4F46F44E-8250-E270-299C-6F5BD20E1F4E}"/>
-              </a:ext>
-            </a:extLst>
-          </p:cNvPr>
-          <p:cNvPicPr>
-            <a:picLocks noChangeAspect="1"/>
-          </p:cNvPicPr>
-          <p:nvPr/>
-        </p:nvPicPr>
-        <p:blipFill>
-          <a:blip r:embed="rId5"/>
-          <a:stretch>
-            <a:fillRect/>
-          </a:stretch>
-        </p:blipFill>
-        <p:spPr>
-          <a:xfrm>
-            <a:off x="6192760" y="2199020"/>
-            <a:ext cx="2049308" cy="1999487"/>
-          </a:xfrm>
-          <a:prstGeom prst="rect">
-            <a:avLst/>
-          </a:prstGeom>
-        </p:spPr>
-      </p:pic>
-    </p:spTree>
-    <p:extLst>
-      <p:ext uri="{BB962C8B-B14F-4D97-AF65-F5344CB8AC3E}">
-        <p14:creationId xmlns:p14="http://schemas.microsoft.com/office/powerpoint/2010/main" val="2507890807"/>
-      </p:ext>
-    </p:extLst>
-  </p:cSld>
-  <p:clrMapOvr>
-    <a:masterClrMapping/>
-  </p:clrMapOvr>
-</p:sld>
-</file>
-
-<file path=ppt/slides/slide13.xml><?xml version="1.0" encoding="utf-8"?>
-<p:sld xmlns:a="http://schemas.openxmlformats.org/drawingml/2006/main" xmlns:r="http://schemas.openxmlformats.org/officeDocument/2006/relationships" xmlns:p="http://schemas.openxmlformats.org/presentationml/2006/main">
-  <p:cSld>
-    <p:spTree>
-      <p:nvGrpSpPr>
-        <p:cNvPr id="1" name="Shape 80">
-          <a:extLst>
-            <a:ext uri="{FF2B5EF4-FFF2-40B4-BE49-F238E27FC236}">
               <a16:creationId xmlns:a16="http://schemas.microsoft.com/office/drawing/2014/main" id="{C32A60FE-CE44-2D5D-F927-68E8F986E124}"/>
             </a:ext>
           </a:extLst>
@@ -10055,7 +8428,7 @@
 </p:sld>
 </file>
 
-<file path=ppt/slides/slide14.xml><?xml version="1.0" encoding="utf-8"?>
+<file path=ppt/slides/slide11.xml><?xml version="1.0" encoding="utf-8"?>
 <p:sld xmlns:a="http://schemas.openxmlformats.org/drawingml/2006/main" xmlns:r="http://schemas.openxmlformats.org/officeDocument/2006/relationships" xmlns:p="http://schemas.openxmlformats.org/presentationml/2006/main">
   <p:cSld>
     <p:spTree>
@@ -10271,8 +8644,8 @@
         </p:nvSpPr>
         <p:spPr>
           <a:xfrm>
-            <a:off x="3872289" y="868756"/>
-            <a:ext cx="4865613" cy="3703244"/>
+            <a:off x="3872289" y="957915"/>
+            <a:ext cx="4865613" cy="3478913"/>
           </a:xfrm>
           <a:prstGeom prst="rect">
             <a:avLst/>
@@ -10315,28 +8688,21 @@
             </a:br>
             <a:r>
               <a:rPr lang="fr-FR" sz="1800" noProof="0" dirty="0"/>
-              <a:t>3. Fine-tuning du modèle de Sentence Transformers </a:t>
+              <a:t>3. Ingénieries des variables plus poussées</a:t>
             </a:r>
             <a:br>
               <a:rPr lang="fr-FR" sz="1800" noProof="0" dirty="0"/>
             </a:br>
             <a:r>
               <a:rPr lang="fr-FR" sz="1800" noProof="0" dirty="0"/>
-              <a:t>4. Ingénieries des variables plus poussées</a:t>
+              <a:t>4. Expansion du jeu de données (une autre langue)</a:t>
             </a:r>
             <a:br>
               <a:rPr lang="fr-FR" sz="1800" noProof="0" dirty="0"/>
             </a:br>
             <a:r>
               <a:rPr lang="fr-FR" sz="1800" noProof="0" dirty="0"/>
-              <a:t>5. Expansion du jeu de données </a:t>
-            </a:r>
-            <a:br>
-              <a:rPr lang="fr-FR" sz="1800" noProof="0" dirty="0"/>
-            </a:br>
-            <a:r>
-              <a:rPr lang="fr-FR" sz="1800" noProof="0" dirty="0"/>
-              <a:t>6. Déploiement du modèle pour utilisation en temps réel</a:t>
+              <a:t>5. Déploiement du modèle pour utilisation en temps réel</a:t>
             </a:r>
             <a:br>
               <a:rPr lang="fr-FR" sz="1600" noProof="0" dirty="0"/>
@@ -10400,7 +8766,7 @@
 </p:sld>
 </file>
 
-<file path=ppt/slides/slide15.xml><?xml version="1.0" encoding="utf-8"?>
+<file path=ppt/slides/slide12.xml><?xml version="1.0" encoding="utf-8"?>
 <p:sld xmlns:a="http://schemas.openxmlformats.org/drawingml/2006/main" xmlns:r="http://schemas.openxmlformats.org/officeDocument/2006/relationships" xmlns:p="http://schemas.openxmlformats.org/presentationml/2006/main">
   <p:cSld>
     <p:spTree>
@@ -10503,8 +8869,8 @@
         </p:nvSpPr>
         <p:spPr>
           <a:xfrm>
-            <a:off x="406097" y="1030187"/>
-            <a:ext cx="3088771" cy="1647699"/>
+            <a:off x="549937" y="1379931"/>
+            <a:ext cx="2361676" cy="1084860"/>
           </a:xfrm>
           <a:prstGeom prst="rect">
             <a:avLst/>
@@ -10775,7 +9141,7 @@
 </p:sld>
 </file>
 
-<file path=ppt/slides/slide16.xml><?xml version="1.0" encoding="utf-8"?>
+<file path=ppt/slides/slide13.xml><?xml version="1.0" encoding="utf-8"?>
 <p:sld xmlns:a="http://schemas.openxmlformats.org/drawingml/2006/main" xmlns:r="http://schemas.openxmlformats.org/officeDocument/2006/relationships" xmlns:p="http://schemas.openxmlformats.org/presentationml/2006/main">
   <p:cSld>
     <p:bg>
@@ -10999,7 +9365,7 @@
 </p:sld>
 </file>
 
-<file path=ppt/slides/slide17.xml><?xml version="1.0" encoding="utf-8"?>
+<file path=ppt/slides/slide14.xml><?xml version="1.0" encoding="utf-8"?>
 <p:sld xmlns:a="http://schemas.openxmlformats.org/drawingml/2006/main" xmlns:r="http://schemas.openxmlformats.org/officeDocument/2006/relationships" xmlns:p="http://schemas.openxmlformats.org/presentationml/2006/main">
   <p:cSld>
     <p:bg>
@@ -11241,8 +9607,8 @@
         </p:nvSpPr>
         <p:spPr>
           <a:xfrm>
-            <a:off x="528599" y="1199357"/>
-            <a:ext cx="7189328" cy="3116611"/>
+            <a:off x="463375" y="868756"/>
+            <a:ext cx="7189328" cy="3850073"/>
           </a:xfrm>
           <a:prstGeom prst="rect">
             <a:avLst/>
@@ -11302,6 +9668,34 @@
             <a:r>
               <a:rPr lang="fr-FR" dirty="0"/>
               <a:t>(apprentissage profond)</a:t>
+            </a:r>
+            <a:br>
+              <a:rPr lang="fr-FR" dirty="0"/>
+            </a:br>
+            <a:br>
+              <a:rPr lang="fr-FR" dirty="0"/>
+            </a:br>
+            <a:r>
+              <a:rPr lang="fr-FR" sz="1800" dirty="0"/>
+              <a:t>Lien vers le dépôt sur </a:t>
+            </a:r>
+            <a:r>
+              <a:rPr lang="fr-FR" sz="1800" dirty="0" err="1"/>
+              <a:t>Github</a:t>
+            </a:r>
+            <a:r>
+              <a:rPr lang="fr-FR" sz="1800" dirty="0"/>
+              <a:t>: </a:t>
+            </a:r>
+            <a:r>
+              <a:rPr lang="fr-FR" sz="1800" dirty="0">
+                <a:hlinkClick r:id="rId3"/>
+              </a:rPr>
+              <a:t>https://github.com/AgaHei/Spam-Detector</a:t>
+            </a:r>
+            <a:r>
+              <a:rPr lang="fr-FR" sz="1800" dirty="0"/>
+              <a:t> </a:t>
             </a:r>
             <a:br>
               <a:rPr lang="fr" sz="4800" dirty="0">
@@ -11344,7 +9738,7 @@
           <p:nvPr/>
         </p:nvPicPr>
         <p:blipFill>
-          <a:blip r:embed="rId3">
+          <a:blip r:embed="rId4">
             <a:alphaModFix/>
           </a:blip>
           <a:stretch>
@@ -11380,7 +9774,7 @@
           <p:nvPr/>
         </p:nvPicPr>
         <p:blipFill>
-          <a:blip r:embed="rId4">
+          <a:blip r:embed="rId5">
             <a:extLst>
               <a:ext uri="{28A0092B-C50C-407E-A947-70E740481C1C}">
                 <a14:useLocalDpi xmlns:a14="http://schemas.microsoft.com/office/drawing/2010/main" val="0"/>
@@ -11394,7 +9788,7 @@
         </p:blipFill>
         <p:spPr bwMode="auto">
           <a:xfrm>
-            <a:off x="6591256" y="2634696"/>
+            <a:off x="6696452" y="1744572"/>
             <a:ext cx="2253343" cy="2253343"/>
           </a:xfrm>
           <a:prstGeom prst="rect">
@@ -11464,10 +9858,10 @@
           <a:p>
             <a:pPr lvl="0"/>
             <a:r>
-              <a:rPr lang="fr-FR" sz="2400" noProof="0" dirty="0"/>
+              <a:rPr lang="fr-FR" sz="2400" b="1" noProof="0" dirty="0"/>
               <a:t>Objectif du projet</a:t>
             </a:r>
-            <a:endParaRPr lang="fr-FR" sz="2500" noProof="0" dirty="0">
+            <a:endParaRPr lang="fr-FR" sz="2500" b="1" noProof="0" dirty="0">
               <a:solidFill>
                 <a:srgbClr val="0E3449"/>
               </a:solidFill>
@@ -11514,7 +9908,23 @@
                   <a:schemeClr val="tx1"/>
                 </a:solidFill>
               </a:rPr>
-              <a:t>Développer un détecteur de spam automatique en utilisant des techniques d’apprentissage profond avancées, exploiter l’apprentissage</a:t>
+              <a:t>Développer un </a:t>
+            </a:r>
+            <a:r>
+              <a:rPr lang="fr-FR" sz="2400" b="1" noProof="0" dirty="0">
+                <a:solidFill>
+                  <a:schemeClr val="tx1"/>
+                </a:solidFill>
+              </a:rPr>
+              <a:t>détecteur de spam automatique </a:t>
+            </a:r>
+            <a:r>
+              <a:rPr lang="fr-FR" sz="2400" noProof="0" dirty="0">
+                <a:solidFill>
+                  <a:schemeClr val="tx1"/>
+                </a:solidFill>
+              </a:rPr>
+              <a:t>en utilisant des techniques d’apprentissage profond avancées, exploiter l’apprentissage</a:t>
             </a:r>
             <a:r>
               <a:rPr lang="fr-FR" sz="2400" dirty="0">
@@ -12016,345 +10426,6 @@
 </file>
 
 <file path=ppt/slides/slide5.xml><?xml version="1.0" encoding="utf-8"?>
-<p:sld xmlns:a="http://schemas.openxmlformats.org/drawingml/2006/main" xmlns:r="http://schemas.openxmlformats.org/officeDocument/2006/relationships" xmlns:p="http://schemas.openxmlformats.org/presentationml/2006/main" show="0">
-  <p:cSld>
-    <p:spTree>
-      <p:nvGrpSpPr>
-        <p:cNvPr id="1" name="Shape 80">
-          <a:extLst>
-            <a:ext uri="{FF2B5EF4-FFF2-40B4-BE49-F238E27FC236}">
-              <a16:creationId xmlns:a16="http://schemas.microsoft.com/office/drawing/2014/main" id="{A8A5D7D1-F001-0176-41AE-652C7D7C9DFC}"/>
-            </a:ext>
-          </a:extLst>
-        </p:cNvPr>
-        <p:cNvGrpSpPr/>
-        <p:nvPr/>
-      </p:nvGrpSpPr>
-      <p:grpSpPr>
-        <a:xfrm>
-          <a:off x="0" y="0"/>
-          <a:ext cx="0" cy="0"/>
-          <a:chOff x="0" y="0"/>
-          <a:chExt cx="0" cy="0"/>
-        </a:xfrm>
-      </p:grpSpPr>
-      <p:sp>
-        <p:nvSpPr>
-          <p:cNvPr id="81" name="Google Shape;81;p16">
-            <a:extLst>
-              <a:ext uri="{FF2B5EF4-FFF2-40B4-BE49-F238E27FC236}">
-                <a16:creationId xmlns:a16="http://schemas.microsoft.com/office/drawing/2014/main" id="{7FFC7DC1-B63D-89A9-0E71-7A081E9C4BD5}"/>
-              </a:ext>
-            </a:extLst>
-          </p:cNvPr>
-          <p:cNvSpPr/>
-          <p:nvPr/>
-        </p:nvSpPr>
-        <p:spPr>
-          <a:xfrm>
-            <a:off x="5500" y="-17775"/>
-            <a:ext cx="3691106" cy="5161200"/>
-          </a:xfrm>
-          <a:prstGeom prst="rect">
-            <a:avLst/>
-          </a:prstGeom>
-          <a:solidFill>
-            <a:srgbClr val="C3FFFC"/>
-          </a:solidFill>
-          <a:ln>
-            <a:noFill/>
-          </a:ln>
-        </p:spPr>
-        <p:txBody>
-          <a:bodyPr spcFirstLastPara="1" wrap="square" lIns="91425" tIns="91425" rIns="91425" bIns="91425" anchor="ctr" anchorCtr="0">
-            <a:noAutofit/>
-          </a:bodyPr>
-          <a:lstStyle/>
-          <a:p>
-            <a:pPr marL="0" marR="0" lvl="0" indent="0" algn="l" rtl="0">
-              <a:lnSpc>
-                <a:spcPct val="100000"/>
-              </a:lnSpc>
-              <a:spcBef>
-                <a:spcPts val="0"/>
-              </a:spcBef>
-              <a:spcAft>
-                <a:spcPts val="0"/>
-              </a:spcAft>
-              <a:buClr>
-                <a:srgbClr val="000000"/>
-              </a:buClr>
-              <a:buSzPts val="1400"/>
-              <a:buFont typeface="Arial"/>
-              <a:buNone/>
-            </a:pPr>
-            <a:endParaRPr sz="1400" b="0" i="0" u="none" strike="noStrike" cap="none">
-              <a:solidFill>
-                <a:srgbClr val="000000"/>
-              </a:solidFill>
-              <a:latin typeface="Arial"/>
-              <a:ea typeface="Arial"/>
-              <a:cs typeface="Arial"/>
-              <a:sym typeface="Arial"/>
-            </a:endParaRPr>
-          </a:p>
-        </p:txBody>
-      </p:sp>
-      <p:sp>
-        <p:nvSpPr>
-          <p:cNvPr id="82" name="Google Shape;82;p16">
-            <a:extLst>
-              <a:ext uri="{FF2B5EF4-FFF2-40B4-BE49-F238E27FC236}">
-                <a16:creationId xmlns:a16="http://schemas.microsoft.com/office/drawing/2014/main" id="{AD11FFD6-8681-77E2-B818-342D4E50E44C}"/>
-              </a:ext>
-            </a:extLst>
-          </p:cNvPr>
-          <p:cNvSpPr txBox="1">
-            <a:spLocks noGrp="1"/>
-          </p:cNvSpPr>
-          <p:nvPr>
-            <p:ph type="title"/>
-          </p:nvPr>
-        </p:nvSpPr>
-        <p:spPr>
-          <a:xfrm>
-            <a:off x="390598" y="1138675"/>
-            <a:ext cx="3306007" cy="3458100"/>
-          </a:xfrm>
-          <a:prstGeom prst="rect">
-            <a:avLst/>
-          </a:prstGeom>
-          <a:noFill/>
-          <a:ln>
-            <a:noFill/>
-          </a:ln>
-        </p:spPr>
-        <p:txBody>
-          <a:bodyPr spcFirstLastPara="1" wrap="square" lIns="91425" tIns="91425" rIns="91425" bIns="91425" anchor="t" anchorCtr="0">
-            <a:noAutofit/>
-          </a:bodyPr>
-          <a:lstStyle/>
-          <a:p>
-            <a:r>
-              <a:rPr lang="en-US" b="1" dirty="0"/>
-              <a:t>Exploratory Data Analysis (EDA) &amp; Insights</a:t>
-            </a:r>
-            <a:br>
-              <a:rPr lang="en-US" b="1" dirty="0"/>
-            </a:br>
-            <a:br>
-              <a:rPr lang="en-US" b="1" dirty="0"/>
-            </a:br>
-            <a:r>
-              <a:rPr lang="en-US" dirty="0"/>
-              <a:t>Key Findings</a:t>
-            </a:r>
-            <a:br>
-              <a:rPr lang="en-US" dirty="0"/>
-            </a:br>
-            <a:br>
-              <a:rPr lang="en-US" sz="2400" dirty="0"/>
-            </a:br>
-            <a:br>
-              <a:rPr lang="fr" sz="2400" dirty="0">
-                <a:solidFill>
-                  <a:srgbClr val="015955"/>
-                </a:solidFill>
-                <a:latin typeface="Inter"/>
-                <a:ea typeface="Inter"/>
-                <a:cs typeface="Inter"/>
-                <a:sym typeface="Inter"/>
-              </a:rPr>
-            </a:br>
-            <a:br>
-              <a:rPr lang="fr" sz="2400" dirty="0">
-                <a:solidFill>
-                  <a:srgbClr val="015955"/>
-                </a:solidFill>
-                <a:latin typeface="Inter"/>
-                <a:ea typeface="Inter"/>
-                <a:cs typeface="Inter"/>
-                <a:sym typeface="Inter"/>
-              </a:rPr>
-            </a:br>
-            <a:endParaRPr sz="2400" dirty="0">
-              <a:solidFill>
-                <a:srgbClr val="015955"/>
-              </a:solidFill>
-              <a:latin typeface="Inter"/>
-              <a:ea typeface="Inter"/>
-              <a:cs typeface="Inter"/>
-              <a:sym typeface="Inter"/>
-            </a:endParaRPr>
-          </a:p>
-        </p:txBody>
-      </p:sp>
-      <p:pic>
-        <p:nvPicPr>
-          <p:cNvPr id="83" name="Google Shape;83;p16">
-            <a:extLst>
-              <a:ext uri="{FF2B5EF4-FFF2-40B4-BE49-F238E27FC236}">
-                <a16:creationId xmlns:a16="http://schemas.microsoft.com/office/drawing/2014/main" id="{60D7D562-0F34-DD17-FD35-4F73EEFBE3DB}"/>
-              </a:ext>
-            </a:extLst>
-          </p:cNvPr>
-          <p:cNvPicPr preferRelativeResize="0"/>
-          <p:nvPr/>
-        </p:nvPicPr>
-        <p:blipFill rotWithShape="1">
-          <a:blip r:embed="rId3">
-            <a:alphaModFix/>
-          </a:blip>
-          <a:srcRect/>
-          <a:stretch/>
-        </p:blipFill>
-        <p:spPr>
-          <a:xfrm>
-            <a:off x="463375" y="482852"/>
-            <a:ext cx="576900" cy="385904"/>
-          </a:xfrm>
-          <a:prstGeom prst="rect">
-            <a:avLst/>
-          </a:prstGeom>
-          <a:noFill/>
-          <a:ln>
-            <a:noFill/>
-          </a:ln>
-        </p:spPr>
-      </p:pic>
-      <p:sp>
-        <p:nvSpPr>
-          <p:cNvPr id="84" name="Google Shape;84;p16">
-            <a:extLst>
-              <a:ext uri="{FF2B5EF4-FFF2-40B4-BE49-F238E27FC236}">
-                <a16:creationId xmlns:a16="http://schemas.microsoft.com/office/drawing/2014/main" id="{58063B08-1C2E-B674-6B5A-1F7A688B758A}"/>
-              </a:ext>
-            </a:extLst>
-          </p:cNvPr>
-          <p:cNvSpPr txBox="1">
-            <a:spLocks noGrp="1"/>
-          </p:cNvSpPr>
-          <p:nvPr>
-            <p:ph type="ctrTitle" idx="4294967295"/>
-          </p:nvPr>
-        </p:nvSpPr>
-        <p:spPr>
-          <a:xfrm>
-            <a:off x="3696605" y="362272"/>
-            <a:ext cx="5315100" cy="4155483"/>
-          </a:xfrm>
-          <a:prstGeom prst="rect">
-            <a:avLst/>
-          </a:prstGeom>
-          <a:noFill/>
-          <a:ln>
-            <a:noFill/>
-          </a:ln>
-        </p:spPr>
-        <p:txBody>
-          <a:bodyPr spcFirstLastPara="1" wrap="square" lIns="91425" tIns="91425" rIns="91425" bIns="91425" anchor="t" anchorCtr="0">
-            <a:noAutofit/>
-          </a:bodyPr>
-          <a:lstStyle/>
-          <a:p>
-            <a:r>
-              <a:rPr lang="en-US" sz="1600" b="1" dirty="0"/>
-              <a:t>- Significant Class Imbalance:</a:t>
-            </a:r>
-            <a:br>
-              <a:rPr lang="en-US" sz="1600" dirty="0"/>
-            </a:br>
-            <a:r>
-              <a:rPr lang="en-US" sz="1600" dirty="0"/>
-              <a:t>Dataset has 5572 messages: 4825 'ham' (86.6%) and 747 'spam' (13.4%). </a:t>
-            </a:r>
-            <a:br>
-              <a:rPr lang="en-US" sz="1600" dirty="0"/>
-            </a:br>
-            <a:br>
-              <a:rPr lang="en-US" sz="1600" dirty="0"/>
-            </a:br>
-            <a:r>
-              <a:rPr lang="en-US" sz="1600" b="1" dirty="0"/>
-              <a:t>- Message Length Differences:</a:t>
-            </a:r>
-            <a:br>
-              <a:rPr lang="en-US" sz="1600" dirty="0"/>
-            </a:br>
-            <a:r>
-              <a:rPr lang="en-US" sz="1600" dirty="0"/>
-              <a:t>'Ham' messages are generally shorter </a:t>
-            </a:r>
-            <a:br>
-              <a:rPr lang="en-US" sz="1600" dirty="0"/>
-            </a:br>
-            <a:br>
-              <a:rPr lang="en-US" sz="1600" dirty="0"/>
-            </a:br>
-            <a:r>
-              <a:rPr lang="en-US" sz="1600" b="1" dirty="0"/>
-              <a:t>- Distinct Language Styles:</a:t>
-            </a:r>
-            <a:br>
-              <a:rPr lang="en-US" sz="1600" dirty="0"/>
-            </a:br>
-            <a:r>
-              <a:rPr lang="en-US" sz="1600" dirty="0"/>
-              <a:t>Ham: Often casual, uses slang, and personal tone. Spam: Characterized by formal, promotional, and urgent language.</a:t>
-            </a:r>
-            <a:br>
-              <a:rPr lang="en-US" sz="1600" dirty="0"/>
-            </a:br>
-            <a:br>
-              <a:rPr lang="en-US" sz="1600" dirty="0"/>
-            </a:br>
-            <a:r>
-              <a:rPr lang="en-US" sz="1600" b="1" dirty="0"/>
-              <a:t>- Vocabulary Patterns:</a:t>
-            </a:r>
-            <a:br>
-              <a:rPr lang="en-US" sz="1600" dirty="0"/>
-            </a:br>
-            <a:r>
-              <a:rPr lang="en-US" sz="1600" dirty="0"/>
-              <a:t>Spam Keywords: Frequent use of terms like "free", "win", "reward", "claim", "urgent", "offer" — classic indicators.</a:t>
-            </a:r>
-            <a:br>
-              <a:rPr lang="en-US" sz="1400" dirty="0"/>
-            </a:br>
-            <a:br>
-              <a:rPr lang="en-US" sz="1400" dirty="0"/>
-            </a:br>
-            <a:br>
-              <a:rPr lang="en-US" dirty="0"/>
-            </a:br>
-            <a:br>
-              <a:rPr lang="en-US" sz="1600" dirty="0"/>
-            </a:br>
-            <a:br>
-              <a:rPr lang="en-US" dirty="0"/>
-            </a:br>
-            <a:br>
-              <a:rPr lang="fr-FR" dirty="0"/>
-            </a:br>
-            <a:endParaRPr lang="en-US" sz="1600" dirty="0"/>
-          </a:p>
-        </p:txBody>
-      </p:sp>
-    </p:spTree>
-    <p:extLst>
-      <p:ext uri="{BB962C8B-B14F-4D97-AF65-F5344CB8AC3E}">
-        <p14:creationId xmlns:p14="http://schemas.microsoft.com/office/powerpoint/2010/main" val="1856429892"/>
-      </p:ext>
-    </p:extLst>
-  </p:cSld>
-  <p:clrMapOvr>
-    <a:masterClrMapping/>
-  </p:clrMapOvr>
-</p:sld>
-</file>
-
-<file path=ppt/slides/slide6.xml><?xml version="1.0" encoding="utf-8"?>
 <p:sld xmlns:a="http://schemas.openxmlformats.org/drawingml/2006/main" xmlns:r="http://schemas.openxmlformats.org/officeDocument/2006/relationships" xmlns:p="http://schemas.openxmlformats.org/presentationml/2006/main">
   <p:cSld>
     <p:spTree>
@@ -12767,7 +10838,7 @@
 </p:sld>
 </file>
 
-<file path=ppt/slides/slide7.xml><?xml version="1.0" encoding="utf-8"?>
+<file path=ppt/slides/slide6.xml><?xml version="1.0" encoding="utf-8"?>
 <p:sld xmlns:a="http://schemas.openxmlformats.org/drawingml/2006/main" xmlns:r="http://schemas.openxmlformats.org/officeDocument/2006/relationships" xmlns:p="http://schemas.openxmlformats.org/presentationml/2006/main">
   <p:cSld>
     <p:spTree>
@@ -13006,8 +11077,8 @@
         </p:nvSpPr>
         <p:spPr>
           <a:xfrm>
-            <a:off x="3740519" y="1141433"/>
-            <a:ext cx="5315100" cy="3425576"/>
+            <a:off x="3707517" y="697480"/>
+            <a:ext cx="4997675" cy="3969936"/>
           </a:xfrm>
           <a:prstGeom prst="rect">
             <a:avLst/>
@@ -13035,45 +11106,100 @@
             </a:br>
             <a:r>
               <a:rPr lang="fr-FR" sz="1800" noProof="0" dirty="0"/>
-              <a:t> - </a:t>
-            </a:r>
-            <a:r>
-              <a:rPr lang="fr-FR" sz="1800" noProof="0" dirty="0" err="1"/>
+              <a:t>- </a:t>
+            </a:r>
+            <a:r>
+              <a:rPr lang="fr-FR" sz="1800" b="1" noProof="0" dirty="0" err="1"/>
               <a:t>spam_keyword_count</a:t>
             </a:r>
-            <a:r>
+            <a:br>
               <a:rPr lang="fr-FR" sz="1800" noProof="0" dirty="0"/>
-              <a:t>: compte les occurrences des mots clés attribués aux spams</a:t>
-            </a:r>
-            <a:br>
+            </a:br>
+            <a:r>
               <a:rPr lang="fr-FR" sz="1800" noProof="0" dirty="0"/>
-            </a:br>
+              <a:t>- </a:t>
+            </a:r>
+            <a:r>
+              <a:rPr lang="fr-FR" sz="1800" b="1" noProof="0" dirty="0" err="1"/>
+              <a:t>has_spam_keywords</a:t>
+            </a:r>
             <a:br>
               <a:rPr lang="fr-FR" sz="1800" noProof="0" dirty="0"/>
             </a:br>
             <a:r>
               <a:rPr lang="fr-FR" sz="1800" noProof="0" dirty="0"/>
-              <a:t> - </a:t>
-            </a:r>
-            <a:r>
-              <a:rPr lang="fr-FR" sz="1800" noProof="0" dirty="0" err="1"/>
-              <a:t>has_spam_keywords</a:t>
-            </a:r>
-            <a:r>
+              <a:t>- </a:t>
+            </a:r>
+            <a:r>
+              <a:rPr lang="fr-FR" sz="1800" b="1" noProof="0" dirty="0" err="1"/>
+              <a:t>char_count</a:t>
+            </a:r>
+            <a:br>
               <a:rPr lang="fr-FR" sz="1800" noProof="0" dirty="0"/>
-              <a:t>: une variable binaire (0 ou 1) </a:t>
-            </a:r>
-            <a:r>
-              <a:rPr lang="fr-FR" sz="1800" noProof="0" dirty="0" err="1"/>
-              <a:t>indicant</a:t>
-            </a:r>
+            </a:br>
             <a:r>
               <a:rPr lang="fr-FR" sz="1800" noProof="0" dirty="0"/>
-              <a:t> si le message contient le mot clé ou non</a:t>
-            </a:r>
-            <a:br>
+              <a:t>- </a:t>
+            </a:r>
+            <a:r>
+              <a:rPr lang="fr-FR" sz="1800" b="1" noProof="0" dirty="0" err="1"/>
+              <a:t>exclamation_count</a:t>
+            </a:r>
+            <a:br>
+              <a:rPr lang="fr-FR" sz="1800" dirty="0"/>
+            </a:br>
+            <a:r>
               <a:rPr lang="fr-FR" sz="1800" noProof="0" dirty="0"/>
-            </a:br>
+              <a:t>- </a:t>
+            </a:r>
+            <a:r>
+              <a:rPr lang="fr-FR" sz="1800" b="1" noProof="0" dirty="0" err="1"/>
+              <a:t>capital_ratio</a:t>
+            </a:r>
+            <a:br>
+              <a:rPr lang="fr-FR" sz="1800" noProof="0" dirty="0"/>
+            </a:br>
+            <a:r>
+              <a:rPr lang="fr-FR" sz="1800" noProof="0" dirty="0"/>
+              <a:t>- </a:t>
+            </a:r>
+            <a:r>
+              <a:rPr lang="fr-FR" sz="1800" b="1" noProof="0" dirty="0" err="1"/>
+              <a:t>has_numbers</a:t>
+            </a:r>
+            <a:br>
+              <a:rPr lang="fr-FR" sz="1800" noProof="0" dirty="0"/>
+            </a:br>
+            <a:r>
+              <a:rPr lang="fr-FR" sz="1800" noProof="0" dirty="0"/>
+              <a:t>- </a:t>
+            </a:r>
+            <a:r>
+              <a:rPr lang="fr-FR" sz="1800" b="1" noProof="0" dirty="0" err="1"/>
+              <a:t>has_currency</a:t>
+            </a:r>
+            <a:br>
+              <a:rPr lang="fr-FR" sz="1800" noProof="0" dirty="0"/>
+            </a:br>
+            <a:r>
+              <a:rPr lang="fr-FR" sz="1800" noProof="0" dirty="0"/>
+              <a:t>- </a:t>
+            </a:r>
+            <a:r>
+              <a:rPr lang="fr-FR" sz="1800" b="1" noProof="0" dirty="0" err="1"/>
+              <a:t>has_url</a:t>
+            </a:r>
+            <a:br>
+              <a:rPr lang="fr-FR" sz="1800" noProof="0" dirty="0"/>
+            </a:br>
+            <a:r>
+              <a:rPr lang="fr-FR" sz="1800" noProof="0" dirty="0"/>
+              <a:t>- </a:t>
+            </a:r>
+            <a:r>
+              <a:rPr lang="fr-FR" sz="1800" b="1" noProof="0" dirty="0" err="1"/>
+              <a:t>has_phone</a:t>
+            </a:r>
             <a:br>
               <a:rPr lang="fr-FR" sz="1800" noProof="0" dirty="0"/>
             </a:br>
@@ -13106,7 +11232,7 @@
 </p:sld>
 </file>
 
-<file path=ppt/slides/slide8.xml><?xml version="1.0" encoding="utf-8"?>
+<file path=ppt/slides/slide7.xml><?xml version="1.0" encoding="utf-8"?>
 <p:sld xmlns:a="http://schemas.openxmlformats.org/drawingml/2006/main" xmlns:r="http://schemas.openxmlformats.org/officeDocument/2006/relationships" xmlns:p="http://schemas.openxmlformats.org/presentationml/2006/main">
   <p:cSld>
     <p:spTree>
@@ -13370,15 +11496,7 @@
             </a:r>
             <a:r>
               <a:rPr lang="fr-FR" sz="1800" noProof="0" dirty="0"/>
-              <a:t> connu pour son </a:t>
-            </a:r>
-            <a:r>
-              <a:rPr lang="fr-FR" sz="1800" noProof="0" dirty="0" err="1"/>
-              <a:t>équlibre</a:t>
-            </a:r>
-            <a:r>
-              <a:rPr lang="fr-FR" sz="1800" noProof="0" dirty="0"/>
-              <a:t> entre la Vitesse et la performance.</a:t>
+              <a:t> connu pour son équilibre entre la Vitesse et la performance.</a:t>
             </a:r>
             <a:br>
               <a:rPr lang="fr-FR" sz="1800" noProof="0" dirty="0"/>
@@ -13454,7 +11572,7 @@
 </p:sld>
 </file>
 
-<file path=ppt/slides/slide9.xml><?xml version="1.0" encoding="utf-8"?>
+<file path=ppt/slides/slide8.xml><?xml version="1.0" encoding="utf-8"?>
 <p:sld xmlns:a="http://schemas.openxmlformats.org/drawingml/2006/main" xmlns:r="http://schemas.openxmlformats.org/officeDocument/2006/relationships" xmlns:p="http://schemas.openxmlformats.org/presentationml/2006/main">
   <p:cSld>
     <p:spTree>
@@ -13462,7 +11580,7 @@
         <p:cNvPr id="1" name="Shape 80">
           <a:extLst>
             <a:ext uri="{FF2B5EF4-FFF2-40B4-BE49-F238E27FC236}">
-              <a16:creationId xmlns:a16="http://schemas.microsoft.com/office/drawing/2014/main" id="{8F107260-E9E3-F2FF-2773-9B1ED7275C4E}"/>
+              <a16:creationId xmlns:a16="http://schemas.microsoft.com/office/drawing/2014/main" id="{D9DE7D89-C1F7-A4A3-4CED-1BDCD203B867}"/>
             </a:ext>
           </a:extLst>
         </p:cNvPr>
@@ -13482,7 +11600,7 @@
           <p:cNvPr id="81" name="Google Shape;81;p16">
             <a:extLst>
               <a:ext uri="{FF2B5EF4-FFF2-40B4-BE49-F238E27FC236}">
-                <a16:creationId xmlns:a16="http://schemas.microsoft.com/office/drawing/2014/main" id="{04979A22-C8E0-FFFA-9852-DCCD10627B77}"/>
+                <a16:creationId xmlns:a16="http://schemas.microsoft.com/office/drawing/2014/main" id="{C8806206-5BF8-B5CB-7F02-C901346802F4}"/>
               </a:ext>
             </a:extLst>
           </p:cNvPr>
@@ -13544,7 +11662,7 @@
           <p:cNvPr id="82" name="Google Shape;82;p16">
             <a:extLst>
               <a:ext uri="{FF2B5EF4-FFF2-40B4-BE49-F238E27FC236}">
-                <a16:creationId xmlns:a16="http://schemas.microsoft.com/office/drawing/2014/main" id="{2AECFF55-D3E0-E752-1051-22457DE80FFD}"/>
+                <a16:creationId xmlns:a16="http://schemas.microsoft.com/office/drawing/2014/main" id="{A76B9C11-15D3-4C6F-276A-F0FAA446B3B5}"/>
               </a:ext>
             </a:extLst>
           </p:cNvPr>
@@ -13575,24 +11693,24 @@
           <a:lstStyle/>
           <a:p>
             <a:r>
-              <a:rPr lang="fr-FR" b="1" dirty="0"/>
+              <a:rPr lang="fr-FR" b="1" noProof="0" dirty="0"/>
               <a:t>Architecture des modèles neuronaux </a:t>
             </a:r>
             <a:br>
-              <a:rPr lang="fr-FR" b="1" dirty="0"/>
-            </a:br>
-            <a:br>
-              <a:rPr lang="fr-FR" dirty="0"/>
-            </a:br>
-            <a:r>
-              <a:rPr lang="fr-FR" sz="2000" dirty="0"/>
+              <a:rPr lang="fr-FR" b="1" noProof="0" dirty="0"/>
+            </a:br>
+            <a:br>
+              <a:rPr lang="fr-FR" noProof="0" dirty="0"/>
+            </a:br>
+            <a:r>
+              <a:rPr lang="fr-FR" sz="2000" noProof="0" dirty="0"/>
               <a:t>- 2 réseaux neuronaux à propagation directe pour une classification binaire efficace</a:t>
             </a:r>
             <a:br>
-              <a:rPr lang="fr-FR" b="1" dirty="0"/>
-            </a:br>
-            <a:br>
-              <a:rPr lang="fr" sz="2400" dirty="0">
+              <a:rPr lang="fr-FR" b="1" noProof="0" dirty="0"/>
+            </a:br>
+            <a:br>
+              <a:rPr lang="fr-FR" sz="2400" noProof="0" dirty="0">
                 <a:solidFill>
                   <a:srgbClr val="015955"/>
                 </a:solidFill>
@@ -13603,7 +11721,7 @@
               </a:rPr>
             </a:br>
             <a:br>
-              <a:rPr lang="fr" sz="2400" dirty="0">
+              <a:rPr lang="fr-FR" sz="2400" noProof="0" dirty="0">
                 <a:solidFill>
                   <a:srgbClr val="015955"/>
                 </a:solidFill>
@@ -13613,7 +11731,7 @@
                 <a:sym typeface="Inter"/>
               </a:rPr>
             </a:br>
-            <a:endParaRPr sz="2400" dirty="0">
+            <a:endParaRPr lang="fr-FR" sz="2400" noProof="0" dirty="0">
               <a:solidFill>
                 <a:srgbClr val="015955"/>
               </a:solidFill>
@@ -13630,7 +11748,7 @@
           <p:cNvPr id="83" name="Google Shape;83;p16">
             <a:extLst>
               <a:ext uri="{FF2B5EF4-FFF2-40B4-BE49-F238E27FC236}">
-                <a16:creationId xmlns:a16="http://schemas.microsoft.com/office/drawing/2014/main" id="{8C51FDFF-64D4-7826-EACF-38E4037EB7A9}"/>
+                <a16:creationId xmlns:a16="http://schemas.microsoft.com/office/drawing/2014/main" id="{1672457B-229E-7F7A-C9FF-AD2C3D6ABAA0}"/>
               </a:ext>
             </a:extLst>
           </p:cNvPr>
@@ -13663,7 +11781,7 @@
           <p:cNvPr id="84" name="Google Shape;84;p16">
             <a:extLst>
               <a:ext uri="{FF2B5EF4-FFF2-40B4-BE49-F238E27FC236}">
-                <a16:creationId xmlns:a16="http://schemas.microsoft.com/office/drawing/2014/main" id="{F5F910D5-3B49-70D5-2E53-E96797673320}"/>
+                <a16:creationId xmlns:a16="http://schemas.microsoft.com/office/drawing/2014/main" id="{2BE524D9-0AA5-9467-7381-4ECE57E3DE0D}"/>
               </a:ext>
             </a:extLst>
           </p:cNvPr>
@@ -13676,8 +11794,8 @@
         </p:nvSpPr>
         <p:spPr>
           <a:xfrm>
-            <a:off x="3526124" y="341931"/>
-            <a:ext cx="5455142" cy="4441788"/>
+            <a:off x="3588119" y="579248"/>
+            <a:ext cx="5315100" cy="4162117"/>
           </a:xfrm>
           <a:prstGeom prst="rect">
             <a:avLst/>
@@ -13694,124 +11812,155 @@
           <a:lstStyle/>
           <a:p>
             <a:r>
-              <a:rPr lang="fr-FR" sz="1600" b="1" noProof="0" dirty="0"/>
-              <a:t>Conception:</a:t>
-            </a:r>
-            <a:br>
-              <a:rPr lang="fr-FR" sz="1600" noProof="0" dirty="0"/>
-            </a:br>
-            <a:br>
-              <a:rPr lang="fr-FR" sz="1600" noProof="0" dirty="0"/>
-            </a:br>
-            <a:r>
-              <a:rPr lang="fr-FR" sz="1600" b="1" noProof="0" dirty="0"/>
-              <a:t>Couche d’entrée</a:t>
-            </a:r>
-            <a:r>
-              <a:rPr lang="fr-FR" sz="1600" noProof="0" dirty="0"/>
-              <a:t>: 392 variables (384 de Sentence Transformers + 8 variables spécifiques).</a:t>
-            </a:r>
-            <a:br>
-              <a:rPr lang="fr-FR" sz="1600" noProof="0" dirty="0"/>
-            </a:br>
-            <a:br>
-              <a:rPr lang="fr-FR" sz="1600" noProof="0" dirty="0"/>
-            </a:br>
-            <a:r>
-              <a:rPr lang="fr-FR" sz="1600" b="1" noProof="0" dirty="0"/>
-              <a:t>Couche de sortie</a:t>
-            </a:r>
-            <a:r>
-              <a:rPr lang="fr-FR" sz="1600" noProof="0" dirty="0"/>
-              <a:t>: Simple neurone avec l’activation sigmoïde pour la classification binaire (spam/</a:t>
-            </a:r>
-            <a:r>
-              <a:rPr lang="fr-FR" sz="1600" noProof="0" dirty="0" err="1"/>
-              <a:t>ham</a:t>
-            </a:r>
-            <a:r>
-              <a:rPr lang="fr-FR" sz="1600" noProof="0" dirty="0"/>
-              <a:t>).</a:t>
-            </a:r>
-            <a:br>
-              <a:rPr lang="fr-FR" sz="1600" noProof="0" dirty="0"/>
-            </a:br>
-            <a:br>
-              <a:rPr lang="fr-FR" sz="1600" noProof="0" dirty="0"/>
-            </a:br>
-            <a:r>
-              <a:rPr lang="fr-FR" sz="1600" b="1" noProof="0" dirty="0"/>
-              <a:t>Activation</a:t>
-            </a:r>
-            <a:r>
-              <a:rPr lang="fr-FR" sz="1600" noProof="0" dirty="0"/>
-              <a:t>: </a:t>
-            </a:r>
-            <a:r>
-              <a:rPr lang="fr-FR" sz="1600" noProof="0" dirty="0" err="1"/>
+              <a:rPr lang="fr-FR" sz="1400" b="1" noProof="0" dirty="0" err="1"/>
+              <a:t>SimpleSpamDetector</a:t>
+            </a:r>
+            <a:r>
+              <a:rPr lang="fr-FR" sz="1400" b="1" noProof="0" dirty="0"/>
+              <a:t>:</a:t>
+            </a:r>
+            <a:br>
+              <a:rPr lang="fr-FR" sz="1400" noProof="0" dirty="0"/>
+            </a:br>
+            <a:br>
+              <a:rPr lang="fr-FR" sz="1400" noProof="0" dirty="0"/>
+            </a:br>
+            <a:r>
+              <a:rPr lang="fr-FR" sz="1400" noProof="0" dirty="0"/>
+              <a:t>Architecture: Couche d’entrée </a:t>
+            </a:r>
+            <a:r>
+              <a:rPr lang="fr-FR" sz="1400" b="1" noProof="0" dirty="0"/>
+              <a:t>(392 variables</a:t>
+            </a:r>
+            <a:r>
+              <a:rPr lang="fr-FR" sz="1400" noProof="0" dirty="0"/>
+              <a:t>) → Couche cachée (</a:t>
+            </a:r>
+            <a:r>
+              <a:rPr lang="fr-FR" sz="1400" b="1" noProof="0" dirty="0"/>
+              <a:t>128 neurones</a:t>
+            </a:r>
+            <a:r>
+              <a:rPr lang="fr-FR" sz="1400" noProof="0" dirty="0"/>
+              <a:t>, activation </a:t>
+            </a:r>
+            <a:r>
+              <a:rPr lang="fr-FR" sz="1400" noProof="0" dirty="0" err="1"/>
               <a:t>ReLU</a:t>
             </a:r>
             <a:r>
-              <a:rPr lang="fr-FR" sz="1600" noProof="0" dirty="0"/>
-              <a:t> pour la non-linéarité dans les couches cachées.</a:t>
-            </a:r>
-            <a:br>
-              <a:rPr lang="fr-FR" sz="1600" noProof="0" dirty="0"/>
-            </a:br>
-            <a:br>
-              <a:rPr lang="fr-FR" sz="1600" noProof="0" dirty="0"/>
-            </a:br>
-            <a:r>
-              <a:rPr lang="fr-FR" sz="1600" b="1" noProof="0" dirty="0"/>
-              <a:t>Dropout</a:t>
-            </a:r>
-            <a:r>
-              <a:rPr lang="fr-FR" sz="1600" noProof="0" dirty="0"/>
-              <a:t>: Inclut pour prévenir l’</a:t>
-            </a:r>
-            <a:r>
-              <a:rPr lang="fr-FR" sz="1600" noProof="0" dirty="0" err="1"/>
-              <a:t>overfitting</a:t>
-            </a:r>
-            <a:r>
-              <a:rPr lang="fr-FR" sz="1600" noProof="0" dirty="0"/>
-              <a:t>, </a:t>
-            </a:r>
-            <a:r>
-              <a:rPr lang="fr-FR" sz="1600" noProof="0" dirty="0" err="1"/>
-              <a:t>surout</a:t>
-            </a:r>
-            <a:r>
-              <a:rPr lang="fr-FR" sz="1600" noProof="0" dirty="0"/>
-              <a:t> dans un </a:t>
-            </a:r>
-            <a:r>
-              <a:rPr lang="fr-FR" sz="1600" noProof="0" dirty="0" err="1"/>
-              <a:t>context</a:t>
-            </a:r>
-            <a:r>
-              <a:rPr lang="fr-FR" sz="1600" noProof="0" dirty="0"/>
-              <a:t> du jeu de données restreint</a:t>
-            </a:r>
-            <a:br>
-              <a:rPr lang="fr-FR" sz="1600" noProof="0" dirty="0"/>
-            </a:br>
-            <a:br>
-              <a:rPr lang="fr-FR" sz="1600" noProof="0" dirty="0"/>
-            </a:br>
-            <a:r>
-              <a:rPr lang="fr-FR" sz="1600" b="1" noProof="0" dirty="0"/>
-              <a:t>Efficacité</a:t>
-            </a:r>
-            <a:r>
-              <a:rPr lang="fr-FR" sz="1600" noProof="0" dirty="0"/>
-              <a:t>: les deux modèles priorisent l’architecture à propagation directe pour équilibrer la performance avec les ressources de calcul pour assurer un déploiement rapide.</a:t>
-            </a:r>
-            <a:br>
-              <a:rPr lang="fr-FR" noProof="0" dirty="0"/>
-            </a:br>
-            <a:br>
-              <a:rPr lang="fr-FR" noProof="0" dirty="0"/>
+              <a:rPr lang="fr-FR" sz="1400" noProof="0" dirty="0"/>
+              <a:t>, Dropout) → Couche de sortie (</a:t>
+            </a:r>
+            <a:r>
+              <a:rPr lang="fr-FR" sz="1400" b="1" noProof="0" dirty="0"/>
+              <a:t>1 neurone</a:t>
+            </a:r>
+            <a:r>
+              <a:rPr lang="fr-FR" sz="1400" noProof="0" dirty="0"/>
+              <a:t>, activation </a:t>
+            </a:r>
+            <a:r>
+              <a:rPr lang="fr-FR" sz="1400" noProof="0" dirty="0" err="1"/>
+              <a:t>Sigmoid</a:t>
+            </a:r>
+            <a:r>
+              <a:rPr lang="fr-FR" sz="1400" noProof="0" dirty="0"/>
+              <a:t> pour la probabilité).</a:t>
+            </a:r>
+            <a:br>
+              <a:rPr lang="fr-FR" sz="1400" noProof="0" dirty="0"/>
+            </a:br>
+            <a:br>
+              <a:rPr lang="fr-FR" sz="1400" noProof="0" dirty="0"/>
+            </a:br>
+            <a:r>
+              <a:rPr lang="fr-FR" sz="1400" b="1" noProof="0" dirty="0"/>
+              <a:t>Paramètres: environ 50,433.</a:t>
+            </a:r>
+            <a:br>
+              <a:rPr lang="fr-FR" sz="1400" noProof="0" dirty="0"/>
+            </a:br>
+            <a:br>
+              <a:rPr lang="fr-FR" sz="1400" noProof="0" dirty="0"/>
+            </a:br>
+            <a:br>
+              <a:rPr lang="fr-FR" sz="1400" noProof="0" dirty="0"/>
+            </a:br>
+            <a:r>
+              <a:rPr lang="fr-FR" sz="1400" b="1" noProof="0" dirty="0" err="1"/>
+              <a:t>UltraSimpleSpamDetector</a:t>
+            </a:r>
+            <a:r>
+              <a:rPr lang="fr-FR" sz="1400" b="1" noProof="0" dirty="0"/>
+              <a:t>:</a:t>
+            </a:r>
+            <a:br>
+              <a:rPr lang="fr-FR" sz="1400" noProof="0" dirty="0"/>
+            </a:br>
+            <a:br>
+              <a:rPr lang="fr-FR" sz="1400" noProof="0" dirty="0"/>
+            </a:br>
+            <a:r>
+              <a:rPr lang="fr-FR" sz="1400" noProof="0" dirty="0"/>
+              <a:t>Architecture: Couche d’entrée (</a:t>
+            </a:r>
+            <a:r>
+              <a:rPr lang="fr-FR" sz="1400" b="1" noProof="0" dirty="0"/>
+              <a:t>392 variables</a:t>
+            </a:r>
+            <a:r>
+              <a:rPr lang="fr-FR" sz="1400" noProof="0" dirty="0"/>
+              <a:t>) → Couche cachée (</a:t>
+            </a:r>
+            <a:r>
+              <a:rPr lang="fr-FR" sz="1400" b="1" noProof="0" dirty="0"/>
+              <a:t>64 neurones</a:t>
+            </a:r>
+            <a:r>
+              <a:rPr lang="fr-FR" sz="1400" noProof="0" dirty="0"/>
+              <a:t>, activation </a:t>
+            </a:r>
+            <a:r>
+              <a:rPr lang="fr-FR" sz="1400" noProof="0" dirty="0" err="1"/>
+              <a:t>ReLU</a:t>
+            </a:r>
+            <a:r>
+              <a:rPr lang="fr-FR" sz="1400" noProof="0" dirty="0"/>
+              <a:t>, Dropout) → Couche de sortie (</a:t>
+            </a:r>
+            <a:r>
+              <a:rPr lang="fr-FR" sz="1400" b="1" noProof="0" dirty="0"/>
+              <a:t>1 neurone</a:t>
+            </a:r>
+            <a:r>
+              <a:rPr lang="fr-FR" sz="1400" noProof="0" dirty="0"/>
+              <a:t>, activation </a:t>
+            </a:r>
+            <a:r>
+              <a:rPr lang="fr-FR" sz="1400" noProof="0" dirty="0" err="1"/>
+              <a:t>Sigmoid</a:t>
+            </a:r>
+            <a:r>
+              <a:rPr lang="fr-FR" sz="1400" noProof="0" dirty="0"/>
+              <a:t> pour la probabilité).</a:t>
+            </a:r>
+            <a:br>
+              <a:rPr lang="fr-FR" sz="1400" noProof="0" dirty="0"/>
+            </a:br>
+            <a:br>
+              <a:rPr lang="fr-FR" sz="1400" noProof="0" dirty="0"/>
+            </a:br>
+            <a:r>
+              <a:rPr lang="fr-FR" sz="1400" b="1" noProof="0" dirty="0"/>
+              <a:t>Paramètres: environ 25,217.</a:t>
+            </a:r>
+            <a:br>
+              <a:rPr lang="fr-FR" sz="1400" noProof="0" dirty="0"/>
+            </a:br>
+            <a:br>
+              <a:rPr lang="fr-FR" sz="1400" noProof="0" dirty="0"/>
             </a:br>
             <a:br>
               <a:rPr lang="fr-FR" noProof="0" dirty="0"/>
@@ -13835,7 +11984,764 @@
     </p:spTree>
     <p:extLst>
       <p:ext uri="{BB962C8B-B14F-4D97-AF65-F5344CB8AC3E}">
-        <p14:creationId xmlns:p14="http://schemas.microsoft.com/office/powerpoint/2010/main" val="2564139638"/>
+        <p14:creationId xmlns:p14="http://schemas.microsoft.com/office/powerpoint/2010/main" val="851915911"/>
+      </p:ext>
+    </p:extLst>
+  </p:cSld>
+  <p:clrMapOvr>
+    <a:masterClrMapping/>
+  </p:clrMapOvr>
+</p:sld>
+</file>
+
+<file path=ppt/slides/slide9.xml><?xml version="1.0" encoding="utf-8"?>
+<p:sld xmlns:a="http://schemas.openxmlformats.org/drawingml/2006/main" xmlns:r="http://schemas.openxmlformats.org/officeDocument/2006/relationships" xmlns:p="http://schemas.openxmlformats.org/presentationml/2006/main">
+  <p:cSld>
+    <p:spTree>
+      <p:nvGrpSpPr>
+        <p:cNvPr id="1" name="Shape 80">
+          <a:extLst>
+            <a:ext uri="{FF2B5EF4-FFF2-40B4-BE49-F238E27FC236}">
+              <a16:creationId xmlns:a16="http://schemas.microsoft.com/office/drawing/2014/main" id="{ED642B1F-86B2-60A5-451B-100199CED629}"/>
+            </a:ext>
+          </a:extLst>
+        </p:cNvPr>
+        <p:cNvGrpSpPr/>
+        <p:nvPr/>
+      </p:nvGrpSpPr>
+      <p:grpSpPr>
+        <a:xfrm>
+          <a:off x="0" y="0"/>
+          <a:ext cx="0" cy="0"/>
+          <a:chOff x="0" y="0"/>
+          <a:chExt cx="0" cy="0"/>
+        </a:xfrm>
+      </p:grpSpPr>
+      <p:sp>
+        <p:nvSpPr>
+          <p:cNvPr id="81" name="Google Shape;81;p16">
+            <a:extLst>
+              <a:ext uri="{FF2B5EF4-FFF2-40B4-BE49-F238E27FC236}">
+                <a16:creationId xmlns:a16="http://schemas.microsoft.com/office/drawing/2014/main" id="{66300018-435D-F945-6779-2C2631A5C23F}"/>
+              </a:ext>
+            </a:extLst>
+          </p:cNvPr>
+          <p:cNvSpPr/>
+          <p:nvPr/>
+        </p:nvSpPr>
+        <p:spPr>
+          <a:xfrm>
+            <a:off x="5499" y="-17775"/>
+            <a:ext cx="3520625" cy="5161200"/>
+          </a:xfrm>
+          <a:prstGeom prst="rect">
+            <a:avLst/>
+          </a:prstGeom>
+          <a:solidFill>
+            <a:srgbClr val="C3FFFC"/>
+          </a:solidFill>
+          <a:ln>
+            <a:noFill/>
+          </a:ln>
+        </p:spPr>
+        <p:txBody>
+          <a:bodyPr spcFirstLastPara="1" wrap="square" lIns="91425" tIns="91425" rIns="91425" bIns="91425" anchor="ctr" anchorCtr="0">
+            <a:noAutofit/>
+          </a:bodyPr>
+          <a:lstStyle/>
+          <a:p>
+            <a:pPr marL="0" marR="0" lvl="0" indent="0" algn="l" rtl="0">
+              <a:lnSpc>
+                <a:spcPct val="100000"/>
+              </a:lnSpc>
+              <a:spcBef>
+                <a:spcPts val="0"/>
+              </a:spcBef>
+              <a:spcAft>
+                <a:spcPts val="0"/>
+              </a:spcAft>
+              <a:buClr>
+                <a:srgbClr val="000000"/>
+              </a:buClr>
+              <a:buSzPts val="1400"/>
+              <a:buFont typeface="Arial"/>
+              <a:buNone/>
+            </a:pPr>
+            <a:endParaRPr sz="1400" b="0" i="0" u="none" strike="noStrike" cap="none">
+              <a:solidFill>
+                <a:srgbClr val="000000"/>
+              </a:solidFill>
+              <a:latin typeface="Arial"/>
+              <a:ea typeface="Arial"/>
+              <a:cs typeface="Arial"/>
+              <a:sym typeface="Arial"/>
+            </a:endParaRPr>
+          </a:p>
+        </p:txBody>
+      </p:sp>
+      <p:sp>
+        <p:nvSpPr>
+          <p:cNvPr id="82" name="Google Shape;82;p16">
+            <a:extLst>
+              <a:ext uri="{FF2B5EF4-FFF2-40B4-BE49-F238E27FC236}">
+                <a16:creationId xmlns:a16="http://schemas.microsoft.com/office/drawing/2014/main" id="{D4136558-C25D-9E12-F881-F17613D060B8}"/>
+              </a:ext>
+            </a:extLst>
+          </p:cNvPr>
+          <p:cNvSpPr txBox="1">
+            <a:spLocks noGrp="1"/>
+          </p:cNvSpPr>
+          <p:nvPr>
+            <p:ph type="title"/>
+          </p:nvPr>
+        </p:nvSpPr>
+        <p:spPr>
+          <a:xfrm>
+            <a:off x="291027" y="1511458"/>
+            <a:ext cx="2988031" cy="1857766"/>
+          </a:xfrm>
+          <a:prstGeom prst="rect">
+            <a:avLst/>
+          </a:prstGeom>
+          <a:noFill/>
+          <a:ln>
+            <a:noFill/>
+          </a:ln>
+        </p:spPr>
+        <p:txBody>
+          <a:bodyPr spcFirstLastPara="1" wrap="square" lIns="91425" tIns="91425" rIns="91425" bIns="91425" anchor="t" anchorCtr="0">
+            <a:noAutofit/>
+          </a:bodyPr>
+          <a:lstStyle/>
+          <a:p>
+            <a:r>
+              <a:rPr lang="fr-FR" b="1" dirty="0"/>
+              <a:t>Evaluation et comparaison des modèles</a:t>
+            </a:r>
+            <a:br>
+              <a:rPr lang="fr-FR" dirty="0"/>
+            </a:br>
+            <a:br>
+              <a:rPr lang="en-US" dirty="0"/>
+            </a:br>
+            <a:br>
+              <a:rPr lang="fr-FR" dirty="0"/>
+            </a:br>
+            <a:br>
+              <a:rPr lang="en-US" dirty="0"/>
+            </a:br>
+            <a:br>
+              <a:rPr lang="fr-FR" dirty="0"/>
+            </a:br>
+            <a:br>
+              <a:rPr lang="fr-FR" b="1" dirty="0"/>
+            </a:br>
+            <a:br>
+              <a:rPr lang="fr" sz="2400" dirty="0">
+                <a:solidFill>
+                  <a:srgbClr val="015955"/>
+                </a:solidFill>
+                <a:latin typeface="Inter"/>
+                <a:ea typeface="Inter"/>
+                <a:cs typeface="Inter"/>
+                <a:sym typeface="Inter"/>
+              </a:rPr>
+            </a:br>
+            <a:br>
+              <a:rPr lang="fr" sz="2400" dirty="0">
+                <a:solidFill>
+                  <a:srgbClr val="015955"/>
+                </a:solidFill>
+                <a:latin typeface="Inter"/>
+                <a:ea typeface="Inter"/>
+                <a:cs typeface="Inter"/>
+                <a:sym typeface="Inter"/>
+              </a:rPr>
+            </a:br>
+            <a:endParaRPr sz="2400" dirty="0">
+              <a:solidFill>
+                <a:srgbClr val="015955"/>
+              </a:solidFill>
+              <a:latin typeface="Inter"/>
+              <a:ea typeface="Inter"/>
+              <a:cs typeface="Inter"/>
+              <a:sym typeface="Inter"/>
+            </a:endParaRPr>
+          </a:p>
+        </p:txBody>
+      </p:sp>
+      <p:pic>
+        <p:nvPicPr>
+          <p:cNvPr id="83" name="Google Shape;83;p16">
+            <a:extLst>
+              <a:ext uri="{FF2B5EF4-FFF2-40B4-BE49-F238E27FC236}">
+                <a16:creationId xmlns:a16="http://schemas.microsoft.com/office/drawing/2014/main" id="{043A57F9-4A1F-D430-FEA6-30310DBE76BE}"/>
+              </a:ext>
+            </a:extLst>
+          </p:cNvPr>
+          <p:cNvPicPr preferRelativeResize="0"/>
+          <p:nvPr/>
+        </p:nvPicPr>
+        <p:blipFill rotWithShape="1">
+          <a:blip r:embed="rId3">
+            <a:alphaModFix/>
+          </a:blip>
+          <a:srcRect/>
+          <a:stretch/>
+        </p:blipFill>
+        <p:spPr>
+          <a:xfrm>
+            <a:off x="463375" y="482852"/>
+            <a:ext cx="576900" cy="385904"/>
+          </a:xfrm>
+          <a:prstGeom prst="rect">
+            <a:avLst/>
+          </a:prstGeom>
+          <a:noFill/>
+          <a:ln>
+            <a:noFill/>
+          </a:ln>
+        </p:spPr>
+      </p:pic>
+      <p:sp>
+        <p:nvSpPr>
+          <p:cNvPr id="84" name="Google Shape;84;p16">
+            <a:extLst>
+              <a:ext uri="{FF2B5EF4-FFF2-40B4-BE49-F238E27FC236}">
+                <a16:creationId xmlns:a16="http://schemas.microsoft.com/office/drawing/2014/main" id="{184E04A7-6DCB-FAF8-0D66-F4C55D80D0DE}"/>
+              </a:ext>
+            </a:extLst>
+          </p:cNvPr>
+          <p:cNvSpPr txBox="1">
+            <a:spLocks noGrp="1"/>
+          </p:cNvSpPr>
+          <p:nvPr>
+            <p:ph type="ctrTitle" idx="4294967295"/>
+          </p:nvPr>
+        </p:nvSpPr>
+        <p:spPr>
+          <a:xfrm>
+            <a:off x="3564586" y="482852"/>
+            <a:ext cx="5455142" cy="4488698"/>
+          </a:xfrm>
+          <a:prstGeom prst="rect">
+            <a:avLst/>
+          </a:prstGeom>
+          <a:noFill/>
+          <a:ln>
+            <a:noFill/>
+          </a:ln>
+        </p:spPr>
+        <p:txBody>
+          <a:bodyPr spcFirstLastPara="1" wrap="square" lIns="91425" tIns="91425" rIns="91425" bIns="91425" anchor="t" anchorCtr="0">
+            <a:noAutofit/>
+          </a:bodyPr>
+          <a:lstStyle/>
+          <a:p>
+            <a:r>
+              <a:rPr lang="fr-FR" sz="1400" b="1" noProof="0" dirty="0" err="1"/>
+              <a:t>Ultra-Simple</a:t>
+            </a:r>
+            <a:r>
+              <a:rPr lang="fr-FR" sz="1400" b="1" noProof="0" dirty="0"/>
+              <a:t> NN</a:t>
+            </a:r>
+            <a:br>
+              <a:rPr lang="fr-FR" sz="1400" b="1" noProof="0" dirty="0"/>
+            </a:br>
+            <a:br>
+              <a:rPr lang="fr-FR" sz="1400" b="1" noProof="0" dirty="0"/>
+            </a:br>
+            <a:r>
+              <a:rPr lang="fr-FR" sz="1400" noProof="0" dirty="0"/>
+              <a:t>Sachant que les deux modèles sont efficaces, il vaut mieux choisir le modèle plus simple: </a:t>
+            </a:r>
+            <a:r>
+              <a:rPr lang="fr-FR" sz="1400" b="1" noProof="0" dirty="0" err="1"/>
+              <a:t>Ultra-Simple</a:t>
+            </a:r>
+            <a:r>
+              <a:rPr lang="fr-FR" sz="1400" b="1" noProof="0" dirty="0"/>
+              <a:t> Neural Network </a:t>
+            </a:r>
+            <a:r>
+              <a:rPr lang="fr-FR" sz="1400" noProof="0" dirty="0"/>
+              <a:t>car il compte deux fois moins de paramètres tout en obtenant les résultats comparables ce qui allège les ressources de calcul pour la détection des spams.</a:t>
+            </a:r>
+            <a:br>
+              <a:rPr lang="fr-FR" sz="1400" noProof="0" dirty="0"/>
+            </a:br>
+            <a:br>
+              <a:rPr lang="fr-FR" sz="1600" noProof="0" dirty="0"/>
+            </a:br>
+            <a:br>
+              <a:rPr lang="fr-FR" noProof="0" dirty="0"/>
+            </a:br>
+            <a:br>
+              <a:rPr lang="fr-FR" sz="1600" noProof="0" dirty="0"/>
+            </a:br>
+            <a:br>
+              <a:rPr lang="fr-FR" noProof="0" dirty="0"/>
+            </a:br>
+            <a:endParaRPr lang="fr-FR" sz="1600" noProof="0" dirty="0"/>
+          </a:p>
+        </p:txBody>
+      </p:sp>
+      <p:pic>
+        <p:nvPicPr>
+          <p:cNvPr id="3" name="Image 2" descr="Une image contenant texte, capture d’écran, diagramme, Rectangle&#10;&#10;Le contenu généré par l’IA peut être incorrect.">
+            <a:extLst>
+              <a:ext uri="{FF2B5EF4-FFF2-40B4-BE49-F238E27FC236}">
+                <a16:creationId xmlns:a16="http://schemas.microsoft.com/office/drawing/2014/main" id="{C702E82C-DF40-71D0-AE1B-AB16CE574622}"/>
+              </a:ext>
+            </a:extLst>
+          </p:cNvPr>
+          <p:cNvPicPr>
+            <a:picLocks noChangeAspect="1"/>
+          </p:cNvPicPr>
+          <p:nvPr/>
+        </p:nvPicPr>
+        <p:blipFill>
+          <a:blip r:embed="rId4"/>
+          <a:stretch>
+            <a:fillRect/>
+          </a:stretch>
+        </p:blipFill>
+        <p:spPr>
+          <a:xfrm>
+            <a:off x="3811652" y="3106446"/>
+            <a:ext cx="2049308" cy="1942716"/>
+          </a:xfrm>
+          <a:prstGeom prst="rect">
+            <a:avLst/>
+          </a:prstGeom>
+        </p:spPr>
+      </p:pic>
+      <p:pic>
+        <p:nvPicPr>
+          <p:cNvPr id="5" name="Image 4" descr="Une image contenant texte, capture d’écran, diagramme, Rectangle&#10;&#10;Le contenu généré par l’IA peut être incorrect.">
+            <a:extLst>
+              <a:ext uri="{FF2B5EF4-FFF2-40B4-BE49-F238E27FC236}">
+                <a16:creationId xmlns:a16="http://schemas.microsoft.com/office/drawing/2014/main" id="{4F46F44E-8250-E270-299C-6F5BD20E1F4E}"/>
+              </a:ext>
+            </a:extLst>
+          </p:cNvPr>
+          <p:cNvPicPr>
+            <a:picLocks noChangeAspect="1"/>
+          </p:cNvPicPr>
+          <p:nvPr/>
+        </p:nvPicPr>
+        <p:blipFill>
+          <a:blip r:embed="rId5"/>
+          <a:stretch>
+            <a:fillRect/>
+          </a:stretch>
+        </p:blipFill>
+        <p:spPr>
+          <a:xfrm>
+            <a:off x="6415690" y="2972063"/>
+            <a:ext cx="2049308" cy="1999487"/>
+          </a:xfrm>
+          <a:prstGeom prst="rect">
+            <a:avLst/>
+          </a:prstGeom>
+        </p:spPr>
+      </p:pic>
+      <p:graphicFrame>
+        <p:nvGraphicFramePr>
+          <p:cNvPr id="4" name="Tableau 3">
+            <a:extLst>
+              <a:ext uri="{FF2B5EF4-FFF2-40B4-BE49-F238E27FC236}">
+                <a16:creationId xmlns:a16="http://schemas.microsoft.com/office/drawing/2014/main" id="{D61D86C2-50C7-67FD-5286-56FFDA31AC41}"/>
+              </a:ext>
+            </a:extLst>
+          </p:cNvPr>
+          <p:cNvGraphicFramePr>
+            <a:graphicFrameLocks noGrp="1"/>
+          </p:cNvGraphicFramePr>
+          <p:nvPr>
+            <p:extLst>
+              <p:ext uri="{D42A27DB-BD31-4B8C-83A1-F6EECF244321}">
+                <p14:modId xmlns:p14="http://schemas.microsoft.com/office/powerpoint/2010/main" val="1255254537"/>
+              </p:ext>
+            </p:extLst>
+          </p:nvPr>
+        </p:nvGraphicFramePr>
+        <p:xfrm>
+          <a:off x="4253947" y="2215031"/>
+          <a:ext cx="3822700" cy="695588"/>
+        </p:xfrm>
+        <a:graphic>
+          <a:graphicData uri="http://schemas.openxmlformats.org/drawingml/2006/table">
+            <a:tbl>
+              <a:tblPr>
+                <a:tableStyleId>{5C22544A-7EE6-4342-B048-85BDC9FD1C3A}</a:tableStyleId>
+              </a:tblPr>
+              <a:tblGrid>
+                <a:gridCol w="1320800">
+                  <a:extLst>
+                    <a:ext uri="{9D8B030D-6E8A-4147-A177-3AD203B41FA5}">
+                      <a16:colId xmlns:a16="http://schemas.microsoft.com/office/drawing/2014/main" val="1580352960"/>
+                    </a:ext>
+                  </a:extLst>
+                </a:gridCol>
+                <a:gridCol w="749300">
+                  <a:extLst>
+                    <a:ext uri="{9D8B030D-6E8A-4147-A177-3AD203B41FA5}">
+                      <a16:colId xmlns:a16="http://schemas.microsoft.com/office/drawing/2014/main" val="527125773"/>
+                    </a:ext>
+                  </a:extLst>
+                </a:gridCol>
+                <a:gridCol w="863600">
+                  <a:extLst>
+                    <a:ext uri="{9D8B030D-6E8A-4147-A177-3AD203B41FA5}">
+                      <a16:colId xmlns:a16="http://schemas.microsoft.com/office/drawing/2014/main" val="2468544463"/>
+                    </a:ext>
+                  </a:extLst>
+                </a:gridCol>
+                <a:gridCol w="889000">
+                  <a:extLst>
+                    <a:ext uri="{9D8B030D-6E8A-4147-A177-3AD203B41FA5}">
+                      <a16:colId xmlns:a16="http://schemas.microsoft.com/office/drawing/2014/main" val="3235623358"/>
+                    </a:ext>
+                  </a:extLst>
+                </a:gridCol>
+              </a:tblGrid>
+              <a:tr h="225239">
+                <a:tc>
+                  <a:txBody>
+                    <a:bodyPr/>
+                    <a:lstStyle/>
+                    <a:p>
+                      <a:pPr algn="l" fontAlgn="b">
+                        <a:buNone/>
+                      </a:pPr>
+                      <a:r>
+                        <a:rPr lang="fr-FR" sz="1200" u="none" strike="noStrike" dirty="0">
+                          <a:effectLst/>
+                        </a:rPr>
+                        <a:t> </a:t>
+                      </a:r>
+                      <a:endParaRPr lang="fr-FR" sz="1200" b="0" i="0" u="none" strike="noStrike" dirty="0">
+                        <a:solidFill>
+                          <a:srgbClr val="000000"/>
+                        </a:solidFill>
+                        <a:effectLst/>
+                        <a:latin typeface="Arial" panose="020B0604020202020204" pitchFamily="34" charset="0"/>
+                      </a:endParaRPr>
+                    </a:p>
+                  </a:txBody>
+                  <a:tcPr marL="6350" marR="6350" marT="6350" marB="0" anchor="b"/>
+                </a:tc>
+                <a:tc>
+                  <a:txBody>
+                    <a:bodyPr/>
+                    <a:lstStyle/>
+                    <a:p>
+                      <a:pPr algn="l" fontAlgn="b">
+                        <a:buNone/>
+                      </a:pPr>
+                      <a:r>
+                        <a:rPr lang="fr-FR" sz="1200" b="1" u="none" strike="noStrike">
+                          <a:effectLst/>
+                        </a:rPr>
+                        <a:t>Accuracy</a:t>
+                      </a:r>
+                      <a:endParaRPr lang="fr-FR" sz="1200" b="1" i="0" u="none" strike="noStrike">
+                        <a:solidFill>
+                          <a:srgbClr val="000000"/>
+                        </a:solidFill>
+                        <a:effectLst/>
+                        <a:latin typeface="Arial" panose="020B0604020202020204" pitchFamily="34" charset="0"/>
+                      </a:endParaRPr>
+                    </a:p>
+                  </a:txBody>
+                  <a:tcPr marL="6350" marR="6350" marT="6350" marB="0" anchor="b"/>
+                </a:tc>
+                <a:tc>
+                  <a:txBody>
+                    <a:bodyPr/>
+                    <a:lstStyle/>
+                    <a:p>
+                      <a:pPr algn="l" fontAlgn="b">
+                        <a:buNone/>
+                      </a:pPr>
+                      <a:r>
+                        <a:rPr lang="fr-FR" sz="1200" b="1" u="none" strike="noStrike">
+                          <a:effectLst/>
+                        </a:rPr>
+                        <a:t>AUC Score</a:t>
+                      </a:r>
+                      <a:endParaRPr lang="fr-FR" sz="1200" b="1" i="0" u="none" strike="noStrike">
+                        <a:solidFill>
+                          <a:srgbClr val="000000"/>
+                        </a:solidFill>
+                        <a:effectLst/>
+                        <a:latin typeface="Arial" panose="020B0604020202020204" pitchFamily="34" charset="0"/>
+                      </a:endParaRPr>
+                    </a:p>
+                  </a:txBody>
+                  <a:tcPr marL="6350" marR="6350" marT="6350" marB="0" anchor="b"/>
+                </a:tc>
+                <a:tc>
+                  <a:txBody>
+                    <a:bodyPr/>
+                    <a:lstStyle/>
+                    <a:p>
+                      <a:pPr algn="l" fontAlgn="b">
+                        <a:buNone/>
+                      </a:pPr>
+                      <a:r>
+                        <a:rPr lang="fr-FR" sz="1200" b="1" u="none" strike="noStrike" dirty="0" err="1">
+                          <a:effectLst/>
+                        </a:rPr>
+                        <a:t>Parameters</a:t>
+                      </a:r>
+                      <a:endParaRPr lang="fr-FR" sz="1200" b="1" i="0" u="none" strike="noStrike" dirty="0">
+                        <a:solidFill>
+                          <a:srgbClr val="000000"/>
+                        </a:solidFill>
+                        <a:effectLst/>
+                        <a:latin typeface="Arial" panose="020B0604020202020204" pitchFamily="34" charset="0"/>
+                      </a:endParaRPr>
+                    </a:p>
+                  </a:txBody>
+                  <a:tcPr marL="6350" marR="6350" marT="6350" marB="0" anchor="b"/>
+                </a:tc>
+                <a:extLst>
+                  <a:ext uri="{0D108BD9-81ED-4DB2-BD59-A6C34878D82A}">
+                    <a16:rowId xmlns:a16="http://schemas.microsoft.com/office/drawing/2014/main" val="3967172099"/>
+                  </a:ext>
+                </a:extLst>
+              </a:tr>
+              <a:tr h="245110">
+                <a:tc>
+                  <a:txBody>
+                    <a:bodyPr/>
+                    <a:lstStyle/>
+                    <a:p>
+                      <a:pPr algn="l" fontAlgn="b">
+                        <a:buNone/>
+                      </a:pPr>
+                      <a:r>
+                        <a:rPr lang="fr-FR" sz="1200" b="1" u="none" strike="noStrike" dirty="0">
+                          <a:effectLst/>
+                        </a:rPr>
+                        <a:t>Simple NN</a:t>
+                      </a:r>
+                      <a:endParaRPr lang="fr-FR" sz="1200" b="1" i="0" u="none" strike="noStrike" dirty="0">
+                        <a:solidFill>
+                          <a:srgbClr val="000000"/>
+                        </a:solidFill>
+                        <a:effectLst/>
+                        <a:latin typeface="Arial" panose="020B0604020202020204" pitchFamily="34" charset="0"/>
+                      </a:endParaRPr>
+                    </a:p>
+                  </a:txBody>
+                  <a:tcPr marL="6350" marR="6350" marT="6350" marB="0" anchor="b"/>
+                </a:tc>
+                <a:tc>
+                  <a:txBody>
+                    <a:bodyPr/>
+                    <a:lstStyle/>
+                    <a:p>
+                      <a:pPr algn="r" fontAlgn="b">
+                        <a:buNone/>
+                      </a:pPr>
+                      <a:r>
+                        <a:rPr lang="fr-FR" sz="1200" u="none" strike="noStrike">
+                          <a:effectLst/>
+                        </a:rPr>
+                        <a:t> 0.9928</a:t>
+                      </a:r>
+                      <a:endParaRPr lang="fr-FR" sz="1200" b="0" i="0" u="none" strike="noStrike">
+                        <a:solidFill>
+                          <a:srgbClr val="000000"/>
+                        </a:solidFill>
+                        <a:effectLst/>
+                        <a:latin typeface="Arial" panose="020B0604020202020204" pitchFamily="34" charset="0"/>
+                      </a:endParaRPr>
+                    </a:p>
+                  </a:txBody>
+                  <a:tcPr marL="6350" marR="6350" marT="6350" marB="0" anchor="b"/>
+                </a:tc>
+                <a:tc>
+                  <a:txBody>
+                    <a:bodyPr/>
+                    <a:lstStyle/>
+                    <a:p>
+                      <a:pPr algn="r" fontAlgn="b">
+                        <a:buNone/>
+                      </a:pPr>
+                      <a:r>
+                        <a:rPr lang="fr-FR" sz="1200" u="none" strike="noStrike">
+                          <a:effectLst/>
+                        </a:rPr>
+                        <a:t>0.9987 </a:t>
+                      </a:r>
+                      <a:endParaRPr lang="fr-FR" sz="1200" b="0" i="0" u="none" strike="noStrike">
+                        <a:solidFill>
+                          <a:srgbClr val="000000"/>
+                        </a:solidFill>
+                        <a:effectLst/>
+                        <a:latin typeface="Arial" panose="020B0604020202020204" pitchFamily="34" charset="0"/>
+                      </a:endParaRPr>
+                    </a:p>
+                  </a:txBody>
+                  <a:tcPr marL="6350" marR="6350" marT="6350" marB="0" anchor="b"/>
+                </a:tc>
+                <a:tc>
+                  <a:txBody>
+                    <a:bodyPr/>
+                    <a:lstStyle/>
+                    <a:p>
+                      <a:pPr algn="r" fontAlgn="b">
+                        <a:buNone/>
+                      </a:pPr>
+                      <a:r>
+                        <a:rPr lang="fr-FR" sz="1200" u="none" strike="noStrike">
+                          <a:effectLst/>
+                        </a:rPr>
+                        <a:t>50,433</a:t>
+                      </a:r>
+                      <a:endParaRPr lang="fr-FR" sz="1200" b="0" i="0" u="none" strike="noStrike">
+                        <a:solidFill>
+                          <a:srgbClr val="000000"/>
+                        </a:solidFill>
+                        <a:effectLst/>
+                        <a:latin typeface="Arial" panose="020B0604020202020204" pitchFamily="34" charset="0"/>
+                      </a:endParaRPr>
+                    </a:p>
+                  </a:txBody>
+                  <a:tcPr marL="6350" marR="6350" marT="6350" marB="0" anchor="b"/>
+                </a:tc>
+                <a:extLst>
+                  <a:ext uri="{0D108BD9-81ED-4DB2-BD59-A6C34878D82A}">
+                    <a16:rowId xmlns:a16="http://schemas.microsoft.com/office/drawing/2014/main" val="2611212671"/>
+                  </a:ext>
+                </a:extLst>
+              </a:tr>
+              <a:tr h="225239">
+                <a:tc>
+                  <a:txBody>
+                    <a:bodyPr/>
+                    <a:lstStyle/>
+                    <a:p>
+                      <a:pPr algn="l" fontAlgn="b">
+                        <a:buNone/>
+                      </a:pPr>
+                      <a:r>
+                        <a:rPr lang="fr-FR" sz="1200" b="1" u="none" strike="noStrike" dirty="0" err="1">
+                          <a:effectLst/>
+                        </a:rPr>
+                        <a:t>Ultra-Simple</a:t>
+                      </a:r>
+                      <a:r>
+                        <a:rPr lang="fr-FR" sz="1200" b="1" u="none" strike="noStrike" dirty="0">
+                          <a:effectLst/>
+                        </a:rPr>
+                        <a:t> NN</a:t>
+                      </a:r>
+                      <a:endParaRPr lang="fr-FR" sz="1200" b="1" i="0" u="none" strike="noStrike" dirty="0">
+                        <a:solidFill>
+                          <a:srgbClr val="000000"/>
+                        </a:solidFill>
+                        <a:effectLst/>
+                        <a:latin typeface="Arial" panose="020B0604020202020204" pitchFamily="34" charset="0"/>
+                      </a:endParaRPr>
+                    </a:p>
+                  </a:txBody>
+                  <a:tcPr marL="6350" marR="6350" marT="6350" marB="0" anchor="b"/>
+                </a:tc>
+                <a:tc>
+                  <a:txBody>
+                    <a:bodyPr/>
+                    <a:lstStyle/>
+                    <a:p>
+                      <a:pPr algn="r" fontAlgn="b">
+                        <a:buNone/>
+                      </a:pPr>
+                      <a:r>
+                        <a:rPr lang="fr-FR" sz="1200" u="none" strike="noStrike">
+                          <a:effectLst/>
+                        </a:rPr>
+                        <a:t>0.9892</a:t>
+                      </a:r>
+                      <a:endParaRPr lang="fr-FR" sz="1200" b="0" i="0" u="none" strike="noStrike">
+                        <a:solidFill>
+                          <a:srgbClr val="000000"/>
+                        </a:solidFill>
+                        <a:effectLst/>
+                        <a:latin typeface="Arial" panose="020B0604020202020204" pitchFamily="34" charset="0"/>
+                      </a:endParaRPr>
+                    </a:p>
+                  </a:txBody>
+                  <a:tcPr marL="6350" marR="6350" marT="6350" marB="0" anchor="b"/>
+                </a:tc>
+                <a:tc>
+                  <a:txBody>
+                    <a:bodyPr/>
+                    <a:lstStyle/>
+                    <a:p>
+                      <a:pPr algn="r" fontAlgn="b">
+                        <a:buNone/>
+                      </a:pPr>
+                      <a:r>
+                        <a:rPr lang="fr-FR" sz="1200" u="none" strike="noStrike">
+                          <a:effectLst/>
+                        </a:rPr>
+                        <a:t>0.9972</a:t>
+                      </a:r>
+                      <a:endParaRPr lang="fr-FR" sz="1200" b="0" i="0" u="none" strike="noStrike">
+                        <a:solidFill>
+                          <a:srgbClr val="000000"/>
+                        </a:solidFill>
+                        <a:effectLst/>
+                        <a:latin typeface="Arial" panose="020B0604020202020204" pitchFamily="34" charset="0"/>
+                      </a:endParaRPr>
+                    </a:p>
+                  </a:txBody>
+                  <a:tcPr marL="6350" marR="6350" marT="6350" marB="0" anchor="b"/>
+                </a:tc>
+                <a:tc>
+                  <a:txBody>
+                    <a:bodyPr/>
+                    <a:lstStyle/>
+                    <a:p>
+                      <a:pPr algn="r" fontAlgn="b">
+                        <a:buNone/>
+                      </a:pPr>
+                      <a:r>
+                        <a:rPr lang="fr-FR" sz="1200" u="none" strike="noStrike" dirty="0">
+                          <a:effectLst/>
+                        </a:rPr>
+                        <a:t>25,217</a:t>
+                      </a:r>
+                      <a:endParaRPr lang="fr-FR" sz="1200" b="0" i="0" u="none" strike="noStrike" dirty="0">
+                        <a:solidFill>
+                          <a:srgbClr val="000000"/>
+                        </a:solidFill>
+                        <a:effectLst/>
+                        <a:latin typeface="Arial" panose="020B0604020202020204" pitchFamily="34" charset="0"/>
+                      </a:endParaRPr>
+                    </a:p>
+                  </a:txBody>
+                  <a:tcPr marL="6350" marR="6350" marT="6350" marB="0" anchor="b"/>
+                </a:tc>
+                <a:extLst>
+                  <a:ext uri="{0D108BD9-81ED-4DB2-BD59-A6C34878D82A}">
+                    <a16:rowId xmlns:a16="http://schemas.microsoft.com/office/drawing/2014/main" val="679414960"/>
+                  </a:ext>
+                </a:extLst>
+              </a:tr>
+            </a:tbl>
+          </a:graphicData>
+        </a:graphic>
+      </p:graphicFrame>
+    </p:spTree>
+    <p:extLst>
+      <p:ext uri="{BB962C8B-B14F-4D97-AF65-F5344CB8AC3E}">
+        <p14:creationId xmlns:p14="http://schemas.microsoft.com/office/powerpoint/2010/main" val="2507890807"/>
       </p:ext>
     </p:extLst>
   </p:cSld>
